--- a/Progression_P6/P6-L08_Mock_Paper_1_Listening.pptx
+++ b/Progression_P6/P6-L08_Mock_Paper_1_Listening.pptx
@@ -1,6 +1,6 @@
 
 <file path=ppt/presentation.xml><?xml version="1.0" encoding="utf-8"?>
-<p:presentation xmlns:a="http://schemas.openxmlformats.org/drawingml/2006/main" xmlns:r="http://schemas.openxmlformats.org/officeDocument/2006/relationships" xmlns:p="http://schemas.openxmlformats.org/presentationml/2006/main" saveSubsetFonts="1" autoCompressPictures="0">
+<p:presentation xmlns:a="http://schemas.openxmlformats.org/drawingml/2006/main" xmlns:r="http://schemas.openxmlformats.org/officeDocument/2006/relationships" xmlns:p="http://schemas.openxmlformats.org/presentationml/2006/main" embedTrueTypeFonts="1" saveSubsetFonts="1" autoCompressPictures="0">
   <p:sldMasterIdLst>
     <p:sldMasterId id="2147483648" r:id="rId1"/>
   </p:sldMasterIdLst>
@@ -29,6 +29,13 @@
   </p:notesMasterIdLst>
   <p:sldSz cx="12192000" cy="6858000"/>
   <p:notesSz cx="6858000" cy="12192000"/>
+  <p:embeddedFontLst>
+    <p:embeddedFont>
+      <p:font typeface="Amiri" pitchFamily="2" charset="-78"/>
+      <p:regular r:id="rIdFont1"/>
+      <p:bold r:id="rIdFont2"/>
+    </p:embeddedFont>
+  </p:embeddedFontLst>
   <p:defaultTextStyle>
     <a:lvl1pPr marL="0" algn="l" defTabSz="914400" rtl="0" eaLnBrk="1" latinLnBrk="0" hangingPunct="1">
       <a:defRPr sz="1800" kern="1200">
@@ -385,8 +392,7 @@
           <a:schemeClr val="tx1"/>
         </a:solidFill>
         <a:latin typeface="+mn-lt"/>
-        <a:ea typeface="+mn-ea"/>
-        <a:cs typeface="+mn-cs"/>
+        <a:cs typeface="Amiri" pitchFamily="2" charset="-78"/>
       </a:defRPr>
     </a:lvl1pPr>
     <a:lvl2pPr marL="457200" algn="l" defTabSz="914400" rtl="0" eaLnBrk="1" latinLnBrk="0" hangingPunct="1">
@@ -395,8 +401,7 @@
           <a:schemeClr val="tx1"/>
         </a:solidFill>
         <a:latin typeface="+mn-lt"/>
-        <a:ea typeface="+mn-ea"/>
-        <a:cs typeface="+mn-cs"/>
+        <a:cs typeface="Amiri" pitchFamily="2" charset="-78"/>
       </a:defRPr>
     </a:lvl2pPr>
     <a:lvl3pPr marL="914400" algn="l" defTabSz="914400" rtl="0" eaLnBrk="1" latinLnBrk="0" hangingPunct="1">
@@ -405,8 +410,7 @@
           <a:schemeClr val="tx1"/>
         </a:solidFill>
         <a:latin typeface="+mn-lt"/>
-        <a:ea typeface="+mn-ea"/>
-        <a:cs typeface="+mn-cs"/>
+        <a:cs typeface="Amiri" pitchFamily="2" charset="-78"/>
       </a:defRPr>
     </a:lvl3pPr>
     <a:lvl4pPr marL="1371600" algn="l" defTabSz="914400" rtl="0" eaLnBrk="1" latinLnBrk="0" hangingPunct="1">
@@ -415,8 +419,7 @@
           <a:schemeClr val="tx1"/>
         </a:solidFill>
         <a:latin typeface="+mn-lt"/>
-        <a:ea typeface="+mn-ea"/>
-        <a:cs typeface="+mn-cs"/>
+        <a:cs typeface="Amiri" pitchFamily="2" charset="-78"/>
       </a:defRPr>
     </a:lvl4pPr>
     <a:lvl5pPr marL="1828800" algn="l" defTabSz="914400" rtl="0" eaLnBrk="1" latinLnBrk="0" hangingPunct="1">
@@ -425,8 +428,7 @@
           <a:schemeClr val="tx1"/>
         </a:solidFill>
         <a:latin typeface="+mn-lt"/>
-        <a:ea typeface="+mn-ea"/>
-        <a:cs typeface="+mn-cs"/>
+        <a:cs typeface="Amiri" pitchFamily="2" charset="-78"/>
       </a:defRPr>
     </a:lvl5pPr>
     <a:lvl6pPr marL="2286000" algn="l" defTabSz="914400" rtl="0" eaLnBrk="1" latinLnBrk="0" hangingPunct="1">
@@ -435,8 +437,7 @@
           <a:schemeClr val="tx1"/>
         </a:solidFill>
         <a:latin typeface="+mn-lt"/>
-        <a:ea typeface="+mn-ea"/>
-        <a:cs typeface="+mn-cs"/>
+        <a:cs typeface="Amiri" pitchFamily="2" charset="-78"/>
       </a:defRPr>
     </a:lvl6pPr>
     <a:lvl7pPr marL="2743200" algn="l" defTabSz="914400" rtl="0" eaLnBrk="1" latinLnBrk="0" hangingPunct="1">
@@ -445,8 +446,7 @@
           <a:schemeClr val="tx1"/>
         </a:solidFill>
         <a:latin typeface="+mn-lt"/>
-        <a:ea typeface="+mn-ea"/>
-        <a:cs typeface="+mn-cs"/>
+        <a:cs typeface="Amiri" pitchFamily="2" charset="-78"/>
       </a:defRPr>
     </a:lvl7pPr>
     <a:lvl8pPr marL="3200400" algn="l" defTabSz="914400" rtl="0" eaLnBrk="1" latinLnBrk="0" hangingPunct="1">
@@ -455,8 +455,7 @@
           <a:schemeClr val="tx1"/>
         </a:solidFill>
         <a:latin typeface="+mn-lt"/>
-        <a:ea typeface="+mn-ea"/>
-        <a:cs typeface="+mn-cs"/>
+        <a:cs typeface="Amiri" pitchFamily="2" charset="-78"/>
       </a:defRPr>
     </a:lvl8pPr>
     <a:lvl9pPr marL="3657600" algn="l" defTabSz="914400" rtl="0" eaLnBrk="1" latinLnBrk="0" hangingPunct="1">
@@ -465,8 +464,7 @@
           <a:schemeClr val="tx1"/>
         </a:solidFill>
         <a:latin typeface="+mn-lt"/>
-        <a:ea typeface="+mn-ea"/>
-        <a:cs typeface="+mn-cs"/>
+        <a:cs typeface="Amiri" pitchFamily="2" charset="-78"/>
       </a:defRPr>
     </a:lvl9pPr>
   </p:notesStyle>
@@ -2166,8 +2164,7 @@
             <a:schemeClr val="tx1"/>
           </a:solidFill>
           <a:latin typeface="+mj-lt"/>
-          <a:ea typeface="+mj-ea"/>
-          <a:cs typeface="+mj-cs"/>
+          <a:cs typeface="Amiri" pitchFamily="2" charset="-78"/>
         </a:defRPr>
       </a:lvl1pPr>
     </p:titleStyle>
@@ -2183,8 +2180,7 @@
             <a:schemeClr val="tx1"/>
           </a:solidFill>
           <a:latin typeface="+mn-lt"/>
-          <a:ea typeface="+mn-ea"/>
-          <a:cs typeface="+mn-cs"/>
+          <a:cs typeface="Amiri" pitchFamily="2" charset="-78"/>
         </a:defRPr>
       </a:lvl1pPr>
       <a:lvl2pPr marL="742950" indent="-285750" algn="l" defTabSz="914400" rtl="0" eaLnBrk="1" latinLnBrk="0" hangingPunct="1">
@@ -2198,8 +2194,7 @@
             <a:schemeClr val="tx1"/>
           </a:solidFill>
           <a:latin typeface="+mn-lt"/>
-          <a:ea typeface="+mn-ea"/>
-          <a:cs typeface="+mn-cs"/>
+          <a:cs typeface="Amiri" pitchFamily="2" charset="-78"/>
         </a:defRPr>
       </a:lvl2pPr>
       <a:lvl3pPr marL="1143000" indent="-228600" algn="l" defTabSz="914400" rtl="0" eaLnBrk="1" latinLnBrk="0" hangingPunct="1">
@@ -2213,8 +2208,7 @@
             <a:schemeClr val="tx1"/>
           </a:solidFill>
           <a:latin typeface="+mn-lt"/>
-          <a:ea typeface="+mn-ea"/>
-          <a:cs typeface="+mn-cs"/>
+          <a:cs typeface="Amiri" pitchFamily="2" charset="-78"/>
         </a:defRPr>
       </a:lvl3pPr>
       <a:lvl4pPr marL="1600200" indent="-228600" algn="l" defTabSz="914400" rtl="0" eaLnBrk="1" latinLnBrk="0" hangingPunct="1">
@@ -2228,8 +2222,7 @@
             <a:schemeClr val="tx1"/>
           </a:solidFill>
           <a:latin typeface="+mn-lt"/>
-          <a:ea typeface="+mn-ea"/>
-          <a:cs typeface="+mn-cs"/>
+          <a:cs typeface="Amiri" pitchFamily="2" charset="-78"/>
         </a:defRPr>
       </a:lvl4pPr>
       <a:lvl5pPr marL="2057400" indent="-228600" algn="l" defTabSz="914400" rtl="0" eaLnBrk="1" latinLnBrk="0" hangingPunct="1">
@@ -2243,8 +2236,7 @@
             <a:schemeClr val="tx1"/>
           </a:solidFill>
           <a:latin typeface="+mn-lt"/>
-          <a:ea typeface="+mn-ea"/>
-          <a:cs typeface="+mn-cs"/>
+          <a:cs typeface="Amiri" pitchFamily="2" charset="-78"/>
         </a:defRPr>
       </a:lvl5pPr>
       <a:lvl6pPr marL="2514600" indent="-228600" algn="l" defTabSz="914400" rtl="0" eaLnBrk="1" latinLnBrk="0" hangingPunct="1">
@@ -2258,8 +2250,7 @@
             <a:schemeClr val="tx1"/>
           </a:solidFill>
           <a:latin typeface="+mn-lt"/>
-          <a:ea typeface="+mn-ea"/>
-          <a:cs typeface="+mn-cs"/>
+          <a:cs typeface="Amiri" pitchFamily="2" charset="-78"/>
         </a:defRPr>
       </a:lvl6pPr>
       <a:lvl7pPr marL="2971800" indent="-228600" algn="l" defTabSz="914400" rtl="0" eaLnBrk="1" latinLnBrk="0" hangingPunct="1">
@@ -2273,8 +2264,7 @@
             <a:schemeClr val="tx1"/>
           </a:solidFill>
           <a:latin typeface="+mn-lt"/>
-          <a:ea typeface="+mn-ea"/>
-          <a:cs typeface="+mn-cs"/>
+          <a:cs typeface="Amiri" pitchFamily="2" charset="-78"/>
         </a:defRPr>
       </a:lvl7pPr>
       <a:lvl8pPr marL="3429000" indent="-228600" algn="l" defTabSz="914400" rtl="0" eaLnBrk="1" latinLnBrk="0" hangingPunct="1">
@@ -2288,8 +2278,7 @@
             <a:schemeClr val="tx1"/>
           </a:solidFill>
           <a:latin typeface="+mn-lt"/>
-          <a:ea typeface="+mn-ea"/>
-          <a:cs typeface="+mn-cs"/>
+          <a:cs typeface="Amiri" pitchFamily="2" charset="-78"/>
         </a:defRPr>
       </a:lvl8pPr>
       <a:lvl9pPr marL="3886200" indent="-228600" algn="l" defTabSz="914400" rtl="0" eaLnBrk="1" latinLnBrk="0" hangingPunct="1">
@@ -2303,8 +2292,7 @@
             <a:schemeClr val="tx1"/>
           </a:solidFill>
           <a:latin typeface="+mn-lt"/>
-          <a:ea typeface="+mn-ea"/>
-          <a:cs typeface="+mn-cs"/>
+          <a:cs typeface="Amiri" pitchFamily="2" charset="-78"/>
         </a:defRPr>
       </a:lvl9pPr>
     </p:bodyStyle>
@@ -2318,8 +2306,7 @@
             <a:schemeClr val="tx1"/>
           </a:solidFill>
           <a:latin typeface="+mn-lt"/>
-          <a:ea typeface="+mn-ea"/>
-          <a:cs typeface="+mn-cs"/>
+          <a:cs typeface="Amiri" pitchFamily="2" charset="-78"/>
         </a:defRPr>
       </a:lvl1pPr>
       <a:lvl2pPr marL="457200" algn="l" defTabSz="914400" rtl="0" eaLnBrk="1" latinLnBrk="0" hangingPunct="1">
@@ -2328,8 +2315,7 @@
             <a:schemeClr val="tx1"/>
           </a:solidFill>
           <a:latin typeface="+mn-lt"/>
-          <a:ea typeface="+mn-ea"/>
-          <a:cs typeface="+mn-cs"/>
+          <a:cs typeface="Amiri" pitchFamily="2" charset="-78"/>
         </a:defRPr>
       </a:lvl2pPr>
       <a:lvl3pPr marL="914400" algn="l" defTabSz="914400" rtl="0" eaLnBrk="1" latinLnBrk="0" hangingPunct="1">
@@ -2338,8 +2324,7 @@
             <a:schemeClr val="tx1"/>
           </a:solidFill>
           <a:latin typeface="+mn-lt"/>
-          <a:ea typeface="+mn-ea"/>
-          <a:cs typeface="+mn-cs"/>
+          <a:cs typeface="Amiri" pitchFamily="2" charset="-78"/>
         </a:defRPr>
       </a:lvl3pPr>
       <a:lvl4pPr marL="1371600" algn="l" defTabSz="914400" rtl="0" eaLnBrk="1" latinLnBrk="0" hangingPunct="1">
@@ -2348,8 +2333,7 @@
             <a:schemeClr val="tx1"/>
           </a:solidFill>
           <a:latin typeface="+mn-lt"/>
-          <a:ea typeface="+mn-ea"/>
-          <a:cs typeface="+mn-cs"/>
+          <a:cs typeface="Amiri" pitchFamily="2" charset="-78"/>
         </a:defRPr>
       </a:lvl4pPr>
       <a:lvl5pPr marL="1828800" algn="l" defTabSz="914400" rtl="0" eaLnBrk="1" latinLnBrk="0" hangingPunct="1">
@@ -2358,8 +2342,7 @@
             <a:schemeClr val="tx1"/>
           </a:solidFill>
           <a:latin typeface="+mn-lt"/>
-          <a:ea typeface="+mn-ea"/>
-          <a:cs typeface="+mn-cs"/>
+          <a:cs typeface="Amiri" pitchFamily="2" charset="-78"/>
         </a:defRPr>
       </a:lvl5pPr>
       <a:lvl6pPr marL="2286000" algn="l" defTabSz="914400" rtl="0" eaLnBrk="1" latinLnBrk="0" hangingPunct="1">
@@ -2368,8 +2351,7 @@
             <a:schemeClr val="tx1"/>
           </a:solidFill>
           <a:latin typeface="+mn-lt"/>
-          <a:ea typeface="+mn-ea"/>
-          <a:cs typeface="+mn-cs"/>
+          <a:cs typeface="Amiri" pitchFamily="2" charset="-78"/>
         </a:defRPr>
       </a:lvl6pPr>
       <a:lvl7pPr marL="2743200" algn="l" defTabSz="914400" rtl="0" eaLnBrk="1" latinLnBrk="0" hangingPunct="1">
@@ -2378,8 +2360,7 @@
             <a:schemeClr val="tx1"/>
           </a:solidFill>
           <a:latin typeface="+mn-lt"/>
-          <a:ea typeface="+mn-ea"/>
-          <a:cs typeface="+mn-cs"/>
+          <a:cs typeface="Amiri" pitchFamily="2" charset="-78"/>
         </a:defRPr>
       </a:lvl7pPr>
       <a:lvl8pPr marL="3200400" algn="l" defTabSz="914400" rtl="0" eaLnBrk="1" latinLnBrk="0" hangingPunct="1">
@@ -2388,8 +2369,7 @@
             <a:schemeClr val="tx1"/>
           </a:solidFill>
           <a:latin typeface="+mn-lt"/>
-          <a:ea typeface="+mn-ea"/>
-          <a:cs typeface="+mn-cs"/>
+          <a:cs typeface="Amiri" pitchFamily="2" charset="-78"/>
         </a:defRPr>
       </a:lvl8pPr>
       <a:lvl9pPr marL="3657600" algn="l" defTabSz="914400" rtl="0" eaLnBrk="1" latinLnBrk="0" hangingPunct="1">
@@ -2398,8 +2378,7 @@
             <a:schemeClr val="tx1"/>
           </a:solidFill>
           <a:latin typeface="+mn-lt"/>
-          <a:ea typeface="+mn-ea"/>
-          <a:cs typeface="+mn-cs"/>
+          <a:cs typeface="Amiri" pitchFamily="2" charset="-78"/>
         </a:defRPr>
       </a:lvl9pPr>
     </p:otherStyle>
@@ -2559,9 +2538,8 @@
                 <a:solidFill>
                   <a:srgbClr val="D4AF37"/>
                 </a:solidFill>
-                <a:latin typeface="Amiri" pitchFamily="34" charset="0"/>
-                <a:ea typeface="Amiri" pitchFamily="34" charset="-122"/>
-                <a:cs typeface="Amiri" pitchFamily="34" charset="-120"/>
+                <a:latin typeface="Amiri" pitchFamily="2" charset="-78"/>
+                <a:cs typeface="Amiri" pitchFamily="2" charset="-78"/>
               </a:rPr>
               <a:t>م</a:t>
             </a:r>
@@ -2599,8 +2577,7 @@
                   <a:srgbClr val="FFFFFF"/>
                 </a:solidFill>
                 <a:latin typeface="Cambria" pitchFamily="34" charset="0"/>
-                <a:ea typeface="Cambria" pitchFamily="34" charset="-122"/>
-                <a:cs typeface="Cambria" pitchFamily="34" charset="-120"/>
+                <a:cs typeface="Amiri" pitchFamily="2" charset="-78"/>
               </a:rPr>
               <a:t>Al Madina Online School</a:t>
             </a:r>
@@ -2616,8 +2593,7 @@
                   <a:srgbClr val="D4AF37"/>
                 </a:solidFill>
                 <a:latin typeface="Calibri" pitchFamily="34" charset="0"/>
-                <a:ea typeface="Calibri" pitchFamily="34" charset="-122"/>
-                <a:cs typeface="Calibri" pitchFamily="34" charset="-120"/>
+                <a:cs typeface="Amiri" pitchFamily="2" charset="-78"/>
               </a:rPr>
               <a:t>ARABIC DEPARTMENT · MIFTAH ARABIC</a:t>
             </a:r>
@@ -2655,8 +2631,7 @@
                   <a:srgbClr val="D4AF37"/>
                 </a:solidFill>
                 <a:latin typeface="Calibri" pitchFamily="34" charset="0"/>
-                <a:ea typeface="Calibri" pitchFamily="34" charset="-122"/>
-                <a:cs typeface="Calibri" pitchFamily="34" charset="-120"/>
+                <a:cs typeface="Amiri" pitchFamily="2" charset="-78"/>
               </a:rPr>
               <a:t>CAMBRIDGE IGCSE ARABIC 0544  ·  YEAR 9  ·  PROGRESSION P6  ·  P6-L08</a:t>
             </a:r>
@@ -2694,8 +2669,7 @@
                   <a:srgbClr val="9FB3D1"/>
                 </a:solidFill>
                 <a:latin typeface="Cambria" pitchFamily="34" charset="0"/>
-                <a:ea typeface="Cambria" pitchFamily="34" charset="-122"/>
-                <a:cs typeface="Cambria" pitchFamily="34" charset="-120"/>
+                <a:cs typeface="Amiri" pitchFamily="2" charset="-78"/>
               </a:rPr>
               <a:t>P6-L08</a:t>
             </a:r>
@@ -2733,8 +2707,7 @@
                   <a:srgbClr val="FFFFFF"/>
                 </a:solidFill>
                 <a:latin typeface="Cambria" pitchFamily="34" charset="0"/>
-                <a:ea typeface="Cambria" pitchFamily="34" charset="-122"/>
-                <a:cs typeface="Cambria" pitchFamily="34" charset="-120"/>
+                <a:cs typeface="Amiri" pitchFamily="2" charset="-78"/>
               </a:rPr>
               <a:t>Mock Examination — Paper 1 Listening (Full Exam Conditions)</a:t>
             </a:r>
@@ -2771,9 +2744,8 @@
                 <a:solidFill>
                   <a:srgbClr val="D4AF37"/>
                 </a:solidFill>
-                <a:latin typeface="Amiri" pitchFamily="34" charset="0"/>
-                <a:ea typeface="Amiri" pitchFamily="34" charset="-122"/>
-                <a:cs typeface="Amiri" pitchFamily="34" charset="-120"/>
+                <a:latin typeface="Amiri" pitchFamily="2" charset="-78"/>
+                <a:cs typeface="Amiri" pitchFamily="2" charset="-78"/>
               </a:rPr>
               <a:t>امْتِحَانُ المُحَاكَاةِ — الوَرَقَةُ الأُولَى: الاسْتِمَاعُ</a:t>
             </a:r>
@@ -2811,8 +2783,7 @@
                   <a:srgbClr val="C6D2E6"/>
                 </a:solidFill>
                 <a:latin typeface="Calibri" pitchFamily="34" charset="0"/>
-                <a:ea typeface="Calibri" pitchFamily="34" charset="-122"/>
-                <a:cs typeface="Calibri" pitchFamily="34" charset="-120"/>
+                <a:cs typeface="Amiri" pitchFamily="2" charset="-78"/>
               </a:rPr>
               <a:t>Sit a full mock Paper 1 under exam conditions — three texts, three formats, every listening strategy at once — then mark it, convert the score to /45 and choose one priority for the real exam.</a:t>
             </a:r>
@@ -2877,8 +2848,7 @@
                   <a:srgbClr val="D4AF37"/>
                 </a:solidFill>
                 <a:latin typeface="Calibri" pitchFamily="34" charset="0"/>
-                <a:ea typeface="Calibri" pitchFamily="34" charset="-122"/>
-                <a:cs typeface="Calibri" pitchFamily="34" charset="-120"/>
+                <a:cs typeface="Amiri" pitchFamily="2" charset="-78"/>
               </a:rPr>
               <a:t>LESSON</a:t>
             </a:r>
@@ -2894,8 +2864,7 @@
                   <a:srgbClr val="FFFFFF"/>
                 </a:solidFill>
                 <a:latin typeface="Calibri" pitchFamily="34" charset="0"/>
-                <a:ea typeface="Calibri" pitchFamily="34" charset="-122"/>
-                <a:cs typeface="Calibri" pitchFamily="34" charset="-120"/>
+                <a:cs typeface="Amiri" pitchFamily="2" charset="-78"/>
               </a:rPr>
               <a:t>P6-L08 · Progression P6 · IGCSE Bridge</a:t>
             </a:r>
@@ -2960,8 +2929,7 @@
                   <a:srgbClr val="D4AF37"/>
                 </a:solidFill>
                 <a:latin typeface="Calibri" pitchFamily="34" charset="0"/>
-                <a:ea typeface="Calibri" pitchFamily="34" charset="-122"/>
-                <a:cs typeface="Calibri" pitchFamily="34" charset="-120"/>
+                <a:cs typeface="Amiri" pitchFamily="2" charset="-78"/>
               </a:rPr>
               <a:t>DURATION</a:t>
             </a:r>
@@ -2977,8 +2945,7 @@
                   <a:srgbClr val="FFFFFF"/>
                 </a:solidFill>
                 <a:latin typeface="Calibri" pitchFamily="34" charset="0"/>
-                <a:ea typeface="Calibri" pitchFamily="34" charset="-122"/>
-                <a:cs typeface="Calibri" pitchFamily="34" charset="-120"/>
+                <a:cs typeface="Amiri" pitchFamily="2" charset="-78"/>
               </a:rPr>
               <a:t>60 minutes · Teams</a:t>
             </a:r>
@@ -3043,8 +3010,7 @@
                   <a:srgbClr val="D4AF37"/>
                 </a:solidFill>
                 <a:latin typeface="Calibri" pitchFamily="34" charset="0"/>
-                <a:ea typeface="Calibri" pitchFamily="34" charset="-122"/>
-                <a:cs typeface="Calibri" pitchFamily="34" charset="-120"/>
+                <a:cs typeface="Amiri" pitchFamily="2" charset="-78"/>
               </a:rPr>
               <a:t>LEVEL</a:t>
             </a:r>
@@ -3060,8 +3026,7 @@
                   <a:srgbClr val="FFFFFF"/>
                 </a:solidFill>
                 <a:latin typeface="Calibri" pitchFamily="34" charset="0"/>
-                <a:ea typeface="Calibri" pitchFamily="34" charset="-122"/>
-                <a:cs typeface="Calibri" pitchFamily="34" charset="-120"/>
+                <a:cs typeface="Amiri" pitchFamily="2" charset="-78"/>
               </a:rPr>
               <a:t>Progression · B1 → B2</a:t>
             </a:r>
@@ -3126,8 +3091,7 @@
                   <a:srgbClr val="D4AF37"/>
                 </a:solidFill>
                 <a:latin typeface="Calibri" pitchFamily="34" charset="0"/>
-                <a:ea typeface="Calibri" pitchFamily="34" charset="-122"/>
-                <a:cs typeface="Calibri" pitchFamily="34" charset="-120"/>
+                <a:cs typeface="Amiri" pitchFamily="2" charset="-78"/>
               </a:rPr>
               <a:t>ON THE WEBSITE</a:t>
             </a:r>
@@ -3143,8 +3107,7 @@
                   <a:srgbClr val="FFFFFF"/>
                 </a:solidFill>
                 <a:latin typeface="Calibri" pitchFamily="34" charset="0"/>
-                <a:ea typeface="Calibri" pitchFamily="34" charset="-122"/>
-                <a:cs typeface="Calibri" pitchFamily="34" charset="-120"/>
+                <a:cs typeface="Amiri" pitchFamily="2" charset="-78"/>
               </a:rPr>
               <a:t>Pathways › Progression › P6 › P6-L08</a:t>
             </a:r>
@@ -3238,9 +3201,8 @@
                 <a:solidFill>
                   <a:srgbClr val="D4AF37"/>
                 </a:solidFill>
-                <a:latin typeface="Amiri" pitchFamily="34" charset="0"/>
-                <a:ea typeface="Amiri" pitchFamily="34" charset="-122"/>
-                <a:cs typeface="Amiri" pitchFamily="34" charset="-120"/>
+                <a:latin typeface="Amiri" pitchFamily="2" charset="-78"/>
+                <a:cs typeface="Amiri" pitchFamily="2" charset="-78"/>
               </a:rPr>
               <a:t>م</a:t>
             </a:r>
@@ -3278,8 +3240,7 @@
                   <a:srgbClr val="1B3B6F"/>
                 </a:solidFill>
                 <a:latin typeface="Cambria" pitchFamily="34" charset="0"/>
-                <a:ea typeface="Cambria" pitchFamily="34" charset="-122"/>
-                <a:cs typeface="Cambria" pitchFamily="34" charset="-120"/>
+                <a:cs typeface="Amiri" pitchFamily="2" charset="-78"/>
               </a:rPr>
               <a:t>Al Madina Online School</a:t>
             </a:r>
@@ -3317,8 +3278,7 @@
                   <a:srgbClr val="8A6D1E"/>
                 </a:solidFill>
                 <a:latin typeface="Calibri" pitchFamily="34" charset="0"/>
-                <a:ea typeface="Calibri" pitchFamily="34" charset="-122"/>
-                <a:cs typeface="Calibri" pitchFamily="34" charset="-120"/>
+                <a:cs typeface="Amiri" pitchFamily="2" charset="-78"/>
               </a:rPr>
               <a:t>ARABIC DEPARTMENT · MIFTAH ARABIC · IGCSE 0544</a:t>
             </a:r>
@@ -3383,8 +3343,7 @@
                   <a:srgbClr val="FFFFFF"/>
                 </a:solidFill>
                 <a:latin typeface="Calibri" pitchFamily="34" charset="0"/>
-                <a:ea typeface="Calibri" pitchFamily="34" charset="-122"/>
-                <a:cs typeface="Calibri" pitchFamily="34" charset="-120"/>
+                <a:cs typeface="Amiri" pitchFamily="2" charset="-78"/>
               </a:rPr>
               <a:t>P6-L08 · IGCSE Bridge</a:t>
             </a:r>
@@ -3449,8 +3408,7 @@
                   <a:srgbClr val="FFFFFF"/>
                 </a:solidFill>
                 <a:latin typeface="Calibri" pitchFamily="34" charset="0"/>
-                <a:ea typeface="Calibri" pitchFamily="34" charset="-122"/>
-                <a:cs typeface="Calibri" pitchFamily="34" charset="-120"/>
+                <a:cs typeface="Amiri" pitchFamily="2" charset="-78"/>
               </a:rPr>
               <a:t>YOU DO · 6 MIN</a:t>
             </a:r>
@@ -3488,8 +3446,7 @@
                   <a:srgbClr val="1E6B52"/>
                 </a:solidFill>
                 <a:latin typeface="Calibri" pitchFamily="34" charset="0"/>
-                <a:ea typeface="Calibri" pitchFamily="34" charset="-122"/>
-                <a:cs typeface="Calibri" pitchFamily="34" charset="-120"/>
+                <a:cs typeface="Amiri" pitchFamily="2" charset="-78"/>
               </a:rPr>
               <a:t>MOCK · PAPER 1 · TEXT 3 — SELECT THE SUPPORTED STATEMENTS (6 MARKS)</a:t>
             </a:r>
@@ -3527,8 +3484,7 @@
                   <a:srgbClr val="1B3B6F"/>
                 </a:solidFill>
                 <a:latin typeface="Cambria" pitchFamily="34" charset="0"/>
-                <a:ea typeface="Cambria" pitchFamily="34" charset="-122"/>
-                <a:cs typeface="Cambria" pitchFamily="34" charset="-120"/>
+                <a:cs typeface="Amiri" pitchFamily="2" charset="-78"/>
               </a:rPr>
               <a:t>Choose the statement the text supports</a:t>
             </a:r>
@@ -3565,9 +3521,8 @@
                 <a:solidFill>
                   <a:srgbClr val="8A6D1E"/>
                 </a:solidFill>
-                <a:latin typeface="Amiri" pitchFamily="34" charset="0"/>
-                <a:ea typeface="Amiri" pitchFamily="34" charset="-122"/>
-                <a:cs typeface="Amiri" pitchFamily="34" charset="-120"/>
+                <a:latin typeface="Amiri" pitchFamily="2" charset="-78"/>
+                <a:cs typeface="Amiri" pitchFamily="2" charset="-78"/>
               </a:rPr>
               <a:t>الاسْتِمَاعُ</a:t>
             </a:r>
@@ -3605,8 +3560,7 @@
                   <a:srgbClr val="8A93A0"/>
                 </a:solidFill>
                 <a:latin typeface="Calibri" pitchFamily="34" charset="0"/>
-                <a:ea typeface="Calibri" pitchFamily="34" charset="-122"/>
-                <a:cs typeface="Calibri" pitchFamily="34" charset="-120"/>
+                <a:cs typeface="Amiri" pitchFamily="2" charset="-78"/>
               </a:rPr>
               <a:t>Miftah Arabic · Progression P6 · IGCSE Bridge · P6-L08</a:t>
             </a:r>
@@ -3703,8 +3657,7 @@
                   <a:srgbClr val="FFFFFF"/>
                 </a:solidFill>
                 <a:latin typeface="Calibri" pitchFamily="34" charset="0"/>
-                <a:ea typeface="Calibri" pitchFamily="34" charset="-122"/>
-                <a:cs typeface="Calibri" pitchFamily="34" charset="-120"/>
+                <a:cs typeface="Amiri" pitchFamily="2" charset="-78"/>
               </a:rPr>
               <a:t>1</a:t>
             </a:r>
@@ -3742,8 +3695,7 @@
                   <a:srgbClr val="1B3B6F"/>
                 </a:solidFill>
                 <a:latin typeface="Calibri" pitchFamily="34" charset="0"/>
-                <a:ea typeface="Calibri" pitchFamily="34" charset="-122"/>
-                <a:cs typeface="Calibri" pitchFamily="34" charset="-120"/>
+                <a:cs typeface="Amiri" pitchFamily="2" charset="-78"/>
               </a:rPr>
               <a:t>Which statement is supported (past perfect)?</a:t>
             </a:r>
@@ -3806,8 +3758,7 @@
                   <a:srgbClr val="1B3B6F"/>
                 </a:solidFill>
                 <a:latin typeface="Calibri" pitchFamily="34" charset="0"/>
-                <a:ea typeface="Calibri" pitchFamily="34" charset="-122"/>
-                <a:cs typeface="Calibri" pitchFamily="34" charset="-120"/>
+                <a:cs typeface="Amiri" pitchFamily="2" charset="-78"/>
               </a:rPr>
               <a:t>A</a:t>
             </a:r>
@@ -3845,8 +3796,7 @@
                   <a:srgbClr val="1F2A37"/>
                 </a:solidFill>
                 <a:latin typeface="Calibri" pitchFamily="34" charset="0"/>
-                <a:ea typeface="Calibri" pitchFamily="34" charset="-122"/>
-                <a:cs typeface="Calibri" pitchFamily="34" charset="-120"/>
+                <a:cs typeface="Amiri" pitchFamily="2" charset="-78"/>
               </a:rPr>
               <a:t>The region had suffered from youth unemployment</a:t>
             </a:r>
@@ -3909,8 +3859,7 @@
                   <a:srgbClr val="1B3B6F"/>
                 </a:solidFill>
                 <a:latin typeface="Calibri" pitchFamily="34" charset="0"/>
-                <a:ea typeface="Calibri" pitchFamily="34" charset="-122"/>
-                <a:cs typeface="Calibri" pitchFamily="34" charset="-120"/>
+                <a:cs typeface="Amiri" pitchFamily="2" charset="-78"/>
               </a:rPr>
               <a:t>B</a:t>
             </a:r>
@@ -3948,8 +3897,7 @@
                   <a:srgbClr val="1F2A37"/>
                 </a:solidFill>
                 <a:latin typeface="Calibri" pitchFamily="34" charset="0"/>
-                <a:ea typeface="Calibri" pitchFamily="34" charset="-122"/>
-                <a:cs typeface="Calibri" pitchFamily="34" charset="-120"/>
+                <a:cs typeface="Amiri" pitchFamily="2" charset="-78"/>
               </a:rPr>
               <a:t>The region always had jobs</a:t>
             </a:r>
@@ -4012,8 +3960,7 @@
                   <a:srgbClr val="1B3B6F"/>
                 </a:solidFill>
                 <a:latin typeface="Calibri" pitchFamily="34" charset="0"/>
-                <a:ea typeface="Calibri" pitchFamily="34" charset="-122"/>
-                <a:cs typeface="Calibri" pitchFamily="34" charset="-120"/>
+                <a:cs typeface="Amiri" pitchFamily="2" charset="-78"/>
               </a:rPr>
               <a:t>C</a:t>
             </a:r>
@@ -4051,8 +3998,7 @@
                   <a:srgbClr val="1F2A37"/>
                 </a:solidFill>
                 <a:latin typeface="Calibri" pitchFamily="34" charset="0"/>
-                <a:ea typeface="Calibri" pitchFamily="34" charset="-122"/>
-                <a:cs typeface="Calibri" pitchFamily="34" charset="-120"/>
+                <a:cs typeface="Amiri" pitchFamily="2" charset="-78"/>
               </a:rPr>
               <a:t>Unemployment began today</a:t>
             </a:r>
@@ -4149,8 +4095,7 @@
                   <a:srgbClr val="FFFFFF"/>
                 </a:solidFill>
                 <a:latin typeface="Calibri" pitchFamily="34" charset="0"/>
-                <a:ea typeface="Calibri" pitchFamily="34" charset="-122"/>
-                <a:cs typeface="Calibri" pitchFamily="34" charset="-120"/>
+                <a:cs typeface="Amiri" pitchFamily="2" charset="-78"/>
               </a:rPr>
               <a:t>2</a:t>
             </a:r>
@@ -4188,8 +4133,7 @@
                   <a:srgbClr val="1B3B6F"/>
                 </a:solidFill>
                 <a:latin typeface="Calibri" pitchFamily="34" charset="0"/>
-                <a:ea typeface="Calibri" pitchFamily="34" charset="-122"/>
-                <a:cs typeface="Calibri" pitchFamily="34" charset="-120"/>
+                <a:cs typeface="Amiri" pitchFamily="2" charset="-78"/>
               </a:rPr>
               <a:t>Which statement is supported (necessity trigger)?</a:t>
             </a:r>
@@ -4252,8 +4196,7 @@
                   <a:srgbClr val="1B3B6F"/>
                 </a:solidFill>
                 <a:latin typeface="Calibri" pitchFamily="34" charset="0"/>
-                <a:ea typeface="Calibri" pitchFamily="34" charset="-122"/>
-                <a:cs typeface="Calibri" pitchFamily="34" charset="-120"/>
+                <a:cs typeface="Amiri" pitchFamily="2" charset="-78"/>
               </a:rPr>
               <a:t>A</a:t>
             </a:r>
@@ -4291,8 +4234,7 @@
                   <a:srgbClr val="1F2A37"/>
                 </a:solidFill>
                 <a:latin typeface="Calibri" pitchFamily="34" charset="0"/>
-                <a:ea typeface="Calibri" pitchFamily="34" charset="-122"/>
-                <a:cs typeface="Calibri" pitchFamily="34" charset="-120"/>
+                <a:cs typeface="Amiri" pitchFamily="2" charset="-78"/>
               </a:rPr>
               <a:t>Training is unnecessary</a:t>
             </a:r>
@@ -4355,8 +4297,7 @@
                   <a:srgbClr val="1B3B6F"/>
                 </a:solidFill>
                 <a:latin typeface="Calibri" pitchFamily="34" charset="0"/>
-                <a:ea typeface="Calibri" pitchFamily="34" charset="-122"/>
-                <a:cs typeface="Calibri" pitchFamily="34" charset="-120"/>
+                <a:cs typeface="Amiri" pitchFamily="2" charset="-78"/>
               </a:rPr>
               <a:t>B</a:t>
             </a:r>
@@ -4394,8 +4335,7 @@
                   <a:srgbClr val="1F2A37"/>
                 </a:solidFill>
                 <a:latin typeface="Calibri" pitchFamily="34" charset="0"/>
-                <a:ea typeface="Calibri" pitchFamily="34" charset="-122"/>
-                <a:cs typeface="Calibri" pitchFamily="34" charset="-120"/>
+                <a:cs typeface="Amiri" pitchFamily="2" charset="-78"/>
               </a:rPr>
               <a:t>Opportunities should be cut</a:t>
             </a:r>
@@ -4458,8 +4398,7 @@
                   <a:srgbClr val="1B3B6F"/>
                 </a:solidFill>
                 <a:latin typeface="Calibri" pitchFamily="34" charset="0"/>
-                <a:ea typeface="Calibri" pitchFamily="34" charset="-122"/>
-                <a:cs typeface="Calibri" pitchFamily="34" charset="-120"/>
+                <a:cs typeface="Amiri" pitchFamily="2" charset="-78"/>
               </a:rPr>
               <a:t>C</a:t>
             </a:r>
@@ -4497,8 +4436,7 @@
                   <a:srgbClr val="1F2A37"/>
                 </a:solidFill>
                 <a:latin typeface="Calibri" pitchFamily="34" charset="0"/>
-                <a:ea typeface="Calibri" pitchFamily="34" charset="-122"/>
-                <a:cs typeface="Calibri" pitchFamily="34" charset="-120"/>
+                <a:cs typeface="Amiri" pitchFamily="2" charset="-78"/>
               </a:rPr>
               <a:t>The matter requires providing real training opportunities</a:t>
             </a:r>
@@ -4595,8 +4533,7 @@
                   <a:srgbClr val="FFFFFF"/>
                 </a:solidFill>
                 <a:latin typeface="Calibri" pitchFamily="34" charset="0"/>
-                <a:ea typeface="Calibri" pitchFamily="34" charset="-122"/>
-                <a:cs typeface="Calibri" pitchFamily="34" charset="-120"/>
+                <a:cs typeface="Amiri" pitchFamily="2" charset="-78"/>
               </a:rPr>
               <a:t>3</a:t>
             </a:r>
@@ -4634,8 +4571,7 @@
                   <a:srgbClr val="1B3B6F"/>
                 </a:solidFill>
                 <a:latin typeface="Calibri" pitchFamily="34" charset="0"/>
-                <a:ea typeface="Calibri" pitchFamily="34" charset="-122"/>
-                <a:cs typeface="Calibri" pitchFamily="34" charset="-120"/>
+                <a:cs typeface="Amiri" pitchFamily="2" charset="-78"/>
               </a:rPr>
               <a:t>Which statement is supported (purpose, </a:t>
             </a:r>
@@ -4647,9 +4583,8 @@
                 <a:solidFill>
                   <a:srgbClr val="1B3B6F"/>
                 </a:solidFill>
-                <a:latin typeface="Amiri" pitchFamily="34" charset="0"/>
-                <a:ea typeface="Amiri" pitchFamily="34" charset="-122"/>
-                <a:cs typeface="Amiri" pitchFamily="34" charset="-120"/>
+                <a:latin typeface="Amiri" pitchFamily="2" charset="-78"/>
+                <a:cs typeface="Amiri" pitchFamily="2" charset="-78"/>
               </a:rPr>
               <a:t>لِكَيْ</a:t>
             </a:r>
@@ -4662,8 +4597,7 @@
                   <a:srgbClr val="1B3B6F"/>
                 </a:solidFill>
                 <a:latin typeface="Calibri" pitchFamily="34" charset="0"/>
-                <a:ea typeface="Calibri" pitchFamily="34" charset="-122"/>
-                <a:cs typeface="Calibri" pitchFamily="34" charset="-120"/>
+                <a:cs typeface="Amiri" pitchFamily="2" charset="-78"/>
               </a:rPr>
               <a:t>)?</a:t>
             </a:r>
@@ -4726,8 +4660,7 @@
                   <a:srgbClr val="1B3B6F"/>
                 </a:solidFill>
                 <a:latin typeface="Calibri" pitchFamily="34" charset="0"/>
-                <a:ea typeface="Calibri" pitchFamily="34" charset="-122"/>
-                <a:cs typeface="Calibri" pitchFamily="34" charset="-120"/>
+                <a:cs typeface="Amiri" pitchFamily="2" charset="-78"/>
               </a:rPr>
               <a:t>A</a:t>
             </a:r>
@@ -4765,8 +4698,7 @@
                   <a:srgbClr val="1F2A37"/>
                 </a:solidFill>
                 <a:latin typeface="Calibri" pitchFamily="34" charset="0"/>
-                <a:ea typeface="Calibri" pitchFamily="34" charset="-122"/>
-                <a:cs typeface="Calibri" pitchFamily="34" charset="-120"/>
+                <a:cs typeface="Amiri" pitchFamily="2" charset="-78"/>
               </a:rPr>
               <a:t>The programme excludes youth</a:t>
             </a:r>
@@ -4829,8 +4761,7 @@
                   <a:srgbClr val="1B3B6F"/>
                 </a:solidFill>
                 <a:latin typeface="Calibri" pitchFamily="34" charset="0"/>
-                <a:ea typeface="Calibri" pitchFamily="34" charset="-122"/>
-                <a:cs typeface="Calibri" pitchFamily="34" charset="-120"/>
+                <a:cs typeface="Amiri" pitchFamily="2" charset="-78"/>
               </a:rPr>
               <a:t>B</a:t>
             </a:r>
@@ -4868,8 +4799,7 @@
                   <a:srgbClr val="1F2A37"/>
                 </a:solidFill>
                 <a:latin typeface="Calibri" pitchFamily="34" charset="0"/>
-                <a:ea typeface="Calibri" pitchFamily="34" charset="-122"/>
-                <a:cs typeface="Calibri" pitchFamily="34" charset="-120"/>
+                <a:cs typeface="Amiri" pitchFamily="2" charset="-78"/>
               </a:rPr>
               <a:t>The programme has no aim</a:t>
             </a:r>
@@ -4932,8 +4862,7 @@
                   <a:srgbClr val="1B3B6F"/>
                 </a:solidFill>
                 <a:latin typeface="Calibri" pitchFamily="34" charset="0"/>
-                <a:ea typeface="Calibri" pitchFamily="34" charset="-122"/>
-                <a:cs typeface="Calibri" pitchFamily="34" charset="-120"/>
+                <a:cs typeface="Amiri" pitchFamily="2" charset="-78"/>
               </a:rPr>
               <a:t>C</a:t>
             </a:r>
@@ -4971,8 +4900,7 @@
                   <a:srgbClr val="1F2A37"/>
                 </a:solidFill>
                 <a:latin typeface="Calibri" pitchFamily="34" charset="0"/>
-                <a:ea typeface="Calibri" pitchFamily="34" charset="-122"/>
-                <a:cs typeface="Calibri" pitchFamily="34" charset="-120"/>
+                <a:cs typeface="Amiri" pitchFamily="2" charset="-78"/>
               </a:rPr>
               <a:t>A programme was launched to empower youth for the job market</a:t>
             </a:r>
@@ -5069,8 +4997,7 @@
                   <a:srgbClr val="FFFFFF"/>
                 </a:solidFill>
                 <a:latin typeface="Calibri" pitchFamily="34" charset="0"/>
-                <a:ea typeface="Calibri" pitchFamily="34" charset="-122"/>
-                <a:cs typeface="Calibri" pitchFamily="34" charset="-120"/>
+                <a:cs typeface="Amiri" pitchFamily="2" charset="-78"/>
               </a:rPr>
               <a:t>4</a:t>
             </a:r>
@@ -5108,8 +5035,7 @@
                   <a:srgbClr val="1B3B6F"/>
                 </a:solidFill>
                 <a:latin typeface="Calibri" pitchFamily="34" charset="0"/>
-                <a:ea typeface="Calibri" pitchFamily="34" charset="-122"/>
-                <a:cs typeface="Calibri" pitchFamily="34" charset="-120"/>
+                <a:cs typeface="Amiri" pitchFamily="2" charset="-78"/>
               </a:rPr>
               <a:t>Which statement is supported (concession-refutation)?</a:t>
             </a:r>
@@ -5172,8 +5098,7 @@
                   <a:srgbClr val="1B3B6F"/>
                 </a:solidFill>
                 <a:latin typeface="Calibri" pitchFamily="34" charset="0"/>
-                <a:ea typeface="Calibri" pitchFamily="34" charset="-122"/>
-                <a:cs typeface="Calibri" pitchFamily="34" charset="-120"/>
+                <a:cs typeface="Amiri" pitchFamily="2" charset="-78"/>
               </a:rPr>
               <a:t>A</a:t>
             </a:r>
@@ -5211,8 +5136,7 @@
                   <a:srgbClr val="1F2A37"/>
                 </a:solidFill>
                 <a:latin typeface="Calibri" pitchFamily="34" charset="0"/>
-                <a:ea typeface="Calibri" pitchFamily="34" charset="-122"/>
-                <a:cs typeface="Calibri" pitchFamily="34" charset="-120"/>
+                <a:cs typeface="Amiri" pitchFamily="2" charset="-78"/>
               </a:rPr>
               <a:t>Funding is limited, yet the will exists</a:t>
             </a:r>
@@ -5275,8 +5199,7 @@
                   <a:srgbClr val="1B3B6F"/>
                 </a:solidFill>
                 <a:latin typeface="Calibri" pitchFamily="34" charset="0"/>
-                <a:ea typeface="Calibri" pitchFamily="34" charset="-122"/>
-                <a:cs typeface="Calibri" pitchFamily="34" charset="-120"/>
+                <a:cs typeface="Amiri" pitchFamily="2" charset="-78"/>
               </a:rPr>
               <a:t>B</a:t>
             </a:r>
@@ -5314,8 +5237,7 @@
                   <a:srgbClr val="1F2A37"/>
                 </a:solidFill>
                 <a:latin typeface="Calibri" pitchFamily="34" charset="0"/>
-                <a:ea typeface="Calibri" pitchFamily="34" charset="-122"/>
-                <a:cs typeface="Calibri" pitchFamily="34" charset="-120"/>
+                <a:cs typeface="Amiri" pitchFamily="2" charset="-78"/>
               </a:rPr>
               <a:t>There is no will</a:t>
             </a:r>
@@ -5378,8 +5300,7 @@
                   <a:srgbClr val="1B3B6F"/>
                 </a:solidFill>
                 <a:latin typeface="Calibri" pitchFamily="34" charset="0"/>
-                <a:ea typeface="Calibri" pitchFamily="34" charset="-122"/>
-                <a:cs typeface="Calibri" pitchFamily="34" charset="-120"/>
+                <a:cs typeface="Amiri" pitchFamily="2" charset="-78"/>
               </a:rPr>
               <a:t>C</a:t>
             </a:r>
@@ -5417,8 +5338,7 @@
                   <a:srgbClr val="1F2A37"/>
                 </a:solidFill>
                 <a:latin typeface="Calibri" pitchFamily="34" charset="0"/>
-                <a:ea typeface="Calibri" pitchFamily="34" charset="-122"/>
-                <a:cs typeface="Calibri" pitchFamily="34" charset="-120"/>
+                <a:cs typeface="Amiri" pitchFamily="2" charset="-78"/>
               </a:rPr>
               <a:t>Funding is unlimited</a:t>
             </a:r>
@@ -5515,8 +5435,7 @@
                   <a:srgbClr val="FFFFFF"/>
                 </a:solidFill>
                 <a:latin typeface="Calibri" pitchFamily="34" charset="0"/>
-                <a:ea typeface="Calibri" pitchFamily="34" charset="-122"/>
-                <a:cs typeface="Calibri" pitchFamily="34" charset="-120"/>
+                <a:cs typeface="Amiri" pitchFamily="2" charset="-78"/>
               </a:rPr>
               <a:t>5</a:t>
             </a:r>
@@ -5554,8 +5473,7 @@
                   <a:srgbClr val="1B3B6F"/>
                 </a:solidFill>
                 <a:latin typeface="Calibri" pitchFamily="34" charset="0"/>
-                <a:ea typeface="Calibri" pitchFamily="34" charset="-122"/>
-                <a:cs typeface="Calibri" pitchFamily="34" charset="-120"/>
+                <a:cs typeface="Amiri" pitchFamily="2" charset="-78"/>
               </a:rPr>
               <a:t>Which statement is supported (Type 1 conditional)?</a:t>
             </a:r>
@@ -5618,8 +5536,7 @@
                   <a:srgbClr val="1B3B6F"/>
                 </a:solidFill>
                 <a:latin typeface="Calibri" pitchFamily="34" charset="0"/>
-                <a:ea typeface="Calibri" pitchFamily="34" charset="-122"/>
-                <a:cs typeface="Calibri" pitchFamily="34" charset="-120"/>
+                <a:cs typeface="Amiri" pitchFamily="2" charset="-78"/>
               </a:rPr>
               <a:t>A</a:t>
             </a:r>
@@ -5657,8 +5574,7 @@
                   <a:srgbClr val="1F2A37"/>
                 </a:solidFill>
                 <a:latin typeface="Calibri" pitchFamily="34" charset="0"/>
-                <a:ea typeface="Calibri" pitchFamily="34" charset="-122"/>
-                <a:cs typeface="Calibri" pitchFamily="34" charset="-120"/>
+                <a:cs typeface="Amiri" pitchFamily="2" charset="-78"/>
               </a:rPr>
               <a:t>Cooperation reduces opportunities</a:t>
             </a:r>
@@ -5721,8 +5637,7 @@
                   <a:srgbClr val="1B3B6F"/>
                 </a:solidFill>
                 <a:latin typeface="Calibri" pitchFamily="34" charset="0"/>
-                <a:ea typeface="Calibri" pitchFamily="34" charset="-122"/>
-                <a:cs typeface="Calibri" pitchFamily="34" charset="-120"/>
+                <a:cs typeface="Amiri" pitchFamily="2" charset="-78"/>
               </a:rPr>
               <a:t>B</a:t>
             </a:r>
@@ -5760,8 +5675,7 @@
                   <a:srgbClr val="1F2A37"/>
                 </a:solidFill>
                 <a:latin typeface="Calibri" pitchFamily="34" charset="0"/>
-                <a:ea typeface="Calibri" pitchFamily="34" charset="-122"/>
-                <a:cs typeface="Calibri" pitchFamily="34" charset="-120"/>
+                <a:cs typeface="Amiri" pitchFamily="2" charset="-78"/>
               </a:rPr>
               <a:t>If the public and private sectors cooperate, opportunities will grow</a:t>
             </a:r>
@@ -5824,8 +5738,7 @@
                   <a:srgbClr val="1B3B6F"/>
                 </a:solidFill>
                 <a:latin typeface="Calibri" pitchFamily="34" charset="0"/>
-                <a:ea typeface="Calibri" pitchFamily="34" charset="-122"/>
-                <a:cs typeface="Calibri" pitchFamily="34" charset="-120"/>
+                <a:cs typeface="Amiri" pitchFamily="2" charset="-78"/>
               </a:rPr>
               <a:t>C</a:t>
             </a:r>
@@ -5863,8 +5776,7 @@
                   <a:srgbClr val="1F2A37"/>
                 </a:solidFill>
                 <a:latin typeface="Calibri" pitchFamily="34" charset="0"/>
-                <a:ea typeface="Calibri" pitchFamily="34" charset="-122"/>
-                <a:cs typeface="Calibri" pitchFamily="34" charset="-120"/>
+                <a:cs typeface="Amiri" pitchFamily="2" charset="-78"/>
               </a:rPr>
               <a:t>Opportunities cannot grow</a:t>
             </a:r>
@@ -5961,8 +5873,7 @@
                   <a:srgbClr val="FFFFFF"/>
                 </a:solidFill>
                 <a:latin typeface="Calibri" pitchFamily="34" charset="0"/>
-                <a:ea typeface="Calibri" pitchFamily="34" charset="-122"/>
-                <a:cs typeface="Calibri" pitchFamily="34" charset="-120"/>
+                <a:cs typeface="Amiri" pitchFamily="2" charset="-78"/>
               </a:rPr>
               <a:t>6</a:t>
             </a:r>
@@ -6000,8 +5911,7 @@
                   <a:srgbClr val="1B3B6F"/>
                 </a:solidFill>
                 <a:latin typeface="Calibri" pitchFamily="34" charset="0"/>
-                <a:ea typeface="Calibri" pitchFamily="34" charset="-122"/>
-                <a:cs typeface="Calibri" pitchFamily="34" charset="-120"/>
+                <a:cs typeface="Amiri" pitchFamily="2" charset="-78"/>
               </a:rPr>
               <a:t>Which statement is supported (hope, </a:t>
             </a:r>
@@ -6013,9 +5923,8 @@
                 <a:solidFill>
                   <a:srgbClr val="1B3B6F"/>
                 </a:solidFill>
-                <a:latin typeface="Amiri" pitchFamily="34" charset="0"/>
-                <a:ea typeface="Amiri" pitchFamily="34" charset="-122"/>
-                <a:cs typeface="Amiri" pitchFamily="34" charset="-120"/>
+                <a:latin typeface="Amiri" pitchFamily="2" charset="-78"/>
+                <a:cs typeface="Amiri" pitchFamily="2" charset="-78"/>
               </a:rPr>
               <a:t>يَرْجُو</a:t>
             </a:r>
@@ -6028,8 +5937,7 @@
                   <a:srgbClr val="1B3B6F"/>
                 </a:solidFill>
                 <a:latin typeface="Calibri" pitchFamily="34" charset="0"/>
-                <a:ea typeface="Calibri" pitchFamily="34" charset="-122"/>
-                <a:cs typeface="Calibri" pitchFamily="34" charset="-120"/>
+                <a:cs typeface="Amiri" pitchFamily="2" charset="-78"/>
               </a:rPr>
               <a:t>)?</a:t>
             </a:r>
@@ -6092,8 +6000,7 @@
                   <a:srgbClr val="1B3B6F"/>
                 </a:solidFill>
                 <a:latin typeface="Calibri" pitchFamily="34" charset="0"/>
-                <a:ea typeface="Calibri" pitchFamily="34" charset="-122"/>
-                <a:cs typeface="Calibri" pitchFamily="34" charset="-120"/>
+                <a:cs typeface="Amiri" pitchFamily="2" charset="-78"/>
               </a:rPr>
               <a:t>A</a:t>
             </a:r>
@@ -6131,8 +6038,7 @@
                   <a:srgbClr val="1F2A37"/>
                 </a:solidFill>
                 <a:latin typeface="Calibri" pitchFamily="34" charset="0"/>
-                <a:ea typeface="Calibri" pitchFamily="34" charset="-122"/>
-                <a:cs typeface="Calibri" pitchFamily="34" charset="-120"/>
+                <a:cs typeface="Amiri" pitchFamily="2" charset="-78"/>
               </a:rPr>
               <a:t>The official hopes the programme becomes a national model</a:t>
             </a:r>
@@ -6195,8 +6101,7 @@
                   <a:srgbClr val="1B3B6F"/>
                 </a:solidFill>
                 <a:latin typeface="Calibri" pitchFamily="34" charset="0"/>
-                <a:ea typeface="Calibri" pitchFamily="34" charset="-122"/>
-                <a:cs typeface="Calibri" pitchFamily="34" charset="-120"/>
+                <a:cs typeface="Amiri" pitchFamily="2" charset="-78"/>
               </a:rPr>
               <a:t>B</a:t>
             </a:r>
@@ -6234,8 +6139,7 @@
                   <a:srgbClr val="1F2A37"/>
                 </a:solidFill>
                 <a:latin typeface="Calibri" pitchFamily="34" charset="0"/>
-                <a:ea typeface="Calibri" pitchFamily="34" charset="-122"/>
-                <a:cs typeface="Calibri" pitchFamily="34" charset="-120"/>
+                <a:cs typeface="Amiri" pitchFamily="2" charset="-78"/>
               </a:rPr>
               <a:t>The official expects it to fail</a:t>
             </a:r>
@@ -6298,8 +6202,7 @@
                   <a:srgbClr val="1B3B6F"/>
                 </a:solidFill>
                 <a:latin typeface="Calibri" pitchFamily="34" charset="0"/>
-                <a:ea typeface="Calibri" pitchFamily="34" charset="-122"/>
-                <a:cs typeface="Calibri" pitchFamily="34" charset="-120"/>
+                <a:cs typeface="Amiri" pitchFamily="2" charset="-78"/>
               </a:rPr>
               <a:t>C</a:t>
             </a:r>
@@ -6337,8 +6240,7 @@
                   <a:srgbClr val="1F2A37"/>
                 </a:solidFill>
                 <a:latin typeface="Calibri" pitchFamily="34" charset="0"/>
-                <a:ea typeface="Calibri" pitchFamily="34" charset="-122"/>
-                <a:cs typeface="Calibri" pitchFamily="34" charset="-120"/>
+                <a:cs typeface="Amiri" pitchFamily="2" charset="-78"/>
               </a:rPr>
               <a:t>The official has no hopes</a:t>
             </a:r>
@@ -6376,8 +6278,7 @@
                   <a:srgbClr val="8A93A0"/>
                 </a:solidFill>
                 <a:latin typeface="Calibri" pitchFamily="34" charset="0"/>
-                <a:ea typeface="Calibri" pitchFamily="34" charset="-122"/>
-                <a:cs typeface="Calibri" pitchFamily="34" charset="-120"/>
+                <a:cs typeface="Amiri" pitchFamily="2" charset="-78"/>
               </a:rPr>
               <a:t>10 / 18</a:t>
             </a:r>
@@ -6471,9 +6372,8 @@
                 <a:solidFill>
                   <a:srgbClr val="D4AF37"/>
                 </a:solidFill>
-                <a:latin typeface="Amiri" pitchFamily="34" charset="0"/>
-                <a:ea typeface="Amiri" pitchFamily="34" charset="-122"/>
-                <a:cs typeface="Amiri" pitchFamily="34" charset="-120"/>
+                <a:latin typeface="Amiri" pitchFamily="2" charset="-78"/>
+                <a:cs typeface="Amiri" pitchFamily="2" charset="-78"/>
               </a:rPr>
               <a:t>م</a:t>
             </a:r>
@@ -6511,8 +6411,7 @@
                   <a:srgbClr val="1B3B6F"/>
                 </a:solidFill>
                 <a:latin typeface="Cambria" pitchFamily="34" charset="0"/>
-                <a:ea typeface="Cambria" pitchFamily="34" charset="-122"/>
-                <a:cs typeface="Cambria" pitchFamily="34" charset="-120"/>
+                <a:cs typeface="Amiri" pitchFamily="2" charset="-78"/>
               </a:rPr>
               <a:t>Al Madina Online School</a:t>
             </a:r>
@@ -6550,8 +6449,7 @@
                   <a:srgbClr val="8A6D1E"/>
                 </a:solidFill>
                 <a:latin typeface="Calibri" pitchFamily="34" charset="0"/>
-                <a:ea typeface="Calibri" pitchFamily="34" charset="-122"/>
-                <a:cs typeface="Calibri" pitchFamily="34" charset="-120"/>
+                <a:cs typeface="Amiri" pitchFamily="2" charset="-78"/>
               </a:rPr>
               <a:t>ARABIC DEPARTMENT · MIFTAH ARABIC · IGCSE 0544</a:t>
             </a:r>
@@ -6616,8 +6514,7 @@
                   <a:srgbClr val="FFFFFF"/>
                 </a:solidFill>
                 <a:latin typeface="Calibri" pitchFamily="34" charset="0"/>
-                <a:ea typeface="Calibri" pitchFamily="34" charset="-122"/>
-                <a:cs typeface="Calibri" pitchFamily="34" charset="-120"/>
+                <a:cs typeface="Amiri" pitchFamily="2" charset="-78"/>
               </a:rPr>
               <a:t>P6-L08 · IGCSE Bridge</a:t>
             </a:r>
@@ -6682,8 +6579,7 @@
                   <a:srgbClr val="FFFFFF"/>
                 </a:solidFill>
                 <a:latin typeface="Calibri" pitchFamily="34" charset="0"/>
-                <a:ea typeface="Calibri" pitchFamily="34" charset="-122"/>
-                <a:cs typeface="Calibri" pitchFamily="34" charset="-120"/>
+                <a:cs typeface="Amiri" pitchFamily="2" charset="-78"/>
               </a:rPr>
               <a:t>FEEDBACK</a:t>
             </a:r>
@@ -6721,8 +6617,7 @@
                   <a:srgbClr val="8A6D1E"/>
                 </a:solidFill>
                 <a:latin typeface="Calibri" pitchFamily="34" charset="0"/>
-                <a:ea typeface="Calibri" pitchFamily="34" charset="-122"/>
-                <a:cs typeface="Calibri" pitchFamily="34" charset="-120"/>
+                <a:cs typeface="Amiri" pitchFamily="2" charset="-78"/>
               </a:rPr>
               <a:t>MOCK · PAPER 1 · ANSWERS · SHOW AFTER THE WHOLE PAPER</a:t>
             </a:r>
@@ -6760,8 +6655,7 @@
                   <a:srgbClr val="1B3B6F"/>
                 </a:solidFill>
                 <a:latin typeface="Cambria" pitchFamily="34" charset="0"/>
-                <a:ea typeface="Cambria" pitchFamily="34" charset="-122"/>
-                <a:cs typeface="Cambria" pitchFamily="34" charset="-120"/>
+                <a:cs typeface="Amiri" pitchFamily="2" charset="-78"/>
               </a:rPr>
               <a:t>A doctor on a balanced life: answers</a:t>
             </a:r>
@@ -6798,9 +6692,8 @@
                 <a:solidFill>
                   <a:srgbClr val="8A6D1E"/>
                 </a:solidFill>
-                <a:latin typeface="Amiri" pitchFamily="34" charset="0"/>
-                <a:ea typeface="Amiri" pitchFamily="34" charset="-122"/>
-                <a:cs typeface="Amiri" pitchFamily="34" charset="-120"/>
+                <a:latin typeface="Amiri" pitchFamily="2" charset="-78"/>
+                <a:cs typeface="Amiri" pitchFamily="2" charset="-78"/>
               </a:rPr>
               <a:t>الإِجَابَاتُ</a:t>
             </a:r>
@@ -6838,8 +6731,7 @@
                   <a:srgbClr val="8A93A0"/>
                 </a:solidFill>
                 <a:latin typeface="Calibri" pitchFamily="34" charset="0"/>
-                <a:ea typeface="Calibri" pitchFamily="34" charset="-122"/>
-                <a:cs typeface="Calibri" pitchFamily="34" charset="-120"/>
+                <a:cs typeface="Amiri" pitchFamily="2" charset="-78"/>
               </a:rPr>
               <a:t>Miftah Arabic · Progression P6 · IGCSE Bridge · P6-L08</a:t>
             </a:r>
@@ -6936,8 +6828,7 @@
                   <a:srgbClr val="FFFFFF"/>
                 </a:solidFill>
                 <a:latin typeface="Calibri" pitchFamily="34" charset="0"/>
-                <a:ea typeface="Calibri" pitchFamily="34" charset="-122"/>
-                <a:cs typeface="Calibri" pitchFamily="34" charset="-120"/>
+                <a:cs typeface="Amiri" pitchFamily="2" charset="-78"/>
               </a:rPr>
               <a:t>1</a:t>
             </a:r>
@@ -6975,8 +6866,7 @@
                   <a:srgbClr val="1B3B6F"/>
                 </a:solidFill>
                 <a:latin typeface="Calibri" pitchFamily="34" charset="0"/>
-                <a:ea typeface="Calibri" pitchFamily="34" charset="-122"/>
-                <a:cs typeface="Calibri" pitchFamily="34" charset="-120"/>
+                <a:cs typeface="Amiri" pitchFamily="2" charset="-78"/>
               </a:rPr>
               <a:t>What does the doctor say prevention is?</a:t>
             </a:r>
@@ -7039,8 +6929,7 @@
                   <a:srgbClr val="1B3B6F"/>
                 </a:solidFill>
                 <a:latin typeface="Calibri" pitchFamily="34" charset="0"/>
-                <a:ea typeface="Calibri" pitchFamily="34" charset="-122"/>
-                <a:cs typeface="Calibri" pitchFamily="34" charset="-120"/>
+                <a:cs typeface="Amiri" pitchFamily="2" charset="-78"/>
               </a:rPr>
               <a:t>A</a:t>
             </a:r>
@@ -7078,8 +6967,7 @@
                   <a:srgbClr val="9AA1AB"/>
                 </a:solidFill>
                 <a:latin typeface="Calibri" pitchFamily="34" charset="0"/>
-                <a:ea typeface="Calibri" pitchFamily="34" charset="-122"/>
-                <a:cs typeface="Calibri" pitchFamily="34" charset="-120"/>
+                <a:cs typeface="Amiri" pitchFamily="2" charset="-78"/>
               </a:rPr>
               <a:t>A waste of time</a:t>
             </a:r>
@@ -7169,8 +7057,7 @@
                   <a:srgbClr val="FFFFFF"/>
                 </a:solidFill>
                 <a:latin typeface="Calibri" pitchFamily="34" charset="0"/>
-                <a:ea typeface="Calibri" pitchFamily="34" charset="-122"/>
-                <a:cs typeface="Calibri" pitchFamily="34" charset="-120"/>
+                <a:cs typeface="Amiri" pitchFamily="2" charset="-78"/>
               </a:rPr>
               <a:t>B</a:t>
             </a:r>
@@ -7208,8 +7095,7 @@
                   <a:srgbClr val="1F2A37"/>
                 </a:solidFill>
                 <a:latin typeface="Calibri" pitchFamily="34" charset="0"/>
-                <a:ea typeface="Calibri" pitchFamily="34" charset="-122"/>
-                <a:cs typeface="Calibri" pitchFamily="34" charset="-120"/>
+                <a:cs typeface="Amiri" pitchFamily="2" charset="-78"/>
               </a:rPr>
               <a:t>Better than cure</a:t>
             </a:r>
@@ -7272,8 +7158,7 @@
                   <a:srgbClr val="1B3B6F"/>
                 </a:solidFill>
                 <a:latin typeface="Calibri" pitchFamily="34" charset="0"/>
-                <a:ea typeface="Calibri" pitchFamily="34" charset="-122"/>
-                <a:cs typeface="Calibri" pitchFamily="34" charset="-120"/>
+                <a:cs typeface="Amiri" pitchFamily="2" charset="-78"/>
               </a:rPr>
               <a:t>C</a:t>
             </a:r>
@@ -7311,8 +7196,7 @@
                   <a:srgbClr val="9AA1AB"/>
                 </a:solidFill>
                 <a:latin typeface="Calibri" pitchFamily="34" charset="0"/>
-                <a:ea typeface="Calibri" pitchFamily="34" charset="-122"/>
-                <a:cs typeface="Calibri" pitchFamily="34" charset="-120"/>
+                <a:cs typeface="Amiri" pitchFamily="2" charset="-78"/>
               </a:rPr>
               <a:t>Only for the old</a:t>
             </a:r>
@@ -7349,9 +7233,8 @@
                 <a:solidFill>
                   <a:srgbClr val="8A6D1E"/>
                 </a:solidFill>
-                <a:latin typeface="Amiri" pitchFamily="34" charset="0"/>
-                <a:ea typeface="Amiri" pitchFamily="34" charset="-122"/>
-                <a:cs typeface="Amiri" pitchFamily="34" charset="-120"/>
+                <a:latin typeface="Amiri" pitchFamily="2" charset="-78"/>
+                <a:cs typeface="Amiri" pitchFamily="2" charset="-78"/>
               </a:rPr>
               <a:t>أُشِيرُ إِلَى أَنَّ الوِقَايَةَ خَيْرٌ مِنَ العِلَاجِ.</a:t>
             </a:r>
@@ -7448,8 +7331,7 @@
                   <a:srgbClr val="FFFFFF"/>
                 </a:solidFill>
                 <a:latin typeface="Calibri" pitchFamily="34" charset="0"/>
-                <a:ea typeface="Calibri" pitchFamily="34" charset="-122"/>
-                <a:cs typeface="Calibri" pitchFamily="34" charset="-120"/>
+                <a:cs typeface="Amiri" pitchFamily="2" charset="-78"/>
               </a:rPr>
               <a:t>2</a:t>
             </a:r>
@@ -7487,8 +7369,7 @@
                   <a:srgbClr val="1B3B6F"/>
                 </a:solidFill>
                 <a:latin typeface="Calibri" pitchFamily="34" charset="0"/>
-                <a:ea typeface="Calibri" pitchFamily="34" charset="-122"/>
-                <a:cs typeface="Calibri" pitchFamily="34" charset="-120"/>
+                <a:cs typeface="Amiri" pitchFamily="2" charset="-78"/>
               </a:rPr>
               <a:t>What does she concede (</a:t>
             </a:r>
@@ -7500,9 +7381,8 @@
                 <a:solidFill>
                   <a:srgbClr val="1B3B6F"/>
                 </a:solidFill>
-                <a:latin typeface="Amiri" pitchFamily="34" charset="0"/>
-                <a:ea typeface="Amiri" pitchFamily="34" charset="-122"/>
-                <a:cs typeface="Amiri" pitchFamily="34" charset="-120"/>
+                <a:latin typeface="Amiri" pitchFamily="2" charset="-78"/>
+                <a:cs typeface="Amiri" pitchFamily="2" charset="-78"/>
               </a:rPr>
               <a:t>صَحِيحٌ أَنَّ</a:t>
             </a:r>
@@ -7515,8 +7395,7 @@
                   <a:srgbClr val="1B3B6F"/>
                 </a:solidFill>
                 <a:latin typeface="Calibri" pitchFamily="34" charset="0"/>
-                <a:ea typeface="Calibri" pitchFamily="34" charset="-122"/>
-                <a:cs typeface="Calibri" pitchFamily="34" charset="-120"/>
+                <a:cs typeface="Amiri" pitchFamily="2" charset="-78"/>
               </a:rPr>
               <a:t>)?</a:t>
             </a:r>
@@ -7579,8 +7458,7 @@
                   <a:srgbClr val="1B3B6F"/>
                 </a:solidFill>
                 <a:latin typeface="Calibri" pitchFamily="34" charset="0"/>
-                <a:ea typeface="Calibri" pitchFamily="34" charset="-122"/>
-                <a:cs typeface="Calibri" pitchFamily="34" charset="-120"/>
+                <a:cs typeface="Amiri" pitchFamily="2" charset="-78"/>
               </a:rPr>
               <a:t>A</a:t>
             </a:r>
@@ -7618,8 +7496,7 @@
                   <a:srgbClr val="9AA1AB"/>
                 </a:solidFill>
                 <a:latin typeface="Calibri" pitchFamily="34" charset="0"/>
-                <a:ea typeface="Calibri" pitchFamily="34" charset="-122"/>
-                <a:cs typeface="Calibri" pitchFamily="34" charset="-120"/>
+                <a:cs typeface="Amiri" pitchFamily="2" charset="-78"/>
               </a:rPr>
               <a:t>Medicines are useless</a:t>
             </a:r>
@@ -7682,8 +7559,7 @@
                   <a:srgbClr val="1B3B6F"/>
                 </a:solidFill>
                 <a:latin typeface="Calibri" pitchFamily="34" charset="0"/>
-                <a:ea typeface="Calibri" pitchFamily="34" charset="-122"/>
-                <a:cs typeface="Calibri" pitchFamily="34" charset="-120"/>
+                <a:cs typeface="Amiri" pitchFamily="2" charset="-78"/>
               </a:rPr>
               <a:t>B</a:t>
             </a:r>
@@ -7721,8 +7597,7 @@
                   <a:srgbClr val="9AA1AB"/>
                 </a:solidFill>
                 <a:latin typeface="Calibri" pitchFamily="34" charset="0"/>
-                <a:ea typeface="Calibri" pitchFamily="34" charset="-122"/>
-                <a:cs typeface="Calibri" pitchFamily="34" charset="-120"/>
+                <a:cs typeface="Amiri" pitchFamily="2" charset="-78"/>
               </a:rPr>
               <a:t>Lifestyle does not matter</a:t>
             </a:r>
@@ -7812,8 +7687,7 @@
                   <a:srgbClr val="FFFFFF"/>
                 </a:solidFill>
                 <a:latin typeface="Calibri" pitchFamily="34" charset="0"/>
-                <a:ea typeface="Calibri" pitchFamily="34" charset="-122"/>
-                <a:cs typeface="Calibri" pitchFamily="34" charset="-120"/>
+                <a:cs typeface="Amiri" pitchFamily="2" charset="-78"/>
               </a:rPr>
               <a:t>C</a:t>
             </a:r>
@@ -7851,8 +7725,7 @@
                   <a:srgbClr val="1F2A37"/>
                 </a:solidFill>
                 <a:latin typeface="Calibri" pitchFamily="34" charset="0"/>
-                <a:ea typeface="Calibri" pitchFamily="34" charset="-122"/>
-                <a:cs typeface="Calibri" pitchFamily="34" charset="-120"/>
+                <a:cs typeface="Amiri" pitchFamily="2" charset="-78"/>
               </a:rPr>
               <a:t>Medicines are sometimes necessary</a:t>
             </a:r>
@@ -7889,9 +7762,8 @@
                 <a:solidFill>
                   <a:srgbClr val="8A6D1E"/>
                 </a:solidFill>
-                <a:latin typeface="Amiri" pitchFamily="34" charset="0"/>
-                <a:ea typeface="Amiri" pitchFamily="34" charset="-122"/>
-                <a:cs typeface="Amiri" pitchFamily="34" charset="-120"/>
+                <a:latin typeface="Amiri" pitchFamily="2" charset="-78"/>
+                <a:cs typeface="Amiri" pitchFamily="2" charset="-78"/>
               </a:rPr>
               <a:t>صَحِيحٌ أَنَّ الأَدْوِيَةَ ضَرُورِيَّةٌ أَحْيَانًا.</a:t>
             </a:r>
@@ -7988,8 +7860,7 @@
                   <a:srgbClr val="FFFFFF"/>
                 </a:solidFill>
                 <a:latin typeface="Calibri" pitchFamily="34" charset="0"/>
-                <a:ea typeface="Calibri" pitchFamily="34" charset="-122"/>
-                <a:cs typeface="Calibri" pitchFamily="34" charset="-120"/>
+                <a:cs typeface="Amiri" pitchFamily="2" charset="-78"/>
               </a:rPr>
               <a:t>3</a:t>
             </a:r>
@@ -8027,8 +7898,7 @@
                   <a:srgbClr val="1B3B6F"/>
                 </a:solidFill>
                 <a:latin typeface="Calibri" pitchFamily="34" charset="0"/>
-                <a:ea typeface="Calibri" pitchFamily="34" charset="-122"/>
-                <a:cs typeface="Calibri" pitchFamily="34" charset="-120"/>
+                <a:cs typeface="Amiri" pitchFamily="2" charset="-78"/>
               </a:rPr>
               <a:t>What does she emphasise (</a:t>
             </a:r>
@@ -8040,9 +7910,8 @@
                 <a:solidFill>
                   <a:srgbClr val="1B3B6F"/>
                 </a:solidFill>
-                <a:latin typeface="Amiri" pitchFamily="34" charset="0"/>
-                <a:ea typeface="Amiri" pitchFamily="34" charset="-122"/>
-                <a:cs typeface="Amiri" pitchFamily="34" charset="-120"/>
+                <a:latin typeface="Amiri" pitchFamily="2" charset="-78"/>
+                <a:cs typeface="Amiri" pitchFamily="2" charset="-78"/>
               </a:rPr>
               <a:t>غَيْرَ أَنَّ</a:t>
             </a:r>
@@ -8055,8 +7924,7 @@
                   <a:srgbClr val="1B3B6F"/>
                 </a:solidFill>
                 <a:latin typeface="Calibri" pitchFamily="34" charset="0"/>
-                <a:ea typeface="Calibri" pitchFamily="34" charset="-122"/>
-                <a:cs typeface="Calibri" pitchFamily="34" charset="-120"/>
+                <a:cs typeface="Amiri" pitchFamily="2" charset="-78"/>
               </a:rPr>
               <a:t>)?</a:t>
             </a:r>
@@ -8146,8 +8014,7 @@
                   <a:srgbClr val="FFFFFF"/>
                 </a:solidFill>
                 <a:latin typeface="Calibri" pitchFamily="34" charset="0"/>
-                <a:ea typeface="Calibri" pitchFamily="34" charset="-122"/>
-                <a:cs typeface="Calibri" pitchFamily="34" charset="-120"/>
+                <a:cs typeface="Amiri" pitchFamily="2" charset="-78"/>
               </a:rPr>
               <a:t>A</a:t>
             </a:r>
@@ -8185,8 +8052,7 @@
                   <a:srgbClr val="1F2A37"/>
                 </a:solidFill>
                 <a:latin typeface="Calibri" pitchFamily="34" charset="0"/>
-                <a:ea typeface="Calibri" pitchFamily="34" charset="-122"/>
-                <a:cs typeface="Calibri" pitchFamily="34" charset="-120"/>
+                <a:cs typeface="Amiri" pitchFamily="2" charset="-78"/>
               </a:rPr>
               <a:t>A healthy lifestyle prevents many diseases</a:t>
             </a:r>
@@ -8249,8 +8115,7 @@
                   <a:srgbClr val="1B3B6F"/>
                 </a:solidFill>
                 <a:latin typeface="Calibri" pitchFamily="34" charset="0"/>
-                <a:ea typeface="Calibri" pitchFamily="34" charset="-122"/>
-                <a:cs typeface="Calibri" pitchFamily="34" charset="-120"/>
+                <a:cs typeface="Amiri" pitchFamily="2" charset="-78"/>
               </a:rPr>
               <a:t>B</a:t>
             </a:r>
@@ -8288,8 +8153,7 @@
                   <a:srgbClr val="9AA1AB"/>
                 </a:solidFill>
                 <a:latin typeface="Calibri" pitchFamily="34" charset="0"/>
-                <a:ea typeface="Calibri" pitchFamily="34" charset="-122"/>
-                <a:cs typeface="Calibri" pitchFamily="34" charset="-120"/>
+                <a:cs typeface="Amiri" pitchFamily="2" charset="-78"/>
               </a:rPr>
               <a:t>Only medicine works</a:t>
             </a:r>
@@ -8352,8 +8216,7 @@
                   <a:srgbClr val="1B3B6F"/>
                 </a:solidFill>
                 <a:latin typeface="Calibri" pitchFamily="34" charset="0"/>
-                <a:ea typeface="Calibri" pitchFamily="34" charset="-122"/>
-                <a:cs typeface="Calibri" pitchFamily="34" charset="-120"/>
+                <a:cs typeface="Amiri" pitchFamily="2" charset="-78"/>
               </a:rPr>
               <a:t>C</a:t>
             </a:r>
@@ -8391,8 +8254,7 @@
                   <a:srgbClr val="9AA1AB"/>
                 </a:solidFill>
                 <a:latin typeface="Calibri" pitchFamily="34" charset="0"/>
-                <a:ea typeface="Calibri" pitchFamily="34" charset="-122"/>
-                <a:cs typeface="Calibri" pitchFamily="34" charset="-120"/>
+                <a:cs typeface="Amiri" pitchFamily="2" charset="-78"/>
               </a:rPr>
               <a:t>Exercise is pointless</a:t>
             </a:r>
@@ -8429,9 +8291,8 @@
                 <a:solidFill>
                   <a:srgbClr val="8A6D1E"/>
                 </a:solidFill>
-                <a:latin typeface="Amiri" pitchFamily="34" charset="0"/>
-                <a:ea typeface="Amiri" pitchFamily="34" charset="-122"/>
-                <a:cs typeface="Amiri" pitchFamily="34" charset="-120"/>
+                <a:latin typeface="Amiri" pitchFamily="2" charset="-78"/>
+                <a:cs typeface="Amiri" pitchFamily="2" charset="-78"/>
               </a:rPr>
               <a:t>غَيْرَ أَنَّ نَمَطَ الحَيَاةِ الصِّحِّيَّ يَقِي مِنْ كَثِيرٍ مِنَ الأَمْرَاضِ.</a:t>
             </a:r>
@@ -8528,8 +8389,7 @@
                   <a:srgbClr val="FFFFFF"/>
                 </a:solidFill>
                 <a:latin typeface="Calibri" pitchFamily="34" charset="0"/>
-                <a:ea typeface="Calibri" pitchFamily="34" charset="-122"/>
-                <a:cs typeface="Calibri" pitchFamily="34" charset="-120"/>
+                <a:cs typeface="Amiri" pitchFamily="2" charset="-78"/>
               </a:rPr>
               <a:t>4</a:t>
             </a:r>
@@ -8567,8 +8427,7 @@
                   <a:srgbClr val="1B3B6F"/>
                 </a:solidFill>
                 <a:latin typeface="Calibri" pitchFamily="34" charset="0"/>
-                <a:ea typeface="Calibri" pitchFamily="34" charset="-122"/>
-                <a:cs typeface="Calibri" pitchFamily="34" charset="-120"/>
+                <a:cs typeface="Amiri" pitchFamily="2" charset="-78"/>
               </a:rPr>
               <a:t>What had many patients done (past perfect)?</a:t>
             </a:r>
@@ -8631,8 +8490,7 @@
                   <a:srgbClr val="1B3B6F"/>
                 </a:solidFill>
                 <a:latin typeface="Calibri" pitchFamily="34" charset="0"/>
-                <a:ea typeface="Calibri" pitchFamily="34" charset="-122"/>
-                <a:cs typeface="Calibri" pitchFamily="34" charset="-120"/>
+                <a:cs typeface="Amiri" pitchFamily="2" charset="-78"/>
               </a:rPr>
               <a:t>A</a:t>
             </a:r>
@@ -8670,8 +8528,7 @@
                   <a:srgbClr val="9AA1AB"/>
                 </a:solidFill>
                 <a:latin typeface="Calibri" pitchFamily="34" charset="0"/>
-                <a:ea typeface="Calibri" pitchFamily="34" charset="-122"/>
-                <a:cs typeface="Calibri" pitchFamily="34" charset="-120"/>
+                <a:cs typeface="Amiri" pitchFamily="2" charset="-78"/>
               </a:rPr>
               <a:t>Exercised daily</a:t>
             </a:r>
@@ -8761,8 +8618,7 @@
                   <a:srgbClr val="FFFFFF"/>
                 </a:solidFill>
                 <a:latin typeface="Calibri" pitchFamily="34" charset="0"/>
-                <a:ea typeface="Calibri" pitchFamily="34" charset="-122"/>
-                <a:cs typeface="Calibri" pitchFamily="34" charset="-120"/>
+                <a:cs typeface="Amiri" pitchFamily="2" charset="-78"/>
               </a:rPr>
               <a:t>B</a:t>
             </a:r>
@@ -8800,8 +8656,7 @@
                   <a:srgbClr val="1F2A37"/>
                 </a:solidFill>
                 <a:latin typeface="Calibri" pitchFamily="34" charset="0"/>
-                <a:ea typeface="Calibri" pitchFamily="34" charset="-122"/>
-                <a:cs typeface="Calibri" pitchFamily="34" charset="-120"/>
+                <a:cs typeface="Amiri" pitchFamily="2" charset="-78"/>
               </a:rPr>
               <a:t>Neglected exercise for years</a:t>
             </a:r>
@@ -8864,8 +8719,7 @@
                   <a:srgbClr val="1B3B6F"/>
                 </a:solidFill>
                 <a:latin typeface="Calibri" pitchFamily="34" charset="0"/>
-                <a:ea typeface="Calibri" pitchFamily="34" charset="-122"/>
-                <a:cs typeface="Calibri" pitchFamily="34" charset="-120"/>
+                <a:cs typeface="Amiri" pitchFamily="2" charset="-78"/>
               </a:rPr>
               <a:t>C</a:t>
             </a:r>
@@ -8903,8 +8757,7 @@
                   <a:srgbClr val="9AA1AB"/>
                 </a:solidFill>
                 <a:latin typeface="Calibri" pitchFamily="34" charset="0"/>
-                <a:ea typeface="Calibri" pitchFamily="34" charset="-122"/>
-                <a:cs typeface="Calibri" pitchFamily="34" charset="-120"/>
+                <a:cs typeface="Amiri" pitchFamily="2" charset="-78"/>
               </a:rPr>
               <a:t>Followed the advice</a:t>
             </a:r>
@@ -8941,9 +8794,8 @@
                 <a:solidFill>
                   <a:srgbClr val="8A6D1E"/>
                 </a:solidFill>
-                <a:latin typeface="Amiri" pitchFamily="34" charset="0"/>
-                <a:ea typeface="Amiri" pitchFamily="34" charset="-122"/>
-                <a:cs typeface="Amiri" pitchFamily="34" charset="-120"/>
+                <a:latin typeface="Amiri" pitchFamily="2" charset="-78"/>
+                <a:cs typeface="Amiri" pitchFamily="2" charset="-78"/>
               </a:rPr>
               <a:t>كَانَ كَثِيرٌ مِنَ المَرْضَى قَدْ أَهْمَلُوا الرِّيَاضَةَ لِسَنَوَاتٍ.</a:t>
             </a:r>
@@ -9040,8 +8892,7 @@
                   <a:srgbClr val="FFFFFF"/>
                 </a:solidFill>
                 <a:latin typeface="Calibri" pitchFamily="34" charset="0"/>
-                <a:ea typeface="Calibri" pitchFamily="34" charset="-122"/>
-                <a:cs typeface="Calibri" pitchFamily="34" charset="-120"/>
+                <a:cs typeface="Amiri" pitchFamily="2" charset="-78"/>
               </a:rPr>
               <a:t>5</a:t>
             </a:r>
@@ -9079,8 +8930,7 @@
                   <a:srgbClr val="1B3B6F"/>
                 </a:solidFill>
                 <a:latin typeface="Calibri" pitchFamily="34" charset="0"/>
-                <a:ea typeface="Calibri" pitchFamily="34" charset="-122"/>
-                <a:cs typeface="Calibri" pitchFamily="34" charset="-120"/>
+                <a:cs typeface="Amiri" pitchFamily="2" charset="-78"/>
               </a:rPr>
               <a:t>What is the Type 1 conditional claim?</a:t>
             </a:r>
@@ -9170,8 +9020,7 @@
                   <a:srgbClr val="FFFFFF"/>
                 </a:solidFill>
                 <a:latin typeface="Calibri" pitchFamily="34" charset="0"/>
-                <a:ea typeface="Calibri" pitchFamily="34" charset="-122"/>
-                <a:cs typeface="Calibri" pitchFamily="34" charset="-120"/>
+                <a:cs typeface="Amiri" pitchFamily="2" charset="-78"/>
               </a:rPr>
               <a:t>A</a:t>
             </a:r>
@@ -9209,8 +9058,7 @@
                   <a:srgbClr val="1F2A37"/>
                 </a:solidFill>
                 <a:latin typeface="Calibri" pitchFamily="34" charset="0"/>
-                <a:ea typeface="Calibri" pitchFamily="34" charset="-122"/>
-                <a:cs typeface="Calibri" pitchFamily="34" charset="-120"/>
+                <a:cs typeface="Amiri" pitchFamily="2" charset="-78"/>
               </a:rPr>
               <a:t>If a person walks half an hour daily, their heart will improve</a:t>
             </a:r>
@@ -9273,8 +9121,7 @@
                   <a:srgbClr val="1B3B6F"/>
                 </a:solidFill>
                 <a:latin typeface="Calibri" pitchFamily="34" charset="0"/>
-                <a:ea typeface="Calibri" pitchFamily="34" charset="-122"/>
-                <a:cs typeface="Calibri" pitchFamily="34" charset="-120"/>
+                <a:cs typeface="Amiri" pitchFamily="2" charset="-78"/>
               </a:rPr>
               <a:t>B</a:t>
             </a:r>
@@ -9312,8 +9159,7 @@
                   <a:srgbClr val="9AA1AB"/>
                 </a:solidFill>
                 <a:latin typeface="Calibri" pitchFamily="34" charset="0"/>
-                <a:ea typeface="Calibri" pitchFamily="34" charset="-122"/>
-                <a:cs typeface="Calibri" pitchFamily="34" charset="-120"/>
+                <a:cs typeface="Amiri" pitchFamily="2" charset="-78"/>
               </a:rPr>
               <a:t>Walking harms the heart</a:t>
             </a:r>
@@ -9376,8 +9222,7 @@
                   <a:srgbClr val="1B3B6F"/>
                 </a:solidFill>
                 <a:latin typeface="Calibri" pitchFamily="34" charset="0"/>
-                <a:ea typeface="Calibri" pitchFamily="34" charset="-122"/>
-                <a:cs typeface="Calibri" pitchFamily="34" charset="-120"/>
+                <a:cs typeface="Amiri" pitchFamily="2" charset="-78"/>
               </a:rPr>
               <a:t>C</a:t>
             </a:r>
@@ -9415,8 +9260,7 @@
                   <a:srgbClr val="9AA1AB"/>
                 </a:solidFill>
                 <a:latin typeface="Calibri" pitchFamily="34" charset="0"/>
-                <a:ea typeface="Calibri" pitchFamily="34" charset="-122"/>
-                <a:cs typeface="Calibri" pitchFamily="34" charset="-120"/>
+                <a:cs typeface="Amiri" pitchFamily="2" charset="-78"/>
               </a:rPr>
               <a:t>The heart cannot improve</a:t>
             </a:r>
@@ -9453,9 +9297,8 @@
                 <a:solidFill>
                   <a:srgbClr val="8A6D1E"/>
                 </a:solidFill>
-                <a:latin typeface="Amiri" pitchFamily="34" charset="0"/>
-                <a:ea typeface="Amiri" pitchFamily="34" charset="-122"/>
-                <a:cs typeface="Amiri" pitchFamily="34" charset="-120"/>
+                <a:latin typeface="Amiri" pitchFamily="2" charset="-78"/>
+                <a:cs typeface="Amiri" pitchFamily="2" charset="-78"/>
               </a:rPr>
               <a:t>إِذَا مَشَى الإِنْسَانُ نِصْفَ سَاعَةٍ يَوْمِيًّا، سَيَتَحَسَّنُ قَلْبُهُ.</a:t>
             </a:r>
@@ -9552,8 +9395,7 @@
                   <a:srgbClr val="FFFFFF"/>
                 </a:solidFill>
                 <a:latin typeface="Calibri" pitchFamily="34" charset="0"/>
-                <a:ea typeface="Calibri" pitchFamily="34" charset="-122"/>
-                <a:cs typeface="Calibri" pitchFamily="34" charset="-120"/>
+                <a:cs typeface="Amiri" pitchFamily="2" charset="-78"/>
               </a:rPr>
               <a:t>6</a:t>
             </a:r>
@@ -9591,8 +9433,7 @@
                   <a:srgbClr val="1B3B6F"/>
                 </a:solidFill>
                 <a:latin typeface="Calibri" pitchFamily="34" charset="0"/>
-                <a:ea typeface="Calibri" pitchFamily="34" charset="-122"/>
-                <a:cs typeface="Calibri" pitchFamily="34" charset="-120"/>
+                <a:cs typeface="Amiri" pitchFamily="2" charset="-78"/>
               </a:rPr>
               <a:t>What is the Type 2 conditional claim?</a:t>
             </a:r>
@@ -9655,8 +9496,7 @@
                   <a:srgbClr val="1B3B6F"/>
                 </a:solidFill>
                 <a:latin typeface="Calibri" pitchFamily="34" charset="0"/>
-                <a:ea typeface="Calibri" pitchFamily="34" charset="-122"/>
-                <a:cs typeface="Calibri" pitchFamily="34" charset="-120"/>
+                <a:cs typeface="Amiri" pitchFamily="2" charset="-78"/>
               </a:rPr>
               <a:t>A</a:t>
             </a:r>
@@ -9694,8 +9534,7 @@
                   <a:srgbClr val="9AA1AB"/>
                 </a:solidFill>
                 <a:latin typeface="Calibri" pitchFamily="34" charset="0"/>
-                <a:ea typeface="Calibri" pitchFamily="34" charset="-122"/>
-                <a:cs typeface="Calibri" pitchFamily="34" charset="-120"/>
+                <a:cs typeface="Amiri" pitchFamily="2" charset="-78"/>
               </a:rPr>
               <a:t>Sugar has no effect</a:t>
             </a:r>
@@ -9758,8 +9597,7 @@
                   <a:srgbClr val="1B3B6F"/>
                 </a:solidFill>
                 <a:latin typeface="Calibri" pitchFamily="34" charset="0"/>
-                <a:ea typeface="Calibri" pitchFamily="34" charset="-122"/>
-                <a:cs typeface="Calibri" pitchFamily="34" charset="-120"/>
+                <a:cs typeface="Amiri" pitchFamily="2" charset="-78"/>
               </a:rPr>
               <a:t>B</a:t>
             </a:r>
@@ -9797,8 +9635,7 @@
                   <a:srgbClr val="9AA1AB"/>
                 </a:solidFill>
                 <a:latin typeface="Calibri" pitchFamily="34" charset="0"/>
-                <a:ea typeface="Calibri" pitchFamily="34" charset="-122"/>
-                <a:cs typeface="Calibri" pitchFamily="34" charset="-120"/>
+                <a:cs typeface="Amiri" pitchFamily="2" charset="-78"/>
               </a:rPr>
               <a:t>Diseases cannot fall</a:t>
             </a:r>
@@ -9888,8 +9725,7 @@
                   <a:srgbClr val="FFFFFF"/>
                 </a:solidFill>
                 <a:latin typeface="Calibri" pitchFamily="34" charset="0"/>
-                <a:ea typeface="Calibri" pitchFamily="34" charset="-122"/>
-                <a:cs typeface="Calibri" pitchFamily="34" charset="-120"/>
+                <a:cs typeface="Amiri" pitchFamily="2" charset="-78"/>
               </a:rPr>
               <a:t>C</a:t>
             </a:r>
@@ -9927,8 +9763,7 @@
                   <a:srgbClr val="1F2A37"/>
                 </a:solidFill>
                 <a:latin typeface="Calibri" pitchFamily="34" charset="0"/>
-                <a:ea typeface="Calibri" pitchFamily="34" charset="-122"/>
-                <a:cs typeface="Calibri" pitchFamily="34" charset="-120"/>
+                <a:cs typeface="Amiri" pitchFamily="2" charset="-78"/>
               </a:rPr>
               <a:t>Had we cut sugar, modern diseases would have fallen</a:t>
             </a:r>
@@ -9965,9 +9800,8 @@
                 <a:solidFill>
                   <a:srgbClr val="8A6D1E"/>
                 </a:solidFill>
-                <a:latin typeface="Amiri" pitchFamily="34" charset="0"/>
-                <a:ea typeface="Amiri" pitchFamily="34" charset="-122"/>
-                <a:cs typeface="Amiri" pitchFamily="34" charset="-120"/>
+                <a:latin typeface="Amiri" pitchFamily="2" charset="-78"/>
+                <a:cs typeface="Amiri" pitchFamily="2" charset="-78"/>
               </a:rPr>
               <a:t>لَوْ قَلَّلْنَا مِنَ السُّكَّرِ، لَانْخَفَضَتْ أَمْرَاضُ العَصْرِ.</a:t>
             </a:r>
@@ -10064,8 +9898,7 @@
                   <a:srgbClr val="FFFFFF"/>
                 </a:solidFill>
                 <a:latin typeface="Calibri" pitchFamily="34" charset="0"/>
-                <a:ea typeface="Calibri" pitchFamily="34" charset="-122"/>
-                <a:cs typeface="Calibri" pitchFamily="34" charset="-120"/>
+                <a:cs typeface="Amiri" pitchFamily="2" charset="-78"/>
               </a:rPr>
               <a:t>7</a:t>
             </a:r>
@@ -10103,8 +9936,7 @@
                   <a:srgbClr val="1B3B6F"/>
                 </a:solidFill>
                 <a:latin typeface="Calibri" pitchFamily="34" charset="0"/>
-                <a:ea typeface="Calibri" pitchFamily="34" charset="-122"/>
-                <a:cs typeface="Calibri" pitchFamily="34" charset="-120"/>
+                <a:cs typeface="Amiri" pitchFamily="2" charset="-78"/>
               </a:rPr>
               <a:t>What does she say one ought to do (</a:t>
             </a:r>
@@ -10116,9 +9948,8 @@
                 <a:solidFill>
                   <a:srgbClr val="1B3B6F"/>
                 </a:solidFill>
-                <a:latin typeface="Amiri" pitchFamily="34" charset="0"/>
-                <a:ea typeface="Amiri" pitchFamily="34" charset="-122"/>
-                <a:cs typeface="Amiri" pitchFamily="34" charset="-120"/>
+                <a:latin typeface="Amiri" pitchFamily="2" charset="-78"/>
+                <a:cs typeface="Amiri" pitchFamily="2" charset="-78"/>
               </a:rPr>
               <a:t>يَنْبَغِي أَنْ</a:t>
             </a:r>
@@ -10131,8 +9962,7 @@
                   <a:srgbClr val="1B3B6F"/>
                 </a:solidFill>
                 <a:latin typeface="Calibri" pitchFamily="34" charset="0"/>
-                <a:ea typeface="Calibri" pitchFamily="34" charset="-122"/>
-                <a:cs typeface="Calibri" pitchFamily="34" charset="-120"/>
+                <a:cs typeface="Amiri" pitchFamily="2" charset="-78"/>
               </a:rPr>
               <a:t>)?</a:t>
             </a:r>
@@ -10195,8 +10025,7 @@
                   <a:srgbClr val="1B3B6F"/>
                 </a:solidFill>
                 <a:latin typeface="Calibri" pitchFamily="34" charset="0"/>
-                <a:ea typeface="Calibri" pitchFamily="34" charset="-122"/>
-                <a:cs typeface="Calibri" pitchFamily="34" charset="-120"/>
+                <a:cs typeface="Amiri" pitchFamily="2" charset="-78"/>
               </a:rPr>
               <a:t>A</a:t>
             </a:r>
@@ -10234,8 +10063,7 @@
                   <a:srgbClr val="9AA1AB"/>
                 </a:solidFill>
                 <a:latin typeface="Calibri" pitchFamily="34" charset="0"/>
-                <a:ea typeface="Calibri" pitchFamily="34" charset="-122"/>
-                <a:cs typeface="Calibri" pitchFamily="34" charset="-120"/>
+                <a:cs typeface="Amiri" pitchFamily="2" charset="-78"/>
               </a:rPr>
               <a:t>Skip meals</a:t>
             </a:r>
@@ -10298,8 +10126,7 @@
                   <a:srgbClr val="1B3B6F"/>
                 </a:solidFill>
                 <a:latin typeface="Calibri" pitchFamily="34" charset="0"/>
-                <a:ea typeface="Calibri" pitchFamily="34" charset="-122"/>
-                <a:cs typeface="Calibri" pitchFamily="34" charset="-120"/>
+                <a:cs typeface="Amiri" pitchFamily="2" charset="-78"/>
               </a:rPr>
               <a:t>B</a:t>
             </a:r>
@@ -10337,8 +10164,7 @@
                   <a:srgbClr val="9AA1AB"/>
                 </a:solidFill>
                 <a:latin typeface="Calibri" pitchFamily="34" charset="0"/>
-                <a:ea typeface="Calibri" pitchFamily="34" charset="-122"/>
-                <a:cs typeface="Calibri" pitchFamily="34" charset="-120"/>
+                <a:cs typeface="Amiri" pitchFamily="2" charset="-78"/>
               </a:rPr>
               <a:t>Avoid all fat</a:t>
             </a:r>
@@ -10428,8 +10254,7 @@
                   <a:srgbClr val="FFFFFF"/>
                 </a:solidFill>
                 <a:latin typeface="Calibri" pitchFamily="34" charset="0"/>
-                <a:ea typeface="Calibri" pitchFamily="34" charset="-122"/>
-                <a:cs typeface="Calibri" pitchFamily="34" charset="-120"/>
+                <a:cs typeface="Amiri" pitchFamily="2" charset="-78"/>
               </a:rPr>
               <a:t>C</a:t>
             </a:r>
@@ -10467,8 +10292,7 @@
                   <a:srgbClr val="1F2A37"/>
                 </a:solidFill>
                 <a:latin typeface="Calibri" pitchFamily="34" charset="0"/>
-                <a:ea typeface="Calibri" pitchFamily="34" charset="-122"/>
-                <a:cs typeface="Calibri" pitchFamily="34" charset="-120"/>
+                <a:cs typeface="Amiri" pitchFamily="2" charset="-78"/>
               </a:rPr>
               <a:t>Drink plenty of water</a:t>
             </a:r>
@@ -10505,9 +10329,8 @@
                 <a:solidFill>
                   <a:srgbClr val="8A6D1E"/>
                 </a:solidFill>
-                <a:latin typeface="Amiri" pitchFamily="34" charset="0"/>
-                <a:ea typeface="Amiri" pitchFamily="34" charset="-122"/>
-                <a:cs typeface="Amiri" pitchFamily="34" charset="-120"/>
+                <a:latin typeface="Amiri" pitchFamily="2" charset="-78"/>
+                <a:cs typeface="Amiri" pitchFamily="2" charset="-78"/>
               </a:rPr>
               <a:t>يَنْبَغِي أَنْ نَشْرَبَ المَاءَ بِوَفْرَةٍ.</a:t>
             </a:r>
@@ -10604,8 +10427,7 @@
                   <a:srgbClr val="FFFFFF"/>
                 </a:solidFill>
                 <a:latin typeface="Calibri" pitchFamily="34" charset="0"/>
-                <a:ea typeface="Calibri" pitchFamily="34" charset="-122"/>
-                <a:cs typeface="Calibri" pitchFamily="34" charset="-120"/>
+                <a:cs typeface="Amiri" pitchFamily="2" charset="-78"/>
               </a:rPr>
               <a:t>8</a:t>
             </a:r>
@@ -10643,8 +10465,7 @@
                   <a:srgbClr val="1B3B6F"/>
                 </a:solidFill>
                 <a:latin typeface="Calibri" pitchFamily="34" charset="0"/>
-                <a:ea typeface="Calibri" pitchFamily="34" charset="-122"/>
-                <a:cs typeface="Calibri" pitchFamily="34" charset="-120"/>
+                <a:cs typeface="Amiri" pitchFamily="2" charset="-78"/>
               </a:rPr>
               <a:t>What does she hope for (</a:t>
             </a:r>
@@ -10656,9 +10477,8 @@
                 <a:solidFill>
                   <a:srgbClr val="1B3B6F"/>
                 </a:solidFill>
-                <a:latin typeface="Amiri" pitchFamily="34" charset="0"/>
-                <a:ea typeface="Amiri" pitchFamily="34" charset="-122"/>
-                <a:cs typeface="Amiri" pitchFamily="34" charset="-120"/>
+                <a:latin typeface="Amiri" pitchFamily="2" charset="-78"/>
+                <a:cs typeface="Amiri" pitchFamily="2" charset="-78"/>
               </a:rPr>
               <a:t>أَرْجُو أَنْ</a:t>
             </a:r>
@@ -10671,8 +10491,7 @@
                   <a:srgbClr val="1B3B6F"/>
                 </a:solidFill>
                 <a:latin typeface="Calibri" pitchFamily="34" charset="0"/>
-                <a:ea typeface="Calibri" pitchFamily="34" charset="-122"/>
-                <a:cs typeface="Calibri" pitchFamily="34" charset="-120"/>
+                <a:cs typeface="Amiri" pitchFamily="2" charset="-78"/>
               </a:rPr>
               <a:t>)?</a:t>
             </a:r>
@@ -10762,8 +10581,7 @@
                   <a:srgbClr val="FFFFFF"/>
                 </a:solidFill>
                 <a:latin typeface="Calibri" pitchFamily="34" charset="0"/>
-                <a:ea typeface="Calibri" pitchFamily="34" charset="-122"/>
-                <a:cs typeface="Calibri" pitchFamily="34" charset="-120"/>
+                <a:cs typeface="Amiri" pitchFamily="2" charset="-78"/>
               </a:rPr>
               <a:t>A</a:t>
             </a:r>
@@ -10801,8 +10619,7 @@
                   <a:srgbClr val="1F2A37"/>
                 </a:solidFill>
                 <a:latin typeface="Calibri" pitchFamily="34" charset="0"/>
-                <a:ea typeface="Calibri" pitchFamily="34" charset="-122"/>
-                <a:cs typeface="Calibri" pitchFamily="34" charset="-120"/>
+                <a:cs typeface="Amiri" pitchFamily="2" charset="-78"/>
               </a:rPr>
               <a:t>That young people care for their health early</a:t>
             </a:r>
@@ -10865,8 +10682,7 @@
                   <a:srgbClr val="1B3B6F"/>
                 </a:solidFill>
                 <a:latin typeface="Calibri" pitchFamily="34" charset="0"/>
-                <a:ea typeface="Calibri" pitchFamily="34" charset="-122"/>
-                <a:cs typeface="Calibri" pitchFamily="34" charset="-120"/>
+                <a:cs typeface="Amiri" pitchFamily="2" charset="-78"/>
               </a:rPr>
               <a:t>B</a:t>
             </a:r>
@@ -10904,8 +10720,7 @@
                   <a:srgbClr val="9AA1AB"/>
                 </a:solidFill>
                 <a:latin typeface="Calibri" pitchFamily="34" charset="0"/>
-                <a:ea typeface="Calibri" pitchFamily="34" charset="-122"/>
-                <a:cs typeface="Calibri" pitchFamily="34" charset="-120"/>
+                <a:cs typeface="Amiri" pitchFamily="2" charset="-78"/>
               </a:rPr>
               <a:t>That people ignore health</a:t>
             </a:r>
@@ -10968,8 +10783,7 @@
                   <a:srgbClr val="1B3B6F"/>
                 </a:solidFill>
                 <a:latin typeface="Calibri" pitchFamily="34" charset="0"/>
-                <a:ea typeface="Calibri" pitchFamily="34" charset="-122"/>
-                <a:cs typeface="Calibri" pitchFamily="34" charset="-120"/>
+                <a:cs typeface="Amiri" pitchFamily="2" charset="-78"/>
               </a:rPr>
               <a:t>C</a:t>
             </a:r>
@@ -11007,8 +10821,7 @@
                   <a:srgbClr val="9AA1AB"/>
                 </a:solidFill>
                 <a:latin typeface="Calibri" pitchFamily="34" charset="0"/>
-                <a:ea typeface="Calibri" pitchFamily="34" charset="-122"/>
-                <a:cs typeface="Calibri" pitchFamily="34" charset="-120"/>
+                <a:cs typeface="Amiri" pitchFamily="2" charset="-78"/>
               </a:rPr>
               <a:t>That medicine replaces lifestyle</a:t>
             </a:r>
@@ -11045,9 +10858,8 @@
                 <a:solidFill>
                   <a:srgbClr val="8A6D1E"/>
                 </a:solidFill>
-                <a:latin typeface="Amiri" pitchFamily="34" charset="0"/>
-                <a:ea typeface="Amiri" pitchFamily="34" charset="-122"/>
-                <a:cs typeface="Amiri" pitchFamily="34" charset="-120"/>
+                <a:latin typeface="Amiri" pitchFamily="2" charset="-78"/>
+                <a:cs typeface="Amiri" pitchFamily="2" charset="-78"/>
               </a:rPr>
               <a:t>أَرْجُو أَنْ يَهْتَمَّ الشَّبَابُ بِصِحَّتِهِمْ مُبَكِّرًا.</a:t>
             </a:r>
@@ -11085,8 +10897,7 @@
                   <a:srgbClr val="8A93A0"/>
                 </a:solidFill>
                 <a:latin typeface="Calibri" pitchFamily="34" charset="0"/>
-                <a:ea typeface="Calibri" pitchFamily="34" charset="-122"/>
-                <a:cs typeface="Calibri" pitchFamily="34" charset="-120"/>
+                <a:cs typeface="Amiri" pitchFamily="2" charset="-78"/>
               </a:rPr>
               <a:t>11 / 18</a:t>
             </a:r>
@@ -11180,9 +10991,8 @@
                 <a:solidFill>
                   <a:srgbClr val="D4AF37"/>
                 </a:solidFill>
-                <a:latin typeface="Amiri" pitchFamily="34" charset="0"/>
-                <a:ea typeface="Amiri" pitchFamily="34" charset="-122"/>
-                <a:cs typeface="Amiri" pitchFamily="34" charset="-120"/>
+                <a:latin typeface="Amiri" pitchFamily="2" charset="-78"/>
+                <a:cs typeface="Amiri" pitchFamily="2" charset="-78"/>
               </a:rPr>
               <a:t>م</a:t>
             </a:r>
@@ -11220,8 +11030,7 @@
                   <a:srgbClr val="1B3B6F"/>
                 </a:solidFill>
                 <a:latin typeface="Cambria" pitchFamily="34" charset="0"/>
-                <a:ea typeface="Cambria" pitchFamily="34" charset="-122"/>
-                <a:cs typeface="Cambria" pitchFamily="34" charset="-120"/>
+                <a:cs typeface="Amiri" pitchFamily="2" charset="-78"/>
               </a:rPr>
               <a:t>Al Madina Online School</a:t>
             </a:r>
@@ -11259,8 +11068,7 @@
                   <a:srgbClr val="8A6D1E"/>
                 </a:solidFill>
                 <a:latin typeface="Calibri" pitchFamily="34" charset="0"/>
-                <a:ea typeface="Calibri" pitchFamily="34" charset="-122"/>
-                <a:cs typeface="Calibri" pitchFamily="34" charset="-120"/>
+                <a:cs typeface="Amiri" pitchFamily="2" charset="-78"/>
               </a:rPr>
               <a:t>ARABIC DEPARTMENT · MIFTAH ARABIC · IGCSE 0544</a:t>
             </a:r>
@@ -11325,8 +11133,7 @@
                   <a:srgbClr val="FFFFFF"/>
                 </a:solidFill>
                 <a:latin typeface="Calibri" pitchFamily="34" charset="0"/>
-                <a:ea typeface="Calibri" pitchFamily="34" charset="-122"/>
-                <a:cs typeface="Calibri" pitchFamily="34" charset="-120"/>
+                <a:cs typeface="Amiri" pitchFamily="2" charset="-78"/>
               </a:rPr>
               <a:t>P6-L08 · IGCSE Bridge</a:t>
             </a:r>
@@ -11391,8 +11198,7 @@
                   <a:srgbClr val="FFFFFF"/>
                 </a:solidFill>
                 <a:latin typeface="Calibri" pitchFamily="34" charset="0"/>
-                <a:ea typeface="Calibri" pitchFamily="34" charset="-122"/>
-                <a:cs typeface="Calibri" pitchFamily="34" charset="-120"/>
+                <a:cs typeface="Amiri" pitchFamily="2" charset="-78"/>
               </a:rPr>
               <a:t>FEEDBACK</a:t>
             </a:r>
@@ -11430,8 +11236,7 @@
                   <a:srgbClr val="8A6D1E"/>
                 </a:solidFill>
                 <a:latin typeface="Calibri" pitchFamily="34" charset="0"/>
-                <a:ea typeface="Calibri" pitchFamily="34" charset="-122"/>
-                <a:cs typeface="Calibri" pitchFamily="34" charset="-120"/>
+                <a:cs typeface="Amiri" pitchFamily="2" charset="-78"/>
               </a:rPr>
               <a:t>MOCK · PAPER 1 · ANSWERS · SHOW AFTER THE WHOLE PAPER</a:t>
             </a:r>
@@ -11469,8 +11274,7 @@
                   <a:srgbClr val="1B3B6F"/>
                 </a:solidFill>
                 <a:latin typeface="Cambria" pitchFamily="34" charset="0"/>
-                <a:ea typeface="Cambria" pitchFamily="34" charset="-122"/>
-                <a:cs typeface="Cambria" pitchFamily="34" charset="-120"/>
+                <a:cs typeface="Amiri" pitchFamily="2" charset="-78"/>
               </a:rPr>
               <a:t>Two friends on future plans: answers</a:t>
             </a:r>
@@ -11507,9 +11311,8 @@
                 <a:solidFill>
                   <a:srgbClr val="8A6D1E"/>
                 </a:solidFill>
-                <a:latin typeface="Amiri" pitchFamily="34" charset="0"/>
-                <a:ea typeface="Amiri" pitchFamily="34" charset="-122"/>
-                <a:cs typeface="Amiri" pitchFamily="34" charset="-120"/>
+                <a:latin typeface="Amiri" pitchFamily="2" charset="-78"/>
+                <a:cs typeface="Amiri" pitchFamily="2" charset="-78"/>
               </a:rPr>
               <a:t>الإِجَابَاتُ</a:t>
             </a:r>
@@ -11547,8 +11350,7 @@
                   <a:srgbClr val="8A93A0"/>
                 </a:solidFill>
                 <a:latin typeface="Calibri" pitchFamily="34" charset="0"/>
-                <a:ea typeface="Calibri" pitchFamily="34" charset="-122"/>
-                <a:cs typeface="Calibri" pitchFamily="34" charset="-120"/>
+                <a:cs typeface="Amiri" pitchFamily="2" charset="-78"/>
               </a:rPr>
               <a:t>Miftah Arabic · Progression P6 · IGCSE Bridge · P6-L08</a:t>
             </a:r>
@@ -11645,8 +11447,7 @@
                   <a:srgbClr val="FFFFFF"/>
                 </a:solidFill>
                 <a:latin typeface="Calibri" pitchFamily="34" charset="0"/>
-                <a:ea typeface="Calibri" pitchFamily="34" charset="-122"/>
-                <a:cs typeface="Calibri" pitchFamily="34" charset="-120"/>
+                <a:cs typeface="Amiri" pitchFamily="2" charset="-78"/>
               </a:rPr>
               <a:t>1</a:t>
             </a:r>
@@ -11684,8 +11485,7 @@
                   <a:srgbClr val="1B3B6F"/>
                 </a:solidFill>
                 <a:latin typeface="Calibri" pitchFamily="34" charset="0"/>
-                <a:ea typeface="Calibri" pitchFamily="34" charset="-122"/>
-                <a:cs typeface="Calibri" pitchFamily="34" charset="-120"/>
+                <a:cs typeface="Amiri" pitchFamily="2" charset="-78"/>
               </a:rPr>
               <a:t>Who says practical training is no less important than the certificate?</a:t>
             </a:r>
@@ -11775,8 +11575,7 @@
                   <a:srgbClr val="FFFFFF"/>
                 </a:solidFill>
                 <a:latin typeface="Calibri" pitchFamily="34" charset="0"/>
-                <a:ea typeface="Calibri" pitchFamily="34" charset="-122"/>
-                <a:cs typeface="Calibri" pitchFamily="34" charset="-120"/>
+                <a:cs typeface="Amiri" pitchFamily="2" charset="-78"/>
               </a:rPr>
               <a:t>A</a:t>
             </a:r>
@@ -11814,8 +11613,7 @@
                   <a:srgbClr val="1F2A37"/>
                 </a:solidFill>
                 <a:latin typeface="Calibri" pitchFamily="34" charset="0"/>
-                <a:ea typeface="Calibri" pitchFamily="34" charset="-122"/>
-                <a:cs typeface="Calibri" pitchFamily="34" charset="-120"/>
+                <a:cs typeface="Amiri" pitchFamily="2" charset="-78"/>
               </a:rPr>
               <a:t>Nour</a:t>
             </a:r>
@@ -11878,8 +11676,7 @@
                   <a:srgbClr val="1B3B6F"/>
                 </a:solidFill>
                 <a:latin typeface="Calibri" pitchFamily="34" charset="0"/>
-                <a:ea typeface="Calibri" pitchFamily="34" charset="-122"/>
-                <a:cs typeface="Calibri" pitchFamily="34" charset="-120"/>
+                <a:cs typeface="Amiri" pitchFamily="2" charset="-78"/>
               </a:rPr>
               <a:t>B</a:t>
             </a:r>
@@ -11917,8 +11714,7 @@
                   <a:srgbClr val="9AA1AB"/>
                 </a:solidFill>
                 <a:latin typeface="Calibri" pitchFamily="34" charset="0"/>
-                <a:ea typeface="Calibri" pitchFamily="34" charset="-122"/>
-                <a:cs typeface="Calibri" pitchFamily="34" charset="-120"/>
+                <a:cs typeface="Amiri" pitchFamily="2" charset="-78"/>
               </a:rPr>
               <a:t>Zayd</a:t>
             </a:r>
@@ -11981,8 +11777,7 @@
                   <a:srgbClr val="1B3B6F"/>
                 </a:solidFill>
                 <a:latin typeface="Calibri" pitchFamily="34" charset="0"/>
-                <a:ea typeface="Calibri" pitchFamily="34" charset="-122"/>
-                <a:cs typeface="Calibri" pitchFamily="34" charset="-120"/>
+                <a:cs typeface="Amiri" pitchFamily="2" charset="-78"/>
               </a:rPr>
               <a:t>C</a:t>
             </a:r>
@@ -12020,8 +11815,7 @@
                   <a:srgbClr val="9AA1AB"/>
                 </a:solidFill>
                 <a:latin typeface="Calibri" pitchFamily="34" charset="0"/>
-                <a:ea typeface="Calibri" pitchFamily="34" charset="-122"/>
-                <a:cs typeface="Calibri" pitchFamily="34" charset="-120"/>
+                <a:cs typeface="Amiri" pitchFamily="2" charset="-78"/>
               </a:rPr>
               <a:t>Both</a:t>
             </a:r>
@@ -12058,9 +11852,8 @@
                 <a:solidFill>
                   <a:srgbClr val="8A6D1E"/>
                 </a:solidFill>
-                <a:latin typeface="Amiri" pitchFamily="34" charset="0"/>
-                <a:ea typeface="Amiri" pitchFamily="34" charset="-122"/>
-                <a:cs typeface="Amiri" pitchFamily="34" charset="-120"/>
+                <a:latin typeface="Amiri" pitchFamily="2" charset="-78"/>
+                <a:cs typeface="Amiri" pitchFamily="2" charset="-78"/>
               </a:rPr>
               <a:t>نُورٌ: أَرَى أَنَّ التَّدْرِيبَ العَمَلِيَّ لَا يَقِلُّ أَهَمِّيَّةً عَنِ الشَّهَادَةِ.</a:t>
             </a:r>
@@ -12157,8 +11950,7 @@
                   <a:srgbClr val="FFFFFF"/>
                 </a:solidFill>
                 <a:latin typeface="Calibri" pitchFamily="34" charset="0"/>
-                <a:ea typeface="Calibri" pitchFamily="34" charset="-122"/>
-                <a:cs typeface="Calibri" pitchFamily="34" charset="-120"/>
+                <a:cs typeface="Amiri" pitchFamily="2" charset="-78"/>
               </a:rPr>
               <a:t>2</a:t>
             </a:r>
@@ -12196,8 +11988,7 @@
                   <a:srgbClr val="1B3B6F"/>
                 </a:solidFill>
                 <a:latin typeface="Calibri" pitchFamily="34" charset="0"/>
-                <a:ea typeface="Calibri" pitchFamily="34" charset="-122"/>
-                <a:cs typeface="Calibri" pitchFamily="34" charset="-120"/>
+                <a:cs typeface="Amiri" pitchFamily="2" charset="-78"/>
               </a:rPr>
               <a:t>Who concedes the certificate matters but skills make the difference?</a:t>
             </a:r>
@@ -12260,8 +12051,7 @@
                   <a:srgbClr val="1B3B6F"/>
                 </a:solidFill>
                 <a:latin typeface="Calibri" pitchFamily="34" charset="0"/>
-                <a:ea typeface="Calibri" pitchFamily="34" charset="-122"/>
-                <a:cs typeface="Calibri" pitchFamily="34" charset="-120"/>
+                <a:cs typeface="Amiri" pitchFamily="2" charset="-78"/>
               </a:rPr>
               <a:t>A</a:t>
             </a:r>
@@ -12299,8 +12089,7 @@
                   <a:srgbClr val="9AA1AB"/>
                 </a:solidFill>
                 <a:latin typeface="Calibri" pitchFamily="34" charset="0"/>
-                <a:ea typeface="Calibri" pitchFamily="34" charset="-122"/>
-                <a:cs typeface="Calibri" pitchFamily="34" charset="-120"/>
+                <a:cs typeface="Amiri" pitchFamily="2" charset="-78"/>
               </a:rPr>
               <a:t>Nour</a:t>
             </a:r>
@@ -12390,8 +12179,7 @@
                   <a:srgbClr val="FFFFFF"/>
                 </a:solidFill>
                 <a:latin typeface="Calibri" pitchFamily="34" charset="0"/>
-                <a:ea typeface="Calibri" pitchFamily="34" charset="-122"/>
-                <a:cs typeface="Calibri" pitchFamily="34" charset="-120"/>
+                <a:cs typeface="Amiri" pitchFamily="2" charset="-78"/>
               </a:rPr>
               <a:t>B</a:t>
             </a:r>
@@ -12429,8 +12217,7 @@
                   <a:srgbClr val="1F2A37"/>
                 </a:solidFill>
                 <a:latin typeface="Calibri" pitchFamily="34" charset="0"/>
-                <a:ea typeface="Calibri" pitchFamily="34" charset="-122"/>
-                <a:cs typeface="Calibri" pitchFamily="34" charset="-120"/>
+                <a:cs typeface="Amiri" pitchFamily="2" charset="-78"/>
               </a:rPr>
               <a:t>Zayd</a:t>
             </a:r>
@@ -12493,8 +12280,7 @@
                   <a:srgbClr val="1B3B6F"/>
                 </a:solidFill>
                 <a:latin typeface="Calibri" pitchFamily="34" charset="0"/>
-                <a:ea typeface="Calibri" pitchFamily="34" charset="-122"/>
-                <a:cs typeface="Calibri" pitchFamily="34" charset="-120"/>
+                <a:cs typeface="Amiri" pitchFamily="2" charset="-78"/>
               </a:rPr>
               <a:t>C</a:t>
             </a:r>
@@ -12532,8 +12318,7 @@
                   <a:srgbClr val="9AA1AB"/>
                 </a:solidFill>
                 <a:latin typeface="Calibri" pitchFamily="34" charset="0"/>
-                <a:ea typeface="Calibri" pitchFamily="34" charset="-122"/>
-                <a:cs typeface="Calibri" pitchFamily="34" charset="-120"/>
+                <a:cs typeface="Amiri" pitchFamily="2" charset="-78"/>
               </a:rPr>
               <a:t>Both</a:t>
             </a:r>
@@ -12570,9 +12355,8 @@
                 <a:solidFill>
                   <a:srgbClr val="8A6D1E"/>
                 </a:solidFill>
-                <a:latin typeface="Amiri" pitchFamily="34" charset="0"/>
-                <a:ea typeface="Amiri" pitchFamily="34" charset="-122"/>
-                <a:cs typeface="Amiri" pitchFamily="34" charset="-120"/>
+                <a:latin typeface="Amiri" pitchFamily="2" charset="-78"/>
+                <a:cs typeface="Amiri" pitchFamily="2" charset="-78"/>
               </a:rPr>
               <a:t>زَيْدٌ: صَحِيحٌ أَنَّ الشَّهَادَةَ مُهِمَّةٌ، غَيْرَ أَنَّ المَهَارَاتِ تَصْنَعُ الفَرْقَ.</a:t>
             </a:r>
@@ -12669,8 +12453,7 @@
                   <a:srgbClr val="FFFFFF"/>
                 </a:solidFill>
                 <a:latin typeface="Calibri" pitchFamily="34" charset="0"/>
-                <a:ea typeface="Calibri" pitchFamily="34" charset="-122"/>
-                <a:cs typeface="Calibri" pitchFamily="34" charset="-120"/>
+                <a:cs typeface="Amiri" pitchFamily="2" charset="-78"/>
               </a:rPr>
               <a:t>3</a:t>
             </a:r>
@@ -12708,8 +12491,7 @@
                   <a:srgbClr val="1B3B6F"/>
                 </a:solidFill>
                 <a:latin typeface="Calibri" pitchFamily="34" charset="0"/>
-                <a:ea typeface="Calibri" pitchFamily="34" charset="-122"/>
-                <a:cs typeface="Calibri" pitchFamily="34" charset="-120"/>
+                <a:cs typeface="Amiri" pitchFamily="2" charset="-78"/>
               </a:rPr>
               <a:t>Who makes the Type 2 conditional about starting training early?</a:t>
             </a:r>
@@ -12799,8 +12581,7 @@
                   <a:srgbClr val="FFFFFF"/>
                 </a:solidFill>
                 <a:latin typeface="Calibri" pitchFamily="34" charset="0"/>
-                <a:ea typeface="Calibri" pitchFamily="34" charset="-122"/>
-                <a:cs typeface="Calibri" pitchFamily="34" charset="-120"/>
+                <a:cs typeface="Amiri" pitchFamily="2" charset="-78"/>
               </a:rPr>
               <a:t>A</a:t>
             </a:r>
@@ -12838,8 +12619,7 @@
                   <a:srgbClr val="1F2A37"/>
                 </a:solidFill>
                 <a:latin typeface="Calibri" pitchFamily="34" charset="0"/>
-                <a:ea typeface="Calibri" pitchFamily="34" charset="-122"/>
-                <a:cs typeface="Calibri" pitchFamily="34" charset="-120"/>
+                <a:cs typeface="Amiri" pitchFamily="2" charset="-78"/>
               </a:rPr>
               <a:t>Nour</a:t>
             </a:r>
@@ -12902,8 +12682,7 @@
                   <a:srgbClr val="1B3B6F"/>
                 </a:solidFill>
                 <a:latin typeface="Calibri" pitchFamily="34" charset="0"/>
-                <a:ea typeface="Calibri" pitchFamily="34" charset="-122"/>
-                <a:cs typeface="Calibri" pitchFamily="34" charset="-120"/>
+                <a:cs typeface="Amiri" pitchFamily="2" charset="-78"/>
               </a:rPr>
               <a:t>B</a:t>
             </a:r>
@@ -12941,8 +12720,7 @@
                   <a:srgbClr val="9AA1AB"/>
                 </a:solidFill>
                 <a:latin typeface="Calibri" pitchFamily="34" charset="0"/>
-                <a:ea typeface="Calibri" pitchFamily="34" charset="-122"/>
-                <a:cs typeface="Calibri" pitchFamily="34" charset="-120"/>
+                <a:cs typeface="Amiri" pitchFamily="2" charset="-78"/>
               </a:rPr>
               <a:t>Zayd</a:t>
             </a:r>
@@ -13005,8 +12783,7 @@
                   <a:srgbClr val="1B3B6F"/>
                 </a:solidFill>
                 <a:latin typeface="Calibri" pitchFamily="34" charset="0"/>
-                <a:ea typeface="Calibri" pitchFamily="34" charset="-122"/>
-                <a:cs typeface="Calibri" pitchFamily="34" charset="-120"/>
+                <a:cs typeface="Amiri" pitchFamily="2" charset="-78"/>
               </a:rPr>
               <a:t>C</a:t>
             </a:r>
@@ -13044,8 +12821,7 @@
                   <a:srgbClr val="9AA1AB"/>
                 </a:solidFill>
                 <a:latin typeface="Calibri" pitchFamily="34" charset="0"/>
-                <a:ea typeface="Calibri" pitchFamily="34" charset="-122"/>
-                <a:cs typeface="Calibri" pitchFamily="34" charset="-120"/>
+                <a:cs typeface="Amiri" pitchFamily="2" charset="-78"/>
               </a:rPr>
               <a:t>Both</a:t>
             </a:r>
@@ -13082,9 +12858,8 @@
                 <a:solidFill>
                   <a:srgbClr val="8A6D1E"/>
                 </a:solidFill>
-                <a:latin typeface="Amiri" pitchFamily="34" charset="0"/>
-                <a:ea typeface="Amiri" pitchFamily="34" charset="-122"/>
-                <a:cs typeface="Amiri" pitchFamily="34" charset="-120"/>
+                <a:latin typeface="Amiri" pitchFamily="2" charset="-78"/>
+                <a:cs typeface="Amiri" pitchFamily="2" charset="-78"/>
               </a:rPr>
               <a:t>نُورٌ: لَوْ بَدَأْتُ التَّدَرُّبَ مُبَكِّرًا، لَاكْتَسَبْتُ خِبْرَةً.</a:t>
             </a:r>
@@ -13181,8 +12956,7 @@
                   <a:srgbClr val="FFFFFF"/>
                 </a:solidFill>
                 <a:latin typeface="Calibri" pitchFamily="34" charset="0"/>
-                <a:ea typeface="Calibri" pitchFamily="34" charset="-122"/>
-                <a:cs typeface="Calibri" pitchFamily="34" charset="-120"/>
+                <a:cs typeface="Amiri" pitchFamily="2" charset="-78"/>
               </a:rPr>
               <a:t>4</a:t>
             </a:r>
@@ -13220,8 +12994,7 @@
                   <a:srgbClr val="1B3B6F"/>
                 </a:solidFill>
                 <a:latin typeface="Calibri" pitchFamily="34" charset="0"/>
-                <a:ea typeface="Calibri" pitchFamily="34" charset="-122"/>
-                <a:cs typeface="Calibri" pitchFamily="34" charset="-120"/>
+                <a:cs typeface="Amiri" pitchFamily="2" charset="-78"/>
               </a:rPr>
               <a:t>Who says one ought to choose a field they love?</a:t>
             </a:r>
@@ -13284,8 +13057,7 @@
                   <a:srgbClr val="1B3B6F"/>
                 </a:solidFill>
                 <a:latin typeface="Calibri" pitchFamily="34" charset="0"/>
-                <a:ea typeface="Calibri" pitchFamily="34" charset="-122"/>
-                <a:cs typeface="Calibri" pitchFamily="34" charset="-120"/>
+                <a:cs typeface="Amiri" pitchFamily="2" charset="-78"/>
               </a:rPr>
               <a:t>A</a:t>
             </a:r>
@@ -13323,8 +13095,7 @@
                   <a:srgbClr val="9AA1AB"/>
                 </a:solidFill>
                 <a:latin typeface="Calibri" pitchFamily="34" charset="0"/>
-                <a:ea typeface="Calibri" pitchFamily="34" charset="-122"/>
-                <a:cs typeface="Calibri" pitchFamily="34" charset="-120"/>
+                <a:cs typeface="Amiri" pitchFamily="2" charset="-78"/>
               </a:rPr>
               <a:t>Nour</a:t>
             </a:r>
@@ -13387,8 +13158,7 @@
                   <a:srgbClr val="1B3B6F"/>
                 </a:solidFill>
                 <a:latin typeface="Calibri" pitchFamily="34" charset="0"/>
-                <a:ea typeface="Calibri" pitchFamily="34" charset="-122"/>
-                <a:cs typeface="Calibri" pitchFamily="34" charset="-120"/>
+                <a:cs typeface="Amiri" pitchFamily="2" charset="-78"/>
               </a:rPr>
               <a:t>B</a:t>
             </a:r>
@@ -13426,8 +13196,7 @@
                   <a:srgbClr val="9AA1AB"/>
                 </a:solidFill>
                 <a:latin typeface="Calibri" pitchFamily="34" charset="0"/>
-                <a:ea typeface="Calibri" pitchFamily="34" charset="-122"/>
-                <a:cs typeface="Calibri" pitchFamily="34" charset="-120"/>
+                <a:cs typeface="Amiri" pitchFamily="2" charset="-78"/>
               </a:rPr>
               <a:t>Both</a:t>
             </a:r>
@@ -13517,8 +13286,7 @@
                   <a:srgbClr val="FFFFFF"/>
                 </a:solidFill>
                 <a:latin typeface="Calibri" pitchFamily="34" charset="0"/>
-                <a:ea typeface="Calibri" pitchFamily="34" charset="-122"/>
-                <a:cs typeface="Calibri" pitchFamily="34" charset="-120"/>
+                <a:cs typeface="Amiri" pitchFamily="2" charset="-78"/>
               </a:rPr>
               <a:t>C</a:t>
             </a:r>
@@ -13556,8 +13324,7 @@
                   <a:srgbClr val="1F2A37"/>
                 </a:solidFill>
                 <a:latin typeface="Calibri" pitchFamily="34" charset="0"/>
-                <a:ea typeface="Calibri" pitchFamily="34" charset="-122"/>
-                <a:cs typeface="Calibri" pitchFamily="34" charset="-120"/>
+                <a:cs typeface="Amiri" pitchFamily="2" charset="-78"/>
               </a:rPr>
               <a:t>Zayd</a:t>
             </a:r>
@@ -13594,9 +13361,8 @@
                 <a:solidFill>
                   <a:srgbClr val="8A6D1E"/>
                 </a:solidFill>
-                <a:latin typeface="Amiri" pitchFamily="34" charset="0"/>
-                <a:ea typeface="Amiri" pitchFamily="34" charset="-122"/>
-                <a:cs typeface="Amiri" pitchFamily="34" charset="-120"/>
+                <a:latin typeface="Amiri" pitchFamily="2" charset="-78"/>
+                <a:cs typeface="Amiri" pitchFamily="2" charset="-78"/>
               </a:rPr>
               <a:t>زَيْدٌ: يَنْبَغِي أَنْ نَخْتَارَ مَجَالًا نُحِبُّهُ.</a:t>
             </a:r>
@@ -13693,8 +13459,7 @@
                   <a:srgbClr val="FFFFFF"/>
                 </a:solidFill>
                 <a:latin typeface="Calibri" pitchFamily="34" charset="0"/>
-                <a:ea typeface="Calibri" pitchFamily="34" charset="-122"/>
-                <a:cs typeface="Calibri" pitchFamily="34" charset="-120"/>
+                <a:cs typeface="Amiri" pitchFamily="2" charset="-78"/>
               </a:rPr>
               <a:t>5</a:t>
             </a:r>
@@ -13732,8 +13497,7 @@
                   <a:srgbClr val="1B3B6F"/>
                 </a:solidFill>
                 <a:latin typeface="Calibri" pitchFamily="34" charset="0"/>
-                <a:ea typeface="Calibri" pitchFamily="34" charset="-122"/>
-                <a:cs typeface="Calibri" pitchFamily="34" charset="-120"/>
+                <a:cs typeface="Amiri" pitchFamily="2" charset="-78"/>
               </a:rPr>
               <a:t>Who reports the teacher's view that passion leads to success?</a:t>
             </a:r>
@@ -13796,8 +13560,7 @@
                   <a:srgbClr val="1B3B6F"/>
                 </a:solidFill>
                 <a:latin typeface="Calibri" pitchFamily="34" charset="0"/>
-                <a:ea typeface="Calibri" pitchFamily="34" charset="-122"/>
-                <a:cs typeface="Calibri" pitchFamily="34" charset="-120"/>
+                <a:cs typeface="Amiri" pitchFamily="2" charset="-78"/>
               </a:rPr>
               <a:t>A</a:t>
             </a:r>
@@ -13835,8 +13598,7 @@
                   <a:srgbClr val="9AA1AB"/>
                 </a:solidFill>
                 <a:latin typeface="Calibri" pitchFamily="34" charset="0"/>
-                <a:ea typeface="Calibri" pitchFamily="34" charset="-122"/>
-                <a:cs typeface="Calibri" pitchFamily="34" charset="-120"/>
+                <a:cs typeface="Amiri" pitchFamily="2" charset="-78"/>
               </a:rPr>
               <a:t>Zayd</a:t>
             </a:r>
@@ -13899,8 +13661,7 @@
                   <a:srgbClr val="1B3B6F"/>
                 </a:solidFill>
                 <a:latin typeface="Calibri" pitchFamily="34" charset="0"/>
-                <a:ea typeface="Calibri" pitchFamily="34" charset="-122"/>
-                <a:cs typeface="Calibri" pitchFamily="34" charset="-120"/>
+                <a:cs typeface="Amiri" pitchFamily="2" charset="-78"/>
               </a:rPr>
               <a:t>B</a:t>
             </a:r>
@@ -13938,8 +13699,7 @@
                   <a:srgbClr val="9AA1AB"/>
                 </a:solidFill>
                 <a:latin typeface="Calibri" pitchFamily="34" charset="0"/>
-                <a:ea typeface="Calibri" pitchFamily="34" charset="-122"/>
-                <a:cs typeface="Calibri" pitchFamily="34" charset="-120"/>
+                <a:cs typeface="Amiri" pitchFamily="2" charset="-78"/>
               </a:rPr>
               <a:t>Both</a:t>
             </a:r>
@@ -14029,8 +13789,7 @@
                   <a:srgbClr val="FFFFFF"/>
                 </a:solidFill>
                 <a:latin typeface="Calibri" pitchFamily="34" charset="0"/>
-                <a:ea typeface="Calibri" pitchFamily="34" charset="-122"/>
-                <a:cs typeface="Calibri" pitchFamily="34" charset="-120"/>
+                <a:cs typeface="Amiri" pitchFamily="2" charset="-78"/>
               </a:rPr>
               <a:t>C</a:t>
             </a:r>
@@ -14068,8 +13827,7 @@
                   <a:srgbClr val="1F2A37"/>
                 </a:solidFill>
                 <a:latin typeface="Calibri" pitchFamily="34" charset="0"/>
-                <a:ea typeface="Calibri" pitchFamily="34" charset="-122"/>
-                <a:cs typeface="Calibri" pitchFamily="34" charset="-120"/>
+                <a:cs typeface="Amiri" pitchFamily="2" charset="-78"/>
               </a:rPr>
               <a:t>Nour</a:t>
             </a:r>
@@ -14106,9 +13864,8 @@
                 <a:solidFill>
                   <a:srgbClr val="8A6D1E"/>
                 </a:solidFill>
-                <a:latin typeface="Amiri" pitchFamily="34" charset="0"/>
-                <a:ea typeface="Amiri" pitchFamily="34" charset="-122"/>
-                <a:cs typeface="Amiri" pitchFamily="34" charset="-120"/>
+                <a:latin typeface="Amiri" pitchFamily="2" charset="-78"/>
+                <a:cs typeface="Amiri" pitchFamily="2" charset="-78"/>
               </a:rPr>
               <a:t>نُورٌ: أَكَّدَ مُعَلِّمِي أَنَّ الشَّغَفَ يَقُودُ إِلَى النَّجَاحِ.</a:t>
             </a:r>
@@ -14205,8 +13962,7 @@
                   <a:srgbClr val="FFFFFF"/>
                 </a:solidFill>
                 <a:latin typeface="Calibri" pitchFamily="34" charset="0"/>
-                <a:ea typeface="Calibri" pitchFamily="34" charset="-122"/>
-                <a:cs typeface="Calibri" pitchFamily="34" charset="-120"/>
+                <a:cs typeface="Amiri" pitchFamily="2" charset="-78"/>
               </a:rPr>
               <a:t>6</a:t>
             </a:r>
@@ -14244,8 +14000,7 @@
                   <a:srgbClr val="1B3B6F"/>
                 </a:solidFill>
                 <a:latin typeface="Calibri" pitchFamily="34" charset="0"/>
-                <a:ea typeface="Calibri" pitchFamily="34" charset="-122"/>
-                <a:cs typeface="Calibri" pitchFamily="34" charset="-120"/>
+                <a:cs typeface="Amiri" pitchFamily="2" charset="-78"/>
               </a:rPr>
               <a:t>Who makes the Type 1 conditional about defining a goal?</a:t>
             </a:r>
@@ -14335,8 +14090,7 @@
                   <a:srgbClr val="FFFFFF"/>
                 </a:solidFill>
                 <a:latin typeface="Calibri" pitchFamily="34" charset="0"/>
-                <a:ea typeface="Calibri" pitchFamily="34" charset="-122"/>
-                <a:cs typeface="Calibri" pitchFamily="34" charset="-120"/>
+                <a:cs typeface="Amiri" pitchFamily="2" charset="-78"/>
               </a:rPr>
               <a:t>A</a:t>
             </a:r>
@@ -14374,8 +14128,7 @@
                   <a:srgbClr val="1F2A37"/>
                 </a:solidFill>
                 <a:latin typeface="Calibri" pitchFamily="34" charset="0"/>
-                <a:ea typeface="Calibri" pitchFamily="34" charset="-122"/>
-                <a:cs typeface="Calibri" pitchFamily="34" charset="-120"/>
+                <a:cs typeface="Amiri" pitchFamily="2" charset="-78"/>
               </a:rPr>
               <a:t>Zayd</a:t>
             </a:r>
@@ -14438,8 +14191,7 @@
                   <a:srgbClr val="1B3B6F"/>
                 </a:solidFill>
                 <a:latin typeface="Calibri" pitchFamily="34" charset="0"/>
-                <a:ea typeface="Calibri" pitchFamily="34" charset="-122"/>
-                <a:cs typeface="Calibri" pitchFamily="34" charset="-120"/>
+                <a:cs typeface="Amiri" pitchFamily="2" charset="-78"/>
               </a:rPr>
               <a:t>B</a:t>
             </a:r>
@@ -14477,8 +14229,7 @@
                   <a:srgbClr val="9AA1AB"/>
                 </a:solidFill>
                 <a:latin typeface="Calibri" pitchFamily="34" charset="0"/>
-                <a:ea typeface="Calibri" pitchFamily="34" charset="-122"/>
-                <a:cs typeface="Calibri" pitchFamily="34" charset="-120"/>
+                <a:cs typeface="Amiri" pitchFamily="2" charset="-78"/>
               </a:rPr>
               <a:t>Nour</a:t>
             </a:r>
@@ -14541,8 +14292,7 @@
                   <a:srgbClr val="1B3B6F"/>
                 </a:solidFill>
                 <a:latin typeface="Calibri" pitchFamily="34" charset="0"/>
-                <a:ea typeface="Calibri" pitchFamily="34" charset="-122"/>
-                <a:cs typeface="Calibri" pitchFamily="34" charset="-120"/>
+                <a:cs typeface="Amiri" pitchFamily="2" charset="-78"/>
               </a:rPr>
               <a:t>C</a:t>
             </a:r>
@@ -14580,8 +14330,7 @@
                   <a:srgbClr val="9AA1AB"/>
                 </a:solidFill>
                 <a:latin typeface="Calibri" pitchFamily="34" charset="0"/>
-                <a:ea typeface="Calibri" pitchFamily="34" charset="-122"/>
-                <a:cs typeface="Calibri" pitchFamily="34" charset="-120"/>
+                <a:cs typeface="Amiri" pitchFamily="2" charset="-78"/>
               </a:rPr>
               <a:t>Both</a:t>
             </a:r>
@@ -14618,9 +14367,8 @@
                 <a:solidFill>
                   <a:srgbClr val="8A6D1E"/>
                 </a:solidFill>
-                <a:latin typeface="Amiri" pitchFamily="34" charset="0"/>
-                <a:ea typeface="Amiri" pitchFamily="34" charset="-122"/>
-                <a:cs typeface="Amiri" pitchFamily="34" charset="-120"/>
+                <a:latin typeface="Amiri" pitchFamily="2" charset="-78"/>
+                <a:cs typeface="Amiri" pitchFamily="2" charset="-78"/>
               </a:rPr>
               <a:t>زَيْدٌ: إِذَا حَدَّدْتُ هَدَفِي، سَأُخَطِّطُ لَهُ بِوُضُوحٍ.</a:t>
             </a:r>
@@ -14658,8 +14406,7 @@
                   <a:srgbClr val="8A93A0"/>
                 </a:solidFill>
                 <a:latin typeface="Calibri" pitchFamily="34" charset="0"/>
-                <a:ea typeface="Calibri" pitchFamily="34" charset="-122"/>
-                <a:cs typeface="Calibri" pitchFamily="34" charset="-120"/>
+                <a:cs typeface="Amiri" pitchFamily="2" charset="-78"/>
               </a:rPr>
               <a:t>12 / 18</a:t>
             </a:r>
@@ -14753,9 +14500,8 @@
                 <a:solidFill>
                   <a:srgbClr val="D4AF37"/>
                 </a:solidFill>
-                <a:latin typeface="Amiri" pitchFamily="34" charset="0"/>
-                <a:ea typeface="Amiri" pitchFamily="34" charset="-122"/>
-                <a:cs typeface="Amiri" pitchFamily="34" charset="-120"/>
+                <a:latin typeface="Amiri" pitchFamily="2" charset="-78"/>
+                <a:cs typeface="Amiri" pitchFamily="2" charset="-78"/>
               </a:rPr>
               <a:t>م</a:t>
             </a:r>
@@ -14793,8 +14539,7 @@
                   <a:srgbClr val="1B3B6F"/>
                 </a:solidFill>
                 <a:latin typeface="Cambria" pitchFamily="34" charset="0"/>
-                <a:ea typeface="Cambria" pitchFamily="34" charset="-122"/>
-                <a:cs typeface="Cambria" pitchFamily="34" charset="-120"/>
+                <a:cs typeface="Amiri" pitchFamily="2" charset="-78"/>
               </a:rPr>
               <a:t>Al Madina Online School</a:t>
             </a:r>
@@ -14832,8 +14577,7 @@
                   <a:srgbClr val="8A6D1E"/>
                 </a:solidFill>
                 <a:latin typeface="Calibri" pitchFamily="34" charset="0"/>
-                <a:ea typeface="Calibri" pitchFamily="34" charset="-122"/>
-                <a:cs typeface="Calibri" pitchFamily="34" charset="-120"/>
+                <a:cs typeface="Amiri" pitchFamily="2" charset="-78"/>
               </a:rPr>
               <a:t>ARABIC DEPARTMENT · MIFTAH ARABIC · IGCSE 0544</a:t>
             </a:r>
@@ -14898,8 +14642,7 @@
                   <a:srgbClr val="FFFFFF"/>
                 </a:solidFill>
                 <a:latin typeface="Calibri" pitchFamily="34" charset="0"/>
-                <a:ea typeface="Calibri" pitchFamily="34" charset="-122"/>
-                <a:cs typeface="Calibri" pitchFamily="34" charset="-120"/>
+                <a:cs typeface="Amiri" pitchFamily="2" charset="-78"/>
               </a:rPr>
               <a:t>P6-L08 · IGCSE Bridge</a:t>
             </a:r>
@@ -14964,8 +14707,7 @@
                   <a:srgbClr val="FFFFFF"/>
                 </a:solidFill>
                 <a:latin typeface="Calibri" pitchFamily="34" charset="0"/>
-                <a:ea typeface="Calibri" pitchFamily="34" charset="-122"/>
-                <a:cs typeface="Calibri" pitchFamily="34" charset="-120"/>
+                <a:cs typeface="Amiri" pitchFamily="2" charset="-78"/>
               </a:rPr>
               <a:t>FEEDBACK</a:t>
             </a:r>
@@ -15003,8 +14745,7 @@
                   <a:srgbClr val="8A6D1E"/>
                 </a:solidFill>
                 <a:latin typeface="Calibri" pitchFamily="34" charset="0"/>
-                <a:ea typeface="Calibri" pitchFamily="34" charset="-122"/>
-                <a:cs typeface="Calibri" pitchFamily="34" charset="-120"/>
+                <a:cs typeface="Amiri" pitchFamily="2" charset="-78"/>
               </a:rPr>
               <a:t>MOCK · PAPER 1 · ANSWERS · SHOW AFTER THE WHOLE PAPER</a:t>
             </a:r>
@@ -15042,8 +14783,7 @@
                   <a:srgbClr val="1B3B6F"/>
                 </a:solidFill>
                 <a:latin typeface="Cambria" pitchFamily="34" charset="0"/>
-                <a:ea typeface="Cambria" pitchFamily="34" charset="-122"/>
-                <a:cs typeface="Cambria" pitchFamily="34" charset="-120"/>
+                <a:cs typeface="Amiri" pitchFamily="2" charset="-78"/>
               </a:rPr>
               <a:t>An official on a social programme: answers</a:t>
             </a:r>
@@ -15080,9 +14820,8 @@
                 <a:solidFill>
                   <a:srgbClr val="8A6D1E"/>
                 </a:solidFill>
-                <a:latin typeface="Amiri" pitchFamily="34" charset="0"/>
-                <a:ea typeface="Amiri" pitchFamily="34" charset="-122"/>
-                <a:cs typeface="Amiri" pitchFamily="34" charset="-120"/>
+                <a:latin typeface="Amiri" pitchFamily="2" charset="-78"/>
+                <a:cs typeface="Amiri" pitchFamily="2" charset="-78"/>
               </a:rPr>
               <a:t>الإِجَابَاتُ</a:t>
             </a:r>
@@ -15120,8 +14859,7 @@
                   <a:srgbClr val="8A93A0"/>
                 </a:solidFill>
                 <a:latin typeface="Calibri" pitchFamily="34" charset="0"/>
-                <a:ea typeface="Calibri" pitchFamily="34" charset="-122"/>
-                <a:cs typeface="Calibri" pitchFamily="34" charset="-120"/>
+                <a:cs typeface="Amiri" pitchFamily="2" charset="-78"/>
               </a:rPr>
               <a:t>Miftah Arabic · Progression P6 · IGCSE Bridge · P6-L08</a:t>
             </a:r>
@@ -15218,8 +14956,7 @@
                   <a:srgbClr val="FFFFFF"/>
                 </a:solidFill>
                 <a:latin typeface="Calibri" pitchFamily="34" charset="0"/>
-                <a:ea typeface="Calibri" pitchFamily="34" charset="-122"/>
-                <a:cs typeface="Calibri" pitchFamily="34" charset="-120"/>
+                <a:cs typeface="Amiri" pitchFamily="2" charset="-78"/>
               </a:rPr>
               <a:t>1</a:t>
             </a:r>
@@ -15257,8 +14994,7 @@
                   <a:srgbClr val="1B3B6F"/>
                 </a:solidFill>
                 <a:latin typeface="Calibri" pitchFamily="34" charset="0"/>
-                <a:ea typeface="Calibri" pitchFamily="34" charset="-122"/>
-                <a:cs typeface="Calibri" pitchFamily="34" charset="-120"/>
+                <a:cs typeface="Amiri" pitchFamily="2" charset="-78"/>
               </a:rPr>
               <a:t>Which statement is supported (past perfect)?</a:t>
             </a:r>
@@ -15348,8 +15084,7 @@
                   <a:srgbClr val="FFFFFF"/>
                 </a:solidFill>
                 <a:latin typeface="Calibri" pitchFamily="34" charset="0"/>
-                <a:ea typeface="Calibri" pitchFamily="34" charset="-122"/>
-                <a:cs typeface="Calibri" pitchFamily="34" charset="-120"/>
+                <a:cs typeface="Amiri" pitchFamily="2" charset="-78"/>
               </a:rPr>
               <a:t>A</a:t>
             </a:r>
@@ -15387,8 +15122,7 @@
                   <a:srgbClr val="1F2A37"/>
                 </a:solidFill>
                 <a:latin typeface="Calibri" pitchFamily="34" charset="0"/>
-                <a:ea typeface="Calibri" pitchFamily="34" charset="-122"/>
-                <a:cs typeface="Calibri" pitchFamily="34" charset="-120"/>
+                <a:cs typeface="Amiri" pitchFamily="2" charset="-78"/>
               </a:rPr>
               <a:t>The region had suffered from youth unemployment</a:t>
             </a:r>
@@ -15451,8 +15185,7 @@
                   <a:srgbClr val="1B3B6F"/>
                 </a:solidFill>
                 <a:latin typeface="Calibri" pitchFamily="34" charset="0"/>
-                <a:ea typeface="Calibri" pitchFamily="34" charset="-122"/>
-                <a:cs typeface="Calibri" pitchFamily="34" charset="-120"/>
+                <a:cs typeface="Amiri" pitchFamily="2" charset="-78"/>
               </a:rPr>
               <a:t>B</a:t>
             </a:r>
@@ -15490,8 +15223,7 @@
                   <a:srgbClr val="9AA1AB"/>
                 </a:solidFill>
                 <a:latin typeface="Calibri" pitchFamily="34" charset="0"/>
-                <a:ea typeface="Calibri" pitchFamily="34" charset="-122"/>
-                <a:cs typeface="Calibri" pitchFamily="34" charset="-120"/>
+                <a:cs typeface="Amiri" pitchFamily="2" charset="-78"/>
               </a:rPr>
               <a:t>The region always had jobs</a:t>
             </a:r>
@@ -15554,8 +15286,7 @@
                   <a:srgbClr val="1B3B6F"/>
                 </a:solidFill>
                 <a:latin typeface="Calibri" pitchFamily="34" charset="0"/>
-                <a:ea typeface="Calibri" pitchFamily="34" charset="-122"/>
-                <a:cs typeface="Calibri" pitchFamily="34" charset="-120"/>
+                <a:cs typeface="Amiri" pitchFamily="2" charset="-78"/>
               </a:rPr>
               <a:t>C</a:t>
             </a:r>
@@ -15593,8 +15324,7 @@
                   <a:srgbClr val="9AA1AB"/>
                 </a:solidFill>
                 <a:latin typeface="Calibri" pitchFamily="34" charset="0"/>
-                <a:ea typeface="Calibri" pitchFamily="34" charset="-122"/>
-                <a:cs typeface="Calibri" pitchFamily="34" charset="-120"/>
+                <a:cs typeface="Amiri" pitchFamily="2" charset="-78"/>
               </a:rPr>
               <a:t>Unemployment began today</a:t>
             </a:r>
@@ -15631,9 +15361,8 @@
                 <a:solidFill>
                   <a:srgbClr val="8A6D1E"/>
                 </a:solidFill>
-                <a:latin typeface="Amiri" pitchFamily="34" charset="0"/>
-                <a:ea typeface="Amiri" pitchFamily="34" charset="-122"/>
-                <a:cs typeface="Amiri" pitchFamily="34" charset="-120"/>
+                <a:latin typeface="Amiri" pitchFamily="2" charset="-78"/>
+                <a:cs typeface="Amiri" pitchFamily="2" charset="-78"/>
               </a:rPr>
               <a:t>كَانَتِ المِنْطَقَةُ قَدْ عَانَتْ مِنَ البَطَالَةِ بَيْنَ الشَّبَابِ.</a:t>
             </a:r>
@@ -15730,8 +15459,7 @@
                   <a:srgbClr val="FFFFFF"/>
                 </a:solidFill>
                 <a:latin typeface="Calibri" pitchFamily="34" charset="0"/>
-                <a:ea typeface="Calibri" pitchFamily="34" charset="-122"/>
-                <a:cs typeface="Calibri" pitchFamily="34" charset="-120"/>
+                <a:cs typeface="Amiri" pitchFamily="2" charset="-78"/>
               </a:rPr>
               <a:t>2</a:t>
             </a:r>
@@ -15769,8 +15497,7 @@
                   <a:srgbClr val="1B3B6F"/>
                 </a:solidFill>
                 <a:latin typeface="Calibri" pitchFamily="34" charset="0"/>
-                <a:ea typeface="Calibri" pitchFamily="34" charset="-122"/>
-                <a:cs typeface="Calibri" pitchFamily="34" charset="-120"/>
+                <a:cs typeface="Amiri" pitchFamily="2" charset="-78"/>
               </a:rPr>
               <a:t>Which statement is supported (necessity trigger)?</a:t>
             </a:r>
@@ -15833,8 +15560,7 @@
                   <a:srgbClr val="1B3B6F"/>
                 </a:solidFill>
                 <a:latin typeface="Calibri" pitchFamily="34" charset="0"/>
-                <a:ea typeface="Calibri" pitchFamily="34" charset="-122"/>
-                <a:cs typeface="Calibri" pitchFamily="34" charset="-120"/>
+                <a:cs typeface="Amiri" pitchFamily="2" charset="-78"/>
               </a:rPr>
               <a:t>A</a:t>
             </a:r>
@@ -15872,8 +15598,7 @@
                   <a:srgbClr val="9AA1AB"/>
                 </a:solidFill>
                 <a:latin typeface="Calibri" pitchFamily="34" charset="0"/>
-                <a:ea typeface="Calibri" pitchFamily="34" charset="-122"/>
-                <a:cs typeface="Calibri" pitchFamily="34" charset="-120"/>
+                <a:cs typeface="Amiri" pitchFamily="2" charset="-78"/>
               </a:rPr>
               <a:t>Training is unnecessary</a:t>
             </a:r>
@@ -15936,8 +15661,7 @@
                   <a:srgbClr val="1B3B6F"/>
                 </a:solidFill>
                 <a:latin typeface="Calibri" pitchFamily="34" charset="0"/>
-                <a:ea typeface="Calibri" pitchFamily="34" charset="-122"/>
-                <a:cs typeface="Calibri" pitchFamily="34" charset="-120"/>
+                <a:cs typeface="Amiri" pitchFamily="2" charset="-78"/>
               </a:rPr>
               <a:t>B</a:t>
             </a:r>
@@ -15975,8 +15699,7 @@
                   <a:srgbClr val="9AA1AB"/>
                 </a:solidFill>
                 <a:latin typeface="Calibri" pitchFamily="34" charset="0"/>
-                <a:ea typeface="Calibri" pitchFamily="34" charset="-122"/>
-                <a:cs typeface="Calibri" pitchFamily="34" charset="-120"/>
+                <a:cs typeface="Amiri" pitchFamily="2" charset="-78"/>
               </a:rPr>
               <a:t>Opportunities should be cut</a:t>
             </a:r>
@@ -16066,8 +15789,7 @@
                   <a:srgbClr val="FFFFFF"/>
                 </a:solidFill>
                 <a:latin typeface="Calibri" pitchFamily="34" charset="0"/>
-                <a:ea typeface="Calibri" pitchFamily="34" charset="-122"/>
-                <a:cs typeface="Calibri" pitchFamily="34" charset="-120"/>
+                <a:cs typeface="Amiri" pitchFamily="2" charset="-78"/>
               </a:rPr>
               <a:t>C</a:t>
             </a:r>
@@ -16105,8 +15827,7 @@
                   <a:srgbClr val="1F2A37"/>
                 </a:solidFill>
                 <a:latin typeface="Calibri" pitchFamily="34" charset="0"/>
-                <a:ea typeface="Calibri" pitchFamily="34" charset="-122"/>
-                <a:cs typeface="Calibri" pitchFamily="34" charset="-120"/>
+                <a:cs typeface="Amiri" pitchFamily="2" charset="-78"/>
               </a:rPr>
               <a:t>The matter requires providing real training opportunities</a:t>
             </a:r>
@@ -16143,9 +15864,8 @@
                 <a:solidFill>
                   <a:srgbClr val="8A6D1E"/>
                 </a:solidFill>
-                <a:latin typeface="Amiri" pitchFamily="34" charset="0"/>
-                <a:ea typeface="Amiri" pitchFamily="34" charset="-122"/>
-                <a:cs typeface="Amiri" pitchFamily="34" charset="-120"/>
+                <a:latin typeface="Amiri" pitchFamily="2" charset="-78"/>
+                <a:cs typeface="Amiri" pitchFamily="2" charset="-78"/>
               </a:rPr>
               <a:t>يَتَطَلَّبُ الأَمْرُ أَنْ نُوَفِّرَ فُرَصَ تَدْرِيبٍ حَقِيقِيَّةً.</a:t>
             </a:r>
@@ -16242,8 +15962,7 @@
                   <a:srgbClr val="FFFFFF"/>
                 </a:solidFill>
                 <a:latin typeface="Calibri" pitchFamily="34" charset="0"/>
-                <a:ea typeface="Calibri" pitchFamily="34" charset="-122"/>
-                <a:cs typeface="Calibri" pitchFamily="34" charset="-120"/>
+                <a:cs typeface="Amiri" pitchFamily="2" charset="-78"/>
               </a:rPr>
               <a:t>3</a:t>
             </a:r>
@@ -16281,8 +16000,7 @@
                   <a:srgbClr val="1B3B6F"/>
                 </a:solidFill>
                 <a:latin typeface="Calibri" pitchFamily="34" charset="0"/>
-                <a:ea typeface="Calibri" pitchFamily="34" charset="-122"/>
-                <a:cs typeface="Calibri" pitchFamily="34" charset="-120"/>
+                <a:cs typeface="Amiri" pitchFamily="2" charset="-78"/>
               </a:rPr>
               <a:t>Which statement is supported (purpose, </a:t>
             </a:r>
@@ -16294,9 +16012,8 @@
                 <a:solidFill>
                   <a:srgbClr val="1B3B6F"/>
                 </a:solidFill>
-                <a:latin typeface="Amiri" pitchFamily="34" charset="0"/>
-                <a:ea typeface="Amiri" pitchFamily="34" charset="-122"/>
-                <a:cs typeface="Amiri" pitchFamily="34" charset="-120"/>
+                <a:latin typeface="Amiri" pitchFamily="2" charset="-78"/>
+                <a:cs typeface="Amiri" pitchFamily="2" charset="-78"/>
               </a:rPr>
               <a:t>لِكَيْ</a:t>
             </a:r>
@@ -16309,8 +16026,7 @@
                   <a:srgbClr val="1B3B6F"/>
                 </a:solidFill>
                 <a:latin typeface="Calibri" pitchFamily="34" charset="0"/>
-                <a:ea typeface="Calibri" pitchFamily="34" charset="-122"/>
-                <a:cs typeface="Calibri" pitchFamily="34" charset="-120"/>
+                <a:cs typeface="Amiri" pitchFamily="2" charset="-78"/>
               </a:rPr>
               <a:t>)?</a:t>
             </a:r>
@@ -16373,8 +16089,7 @@
                   <a:srgbClr val="1B3B6F"/>
                 </a:solidFill>
                 <a:latin typeface="Calibri" pitchFamily="34" charset="0"/>
-                <a:ea typeface="Calibri" pitchFamily="34" charset="-122"/>
-                <a:cs typeface="Calibri" pitchFamily="34" charset="-120"/>
+                <a:cs typeface="Amiri" pitchFamily="2" charset="-78"/>
               </a:rPr>
               <a:t>A</a:t>
             </a:r>
@@ -16412,8 +16127,7 @@
                   <a:srgbClr val="9AA1AB"/>
                 </a:solidFill>
                 <a:latin typeface="Calibri" pitchFamily="34" charset="0"/>
-                <a:ea typeface="Calibri" pitchFamily="34" charset="-122"/>
-                <a:cs typeface="Calibri" pitchFamily="34" charset="-120"/>
+                <a:cs typeface="Amiri" pitchFamily="2" charset="-78"/>
               </a:rPr>
               <a:t>The programme excludes youth</a:t>
             </a:r>
@@ -16476,8 +16190,7 @@
                   <a:srgbClr val="1B3B6F"/>
                 </a:solidFill>
                 <a:latin typeface="Calibri" pitchFamily="34" charset="0"/>
-                <a:ea typeface="Calibri" pitchFamily="34" charset="-122"/>
-                <a:cs typeface="Calibri" pitchFamily="34" charset="-120"/>
+                <a:cs typeface="Amiri" pitchFamily="2" charset="-78"/>
               </a:rPr>
               <a:t>B</a:t>
             </a:r>
@@ -16515,8 +16228,7 @@
                   <a:srgbClr val="9AA1AB"/>
                 </a:solidFill>
                 <a:latin typeface="Calibri" pitchFamily="34" charset="0"/>
-                <a:ea typeface="Calibri" pitchFamily="34" charset="-122"/>
-                <a:cs typeface="Calibri" pitchFamily="34" charset="-120"/>
+                <a:cs typeface="Amiri" pitchFamily="2" charset="-78"/>
               </a:rPr>
               <a:t>The programme has no aim</a:t>
             </a:r>
@@ -16606,8 +16318,7 @@
                   <a:srgbClr val="FFFFFF"/>
                 </a:solidFill>
                 <a:latin typeface="Calibri" pitchFamily="34" charset="0"/>
-                <a:ea typeface="Calibri" pitchFamily="34" charset="-122"/>
-                <a:cs typeface="Calibri" pitchFamily="34" charset="-120"/>
+                <a:cs typeface="Amiri" pitchFamily="2" charset="-78"/>
               </a:rPr>
               <a:t>C</a:t>
             </a:r>
@@ -16645,8 +16356,7 @@
                   <a:srgbClr val="1F2A37"/>
                 </a:solidFill>
                 <a:latin typeface="Calibri" pitchFamily="34" charset="0"/>
-                <a:ea typeface="Calibri" pitchFamily="34" charset="-122"/>
-                <a:cs typeface="Calibri" pitchFamily="34" charset="-120"/>
+                <a:cs typeface="Amiri" pitchFamily="2" charset="-78"/>
               </a:rPr>
               <a:t>A programme was launched to empower youth for the job market</a:t>
             </a:r>
@@ -16683,9 +16393,8 @@
                 <a:solidFill>
                   <a:srgbClr val="8A6D1E"/>
                 </a:solidFill>
-                <a:latin typeface="Amiri" pitchFamily="34" charset="0"/>
-                <a:ea typeface="Amiri" pitchFamily="34" charset="-122"/>
-                <a:cs typeface="Amiri" pitchFamily="34" charset="-120"/>
+                <a:latin typeface="Amiri" pitchFamily="2" charset="-78"/>
+                <a:cs typeface="Amiri" pitchFamily="2" charset="-78"/>
               </a:rPr>
               <a:t>أُطْلِقَ بَرْنَامَجٌ لِكَيْ يُمَكِّنَ الشَّبَابَ مِنْ سُوقِ العَمَلِ.</a:t>
             </a:r>
@@ -16782,8 +16491,7 @@
                   <a:srgbClr val="FFFFFF"/>
                 </a:solidFill>
                 <a:latin typeface="Calibri" pitchFamily="34" charset="0"/>
-                <a:ea typeface="Calibri" pitchFamily="34" charset="-122"/>
-                <a:cs typeface="Calibri" pitchFamily="34" charset="-120"/>
+                <a:cs typeface="Amiri" pitchFamily="2" charset="-78"/>
               </a:rPr>
               <a:t>4</a:t>
             </a:r>
@@ -16821,8 +16529,7 @@
                   <a:srgbClr val="1B3B6F"/>
                 </a:solidFill>
                 <a:latin typeface="Calibri" pitchFamily="34" charset="0"/>
-                <a:ea typeface="Calibri" pitchFamily="34" charset="-122"/>
-                <a:cs typeface="Calibri" pitchFamily="34" charset="-120"/>
+                <a:cs typeface="Amiri" pitchFamily="2" charset="-78"/>
               </a:rPr>
               <a:t>Which statement is supported (concession-refutation)?</a:t>
             </a:r>
@@ -16912,8 +16619,7 @@
                   <a:srgbClr val="FFFFFF"/>
                 </a:solidFill>
                 <a:latin typeface="Calibri" pitchFamily="34" charset="0"/>
-                <a:ea typeface="Calibri" pitchFamily="34" charset="-122"/>
-                <a:cs typeface="Calibri" pitchFamily="34" charset="-120"/>
+                <a:cs typeface="Amiri" pitchFamily="2" charset="-78"/>
               </a:rPr>
               <a:t>A</a:t>
             </a:r>
@@ -16951,8 +16657,7 @@
                   <a:srgbClr val="1F2A37"/>
                 </a:solidFill>
                 <a:latin typeface="Calibri" pitchFamily="34" charset="0"/>
-                <a:ea typeface="Calibri" pitchFamily="34" charset="-122"/>
-                <a:cs typeface="Calibri" pitchFamily="34" charset="-120"/>
+                <a:cs typeface="Amiri" pitchFamily="2" charset="-78"/>
               </a:rPr>
               <a:t>Funding is limited, yet the will exists</a:t>
             </a:r>
@@ -17015,8 +16720,7 @@
                   <a:srgbClr val="1B3B6F"/>
                 </a:solidFill>
                 <a:latin typeface="Calibri" pitchFamily="34" charset="0"/>
-                <a:ea typeface="Calibri" pitchFamily="34" charset="-122"/>
-                <a:cs typeface="Calibri" pitchFamily="34" charset="-120"/>
+                <a:cs typeface="Amiri" pitchFamily="2" charset="-78"/>
               </a:rPr>
               <a:t>B</a:t>
             </a:r>
@@ -17054,8 +16758,7 @@
                   <a:srgbClr val="9AA1AB"/>
                 </a:solidFill>
                 <a:latin typeface="Calibri" pitchFamily="34" charset="0"/>
-                <a:ea typeface="Calibri" pitchFamily="34" charset="-122"/>
-                <a:cs typeface="Calibri" pitchFamily="34" charset="-120"/>
+                <a:cs typeface="Amiri" pitchFamily="2" charset="-78"/>
               </a:rPr>
               <a:t>There is no will</a:t>
             </a:r>
@@ -17118,8 +16821,7 @@
                   <a:srgbClr val="1B3B6F"/>
                 </a:solidFill>
                 <a:latin typeface="Calibri" pitchFamily="34" charset="0"/>
-                <a:ea typeface="Calibri" pitchFamily="34" charset="-122"/>
-                <a:cs typeface="Calibri" pitchFamily="34" charset="-120"/>
+                <a:cs typeface="Amiri" pitchFamily="2" charset="-78"/>
               </a:rPr>
               <a:t>C</a:t>
             </a:r>
@@ -17157,8 +16859,7 @@
                   <a:srgbClr val="9AA1AB"/>
                 </a:solidFill>
                 <a:latin typeface="Calibri" pitchFamily="34" charset="0"/>
-                <a:ea typeface="Calibri" pitchFamily="34" charset="-122"/>
-                <a:cs typeface="Calibri" pitchFamily="34" charset="-120"/>
+                <a:cs typeface="Amiri" pitchFamily="2" charset="-78"/>
               </a:rPr>
               <a:t>Funding is unlimited</a:t>
             </a:r>
@@ -17195,9 +16896,8 @@
                 <a:solidFill>
                   <a:srgbClr val="8A6D1E"/>
                 </a:solidFill>
-                <a:latin typeface="Amiri" pitchFamily="34" charset="0"/>
-                <a:ea typeface="Amiri" pitchFamily="34" charset="-122"/>
-                <a:cs typeface="Amiri" pitchFamily="34" charset="-120"/>
+                <a:latin typeface="Amiri" pitchFamily="2" charset="-78"/>
+                <a:cs typeface="Amiri" pitchFamily="2" charset="-78"/>
               </a:rPr>
               <a:t>صَحِيحٌ أَنَّ التَّمْوِيلَ مَحْدُودٌ، غَيْرَ أَنَّ الإِرَادَةَ مَوْجُودَةٌ.</a:t>
             </a:r>
@@ -17294,8 +16994,7 @@
                   <a:srgbClr val="FFFFFF"/>
                 </a:solidFill>
                 <a:latin typeface="Calibri" pitchFamily="34" charset="0"/>
-                <a:ea typeface="Calibri" pitchFamily="34" charset="-122"/>
-                <a:cs typeface="Calibri" pitchFamily="34" charset="-120"/>
+                <a:cs typeface="Amiri" pitchFamily="2" charset="-78"/>
               </a:rPr>
               <a:t>5</a:t>
             </a:r>
@@ -17333,8 +17032,7 @@
                   <a:srgbClr val="1B3B6F"/>
                 </a:solidFill>
                 <a:latin typeface="Calibri" pitchFamily="34" charset="0"/>
-                <a:ea typeface="Calibri" pitchFamily="34" charset="-122"/>
-                <a:cs typeface="Calibri" pitchFamily="34" charset="-120"/>
+                <a:cs typeface="Amiri" pitchFamily="2" charset="-78"/>
               </a:rPr>
               <a:t>Which statement is supported (Type 1 conditional)?</a:t>
             </a:r>
@@ -17397,8 +17095,7 @@
                   <a:srgbClr val="1B3B6F"/>
                 </a:solidFill>
                 <a:latin typeface="Calibri" pitchFamily="34" charset="0"/>
-                <a:ea typeface="Calibri" pitchFamily="34" charset="-122"/>
-                <a:cs typeface="Calibri" pitchFamily="34" charset="-120"/>
+                <a:cs typeface="Amiri" pitchFamily="2" charset="-78"/>
               </a:rPr>
               <a:t>A</a:t>
             </a:r>
@@ -17436,8 +17133,7 @@
                   <a:srgbClr val="9AA1AB"/>
                 </a:solidFill>
                 <a:latin typeface="Calibri" pitchFamily="34" charset="0"/>
-                <a:ea typeface="Calibri" pitchFamily="34" charset="-122"/>
-                <a:cs typeface="Calibri" pitchFamily="34" charset="-120"/>
+                <a:cs typeface="Amiri" pitchFamily="2" charset="-78"/>
               </a:rPr>
               <a:t>Cooperation reduces opportunities</a:t>
             </a:r>
@@ -17527,8 +17223,7 @@
                   <a:srgbClr val="FFFFFF"/>
                 </a:solidFill>
                 <a:latin typeface="Calibri" pitchFamily="34" charset="0"/>
-                <a:ea typeface="Calibri" pitchFamily="34" charset="-122"/>
-                <a:cs typeface="Calibri" pitchFamily="34" charset="-120"/>
+                <a:cs typeface="Amiri" pitchFamily="2" charset="-78"/>
               </a:rPr>
               <a:t>B</a:t>
             </a:r>
@@ -17566,8 +17261,7 @@
                   <a:srgbClr val="1F2A37"/>
                 </a:solidFill>
                 <a:latin typeface="Calibri" pitchFamily="34" charset="0"/>
-                <a:ea typeface="Calibri" pitchFamily="34" charset="-122"/>
-                <a:cs typeface="Calibri" pitchFamily="34" charset="-120"/>
+                <a:cs typeface="Amiri" pitchFamily="2" charset="-78"/>
               </a:rPr>
               <a:t>If the public and private sectors cooperate, opportunities will grow</a:t>
             </a:r>
@@ -17630,8 +17324,7 @@
                   <a:srgbClr val="1B3B6F"/>
                 </a:solidFill>
                 <a:latin typeface="Calibri" pitchFamily="34" charset="0"/>
-                <a:ea typeface="Calibri" pitchFamily="34" charset="-122"/>
-                <a:cs typeface="Calibri" pitchFamily="34" charset="-120"/>
+                <a:cs typeface="Amiri" pitchFamily="2" charset="-78"/>
               </a:rPr>
               <a:t>C</a:t>
             </a:r>
@@ -17669,8 +17362,7 @@
                   <a:srgbClr val="9AA1AB"/>
                 </a:solidFill>
                 <a:latin typeface="Calibri" pitchFamily="34" charset="0"/>
-                <a:ea typeface="Calibri" pitchFamily="34" charset="-122"/>
-                <a:cs typeface="Calibri" pitchFamily="34" charset="-120"/>
+                <a:cs typeface="Amiri" pitchFamily="2" charset="-78"/>
               </a:rPr>
               <a:t>Opportunities cannot grow</a:t>
             </a:r>
@@ -17707,9 +17399,8 @@
                 <a:solidFill>
                   <a:srgbClr val="8A6D1E"/>
                 </a:solidFill>
-                <a:latin typeface="Amiri" pitchFamily="34" charset="0"/>
-                <a:ea typeface="Amiri" pitchFamily="34" charset="-122"/>
-                <a:cs typeface="Amiri" pitchFamily="34" charset="-120"/>
+                <a:latin typeface="Amiri" pitchFamily="2" charset="-78"/>
+                <a:cs typeface="Amiri" pitchFamily="2" charset="-78"/>
               </a:rPr>
               <a:t>إِذَا تَعَاوَنَ القِطَاعَانِ العَامُّ وَالخَاصُّ، سَتَزْدَادُ الفُرَصُ.</a:t>
             </a:r>
@@ -17806,8 +17497,7 @@
                   <a:srgbClr val="FFFFFF"/>
                 </a:solidFill>
                 <a:latin typeface="Calibri" pitchFamily="34" charset="0"/>
-                <a:ea typeface="Calibri" pitchFamily="34" charset="-122"/>
-                <a:cs typeface="Calibri" pitchFamily="34" charset="-120"/>
+                <a:cs typeface="Amiri" pitchFamily="2" charset="-78"/>
               </a:rPr>
               <a:t>6</a:t>
             </a:r>
@@ -17845,8 +17535,7 @@
                   <a:srgbClr val="1B3B6F"/>
                 </a:solidFill>
                 <a:latin typeface="Calibri" pitchFamily="34" charset="0"/>
-                <a:ea typeface="Calibri" pitchFamily="34" charset="-122"/>
-                <a:cs typeface="Calibri" pitchFamily="34" charset="-120"/>
+                <a:cs typeface="Amiri" pitchFamily="2" charset="-78"/>
               </a:rPr>
               <a:t>Which statement is supported (hope, </a:t>
             </a:r>
@@ -17858,9 +17547,8 @@
                 <a:solidFill>
                   <a:srgbClr val="1B3B6F"/>
                 </a:solidFill>
-                <a:latin typeface="Amiri" pitchFamily="34" charset="0"/>
-                <a:ea typeface="Amiri" pitchFamily="34" charset="-122"/>
-                <a:cs typeface="Amiri" pitchFamily="34" charset="-120"/>
+                <a:latin typeface="Amiri" pitchFamily="2" charset="-78"/>
+                <a:cs typeface="Amiri" pitchFamily="2" charset="-78"/>
               </a:rPr>
               <a:t>يَرْجُو</a:t>
             </a:r>
@@ -17873,8 +17561,7 @@
                   <a:srgbClr val="1B3B6F"/>
                 </a:solidFill>
                 <a:latin typeface="Calibri" pitchFamily="34" charset="0"/>
-                <a:ea typeface="Calibri" pitchFamily="34" charset="-122"/>
-                <a:cs typeface="Calibri" pitchFamily="34" charset="-120"/>
+                <a:cs typeface="Amiri" pitchFamily="2" charset="-78"/>
               </a:rPr>
               <a:t>)?</a:t>
             </a:r>
@@ -17964,8 +17651,7 @@
                   <a:srgbClr val="FFFFFF"/>
                 </a:solidFill>
                 <a:latin typeface="Calibri" pitchFamily="34" charset="0"/>
-                <a:ea typeface="Calibri" pitchFamily="34" charset="-122"/>
-                <a:cs typeface="Calibri" pitchFamily="34" charset="-120"/>
+                <a:cs typeface="Amiri" pitchFamily="2" charset="-78"/>
               </a:rPr>
               <a:t>A</a:t>
             </a:r>
@@ -18003,8 +17689,7 @@
                   <a:srgbClr val="1F2A37"/>
                 </a:solidFill>
                 <a:latin typeface="Calibri" pitchFamily="34" charset="0"/>
-                <a:ea typeface="Calibri" pitchFamily="34" charset="-122"/>
-                <a:cs typeface="Calibri" pitchFamily="34" charset="-120"/>
+                <a:cs typeface="Amiri" pitchFamily="2" charset="-78"/>
               </a:rPr>
               <a:t>The official hopes the programme becomes a national model</a:t>
             </a:r>
@@ -18067,8 +17752,7 @@
                   <a:srgbClr val="1B3B6F"/>
                 </a:solidFill>
                 <a:latin typeface="Calibri" pitchFamily="34" charset="0"/>
-                <a:ea typeface="Calibri" pitchFamily="34" charset="-122"/>
-                <a:cs typeface="Calibri" pitchFamily="34" charset="-120"/>
+                <a:cs typeface="Amiri" pitchFamily="2" charset="-78"/>
               </a:rPr>
               <a:t>B</a:t>
             </a:r>
@@ -18106,8 +17790,7 @@
                   <a:srgbClr val="9AA1AB"/>
                 </a:solidFill>
                 <a:latin typeface="Calibri" pitchFamily="34" charset="0"/>
-                <a:ea typeface="Calibri" pitchFamily="34" charset="-122"/>
-                <a:cs typeface="Calibri" pitchFamily="34" charset="-120"/>
+                <a:cs typeface="Amiri" pitchFamily="2" charset="-78"/>
               </a:rPr>
               <a:t>The official expects it to fail</a:t>
             </a:r>
@@ -18170,8 +17853,7 @@
                   <a:srgbClr val="1B3B6F"/>
                 </a:solidFill>
                 <a:latin typeface="Calibri" pitchFamily="34" charset="0"/>
-                <a:ea typeface="Calibri" pitchFamily="34" charset="-122"/>
-                <a:cs typeface="Calibri" pitchFamily="34" charset="-120"/>
+                <a:cs typeface="Amiri" pitchFamily="2" charset="-78"/>
               </a:rPr>
               <a:t>C</a:t>
             </a:r>
@@ -18209,8 +17891,7 @@
                   <a:srgbClr val="9AA1AB"/>
                 </a:solidFill>
                 <a:latin typeface="Calibri" pitchFamily="34" charset="0"/>
-                <a:ea typeface="Calibri" pitchFamily="34" charset="-122"/>
-                <a:cs typeface="Calibri" pitchFamily="34" charset="-120"/>
+                <a:cs typeface="Amiri" pitchFamily="2" charset="-78"/>
               </a:rPr>
               <a:t>The official has no hopes</a:t>
             </a:r>
@@ -18247,9 +17928,8 @@
                 <a:solidFill>
                   <a:srgbClr val="8A6D1E"/>
                 </a:solidFill>
-                <a:latin typeface="Amiri" pitchFamily="34" charset="0"/>
-                <a:ea typeface="Amiri" pitchFamily="34" charset="-122"/>
-                <a:cs typeface="Amiri" pitchFamily="34" charset="-120"/>
+                <a:latin typeface="Amiri" pitchFamily="2" charset="-78"/>
+                <a:cs typeface="Amiri" pitchFamily="2" charset="-78"/>
               </a:rPr>
               <a:t>يَرْجُو المَسْؤُولُ أَنْ يُصْبِحَ البَرْنَامَجُ نَمُوذَجًا وَطَنِيًّا.</a:t>
             </a:r>
@@ -18287,8 +17967,7 @@
                   <a:srgbClr val="8A93A0"/>
                 </a:solidFill>
                 <a:latin typeface="Calibri" pitchFamily="34" charset="0"/>
-                <a:ea typeface="Calibri" pitchFamily="34" charset="-122"/>
-                <a:cs typeface="Calibri" pitchFamily="34" charset="-120"/>
+                <a:cs typeface="Amiri" pitchFamily="2" charset="-78"/>
               </a:rPr>
               <a:t>13 / 18</a:t>
             </a:r>
@@ -18382,9 +18061,8 @@
                 <a:solidFill>
                   <a:srgbClr val="D4AF37"/>
                 </a:solidFill>
-                <a:latin typeface="Amiri" pitchFamily="34" charset="0"/>
-                <a:ea typeface="Amiri" pitchFamily="34" charset="-122"/>
-                <a:cs typeface="Amiri" pitchFamily="34" charset="-120"/>
+                <a:latin typeface="Amiri" pitchFamily="2" charset="-78"/>
+                <a:cs typeface="Amiri" pitchFamily="2" charset="-78"/>
               </a:rPr>
               <a:t>م</a:t>
             </a:r>
@@ -18422,8 +18100,7 @@
                   <a:srgbClr val="1B3B6F"/>
                 </a:solidFill>
                 <a:latin typeface="Cambria" pitchFamily="34" charset="0"/>
-                <a:ea typeface="Cambria" pitchFamily="34" charset="-122"/>
-                <a:cs typeface="Cambria" pitchFamily="34" charset="-120"/>
+                <a:cs typeface="Amiri" pitchFamily="2" charset="-78"/>
               </a:rPr>
               <a:t>Al Madina Online School</a:t>
             </a:r>
@@ -18461,8 +18138,7 @@
                   <a:srgbClr val="8A6D1E"/>
                 </a:solidFill>
                 <a:latin typeface="Calibri" pitchFamily="34" charset="0"/>
-                <a:ea typeface="Calibri" pitchFamily="34" charset="-122"/>
-                <a:cs typeface="Calibri" pitchFamily="34" charset="-120"/>
+                <a:cs typeface="Amiri" pitchFamily="2" charset="-78"/>
               </a:rPr>
               <a:t>ARABIC DEPARTMENT · MIFTAH ARABIC · IGCSE 0544</a:t>
             </a:r>
@@ -18527,8 +18203,7 @@
                   <a:srgbClr val="FFFFFF"/>
                 </a:solidFill>
                 <a:latin typeface="Calibri" pitchFamily="34" charset="0"/>
-                <a:ea typeface="Calibri" pitchFamily="34" charset="-122"/>
-                <a:cs typeface="Calibri" pitchFamily="34" charset="-120"/>
+                <a:cs typeface="Amiri" pitchFamily="2" charset="-78"/>
               </a:rPr>
               <a:t>P6-L08 · IGCSE Bridge</a:t>
             </a:r>
@@ -18593,8 +18268,7 @@
                   <a:srgbClr val="FFFFFF"/>
                 </a:solidFill>
                 <a:latin typeface="Calibri" pitchFamily="34" charset="0"/>
-                <a:ea typeface="Calibri" pitchFamily="34" charset="-122"/>
-                <a:cs typeface="Calibri" pitchFamily="34" charset="-120"/>
+                <a:cs typeface="Amiri" pitchFamily="2" charset="-78"/>
               </a:rPr>
               <a:t>FEEDBACK · 5 MIN</a:t>
             </a:r>
@@ -18632,8 +18306,7 @@
                   <a:srgbClr val="8A6D1E"/>
                 </a:solidFill>
                 <a:latin typeface="Calibri" pitchFamily="34" charset="0"/>
-                <a:ea typeface="Calibri" pitchFamily="34" charset="-122"/>
-                <a:cs typeface="Calibri" pitchFamily="34" charset="-120"/>
+                <a:cs typeface="Amiri" pitchFamily="2" charset="-78"/>
               </a:rPr>
               <a:t>FEEDBACK · SCORE · CONVERT · TARGET (WEBSITE)</a:t>
             </a:r>
@@ -18671,8 +18344,7 @@
                   <a:srgbClr val="1B3B6F"/>
                 </a:solidFill>
                 <a:latin typeface="Cambria" pitchFamily="34" charset="0"/>
-                <a:ea typeface="Cambria" pitchFamily="34" charset="-122"/>
-                <a:cs typeface="Cambria" pitchFamily="34" charset="-120"/>
+                <a:cs typeface="Amiri" pitchFamily="2" charset="-78"/>
               </a:rPr>
               <a:t>Record your Paper 1 mock score</a:t>
             </a:r>
@@ -18709,9 +18381,8 @@
                 <a:solidFill>
                   <a:srgbClr val="8A6D1E"/>
                 </a:solidFill>
-                <a:latin typeface="Amiri" pitchFamily="34" charset="0"/>
-                <a:ea typeface="Amiri" pitchFamily="34" charset="-122"/>
-                <a:cs typeface="Amiri" pitchFamily="34" charset="-120"/>
+                <a:latin typeface="Amiri" pitchFamily="2" charset="-78"/>
+                <a:cs typeface="Amiri" pitchFamily="2" charset="-78"/>
               </a:rPr>
               <a:t>سَجِّلْ نَتِيجَتَكَ</a:t>
             </a:r>
@@ -18749,8 +18420,7 @@
                   <a:srgbClr val="8A93A0"/>
                 </a:solidFill>
                 <a:latin typeface="Calibri" pitchFamily="34" charset="0"/>
-                <a:ea typeface="Calibri" pitchFamily="34" charset="-122"/>
-                <a:cs typeface="Calibri" pitchFamily="34" charset="-120"/>
+                <a:cs typeface="Amiri" pitchFamily="2" charset="-78"/>
               </a:rPr>
               <a:t>Miftah Arabic · Progression P6 · IGCSE Bridge · P6-L08</a:t>
             </a:r>
@@ -18813,8 +18483,7 @@
                   <a:srgbClr val="FFFFFF"/>
                 </a:solidFill>
                 <a:latin typeface="Calibri" pitchFamily="34" charset="0"/>
-                <a:ea typeface="Calibri" pitchFamily="34" charset="-122"/>
-                <a:cs typeface="Calibri" pitchFamily="34" charset="-120"/>
+                <a:cs typeface="Amiri" pitchFamily="2" charset="-78"/>
               </a:rPr>
               <a:t>Yours</a:t>
             </a:r>
@@ -18852,8 +18521,7 @@
                   <a:srgbClr val="FFFFFF"/>
                 </a:solidFill>
                 <a:latin typeface="Calibri" pitchFamily="34" charset="0"/>
-                <a:ea typeface="Calibri" pitchFamily="34" charset="-122"/>
-                <a:cs typeface="Calibri" pitchFamily="34" charset="-120"/>
+                <a:cs typeface="Amiri" pitchFamily="2" charset="-78"/>
               </a:rPr>
               <a:t>Example</a:t>
             </a:r>
@@ -18891,8 +18559,7 @@
                   <a:srgbClr val="FFFFFF"/>
                 </a:solidFill>
                 <a:latin typeface="Calibri" pitchFamily="34" charset="0"/>
-                <a:ea typeface="Calibri" pitchFamily="34" charset="-122"/>
-                <a:cs typeface="Calibri" pitchFamily="34" charset="-120"/>
+                <a:cs typeface="Amiri" pitchFamily="2" charset="-78"/>
               </a:rPr>
               <a:t>Record</a:t>
             </a:r>
@@ -18957,8 +18624,7 @@
                   <a:srgbClr val="5A6472"/>
                 </a:solidFill>
                 <a:latin typeface="Calibri" pitchFamily="34" charset="0"/>
-                <a:ea typeface="Calibri" pitchFamily="34" charset="-122"/>
-                <a:cs typeface="Calibri" pitchFamily="34" charset="-120"/>
+                <a:cs typeface="Amiri" pitchFamily="2" charset="-78"/>
               </a:rPr>
               <a:t>______________</a:t>
             </a:r>
@@ -18996,8 +18662,7 @@
                   <a:srgbClr val="5A6472"/>
                 </a:solidFill>
                 <a:latin typeface="Calibri" pitchFamily="34" charset="0"/>
-                <a:ea typeface="Calibri" pitchFamily="34" charset="-122"/>
-                <a:cs typeface="Calibri" pitchFamily="34" charset="-120"/>
+                <a:cs typeface="Amiri" pitchFamily="2" charset="-78"/>
               </a:rPr>
               <a:t>6/8</a:t>
             </a:r>
@@ -19035,8 +18700,7 @@
                   <a:srgbClr val="5A6472"/>
                 </a:solidFill>
                 <a:latin typeface="Calibri" pitchFamily="34" charset="0"/>
-                <a:ea typeface="Calibri" pitchFamily="34" charset="-122"/>
-                <a:cs typeface="Calibri" pitchFamily="34" charset="-120"/>
+                <a:cs typeface="Amiri" pitchFamily="2" charset="-78"/>
               </a:rPr>
               <a:t>Text 1 (out of 8)</a:t>
             </a:r>
@@ -19101,8 +18765,7 @@
                   <a:srgbClr val="FFFFFF"/>
                 </a:solidFill>
                 <a:latin typeface="Calibri" pitchFamily="34" charset="0"/>
-                <a:ea typeface="Calibri" pitchFamily="34" charset="-122"/>
-                <a:cs typeface="Calibri" pitchFamily="34" charset="-120"/>
+                <a:cs typeface="Amiri" pitchFamily="2" charset="-78"/>
               </a:rPr>
               <a:t>CORE</a:t>
             </a:r>
@@ -19167,8 +18830,7 @@
                   <a:srgbClr val="5A6472"/>
                 </a:solidFill>
                 <a:latin typeface="Calibri" pitchFamily="34" charset="0"/>
-                <a:ea typeface="Calibri" pitchFamily="34" charset="-122"/>
-                <a:cs typeface="Calibri" pitchFamily="34" charset="-120"/>
+                <a:cs typeface="Amiri" pitchFamily="2" charset="-78"/>
               </a:rPr>
               <a:t>______________</a:t>
             </a:r>
@@ -19206,8 +18868,7 @@
                   <a:srgbClr val="5A6472"/>
                 </a:solidFill>
                 <a:latin typeface="Calibri" pitchFamily="34" charset="0"/>
-                <a:ea typeface="Calibri" pitchFamily="34" charset="-122"/>
-                <a:cs typeface="Calibri" pitchFamily="34" charset="-120"/>
+                <a:cs typeface="Amiri" pitchFamily="2" charset="-78"/>
               </a:rPr>
               <a:t>4/6</a:t>
             </a:r>
@@ -19245,8 +18906,7 @@
                   <a:srgbClr val="5A6472"/>
                 </a:solidFill>
                 <a:latin typeface="Calibri" pitchFamily="34" charset="0"/>
-                <a:ea typeface="Calibri" pitchFamily="34" charset="-122"/>
-                <a:cs typeface="Calibri" pitchFamily="34" charset="-120"/>
+                <a:cs typeface="Amiri" pitchFamily="2" charset="-78"/>
               </a:rPr>
               <a:t>Text 2 (out of 6)</a:t>
             </a:r>
@@ -19311,8 +18971,7 @@
                   <a:srgbClr val="FFFFFF"/>
                 </a:solidFill>
                 <a:latin typeface="Calibri" pitchFamily="34" charset="0"/>
-                <a:ea typeface="Calibri" pitchFamily="34" charset="-122"/>
-                <a:cs typeface="Calibri" pitchFamily="34" charset="-120"/>
+                <a:cs typeface="Amiri" pitchFamily="2" charset="-78"/>
               </a:rPr>
               <a:t>CORE</a:t>
             </a:r>
@@ -19377,8 +19036,7 @@
                   <a:srgbClr val="5A6472"/>
                 </a:solidFill>
                 <a:latin typeface="Calibri" pitchFamily="34" charset="0"/>
-                <a:ea typeface="Calibri" pitchFamily="34" charset="-122"/>
-                <a:cs typeface="Calibri" pitchFamily="34" charset="-120"/>
+                <a:cs typeface="Amiri" pitchFamily="2" charset="-78"/>
               </a:rPr>
               <a:t>______________</a:t>
             </a:r>
@@ -19416,8 +19074,7 @@
                   <a:srgbClr val="5A6472"/>
                 </a:solidFill>
                 <a:latin typeface="Calibri" pitchFamily="34" charset="0"/>
-                <a:ea typeface="Calibri" pitchFamily="34" charset="-122"/>
-                <a:cs typeface="Calibri" pitchFamily="34" charset="-120"/>
+                <a:cs typeface="Amiri" pitchFamily="2" charset="-78"/>
               </a:rPr>
               <a:t>5/6</a:t>
             </a:r>
@@ -19455,8 +19112,7 @@
                   <a:srgbClr val="5A6472"/>
                 </a:solidFill>
                 <a:latin typeface="Calibri" pitchFamily="34" charset="0"/>
-                <a:ea typeface="Calibri" pitchFamily="34" charset="-122"/>
-                <a:cs typeface="Calibri" pitchFamily="34" charset="-120"/>
+                <a:cs typeface="Amiri" pitchFamily="2" charset="-78"/>
               </a:rPr>
               <a:t>Text 3 (out of 6)</a:t>
             </a:r>
@@ -19521,8 +19177,7 @@
                   <a:srgbClr val="FFFFFF"/>
                 </a:solidFill>
                 <a:latin typeface="Calibri" pitchFamily="34" charset="0"/>
-                <a:ea typeface="Calibri" pitchFamily="34" charset="-122"/>
-                <a:cs typeface="Calibri" pitchFamily="34" charset="-120"/>
+                <a:cs typeface="Amiri" pitchFamily="2" charset="-78"/>
               </a:rPr>
               <a:t>CORE</a:t>
             </a:r>
@@ -19587,8 +19242,7 @@
                   <a:srgbClr val="5A6472"/>
                 </a:solidFill>
                 <a:latin typeface="Calibri" pitchFamily="34" charset="0"/>
-                <a:ea typeface="Calibri" pitchFamily="34" charset="-122"/>
-                <a:cs typeface="Calibri" pitchFamily="34" charset="-120"/>
+                <a:cs typeface="Amiri" pitchFamily="2" charset="-78"/>
               </a:rPr>
               <a:t>______________</a:t>
             </a:r>
@@ -19626,8 +19280,7 @@
                   <a:srgbClr val="5A6472"/>
                 </a:solidFill>
                 <a:latin typeface="Calibri" pitchFamily="34" charset="0"/>
-                <a:ea typeface="Calibri" pitchFamily="34" charset="-122"/>
-                <a:cs typeface="Calibri" pitchFamily="34" charset="-120"/>
+                <a:cs typeface="Amiri" pitchFamily="2" charset="-78"/>
               </a:rPr>
               <a:t>15/20 → 33.75/45</a:t>
             </a:r>
@@ -19665,8 +19318,7 @@
                   <a:srgbClr val="5A6472"/>
                 </a:solidFill>
                 <a:latin typeface="Calibri" pitchFamily="34" charset="0"/>
-                <a:ea typeface="Calibri" pitchFamily="34" charset="-122"/>
-                <a:cs typeface="Calibri" pitchFamily="34" charset="-120"/>
+                <a:cs typeface="Amiri" pitchFamily="2" charset="-78"/>
               </a:rPr>
               <a:t>Raw total (out of 20) and converted score (out of 45)</a:t>
             </a:r>
@@ -19731,8 +19383,7 @@
                   <a:srgbClr val="FFFFFF"/>
                 </a:solidFill>
                 <a:latin typeface="Calibri" pitchFamily="34" charset="0"/>
-                <a:ea typeface="Calibri" pitchFamily="34" charset="-122"/>
-                <a:cs typeface="Calibri" pitchFamily="34" charset="-120"/>
+                <a:cs typeface="Amiri" pitchFamily="2" charset="-78"/>
               </a:rPr>
               <a:t>CORE</a:t>
             </a:r>
@@ -19797,8 +19448,7 @@
                   <a:srgbClr val="5A6472"/>
                 </a:solidFill>
                 <a:latin typeface="Calibri" pitchFamily="34" charset="0"/>
-                <a:ea typeface="Calibri" pitchFamily="34" charset="-122"/>
-                <a:cs typeface="Calibri" pitchFamily="34" charset="-120"/>
+                <a:cs typeface="Amiri" pitchFamily="2" charset="-78"/>
               </a:rPr>
               <a:t>______________</a:t>
             </a:r>
@@ -19836,8 +19486,7 @@
                   <a:srgbClr val="5A6472"/>
                 </a:solidFill>
                 <a:latin typeface="Calibri" pitchFamily="34" charset="0"/>
-                <a:ea typeface="Calibri" pitchFamily="34" charset="-122"/>
-                <a:cs typeface="Calibri" pitchFamily="34" charset="-120"/>
+                <a:cs typeface="Amiri" pitchFamily="2" charset="-78"/>
               </a:rPr>
               <a:t>matching — listen for the names</a:t>
             </a:r>
@@ -19875,8 +19524,7 @@
                   <a:srgbClr val="5A6472"/>
                 </a:solidFill>
                 <a:latin typeface="Calibri" pitchFamily="34" charset="0"/>
-                <a:ea typeface="Calibri" pitchFamily="34" charset="-122"/>
-                <a:cs typeface="Calibri" pitchFamily="34" charset="-120"/>
+                <a:cs typeface="Amiri" pitchFamily="2" charset="-78"/>
               </a:rPr>
               <a:t>My priority format for the real exam (MC / matching / select-two)</a:t>
             </a:r>
@@ -19914,8 +19562,7 @@
                   <a:srgbClr val="1B3B6F"/>
                 </a:solidFill>
                 <a:latin typeface="Calibri" pitchFamily="34" charset="0"/>
-                <a:ea typeface="Calibri" pitchFamily="34" charset="-122"/>
-                <a:cs typeface="Calibri" pitchFamily="34" charset="-120"/>
+                <a:cs typeface="Amiri" pitchFamily="2" charset="-78"/>
               </a:rPr>
               <a:t>Convert: raw × 2.25. Example: 15 × 2.25 = 33.75 ≈ 34/45. Bring this record to P6-L11.</a:t>
             </a:r>
@@ -19953,8 +19600,7 @@
                   <a:srgbClr val="8A93A0"/>
                 </a:solidFill>
                 <a:latin typeface="Calibri" pitchFamily="34" charset="0"/>
-                <a:ea typeface="Calibri" pitchFamily="34" charset="-122"/>
-                <a:cs typeface="Calibri" pitchFamily="34" charset="-120"/>
+                <a:cs typeface="Amiri" pitchFamily="2" charset="-78"/>
               </a:rPr>
               <a:t>14 / 18</a:t>
             </a:r>
@@ -20048,9 +19694,8 @@
                 <a:solidFill>
                   <a:srgbClr val="D4AF37"/>
                 </a:solidFill>
-                <a:latin typeface="Amiri" pitchFamily="34" charset="0"/>
-                <a:ea typeface="Amiri" pitchFamily="34" charset="-122"/>
-                <a:cs typeface="Amiri" pitchFamily="34" charset="-120"/>
+                <a:latin typeface="Amiri" pitchFamily="2" charset="-78"/>
+                <a:cs typeface="Amiri" pitchFamily="2" charset="-78"/>
               </a:rPr>
               <a:t>م</a:t>
             </a:r>
@@ -20088,8 +19733,7 @@
                   <a:srgbClr val="1B3B6F"/>
                 </a:solidFill>
                 <a:latin typeface="Cambria" pitchFamily="34" charset="0"/>
-                <a:ea typeface="Cambria" pitchFamily="34" charset="-122"/>
-                <a:cs typeface="Cambria" pitchFamily="34" charset="-120"/>
+                <a:cs typeface="Amiri" pitchFamily="2" charset="-78"/>
               </a:rPr>
               <a:t>Al Madina Online School</a:t>
             </a:r>
@@ -20127,8 +19771,7 @@
                   <a:srgbClr val="8A6D1E"/>
                 </a:solidFill>
                 <a:latin typeface="Calibri" pitchFamily="34" charset="0"/>
-                <a:ea typeface="Calibri" pitchFamily="34" charset="-122"/>
-                <a:cs typeface="Calibri" pitchFamily="34" charset="-120"/>
+                <a:cs typeface="Amiri" pitchFamily="2" charset="-78"/>
               </a:rPr>
               <a:t>ARABIC DEPARTMENT · MIFTAH ARABIC · IGCSE 0544</a:t>
             </a:r>
@@ -20193,8 +19836,7 @@
                   <a:srgbClr val="FFFFFF"/>
                 </a:solidFill>
                 <a:latin typeface="Calibri" pitchFamily="34" charset="0"/>
-                <a:ea typeface="Calibri" pitchFamily="34" charset="-122"/>
-                <a:cs typeface="Calibri" pitchFamily="34" charset="-120"/>
+                <a:cs typeface="Amiri" pitchFamily="2" charset="-78"/>
               </a:rPr>
               <a:t>P6-L08 · IGCSE Bridge</a:t>
             </a:r>
@@ -20259,8 +19901,7 @@
                   <a:srgbClr val="FFFFFF"/>
                 </a:solidFill>
                 <a:latin typeface="Calibri" pitchFamily="34" charset="0"/>
-                <a:ea typeface="Calibri" pitchFamily="34" charset="-122"/>
-                <a:cs typeface="Calibri" pitchFamily="34" charset="-120"/>
+                <a:cs typeface="Amiri" pitchFamily="2" charset="-78"/>
               </a:rPr>
               <a:t>FEEDBACK · 2 MIN</a:t>
             </a:r>
@@ -20298,8 +19939,7 @@
                   <a:srgbClr val="8A6D1E"/>
                 </a:solidFill>
                 <a:latin typeface="Calibri" pitchFamily="34" charset="0"/>
-                <a:ea typeface="Calibri" pitchFamily="34" charset="-122"/>
-                <a:cs typeface="Calibri" pitchFamily="34" charset="-120"/>
+                <a:cs typeface="Amiri" pitchFamily="2" charset="-78"/>
               </a:rPr>
               <a:t>FEEDBACK · PAPER 1 DONE (WEBSITE)</a:t>
             </a:r>
@@ -20337,8 +19977,7 @@
                   <a:srgbClr val="1B3B6F"/>
                 </a:solidFill>
                 <a:latin typeface="Cambria" pitchFamily="34" charset="0"/>
-                <a:ea typeface="Cambria" pitchFamily="34" charset="-122"/>
-                <a:cs typeface="Cambria" pitchFamily="34" charset="-120"/>
+                <a:cs typeface="Amiri" pitchFamily="2" charset="-78"/>
               </a:rPr>
               <a:t>Post-mock reflection</a:t>
             </a:r>
@@ -20375,9 +20014,8 @@
                 <a:solidFill>
                   <a:srgbClr val="8A6D1E"/>
                 </a:solidFill>
-                <a:latin typeface="Amiri" pitchFamily="34" charset="0"/>
-                <a:ea typeface="Amiri" pitchFamily="34" charset="-122"/>
-                <a:cs typeface="Amiri" pitchFamily="34" charset="-120"/>
+                <a:latin typeface="Amiri" pitchFamily="2" charset="-78"/>
+                <a:cs typeface="Amiri" pitchFamily="2" charset="-78"/>
               </a:rPr>
               <a:t>التَّأَمُّلُ</a:t>
             </a:r>
@@ -20415,8 +20053,7 @@
                   <a:srgbClr val="8A93A0"/>
                 </a:solidFill>
                 <a:latin typeface="Calibri" pitchFamily="34" charset="0"/>
-                <a:ea typeface="Calibri" pitchFamily="34" charset="-122"/>
-                <a:cs typeface="Calibri" pitchFamily="34" charset="-120"/>
+                <a:cs typeface="Amiri" pitchFamily="2" charset="-78"/>
               </a:rPr>
               <a:t>Miftah Arabic · Progression P6 · IGCSE Bridge · P6-L08</a:t>
             </a:r>
@@ -20479,8 +20116,7 @@
                   <a:srgbClr val="FFFFFF"/>
                 </a:solidFill>
                 <a:latin typeface="Calibri" pitchFamily="34" charset="0"/>
-                <a:ea typeface="Calibri" pitchFamily="34" charset="-122"/>
-                <a:cs typeface="Calibri" pitchFamily="34" charset="-120"/>
+                <a:cs typeface="Amiri" pitchFamily="2" charset="-78"/>
               </a:rPr>
               <a:t>Model ending</a:t>
             </a:r>
@@ -20518,8 +20154,7 @@
                   <a:srgbClr val="FFFFFF"/>
                 </a:solidFill>
                 <a:latin typeface="Calibri" pitchFamily="34" charset="0"/>
-                <a:ea typeface="Calibri" pitchFamily="34" charset="-122"/>
-                <a:cs typeface="Calibri" pitchFamily="34" charset="-120"/>
+                <a:cs typeface="Amiri" pitchFamily="2" charset="-78"/>
               </a:rPr>
               <a:t>Meaning</a:t>
             </a:r>
@@ -20557,8 +20192,7 @@
                   <a:srgbClr val="FFFFFF"/>
                 </a:solidFill>
                 <a:latin typeface="Calibri" pitchFamily="34" charset="0"/>
-                <a:ea typeface="Calibri" pitchFamily="34" charset="-122"/>
-                <a:cs typeface="Calibri" pitchFamily="34" charset="-120"/>
+                <a:cs typeface="Amiri" pitchFamily="2" charset="-78"/>
               </a:rPr>
               <a:t>Reflection frame (website)</a:t>
             </a:r>
@@ -20623,8 +20257,7 @@
                   <a:srgbClr val="5A6472"/>
                 </a:solidFill>
                 <a:latin typeface="Calibri" pitchFamily="34" charset="0"/>
-                <a:ea typeface="Calibri" pitchFamily="34" charset="-122"/>
-                <a:cs typeface="Calibri" pitchFamily="34" charset="-120"/>
+                <a:cs typeface="Amiri" pitchFamily="2" charset="-78"/>
               </a:rPr>
               <a:t>multiple choice</a:t>
             </a:r>
@@ -20662,8 +20295,7 @@
                   <a:srgbClr val="5A6472"/>
                 </a:solidFill>
                 <a:latin typeface="Calibri" pitchFamily="34" charset="0"/>
-                <a:ea typeface="Calibri" pitchFamily="34" charset="-122"/>
-                <a:cs typeface="Calibri" pitchFamily="34" charset="-120"/>
+                <a:cs typeface="Amiri" pitchFamily="2" charset="-78"/>
               </a:rPr>
               <a:t>my strongest format today</a:t>
             </a:r>
@@ -20701,8 +20333,7 @@
                   <a:srgbClr val="5A6472"/>
                 </a:solidFill>
                 <a:latin typeface="Calibri" pitchFamily="34" charset="0"/>
-                <a:ea typeface="Calibri" pitchFamily="34" charset="-122"/>
-                <a:cs typeface="Calibri" pitchFamily="34" charset="-120"/>
+                <a:cs typeface="Amiri" pitchFamily="2" charset="-78"/>
               </a:rPr>
               <a:t>My strongest format today was…</a:t>
             </a:r>
@@ -20767,8 +20398,7 @@
                   <a:srgbClr val="5A6472"/>
                 </a:solidFill>
                 <a:latin typeface="Calibri" pitchFamily="34" charset="0"/>
-                <a:ea typeface="Calibri" pitchFamily="34" charset="-122"/>
-                <a:cs typeface="Calibri" pitchFamily="34" charset="-120"/>
+                <a:cs typeface="Amiri" pitchFamily="2" charset="-78"/>
               </a:rPr>
               <a:t>matching — write the names first</a:t>
             </a:r>
@@ -20806,8 +20436,7 @@
                   <a:srgbClr val="5A6472"/>
                 </a:solidFill>
                 <a:latin typeface="Calibri" pitchFamily="34" charset="0"/>
-                <a:ea typeface="Calibri" pitchFamily="34" charset="-122"/>
-                <a:cs typeface="Calibri" pitchFamily="34" charset="-120"/>
+                <a:cs typeface="Amiri" pitchFamily="2" charset="-78"/>
               </a:rPr>
               <a:t>what I will improve before the real exam</a:t>
             </a:r>
@@ -20845,8 +20474,7 @@
                   <a:srgbClr val="5A6472"/>
                 </a:solidFill>
                 <a:latin typeface="Calibri" pitchFamily="34" charset="0"/>
-                <a:ea typeface="Calibri" pitchFamily="34" charset="-122"/>
-                <a:cs typeface="Calibri" pitchFamily="34" charset="-120"/>
+                <a:cs typeface="Amiri" pitchFamily="2" charset="-78"/>
               </a:rPr>
               <a:t>Before the real exam I will improve…</a:t>
             </a:r>
@@ -20910,9 +20538,8 @@
                 <a:solidFill>
                   <a:srgbClr val="1B3B6F"/>
                 </a:solidFill>
-                <a:latin typeface="Amiri" pitchFamily="34" charset="0"/>
-                <a:ea typeface="Amiri" pitchFamily="34" charset="-122"/>
-                <a:cs typeface="Amiri" pitchFamily="34" charset="-120"/>
+                <a:latin typeface="Amiri" pitchFamily="2" charset="-78"/>
+                <a:cs typeface="Amiri" pitchFamily="2" charset="-78"/>
               </a:rPr>
               <a:t>قِرَاءَةُ الأَسْئِلَةِ مُسْبَقًا</a:t>
             </a:r>
@@ -20950,8 +20577,7 @@
                   <a:srgbClr val="5A6472"/>
                 </a:solidFill>
                 <a:latin typeface="Calibri" pitchFamily="34" charset="0"/>
-                <a:ea typeface="Calibri" pitchFamily="34" charset="-122"/>
-                <a:cs typeface="Calibri" pitchFamily="34" charset="-120"/>
+                <a:cs typeface="Amiri" pitchFamily="2" charset="-78"/>
               </a:rPr>
               <a:t>The strategy that helped me most was …</a:t>
             </a:r>
@@ -20988,9 +20614,8 @@
                 <a:solidFill>
                   <a:srgbClr val="1B3B6F"/>
                 </a:solidFill>
-                <a:latin typeface="Amiri" pitchFamily="34" charset="0"/>
-                <a:ea typeface="Amiri" pitchFamily="34" charset="-122"/>
-                <a:cs typeface="Amiri" pitchFamily="34" charset="-120"/>
+                <a:latin typeface="Amiri" pitchFamily="2" charset="-78"/>
+                <a:cs typeface="Amiri" pitchFamily="2" charset="-78"/>
               </a:rPr>
               <a:t>الاسْتِرَاتِيجِيَّةُ الَّتِي سَاعَدَتْنِي أَكْثَرَ هِيَ ______ .</a:t>
             </a:r>
@@ -21028,8 +20653,7 @@
                   <a:srgbClr val="1B3B6F"/>
                 </a:solidFill>
                 <a:latin typeface="Calibri" pitchFamily="34" charset="0"/>
-                <a:ea typeface="Calibri" pitchFamily="34" charset="-122"/>
-                <a:cs typeface="Calibri" pitchFamily="34" charset="-120"/>
+                <a:cs typeface="Amiri" pitchFamily="2" charset="-78"/>
               </a:rPr>
               <a:t>Paper 1 done — well done for sitting it under real conditions.</a:t>
             </a:r>
@@ -21067,8 +20691,7 @@
                   <a:srgbClr val="8A93A0"/>
                 </a:solidFill>
                 <a:latin typeface="Calibri" pitchFamily="34" charset="0"/>
-                <a:ea typeface="Calibri" pitchFamily="34" charset="-122"/>
-                <a:cs typeface="Calibri" pitchFamily="34" charset="-120"/>
+                <a:cs typeface="Amiri" pitchFamily="2" charset="-78"/>
               </a:rPr>
               <a:t>15 / 18</a:t>
             </a:r>
@@ -21162,9 +20785,8 @@
                 <a:solidFill>
                   <a:srgbClr val="D4AF37"/>
                 </a:solidFill>
-                <a:latin typeface="Amiri" pitchFamily="34" charset="0"/>
-                <a:ea typeface="Amiri" pitchFamily="34" charset="-122"/>
-                <a:cs typeface="Amiri" pitchFamily="34" charset="-120"/>
+                <a:latin typeface="Amiri" pitchFamily="2" charset="-78"/>
+                <a:cs typeface="Amiri" pitchFamily="2" charset="-78"/>
               </a:rPr>
               <a:t>م</a:t>
             </a:r>
@@ -21202,8 +20824,7 @@
                   <a:srgbClr val="1B3B6F"/>
                 </a:solidFill>
                 <a:latin typeface="Cambria" pitchFamily="34" charset="0"/>
-                <a:ea typeface="Cambria" pitchFamily="34" charset="-122"/>
-                <a:cs typeface="Cambria" pitchFamily="34" charset="-120"/>
+                <a:cs typeface="Amiri" pitchFamily="2" charset="-78"/>
               </a:rPr>
               <a:t>Al Madina Online School</a:t>
             </a:r>
@@ -21241,8 +20862,7 @@
                   <a:srgbClr val="8A6D1E"/>
                 </a:solidFill>
                 <a:latin typeface="Calibri" pitchFamily="34" charset="0"/>
-                <a:ea typeface="Calibri" pitchFamily="34" charset="-122"/>
-                <a:cs typeface="Calibri" pitchFamily="34" charset="-120"/>
+                <a:cs typeface="Amiri" pitchFamily="2" charset="-78"/>
               </a:rPr>
               <a:t>ARABIC DEPARTMENT · MIFTAH ARABIC · IGCSE 0544</a:t>
             </a:r>
@@ -21307,8 +20927,7 @@
                   <a:srgbClr val="FFFFFF"/>
                 </a:solidFill>
                 <a:latin typeface="Calibri" pitchFamily="34" charset="0"/>
-                <a:ea typeface="Calibri" pitchFamily="34" charset="-122"/>
-                <a:cs typeface="Calibri" pitchFamily="34" charset="-120"/>
+                <a:cs typeface="Amiri" pitchFamily="2" charset="-78"/>
               </a:rPr>
               <a:t>P6-L08 · IGCSE Bridge</a:t>
             </a:r>
@@ -21373,8 +20992,7 @@
                   <a:srgbClr val="FFFFFF"/>
                 </a:solidFill>
                 <a:latin typeface="Calibri" pitchFamily="34" charset="0"/>
-                <a:ea typeface="Calibri" pitchFamily="34" charset="-122"/>
-                <a:cs typeface="Calibri" pitchFamily="34" charset="-120"/>
+                <a:cs typeface="Amiri" pitchFamily="2" charset="-78"/>
               </a:rPr>
               <a:t>FEEDBACK · 1 MIN</a:t>
             </a:r>
@@ -21412,8 +21030,7 @@
                   <a:srgbClr val="8A6D1E"/>
                 </a:solidFill>
                 <a:latin typeface="Calibri" pitchFamily="34" charset="0"/>
-                <a:ea typeface="Calibri" pitchFamily="34" charset="-122"/>
-                <a:cs typeface="Calibri" pitchFamily="34" charset="-120"/>
+                <a:cs typeface="Amiri" pitchFamily="2" charset="-78"/>
               </a:rPr>
               <a:t>FEEDBACK · SUCCESS CRITERIA</a:t>
             </a:r>
@@ -21451,8 +21068,7 @@
                   <a:srgbClr val="1B3B6F"/>
                 </a:solidFill>
                 <a:latin typeface="Cambria" pitchFamily="34" charset="0"/>
-                <a:ea typeface="Cambria" pitchFamily="34" charset="-122"/>
-                <a:cs typeface="Cambria" pitchFamily="34" charset="-120"/>
+                <a:cs typeface="Amiri" pitchFamily="2" charset="-78"/>
               </a:rPr>
               <a:t>Check your work</a:t>
             </a:r>
@@ -21489,9 +21105,8 @@
                 <a:solidFill>
                   <a:srgbClr val="8A6D1E"/>
                 </a:solidFill>
-                <a:latin typeface="Amiri" pitchFamily="34" charset="0"/>
-                <a:ea typeface="Amiri" pitchFamily="34" charset="-122"/>
-                <a:cs typeface="Amiri" pitchFamily="34" charset="-120"/>
+                <a:latin typeface="Amiri" pitchFamily="2" charset="-78"/>
+                <a:cs typeface="Amiri" pitchFamily="2" charset="-78"/>
               </a:rPr>
               <a:t>قَيِّمْ عَمَلَكَ</a:t>
             </a:r>
@@ -21529,8 +21144,7 @@
                   <a:srgbClr val="8A93A0"/>
                 </a:solidFill>
                 <a:latin typeface="Calibri" pitchFamily="34" charset="0"/>
-                <a:ea typeface="Calibri" pitchFamily="34" charset="-122"/>
-                <a:cs typeface="Calibri" pitchFamily="34" charset="-120"/>
+                <a:cs typeface="Amiri" pitchFamily="2" charset="-78"/>
               </a:rPr>
               <a:t>Miftah Arabic · Progression P6 · IGCSE Bridge · P6-L08</a:t>
             </a:r>
@@ -21627,8 +21241,7 @@
                   <a:srgbClr val="1F2A37"/>
                 </a:solidFill>
                 <a:latin typeface="Calibri" pitchFamily="34" charset="0"/>
-                <a:ea typeface="Calibri" pitchFamily="34" charset="-122"/>
-                <a:cs typeface="Calibri" pitchFamily="34" charset="-120"/>
+                <a:cs typeface="Amiri" pitchFamily="2" charset="-78"/>
               </a:rPr>
               <a:t>I answered every question — no blanks.</a:t>
             </a:r>
@@ -21693,8 +21306,7 @@
                   <a:srgbClr val="FFFFFF"/>
                 </a:solidFill>
                 <a:latin typeface="Calibri" pitchFamily="34" charset="0"/>
-                <a:ea typeface="Calibri" pitchFamily="34" charset="-122"/>
-                <a:cs typeface="Calibri" pitchFamily="34" charset="-120"/>
+                <a:cs typeface="Amiri" pitchFamily="2" charset="-78"/>
               </a:rPr>
               <a:t>CORE</a:t>
             </a:r>
@@ -21791,8 +21403,7 @@
                   <a:srgbClr val="1F2A37"/>
                 </a:solidFill>
                 <a:latin typeface="Calibri" pitchFamily="34" charset="0"/>
-                <a:ea typeface="Calibri" pitchFamily="34" charset="-122"/>
-                <a:cs typeface="Calibri" pitchFamily="34" charset="-120"/>
+                <a:cs typeface="Amiri" pitchFamily="2" charset="-78"/>
               </a:rPr>
               <a:t>I know my raw score out of 20.</a:t>
             </a:r>
@@ -21857,8 +21468,7 @@
                   <a:srgbClr val="FFFFFF"/>
                 </a:solidFill>
                 <a:latin typeface="Calibri" pitchFamily="34" charset="0"/>
-                <a:ea typeface="Calibri" pitchFamily="34" charset="-122"/>
-                <a:cs typeface="Calibri" pitchFamily="34" charset="-120"/>
+                <a:cs typeface="Amiri" pitchFamily="2" charset="-78"/>
               </a:rPr>
               <a:t>CORE</a:t>
             </a:r>
@@ -21955,8 +21565,7 @@
                   <a:srgbClr val="1F2A37"/>
                 </a:solidFill>
                 <a:latin typeface="Calibri" pitchFamily="34" charset="0"/>
-                <a:ea typeface="Calibri" pitchFamily="34" charset="-122"/>
-                <a:cs typeface="Calibri" pitchFamily="34" charset="-120"/>
+                <a:cs typeface="Amiri" pitchFamily="2" charset="-78"/>
               </a:rPr>
               <a:t>I annotated each question before the script.</a:t>
             </a:r>
@@ -22021,8 +21630,7 @@
                   <a:srgbClr val="FFFFFF"/>
                 </a:solidFill>
                 <a:latin typeface="Calibri" pitchFamily="34" charset="0"/>
-                <a:ea typeface="Calibri" pitchFamily="34" charset="-122"/>
-                <a:cs typeface="Calibri" pitchFamily="34" charset="-120"/>
+                <a:cs typeface="Amiri" pitchFamily="2" charset="-78"/>
               </a:rPr>
               <a:t>DEVELOP</a:t>
             </a:r>
@@ -22119,8 +21727,7 @@
                   <a:srgbClr val="1F2A37"/>
                 </a:solidFill>
                 <a:latin typeface="Calibri" pitchFamily="34" charset="0"/>
-                <a:ea typeface="Calibri" pitchFamily="34" charset="-122"/>
-                <a:cs typeface="Calibri" pitchFamily="34" charset="-120"/>
+                <a:cs typeface="Amiri" pitchFamily="2" charset="-78"/>
               </a:rPr>
               <a:t>I used the second reading to verify, not to over-change.</a:t>
             </a:r>
@@ -22185,8 +21792,7 @@
                   <a:srgbClr val="FFFFFF"/>
                 </a:solidFill>
                 <a:latin typeface="Calibri" pitchFamily="34" charset="0"/>
-                <a:ea typeface="Calibri" pitchFamily="34" charset="-122"/>
-                <a:cs typeface="Calibri" pitchFamily="34" charset="-120"/>
+                <a:cs typeface="Amiri" pitchFamily="2" charset="-78"/>
               </a:rPr>
               <a:t>STRETCH</a:t>
             </a:r>
@@ -22283,8 +21889,7 @@
                   <a:srgbClr val="1F2A37"/>
                 </a:solidFill>
                 <a:latin typeface="Calibri" pitchFamily="34" charset="0"/>
-                <a:ea typeface="Calibri" pitchFamily="34" charset="-122"/>
-                <a:cs typeface="Calibri" pitchFamily="34" charset="-120"/>
+                <a:cs typeface="Amiri" pitchFamily="2" charset="-78"/>
               </a:rPr>
               <a:t>I know my priority format for the real exam.</a:t>
             </a:r>
@@ -22349,8 +21954,7 @@
                   <a:srgbClr val="FFFFFF"/>
                 </a:solidFill>
                 <a:latin typeface="Calibri" pitchFamily="34" charset="0"/>
-                <a:ea typeface="Calibri" pitchFamily="34" charset="-122"/>
-                <a:cs typeface="Calibri" pitchFamily="34" charset="-120"/>
+                <a:cs typeface="Amiri" pitchFamily="2" charset="-78"/>
               </a:rPr>
               <a:t>STRETCH</a:t>
             </a:r>
@@ -22422,8 +22026,7 @@
                   <a:srgbClr val="2E8B57"/>
                 </a:solidFill>
                 <a:latin typeface="Calibri" pitchFamily="34" charset="0"/>
-                <a:ea typeface="Calibri" pitchFamily="34" charset="-122"/>
-                <a:cs typeface="Calibri" pitchFamily="34" charset="-120"/>
+                <a:cs typeface="Amiri" pitchFamily="2" charset="-78"/>
               </a:rPr>
               <a:t>WWW</a:t>
             </a:r>
@@ -22439,8 +22042,7 @@
                   <a:srgbClr val="1F2A37"/>
                 </a:solidFill>
                 <a:latin typeface="Calibri" pitchFamily="34" charset="0"/>
-                <a:ea typeface="Calibri" pitchFamily="34" charset="-122"/>
-                <a:cs typeface="Calibri" pitchFamily="34" charset="-120"/>
+                <a:cs typeface="Amiri" pitchFamily="2" charset="-78"/>
               </a:rPr>
               <a:t>What went well? One thing you did accurately.</a:t>
             </a:r>
@@ -22512,8 +22114,7 @@
                   <a:srgbClr val="C9780A"/>
                 </a:solidFill>
                 <a:latin typeface="Calibri" pitchFamily="34" charset="0"/>
-                <a:ea typeface="Calibri" pitchFamily="34" charset="-122"/>
-                <a:cs typeface="Calibri" pitchFamily="34" charset="-120"/>
+                <a:cs typeface="Amiri" pitchFamily="2" charset="-78"/>
               </a:rPr>
               <a:t>EBI</a:t>
             </a:r>
@@ -22529,8 +22130,7 @@
                   <a:srgbClr val="1F2A37"/>
                 </a:solidFill>
                 <a:latin typeface="Calibri" pitchFamily="34" charset="0"/>
-                <a:ea typeface="Calibri" pitchFamily="34" charset="-122"/>
-                <a:cs typeface="Calibri" pitchFamily="34" charset="-120"/>
+                <a:cs typeface="Amiri" pitchFamily="2" charset="-78"/>
               </a:rPr>
               <a:t>Even better if… One thing you will fix or add.</a:t>
             </a:r>
@@ -22568,8 +22168,7 @@
                   <a:srgbClr val="8A93A0"/>
                 </a:solidFill>
                 <a:latin typeface="Calibri" pitchFamily="34" charset="0"/>
-                <a:ea typeface="Calibri" pitchFamily="34" charset="-122"/>
-                <a:cs typeface="Calibri" pitchFamily="34" charset="-120"/>
+                <a:cs typeface="Amiri" pitchFamily="2" charset="-78"/>
               </a:rPr>
               <a:t>16 / 18</a:t>
             </a:r>
@@ -22663,9 +22262,8 @@
                 <a:solidFill>
                   <a:srgbClr val="D4AF37"/>
                 </a:solidFill>
-                <a:latin typeface="Amiri" pitchFamily="34" charset="0"/>
-                <a:ea typeface="Amiri" pitchFamily="34" charset="-122"/>
-                <a:cs typeface="Amiri" pitchFamily="34" charset="-120"/>
+                <a:latin typeface="Amiri" pitchFamily="2" charset="-78"/>
+                <a:cs typeface="Amiri" pitchFamily="2" charset="-78"/>
               </a:rPr>
               <a:t>م</a:t>
             </a:r>
@@ -22703,8 +22301,7 @@
                   <a:srgbClr val="1B3B6F"/>
                 </a:solidFill>
                 <a:latin typeface="Cambria" pitchFamily="34" charset="0"/>
-                <a:ea typeface="Cambria" pitchFamily="34" charset="-122"/>
-                <a:cs typeface="Cambria" pitchFamily="34" charset="-120"/>
+                <a:cs typeface="Amiri" pitchFamily="2" charset="-78"/>
               </a:rPr>
               <a:t>Al Madina Online School</a:t>
             </a:r>
@@ -22742,8 +22339,7 @@
                   <a:srgbClr val="8A6D1E"/>
                 </a:solidFill>
                 <a:latin typeface="Calibri" pitchFamily="34" charset="0"/>
-                <a:ea typeface="Calibri" pitchFamily="34" charset="-122"/>
-                <a:cs typeface="Calibri" pitchFamily="34" charset="-120"/>
+                <a:cs typeface="Amiri" pitchFamily="2" charset="-78"/>
               </a:rPr>
               <a:t>ARABIC DEPARTMENT · MIFTAH ARABIC · IGCSE 0544</a:t>
             </a:r>
@@ -22808,8 +22404,7 @@
                   <a:srgbClr val="FFFFFF"/>
                 </a:solidFill>
                 <a:latin typeface="Calibri" pitchFamily="34" charset="0"/>
-                <a:ea typeface="Calibri" pitchFamily="34" charset="-122"/>
-                <a:cs typeface="Calibri" pitchFamily="34" charset="-120"/>
+                <a:cs typeface="Amiri" pitchFamily="2" charset="-78"/>
               </a:rPr>
               <a:t>P6-L08 · IGCSE Bridge</a:t>
             </a:r>
@@ -22874,8 +22469,7 @@
                   <a:srgbClr val="FFFFFF"/>
                 </a:solidFill>
                 <a:latin typeface="Calibri" pitchFamily="34" charset="0"/>
-                <a:ea typeface="Calibri" pitchFamily="34" charset="-122"/>
-                <a:cs typeface="Calibri" pitchFamily="34" charset="-120"/>
+                <a:cs typeface="Amiri" pitchFamily="2" charset="-78"/>
               </a:rPr>
               <a:t>PREPARATION · 2 MIN</a:t>
             </a:r>
@@ -22913,8 +22507,7 @@
                   <a:srgbClr val="C45A3C"/>
                 </a:solidFill>
                 <a:latin typeface="Calibri" pitchFamily="34" charset="0"/>
-                <a:ea typeface="Calibri" pitchFamily="34" charset="-122"/>
-                <a:cs typeface="Calibri" pitchFamily="34" charset="-120"/>
+                <a:cs typeface="Amiri" pitchFamily="2" charset="-78"/>
               </a:rPr>
               <a:t>PREPARATION FOR NEXT LESSON · ABOUT 10 MINUTES</a:t>
             </a:r>
@@ -22952,8 +22545,7 @@
                   <a:srgbClr val="1B3B6F"/>
                 </a:solidFill>
                 <a:latin typeface="Cambria" pitchFamily="34" charset="0"/>
-                <a:ea typeface="Cambria" pitchFamily="34" charset="-122"/>
-                <a:cs typeface="Cambria" pitchFamily="34" charset="-120"/>
+                <a:cs typeface="Amiri" pitchFamily="2" charset="-78"/>
               </a:rPr>
               <a:t>Before P6-L09: get ready at home</a:t>
             </a:r>
@@ -22990,9 +22582,8 @@
                 <a:solidFill>
                   <a:srgbClr val="8A6D1E"/>
                 </a:solidFill>
-                <a:latin typeface="Amiri" pitchFamily="34" charset="0"/>
-                <a:ea typeface="Amiri" pitchFamily="34" charset="-122"/>
-                <a:cs typeface="Amiri" pitchFamily="34" charset="-120"/>
+                <a:latin typeface="Amiri" pitchFamily="2" charset="-78"/>
+                <a:cs typeface="Amiri" pitchFamily="2" charset="-78"/>
               </a:rPr>
               <a:t>التَّحْضِيرُ لِلدَّرْسِ القَادِمِ</a:t>
             </a:r>
@@ -23030,8 +22621,7 @@
                   <a:srgbClr val="8A93A0"/>
                 </a:solidFill>
                 <a:latin typeface="Calibri" pitchFamily="34" charset="0"/>
-                <a:ea typeface="Calibri" pitchFamily="34" charset="-122"/>
-                <a:cs typeface="Calibri" pitchFamily="34" charset="-120"/>
+                <a:cs typeface="Amiri" pitchFamily="2" charset="-78"/>
               </a:rPr>
               <a:t>Miftah Arabic · Progression P6 · IGCSE Bridge · P6-L08</a:t>
             </a:r>
@@ -23152,8 +22742,7 @@
                   <a:srgbClr val="C45A3C"/>
                 </a:solidFill>
                 <a:latin typeface="Calibri" pitchFamily="34" charset="0"/>
-                <a:ea typeface="Calibri" pitchFamily="34" charset="-122"/>
-                <a:cs typeface="Calibri" pitchFamily="34" charset="-120"/>
+                <a:cs typeface="Amiri" pitchFamily="2" charset="-78"/>
               </a:rPr>
               <a:t>LEARN THESE 5 WORDS</a:t>
             </a:r>
@@ -23169,8 +22758,7 @@
                   <a:srgbClr val="5A6472"/>
                 </a:solidFill>
                 <a:latin typeface="Calibri" pitchFamily="34" charset="0"/>
-                <a:ea typeface="Calibri" pitchFamily="34" charset="-122"/>
-                <a:cs typeface="Calibri" pitchFamily="34" charset="-120"/>
+                <a:cs typeface="Amiri" pitchFamily="2" charset="-78"/>
               </a:rPr>
               <a:t>for P6-L09 · Mock Examination — Papers 2 and 4 (Reading and Writing)</a:t>
             </a:r>
@@ -23207,9 +22795,8 @@
                 <a:solidFill>
                   <a:srgbClr val="1B3B6F"/>
                 </a:solidFill>
-                <a:latin typeface="Amiri" pitchFamily="34" charset="0"/>
-                <a:ea typeface="Amiri" pitchFamily="34" charset="-122"/>
-                <a:cs typeface="Amiri" pitchFamily="34" charset="-120"/>
+                <a:latin typeface="Amiri" pitchFamily="2" charset="-78"/>
+                <a:cs typeface="Amiri" pitchFamily="2" charset="-78"/>
               </a:rPr>
               <a:t>المَعْنَى العَامُّ</a:t>
             </a:r>
@@ -23247,8 +22834,7 @@
                   <a:srgbClr val="1F2A37"/>
                 </a:solidFill>
                 <a:latin typeface="Calibri" pitchFamily="34" charset="0"/>
-                <a:ea typeface="Calibri" pitchFamily="34" charset="-122"/>
-                <a:cs typeface="Calibri" pitchFamily="34" charset="-120"/>
+                <a:cs typeface="Amiri" pitchFamily="2" charset="-78"/>
               </a:rPr>
               <a:t>general meaning (R1)</a:t>
             </a:r>
@@ -23261,8 +22847,7 @@
                   <a:srgbClr val="5A6472"/>
                 </a:solidFill>
                 <a:latin typeface="Calibri" pitchFamily="34" charset="0"/>
-                <a:ea typeface="Calibri" pitchFamily="34" charset="-122"/>
-                <a:cs typeface="Calibri" pitchFamily="34" charset="-120"/>
+                <a:cs typeface="Amiri" pitchFamily="2" charset="-78"/>
               </a:rPr>
               <a:t>  —</a:t>
             </a:r>
@@ -23299,9 +22884,8 @@
                 <a:solidFill>
                   <a:srgbClr val="1B3B6F"/>
                 </a:solidFill>
-                <a:latin typeface="Amiri" pitchFamily="34" charset="0"/>
-                <a:ea typeface="Amiri" pitchFamily="34" charset="-122"/>
-                <a:cs typeface="Amiri" pitchFamily="34" charset="-120"/>
+                <a:latin typeface="Amiri" pitchFamily="2" charset="-78"/>
+                <a:cs typeface="Amiri" pitchFamily="2" charset="-78"/>
               </a:rPr>
               <a:t>التَّفَاصِيلُ الوَاقِعِيَّةُ</a:t>
             </a:r>
@@ -23339,8 +22923,7 @@
                   <a:srgbClr val="1F2A37"/>
                 </a:solidFill>
                 <a:latin typeface="Calibri" pitchFamily="34" charset="0"/>
-                <a:ea typeface="Calibri" pitchFamily="34" charset="-122"/>
-                <a:cs typeface="Calibri" pitchFamily="34" charset="-120"/>
+                <a:cs typeface="Amiri" pitchFamily="2" charset="-78"/>
               </a:rPr>
               <a:t>factual details (R2)</a:t>
             </a:r>
@@ -23353,8 +22936,7 @@
                   <a:srgbClr val="5A6472"/>
                 </a:solidFill>
                 <a:latin typeface="Calibri" pitchFamily="34" charset="0"/>
-                <a:ea typeface="Calibri" pitchFamily="34" charset="-122"/>
-                <a:cs typeface="Calibri" pitchFamily="34" charset="-120"/>
+                <a:cs typeface="Amiri" pitchFamily="2" charset="-78"/>
               </a:rPr>
               <a:t>  sg. تَفْصِيلٌ</a:t>
             </a:r>
@@ -23391,9 +22973,8 @@
                 <a:solidFill>
                   <a:srgbClr val="1B3B6F"/>
                 </a:solidFill>
-                <a:latin typeface="Amiri" pitchFamily="34" charset="0"/>
-                <a:ea typeface="Amiri" pitchFamily="34" charset="-122"/>
-                <a:cs typeface="Amiri" pitchFamily="34" charset="-120"/>
+                <a:latin typeface="Amiri" pitchFamily="2" charset="-78"/>
+                <a:cs typeface="Amiri" pitchFamily="2" charset="-78"/>
               </a:rPr>
               <a:t>الأَدِلَّةُ النَّصِّيَّةُ</a:t>
             </a:r>
@@ -23431,8 +23012,7 @@
                   <a:srgbClr val="1F2A37"/>
                 </a:solidFill>
                 <a:latin typeface="Calibri" pitchFamily="34" charset="0"/>
-                <a:ea typeface="Calibri" pitchFamily="34" charset="-122"/>
-                <a:cs typeface="Calibri" pitchFamily="34" charset="-120"/>
+                <a:cs typeface="Amiri" pitchFamily="2" charset="-78"/>
               </a:rPr>
               <a:t>textual evidence</a:t>
             </a:r>
@@ -23445,8 +23025,7 @@
                   <a:srgbClr val="5A6472"/>
                 </a:solidFill>
                 <a:latin typeface="Calibri" pitchFamily="34" charset="0"/>
-                <a:ea typeface="Calibri" pitchFamily="34" charset="-122"/>
-                <a:cs typeface="Calibri" pitchFamily="34" charset="-120"/>
+                <a:cs typeface="Amiri" pitchFamily="2" charset="-78"/>
               </a:rPr>
               <a:t>  sg. دَلِيلٌ</a:t>
             </a:r>
@@ -23483,9 +23062,8 @@
                 <a:solidFill>
                   <a:srgbClr val="1B3B6F"/>
                 </a:solidFill>
-                <a:latin typeface="Amiri" pitchFamily="34" charset="0"/>
-                <a:ea typeface="Amiri" pitchFamily="34" charset="-122"/>
-                <a:cs typeface="Amiri" pitchFamily="34" charset="-120"/>
+                <a:latin typeface="Amiri" pitchFamily="2" charset="-78"/>
+                <a:cs typeface="Amiri" pitchFamily="2" charset="-78"/>
               </a:rPr>
               <a:t>اسْتِنْتَاجُ الكَلِمَاتِ المَجْهُولَةِ</a:t>
             </a:r>
@@ -23523,8 +23101,7 @@
                   <a:srgbClr val="1F2A37"/>
                 </a:solidFill>
                 <a:latin typeface="Calibri" pitchFamily="34" charset="0"/>
-                <a:ea typeface="Calibri" pitchFamily="34" charset="-122"/>
-                <a:cs typeface="Calibri" pitchFamily="34" charset="-120"/>
+                <a:cs typeface="Amiri" pitchFamily="2" charset="-78"/>
               </a:rPr>
               <a:t>deducing unknown words</a:t>
             </a:r>
@@ -23537,8 +23114,7 @@
                   <a:srgbClr val="5A6472"/>
                 </a:solidFill>
                 <a:latin typeface="Calibri" pitchFamily="34" charset="0"/>
-                <a:ea typeface="Calibri" pitchFamily="34" charset="-122"/>
-                <a:cs typeface="Calibri" pitchFamily="34" charset="-120"/>
+                <a:cs typeface="Amiri" pitchFamily="2" charset="-78"/>
               </a:rPr>
               <a:t>  —</a:t>
             </a:r>
@@ -23575,9 +23151,8 @@
                 <a:solidFill>
                   <a:srgbClr val="1B3B6F"/>
                 </a:solidFill>
-                <a:latin typeface="Amiri" pitchFamily="34" charset="0"/>
-                <a:ea typeface="Amiri" pitchFamily="34" charset="-122"/>
-                <a:cs typeface="Amiri" pitchFamily="34" charset="-120"/>
+                <a:latin typeface="Amiri" pitchFamily="2" charset="-78"/>
+                <a:cs typeface="Amiri" pitchFamily="2" charset="-78"/>
               </a:rPr>
               <a:t>الدِّقَّةُ فِي الاخْتِيَارِ</a:t>
             </a:r>
@@ -23615,8 +23190,7 @@
                   <a:srgbClr val="1F2A37"/>
                 </a:solidFill>
                 <a:latin typeface="Calibri" pitchFamily="34" charset="0"/>
-                <a:ea typeface="Calibri" pitchFamily="34" charset="-122"/>
-                <a:cs typeface="Calibri" pitchFamily="34" charset="-120"/>
+                <a:cs typeface="Amiri" pitchFamily="2" charset="-78"/>
               </a:rPr>
               <a:t>accuracy in selection</a:t>
             </a:r>
@@ -23629,8 +23203,7 @@
                   <a:srgbClr val="5A6472"/>
                 </a:solidFill>
                 <a:latin typeface="Calibri" pitchFamily="34" charset="0"/>
-                <a:ea typeface="Calibri" pitchFamily="34" charset="-122"/>
-                <a:cs typeface="Calibri" pitchFamily="34" charset="-120"/>
+                <a:cs typeface="Amiri" pitchFamily="2" charset="-78"/>
               </a:rPr>
               <a:t>  —</a:t>
             </a:r>
@@ -23668,8 +23241,7 @@
                   <a:srgbClr val="C45A3C"/>
                 </a:solidFill>
                 <a:latin typeface="Calibri" pitchFamily="34" charset="0"/>
-                <a:ea typeface="Calibri" pitchFamily="34" charset="-122"/>
-                <a:cs typeface="Calibri" pitchFamily="34" charset="-120"/>
+                <a:cs typeface="Amiri" pitchFamily="2" charset="-78"/>
               </a:rPr>
               <a:t>AND ANSWER ONE QUESTION</a:t>
             </a:r>
@@ -23707,8 +23279,7 @@
                   <a:srgbClr val="1F2A37"/>
                 </a:solidFill>
                 <a:latin typeface="Calibri" pitchFamily="34" charset="0"/>
-                <a:ea typeface="Calibri" pitchFamily="34" charset="-122"/>
-                <a:cs typeface="Calibri" pitchFamily="34" charset="-120"/>
+                <a:cs typeface="Amiri" pitchFamily="2" charset="-78"/>
               </a:rPr>
               <a:t>What will you do first when you open the reading paper?</a:t>
             </a:r>
@@ -23748,9 +23319,8 @@
                 <a:solidFill>
                   <a:srgbClr val="1B3B6F"/>
                 </a:solidFill>
-                <a:latin typeface="Amiri" pitchFamily="34" charset="0"/>
-                <a:ea typeface="Amiri" pitchFamily="34" charset="-122"/>
-                <a:cs typeface="Amiri" pitchFamily="34" charset="-120"/>
+                <a:latin typeface="Amiri" pitchFamily="2" charset="-78"/>
+                <a:cs typeface="Amiri" pitchFamily="2" charset="-78"/>
               </a:rPr>
               <a:t>سَأَقْرَأُ ______ أَوَّلًا، ثُمَّ سَأَبْحَثُ عَنْ ______ .</a:t>
             </a:r>
@@ -23788,8 +23358,7 @@
                   <a:srgbClr val="1B3B6F"/>
                 </a:solidFill>
                 <a:latin typeface="Calibri" pitchFamily="34" charset="0"/>
-                <a:ea typeface="Calibri" pitchFamily="34" charset="-122"/>
-                <a:cs typeface="Calibri" pitchFamily="34" charset="-120"/>
+                <a:cs typeface="Amiri" pitchFamily="2" charset="-78"/>
               </a:rPr>
               <a:t>HOMEWORK — CHOOSE YOUR ROUTE</a:t>
             </a:r>
@@ -23888,8 +23457,7 @@
                   <a:srgbClr val="FFFFFF"/>
                 </a:solidFill>
                 <a:latin typeface="Calibri" pitchFamily="34" charset="0"/>
-                <a:ea typeface="Calibri" pitchFamily="34" charset="-122"/>
-                <a:cs typeface="Calibri" pitchFamily="34" charset="-120"/>
+                <a:cs typeface="Amiri" pitchFamily="2" charset="-78"/>
               </a:rPr>
               <a:t>CORE</a:t>
             </a:r>
@@ -23927,8 +23495,7 @@
                   <a:srgbClr val="1F2A37"/>
                 </a:solidFill>
                 <a:latin typeface="Calibri" pitchFamily="34" charset="0"/>
-                <a:ea typeface="Calibri" pitchFamily="34" charset="-122"/>
-                <a:cs typeface="Calibri" pitchFamily="34" charset="-120"/>
+                <a:cs typeface="Amiri" pitchFamily="2" charset="-78"/>
               </a:rPr>
               <a:t>Re-listen to Text 1 (teacher recording) and correct your answers; revise the five reading words.</a:t>
             </a:r>
@@ -24027,8 +23594,7 @@
                   <a:srgbClr val="FFFFFF"/>
                 </a:solidFill>
                 <a:latin typeface="Calibri" pitchFamily="34" charset="0"/>
-                <a:ea typeface="Calibri" pitchFamily="34" charset="-122"/>
-                <a:cs typeface="Calibri" pitchFamily="34" charset="-120"/>
+                <a:cs typeface="Amiri" pitchFamily="2" charset="-78"/>
               </a:rPr>
               <a:t>DEVELOP</a:t>
             </a:r>
@@ -24066,8 +23632,7 @@
                   <a:srgbClr val="1F2A37"/>
                 </a:solidFill>
                 <a:latin typeface="Calibri" pitchFamily="34" charset="0"/>
-                <a:ea typeface="Calibri" pitchFamily="34" charset="-122"/>
-                <a:cs typeface="Calibri" pitchFamily="34" charset="-120"/>
+                <a:cs typeface="Amiri" pitchFamily="2" charset="-78"/>
               </a:rPr>
               <a:t>Rewrite the three scripts’ signal phrases (</a:t>
             </a:r>
@@ -24079,9 +23644,8 @@
                 <a:solidFill>
                   <a:srgbClr val="1F2A37"/>
                 </a:solidFill>
-                <a:latin typeface="Amiri" pitchFamily="34" charset="0"/>
-                <a:ea typeface="Amiri" pitchFamily="34" charset="-122"/>
-                <a:cs typeface="Amiri" pitchFamily="34" charset="-120"/>
+                <a:latin typeface="Amiri" pitchFamily="2" charset="-78"/>
+                <a:cs typeface="Amiri" pitchFamily="2" charset="-78"/>
               </a:rPr>
               <a:t>لَوْ</a:t>
             </a:r>
@@ -24094,8 +23658,7 @@
                   <a:srgbClr val="1F2A37"/>
                 </a:solidFill>
                 <a:latin typeface="Calibri" pitchFamily="34" charset="0"/>
-                <a:ea typeface="Calibri" pitchFamily="34" charset="-122"/>
-                <a:cs typeface="Calibri" pitchFamily="34" charset="-120"/>
+                <a:cs typeface="Amiri" pitchFamily="2" charset="-78"/>
               </a:rPr>
               <a:t> · </a:t>
             </a:r>
@@ -24107,9 +23670,8 @@
                 <a:solidFill>
                   <a:srgbClr val="1F2A37"/>
                 </a:solidFill>
-                <a:latin typeface="Amiri" pitchFamily="34" charset="0"/>
-                <a:ea typeface="Amiri" pitchFamily="34" charset="-122"/>
-                <a:cs typeface="Amiri" pitchFamily="34" charset="-120"/>
+                <a:latin typeface="Amiri" pitchFamily="2" charset="-78"/>
+                <a:cs typeface="Amiri" pitchFamily="2" charset="-78"/>
               </a:rPr>
               <a:t>غَيْرَ أَنَّ</a:t>
             </a:r>
@@ -24122,8 +23684,7 @@
                   <a:srgbClr val="1F2A37"/>
                 </a:solidFill>
                 <a:latin typeface="Calibri" pitchFamily="34" charset="0"/>
-                <a:ea typeface="Calibri" pitchFamily="34" charset="-122"/>
-                <a:cs typeface="Calibri" pitchFamily="34" charset="-120"/>
+                <a:cs typeface="Amiri" pitchFamily="2" charset="-78"/>
               </a:rPr>
               <a:t> · </a:t>
             </a:r>
@@ -24135,9 +23696,8 @@
                 <a:solidFill>
                   <a:srgbClr val="1F2A37"/>
                 </a:solidFill>
-                <a:latin typeface="Amiri" pitchFamily="34" charset="0"/>
-                <a:ea typeface="Amiri" pitchFamily="34" charset="-122"/>
-                <a:cs typeface="Amiri" pitchFamily="34" charset="-120"/>
+                <a:latin typeface="Amiri" pitchFamily="2" charset="-78"/>
+                <a:cs typeface="Amiri" pitchFamily="2" charset="-78"/>
               </a:rPr>
               <a:t>يَتَطَلَّبُ</a:t>
             </a:r>
@@ -24150,8 +23710,7 @@
                   <a:srgbClr val="1F2A37"/>
                 </a:solidFill>
                 <a:latin typeface="Calibri" pitchFamily="34" charset="0"/>
-                <a:ea typeface="Calibri" pitchFamily="34" charset="-122"/>
-                <a:cs typeface="Calibri" pitchFamily="34" charset="-120"/>
+                <a:cs typeface="Amiri" pitchFamily="2" charset="-78"/>
               </a:rPr>
               <a:t>) in your book; revise the five reading words.</a:t>
             </a:r>
@@ -24250,8 +23809,7 @@
                   <a:srgbClr val="FFFFFF"/>
                 </a:solidFill>
                 <a:latin typeface="Calibri" pitchFamily="34" charset="0"/>
-                <a:ea typeface="Calibri" pitchFamily="34" charset="-122"/>
-                <a:cs typeface="Calibri" pitchFamily="34" charset="-120"/>
+                <a:cs typeface="Amiri" pitchFamily="2" charset="-78"/>
               </a:rPr>
               <a:t>STRETCH</a:t>
             </a:r>
@@ -24289,8 +23847,7 @@
                   <a:srgbClr val="1F2A37"/>
                 </a:solidFill>
                 <a:latin typeface="Calibri" pitchFamily="34" charset="0"/>
-                <a:ea typeface="Calibri" pitchFamily="34" charset="-122"/>
-                <a:cs typeface="Calibri" pitchFamily="34" charset="-120"/>
+                <a:cs typeface="Amiri" pitchFamily="2" charset="-78"/>
               </a:rPr>
               <a:t>Explain in writing why each wrong answer was wrong; revise the five reading words.</a:t>
             </a:r>
@@ -24328,8 +23885,7 @@
                   <a:srgbClr val="8A93A0"/>
                 </a:solidFill>
                 <a:latin typeface="Calibri" pitchFamily="34" charset="0"/>
-                <a:ea typeface="Calibri" pitchFamily="34" charset="-122"/>
-                <a:cs typeface="Calibri" pitchFamily="34" charset="-120"/>
+                <a:cs typeface="Amiri" pitchFamily="2" charset="-78"/>
               </a:rPr>
               <a:t>17 / 18</a:t>
             </a:r>
@@ -24473,8 +24029,7 @@
                   <a:srgbClr val="D4AF37"/>
                 </a:solidFill>
                 <a:latin typeface="Calibri" pitchFamily="34" charset="0"/>
-                <a:ea typeface="Calibri" pitchFamily="34" charset="-122"/>
-                <a:cs typeface="Calibri" pitchFamily="34" charset="-120"/>
+                <a:cs typeface="Amiri" pitchFamily="2" charset="-78"/>
               </a:rPr>
               <a:t>P6-L08 COMPLETE</a:t>
             </a:r>
@@ -24511,9 +24066,8 @@
                 <a:solidFill>
                   <a:srgbClr val="FFFFFF"/>
                 </a:solidFill>
-                <a:latin typeface="Amiri" pitchFamily="34" charset="0"/>
-                <a:ea typeface="Amiri" pitchFamily="34" charset="-122"/>
-                <a:cs typeface="Amiri" pitchFamily="34" charset="-120"/>
+                <a:latin typeface="Amiri" pitchFamily="2" charset="-78"/>
+                <a:cs typeface="Amiri" pitchFamily="2" charset="-78"/>
               </a:rPr>
               <a:t>أَحْسَنْتُمْ! إِلَى اللِّقَاءِ</a:t>
             </a:r>
@@ -24551,8 +24105,7 @@
                   <a:srgbClr val="C6D2E6"/>
                 </a:solidFill>
                 <a:latin typeface="Calibri" pitchFamily="34" charset="0"/>
-                <a:ea typeface="Calibri" pitchFamily="34" charset="-122"/>
-                <a:cs typeface="Calibri" pitchFamily="34" charset="-120"/>
+                <a:cs typeface="Amiri" pitchFamily="2" charset="-78"/>
               </a:rPr>
               <a:t>Well done — see you next lesson.</a:t>
             </a:r>
@@ -24590,8 +24143,7 @@
                   <a:srgbClr val="D4AF37"/>
                 </a:solidFill>
                 <a:latin typeface="Calibri" pitchFamily="34" charset="0"/>
-                <a:ea typeface="Calibri" pitchFamily="34" charset="-122"/>
-                <a:cs typeface="Calibri" pitchFamily="34" charset="-120"/>
+                <a:cs typeface="Amiri" pitchFamily="2" charset="-78"/>
               </a:rPr>
               <a:t>NEXT LESSON</a:t>
             </a:r>
@@ -24629,8 +24181,7 @@
                   <a:srgbClr val="FFFFFF"/>
                 </a:solidFill>
                 <a:latin typeface="Cambria" pitchFamily="34" charset="0"/>
-                <a:ea typeface="Cambria" pitchFamily="34" charset="-122"/>
-                <a:cs typeface="Cambria" pitchFamily="34" charset="-120"/>
+                <a:cs typeface="Amiri" pitchFamily="2" charset="-78"/>
               </a:rPr>
               <a:t>P6-L09 · Mock Examination — Papers 2 and 4 (Reading and Writing)</a:t>
             </a:r>
@@ -24667,9 +24218,8 @@
                 <a:solidFill>
                   <a:srgbClr val="D4AF37"/>
                 </a:solidFill>
-                <a:latin typeface="Amiri" pitchFamily="34" charset="0"/>
-                <a:ea typeface="Amiri" pitchFamily="34" charset="-122"/>
-                <a:cs typeface="Amiri" pitchFamily="34" charset="-120"/>
+                <a:latin typeface="Amiri" pitchFamily="2" charset="-78"/>
+                <a:cs typeface="Amiri" pitchFamily="2" charset="-78"/>
               </a:rPr>
               <a:t>امْتِحَانُ المُحَاكَاةِ — الوَرَقَتَانِ الثَّانِيَةُ وَالرَّابِعَةُ</a:t>
             </a:r>
@@ -24707,8 +24257,7 @@
                   <a:srgbClr val="FFFFFF"/>
                 </a:solidFill>
                 <a:latin typeface="Calibri" pitchFamily="34" charset="0"/>
-                <a:ea typeface="Calibri" pitchFamily="34" charset="-122"/>
-                <a:cs typeface="Calibri" pitchFamily="34" charset="-120"/>
+                <a:cs typeface="Amiri" pitchFamily="2" charset="-78"/>
               </a:rPr>
               <a:t>Remember: the score is information, not a judgement. Read, label, listen for gist, verify — and never leave a blank.</a:t>
             </a:r>
@@ -24802,9 +24351,8 @@
                 <a:solidFill>
                   <a:srgbClr val="D4AF37"/>
                 </a:solidFill>
-                <a:latin typeface="Amiri" pitchFamily="34" charset="0"/>
-                <a:ea typeface="Amiri" pitchFamily="34" charset="-122"/>
-                <a:cs typeface="Amiri" pitchFamily="34" charset="-120"/>
+                <a:latin typeface="Amiri" pitchFamily="2" charset="-78"/>
+                <a:cs typeface="Amiri" pitchFamily="2" charset="-78"/>
               </a:rPr>
               <a:t>م</a:t>
             </a:r>
@@ -24842,8 +24390,7 @@
                   <a:srgbClr val="1B3B6F"/>
                 </a:solidFill>
                 <a:latin typeface="Cambria" pitchFamily="34" charset="0"/>
-                <a:ea typeface="Cambria" pitchFamily="34" charset="-122"/>
-                <a:cs typeface="Cambria" pitchFamily="34" charset="-120"/>
+                <a:cs typeface="Amiri" pitchFamily="2" charset="-78"/>
               </a:rPr>
               <a:t>Al Madina Online School</a:t>
             </a:r>
@@ -24881,8 +24428,7 @@
                   <a:srgbClr val="8A6D1E"/>
                 </a:solidFill>
                 <a:latin typeface="Calibri" pitchFamily="34" charset="0"/>
-                <a:ea typeface="Calibri" pitchFamily="34" charset="-122"/>
-                <a:cs typeface="Calibri" pitchFamily="34" charset="-120"/>
+                <a:cs typeface="Amiri" pitchFamily="2" charset="-78"/>
               </a:rPr>
               <a:t>ARABIC DEPARTMENT · MIFTAH ARABIC · IGCSE 0544</a:t>
             </a:r>
@@ -24947,8 +24493,7 @@
                   <a:srgbClr val="FFFFFF"/>
                 </a:solidFill>
                 <a:latin typeface="Calibri" pitchFamily="34" charset="0"/>
-                <a:ea typeface="Calibri" pitchFamily="34" charset="-122"/>
-                <a:cs typeface="Calibri" pitchFamily="34" charset="-120"/>
+                <a:cs typeface="Amiri" pitchFamily="2" charset="-78"/>
               </a:rPr>
               <a:t>P6-L08 · IGCSE Bridge</a:t>
             </a:r>
@@ -25013,8 +24558,7 @@
                   <a:srgbClr val="FFFFFF"/>
                 </a:solidFill>
                 <a:latin typeface="Calibri" pitchFamily="34" charset="0"/>
-                <a:ea typeface="Calibri" pitchFamily="34" charset="-122"/>
-                <a:cs typeface="Calibri" pitchFamily="34" charset="-120"/>
+                <a:cs typeface="Amiri" pitchFamily="2" charset="-78"/>
               </a:rPr>
               <a:t>WELCOME · 1 MIN</a:t>
             </a:r>
@@ -25052,8 +24596,7 @@
                   <a:srgbClr val="5A6472"/>
                 </a:solidFill>
                 <a:latin typeface="Calibri" pitchFamily="34" charset="0"/>
-                <a:ea typeface="Calibri" pitchFamily="34" charset="-122"/>
-                <a:cs typeface="Calibri" pitchFamily="34" charset="-120"/>
+                <a:cs typeface="Amiri" pitchFamily="2" charset="-78"/>
               </a:rPr>
               <a:t>BEFORE WE BEGIN</a:t>
             </a:r>
@@ -25091,8 +24634,7 @@
                   <a:srgbClr val="1B3B6F"/>
                 </a:solidFill>
                 <a:latin typeface="Cambria" pitchFamily="34" charset="0"/>
-                <a:ea typeface="Cambria" pitchFamily="34" charset="-122"/>
-                <a:cs typeface="Cambria" pitchFamily="34" charset="-120"/>
+                <a:cs typeface="Amiri" pitchFamily="2" charset="-78"/>
               </a:rPr>
               <a:t>Our online classroom</a:t>
             </a:r>
@@ -25129,9 +24671,8 @@
                 <a:solidFill>
                   <a:srgbClr val="8A6D1E"/>
                 </a:solidFill>
-                <a:latin typeface="Amiri" pitchFamily="34" charset="0"/>
-                <a:ea typeface="Amiri" pitchFamily="34" charset="-122"/>
-                <a:cs typeface="Amiri" pitchFamily="34" charset="-120"/>
+                <a:latin typeface="Amiri" pitchFamily="2" charset="-78"/>
+                <a:cs typeface="Amiri" pitchFamily="2" charset="-78"/>
               </a:rPr>
               <a:t>آدَابُ الصَّفِّ</a:t>
             </a:r>
@@ -25169,8 +24710,7 @@
                   <a:srgbClr val="8A93A0"/>
                 </a:solidFill>
                 <a:latin typeface="Calibri" pitchFamily="34" charset="0"/>
-                <a:ea typeface="Calibri" pitchFamily="34" charset="-122"/>
-                <a:cs typeface="Calibri" pitchFamily="34" charset="-120"/>
+                <a:cs typeface="Amiri" pitchFamily="2" charset="-78"/>
               </a:rPr>
               <a:t>Miftah Arabic · Progression P6 · IGCSE Bridge · P6-L08</a:t>
             </a:r>
@@ -25291,8 +24831,7 @@
                   <a:srgbClr val="1B3B6F"/>
                 </a:solidFill>
                 <a:latin typeface="Calibri" pitchFamily="34" charset="0"/>
-                <a:ea typeface="Calibri" pitchFamily="34" charset="-122"/>
-                <a:cs typeface="Calibri" pitchFamily="34" charset="-120"/>
+                <a:cs typeface="Amiri" pitchFamily="2" charset="-78"/>
               </a:rPr>
               <a:t>Camera on</a:t>
             </a:r>
@@ -25308,8 +24847,7 @@
                   <a:srgbClr val="5A6472"/>
                 </a:solidFill>
                 <a:latin typeface="Calibri" pitchFamily="34" charset="0"/>
-                <a:ea typeface="Calibri" pitchFamily="34" charset="-122"/>
-                <a:cs typeface="Calibri" pitchFamily="34" charset="-120"/>
+                <a:cs typeface="Amiri" pitchFamily="2" charset="-78"/>
               </a:rPr>
               <a:t>So I can see you learning and help you quickly.</a:t>
             </a:r>
@@ -25430,8 +24968,7 @@
                   <a:srgbClr val="1B3B6F"/>
                 </a:solidFill>
                 <a:latin typeface="Calibri" pitchFamily="34" charset="0"/>
-                <a:ea typeface="Calibri" pitchFamily="34" charset="-122"/>
-                <a:cs typeface="Calibri" pitchFamily="34" charset="-120"/>
+                <a:cs typeface="Amiri" pitchFamily="2" charset="-78"/>
               </a:rPr>
               <a:t>Mic muted</a:t>
             </a:r>
@@ -25447,8 +24984,7 @@
                   <a:srgbClr val="5A6472"/>
                 </a:solidFill>
                 <a:latin typeface="Calibri" pitchFamily="34" charset="0"/>
-                <a:ea typeface="Calibri" pitchFamily="34" charset="-122"/>
-                <a:cs typeface="Calibri" pitchFamily="34" charset="-120"/>
+                <a:cs typeface="Amiri" pitchFamily="2" charset="-78"/>
               </a:rPr>
               <a:t>Unmute only when invited to speak.</a:t>
             </a:r>
@@ -25569,8 +25105,7 @@
                   <a:srgbClr val="1B3B6F"/>
                 </a:solidFill>
                 <a:latin typeface="Calibri" pitchFamily="34" charset="0"/>
-                <a:ea typeface="Calibri" pitchFamily="34" charset="-122"/>
-                <a:cs typeface="Calibri" pitchFamily="34" charset="-120"/>
+                <a:cs typeface="Amiri" pitchFamily="2" charset="-78"/>
               </a:rPr>
               <a:t>Chat for learning</a:t>
             </a:r>
@@ -25586,8 +25121,7 @@
                   <a:srgbClr val="5A6472"/>
                 </a:solidFill>
                 <a:latin typeface="Calibri" pitchFamily="34" charset="0"/>
-                <a:ea typeface="Calibri" pitchFamily="34" charset="-122"/>
-                <a:cs typeface="Calibri" pitchFamily="34" charset="-120"/>
+                <a:cs typeface="Amiri" pitchFamily="2" charset="-78"/>
               </a:rPr>
               <a:t>Answers, questions and Arabic only.</a:t>
             </a:r>
@@ -25708,8 +25242,7 @@
                   <a:srgbClr val="1B3B6F"/>
                 </a:solidFill>
                 <a:latin typeface="Calibri" pitchFamily="34" charset="0"/>
-                <a:ea typeface="Calibri" pitchFamily="34" charset="-122"/>
-                <a:cs typeface="Calibri" pitchFamily="34" charset="-120"/>
+                <a:cs typeface="Amiri" pitchFamily="2" charset="-78"/>
               </a:rPr>
               <a:t>Raise your hand</a:t>
             </a:r>
@@ -25725,8 +25258,7 @@
                   <a:srgbClr val="5A6472"/>
                 </a:solidFill>
                 <a:latin typeface="Calibri" pitchFamily="34" charset="0"/>
-                <a:ea typeface="Calibri" pitchFamily="34" charset="-122"/>
-                <a:cs typeface="Calibri" pitchFamily="34" charset="-120"/>
+                <a:cs typeface="Amiri" pitchFamily="2" charset="-78"/>
               </a:rPr>
               <a:t>Use the hand button to ask for help.</a:t>
             </a:r>
@@ -25798,8 +25330,7 @@
                   <a:srgbClr val="1B3B6F"/>
                 </a:solidFill>
                 <a:latin typeface="Calibri" pitchFamily="34" charset="0"/>
-                <a:ea typeface="Calibri" pitchFamily="34" charset="-122"/>
-                <a:cs typeface="Calibri" pitchFamily="34" charset="-120"/>
+                <a:cs typeface="Amiri" pitchFamily="2" charset="-78"/>
               </a:rPr>
               <a:t>HOW WE TALK — THE ORACY CODE</a:t>
             </a:r>
@@ -25862,8 +25393,7 @@
                   <a:srgbClr val="D4AF37"/>
                 </a:solidFill>
                 <a:latin typeface="Arial" pitchFamily="34" charset="0"/>
-                <a:ea typeface="Arial" pitchFamily="34" charset="-122"/>
-                <a:cs typeface="Arial" pitchFamily="34" charset="-120"/>
+                <a:cs typeface="Amiri" pitchFamily="2" charset="-78"/>
               </a:rPr>
               <a:t>●</a:t>
             </a:r>
@@ -25901,8 +25431,7 @@
                   <a:srgbClr val="1B3B6F"/>
                 </a:solidFill>
                 <a:latin typeface="Calibri" pitchFamily="34" charset="0"/>
-                <a:ea typeface="Calibri" pitchFamily="34" charset="-122"/>
-                <a:cs typeface="Calibri" pitchFamily="34" charset="-120"/>
+                <a:cs typeface="Amiri" pitchFamily="2" charset="-78"/>
               </a:rPr>
               <a:t>Think</a:t>
             </a:r>
@@ -25918,8 +25447,7 @@
                   <a:srgbClr val="5A6472"/>
                 </a:solidFill>
                 <a:latin typeface="Calibri" pitchFamily="34" charset="0"/>
-                <a:ea typeface="Calibri" pitchFamily="34" charset="-122"/>
-                <a:cs typeface="Calibri" pitchFamily="34" charset="-120"/>
+                <a:cs typeface="Amiri" pitchFamily="2" charset="-78"/>
               </a:rPr>
               <a:t>silent preparation</a:t>
             </a:r>
@@ -25982,8 +25510,7 @@
                   <a:srgbClr val="D4AF37"/>
                 </a:solidFill>
                 <a:latin typeface="Arial" pitchFamily="34" charset="0"/>
-                <a:ea typeface="Arial" pitchFamily="34" charset="-122"/>
-                <a:cs typeface="Arial" pitchFamily="34" charset="-120"/>
+                <a:cs typeface="Amiri" pitchFamily="2" charset="-78"/>
               </a:rPr>
               <a:t>↔</a:t>
             </a:r>
@@ -26021,8 +25548,7 @@
                   <a:srgbClr val="1B3B6F"/>
                 </a:solidFill>
                 <a:latin typeface="Calibri" pitchFamily="34" charset="0"/>
-                <a:ea typeface="Calibri" pitchFamily="34" charset="-122"/>
-                <a:cs typeface="Calibri" pitchFamily="34" charset="-120"/>
+                <a:cs typeface="Amiri" pitchFamily="2" charset="-78"/>
               </a:rPr>
               <a:t>Rehearse</a:t>
             </a:r>
@@ -26038,8 +25564,7 @@
                   <a:srgbClr val="5A6472"/>
                 </a:solidFill>
                 <a:latin typeface="Calibri" pitchFamily="34" charset="0"/>
-                <a:ea typeface="Calibri" pitchFamily="34" charset="-122"/>
-                <a:cs typeface="Calibri" pitchFamily="34" charset="-120"/>
+                <a:cs typeface="Amiri" pitchFamily="2" charset="-78"/>
               </a:rPr>
               <a:t>both partners speak</a:t>
             </a:r>
@@ -26102,8 +25627,7 @@
                   <a:srgbClr val="D4AF37"/>
                 </a:solidFill>
                 <a:latin typeface="Arial" pitchFamily="34" charset="0"/>
-                <a:ea typeface="Arial" pitchFamily="34" charset="-122"/>
-                <a:cs typeface="Arial" pitchFamily="34" charset="-120"/>
+                <a:cs typeface="Amiri" pitchFamily="2" charset="-78"/>
               </a:rPr>
               <a:t>+</a:t>
             </a:r>
@@ -26141,8 +25665,7 @@
                   <a:srgbClr val="1B3B6F"/>
                 </a:solidFill>
                 <a:latin typeface="Calibri" pitchFamily="34" charset="0"/>
-                <a:ea typeface="Calibri" pitchFamily="34" charset="-122"/>
-                <a:cs typeface="Calibri" pitchFamily="34" charset="-120"/>
+                <a:cs typeface="Amiri" pitchFamily="2" charset="-78"/>
               </a:rPr>
               <a:t>Build</a:t>
             </a:r>
@@ -26158,8 +25681,7 @@
                   <a:srgbClr val="5A6472"/>
                 </a:solidFill>
                 <a:latin typeface="Calibri" pitchFamily="34" charset="0"/>
-                <a:ea typeface="Calibri" pitchFamily="34" charset="-122"/>
-                <a:cs typeface="Calibri" pitchFamily="34" charset="-120"/>
+                <a:cs typeface="Amiri" pitchFamily="2" charset="-78"/>
               </a:rPr>
               <a:t>add a reason or detail</a:t>
             </a:r>
@@ -26222,8 +25744,7 @@
                   <a:srgbClr val="D4AF37"/>
                 </a:solidFill>
                 <a:latin typeface="Arial" pitchFamily="34" charset="0"/>
-                <a:ea typeface="Arial" pitchFamily="34" charset="-122"/>
-                <a:cs typeface="Arial" pitchFamily="34" charset="-120"/>
+                <a:cs typeface="Amiri" pitchFamily="2" charset="-78"/>
               </a:rPr>
               <a:t>?</a:t>
             </a:r>
@@ -26261,8 +25782,7 @@
                   <a:srgbClr val="1B3B6F"/>
                 </a:solidFill>
                 <a:latin typeface="Calibri" pitchFamily="34" charset="0"/>
-                <a:ea typeface="Calibri" pitchFamily="34" charset="-122"/>
-                <a:cs typeface="Calibri" pitchFamily="34" charset="-120"/>
+                <a:cs typeface="Amiri" pitchFamily="2" charset="-78"/>
               </a:rPr>
               <a:t>Challenge</a:t>
             </a:r>
@@ -26278,8 +25798,7 @@
                   <a:srgbClr val="5A6472"/>
                 </a:solidFill>
                 <a:latin typeface="Calibri" pitchFamily="34" charset="0"/>
-                <a:ea typeface="Calibri" pitchFamily="34" charset="-122"/>
-                <a:cs typeface="Calibri" pitchFamily="34" charset="-120"/>
+                <a:cs typeface="Amiri" pitchFamily="2" charset="-78"/>
               </a:rPr>
               <a:t>question respectfully</a:t>
             </a:r>
@@ -26342,8 +25861,7 @@
                   <a:srgbClr val="D4AF37"/>
                 </a:solidFill>
                 <a:latin typeface="Arial" pitchFamily="34" charset="0"/>
-                <a:ea typeface="Arial" pitchFamily="34" charset="-122"/>
-                <a:cs typeface="Arial" pitchFamily="34" charset="-120"/>
+                <a:cs typeface="Amiri" pitchFamily="2" charset="-78"/>
               </a:rPr>
               <a:t>◎</a:t>
             </a:r>
@@ -26381,8 +25899,7 @@
                   <a:srgbClr val="1B3B6F"/>
                 </a:solidFill>
                 <a:latin typeface="Calibri" pitchFamily="34" charset="0"/>
-                <a:ea typeface="Calibri" pitchFamily="34" charset="-122"/>
-                <a:cs typeface="Calibri" pitchFamily="34" charset="-120"/>
+                <a:cs typeface="Amiri" pitchFamily="2" charset="-78"/>
               </a:rPr>
               <a:t>Share</a:t>
             </a:r>
@@ -26398,8 +25915,7 @@
                   <a:srgbClr val="5A6472"/>
                 </a:solidFill>
                 <a:latin typeface="Calibri" pitchFamily="34" charset="0"/>
-                <a:ea typeface="Calibri" pitchFamily="34" charset="-122"/>
-                <a:cs typeface="Calibri" pitchFamily="34" charset="-120"/>
+                <a:cs typeface="Amiri" pitchFamily="2" charset="-78"/>
               </a:rPr>
               <a:t>anyone may be invited</a:t>
             </a:r>
@@ -26462,8 +25978,7 @@
                   <a:srgbClr val="D4AF37"/>
                 </a:solidFill>
                 <a:latin typeface="Arial" pitchFamily="34" charset="0"/>
-                <a:ea typeface="Arial" pitchFamily="34" charset="-122"/>
-                <a:cs typeface="Arial" pitchFamily="34" charset="-120"/>
+                <a:cs typeface="Amiri" pitchFamily="2" charset="-78"/>
               </a:rPr>
               <a:t>↺</a:t>
             </a:r>
@@ -26501,8 +26016,7 @@
                   <a:srgbClr val="1B3B6F"/>
                 </a:solidFill>
                 <a:latin typeface="Calibri" pitchFamily="34" charset="0"/>
-                <a:ea typeface="Calibri" pitchFamily="34" charset="-122"/>
-                <a:cs typeface="Calibri" pitchFamily="34" charset="-120"/>
+                <a:cs typeface="Amiri" pitchFamily="2" charset="-78"/>
               </a:rPr>
               <a:t>Summarise</a:t>
             </a:r>
@@ -26518,8 +26032,7 @@
                   <a:srgbClr val="5A6472"/>
                 </a:solidFill>
                 <a:latin typeface="Calibri" pitchFamily="34" charset="0"/>
-                <a:ea typeface="Calibri" pitchFamily="34" charset="-122"/>
-                <a:cs typeface="Calibri" pitchFamily="34" charset="-120"/>
+                <a:cs typeface="Amiri" pitchFamily="2" charset="-78"/>
               </a:rPr>
               <a:t>say it more precisely</a:t>
             </a:r>
@@ -26557,8 +26070,7 @@
                   <a:srgbClr val="8A6D1E"/>
                 </a:solidFill>
                 <a:latin typeface="Calibri" pitchFamily="34" charset="0"/>
-                <a:ea typeface="Calibri" pitchFamily="34" charset="-122"/>
-                <a:cs typeface="Calibri" pitchFamily="34" charset="-120"/>
+                <a:cs typeface="Amiri" pitchFamily="2" charset="-78"/>
               </a:rPr>
               <a:t>I will always give you thinking and practice time before I ask anyone. Reading aloud is by invitation — you can always say “pass, please come back to me”.</a:t>
             </a:r>
@@ -26596,8 +26108,7 @@
                   <a:srgbClr val="8A93A0"/>
                 </a:solidFill>
                 <a:latin typeface="Calibri" pitchFamily="34" charset="0"/>
-                <a:ea typeface="Calibri" pitchFamily="34" charset="-122"/>
-                <a:cs typeface="Calibri" pitchFamily="34" charset="-120"/>
+                <a:cs typeface="Amiri" pitchFamily="2" charset="-78"/>
               </a:rPr>
               <a:t>2 / 18</a:t>
             </a:r>
@@ -26691,9 +26202,8 @@
                 <a:solidFill>
                   <a:srgbClr val="D4AF37"/>
                 </a:solidFill>
-                <a:latin typeface="Amiri" pitchFamily="34" charset="0"/>
-                <a:ea typeface="Amiri" pitchFamily="34" charset="-122"/>
-                <a:cs typeface="Amiri" pitchFamily="34" charset="-120"/>
+                <a:latin typeface="Amiri" pitchFamily="2" charset="-78"/>
+                <a:cs typeface="Amiri" pitchFamily="2" charset="-78"/>
               </a:rPr>
               <a:t>م</a:t>
             </a:r>
@@ -26731,8 +26241,7 @@
                   <a:srgbClr val="1B3B6F"/>
                 </a:solidFill>
                 <a:latin typeface="Cambria" pitchFamily="34" charset="0"/>
-                <a:ea typeface="Cambria" pitchFamily="34" charset="-122"/>
-                <a:cs typeface="Cambria" pitchFamily="34" charset="-120"/>
+                <a:cs typeface="Amiri" pitchFamily="2" charset="-78"/>
               </a:rPr>
               <a:t>Al Madina Online School</a:t>
             </a:r>
@@ -26770,8 +26279,7 @@
                   <a:srgbClr val="8A6D1E"/>
                 </a:solidFill>
                 <a:latin typeface="Calibri" pitchFamily="34" charset="0"/>
-                <a:ea typeface="Calibri" pitchFamily="34" charset="-122"/>
-                <a:cs typeface="Calibri" pitchFamily="34" charset="-120"/>
+                <a:cs typeface="Amiri" pitchFamily="2" charset="-78"/>
               </a:rPr>
               <a:t>ARABIC DEPARTMENT · MIFTAH ARABIC · IGCSE 0544</a:t>
             </a:r>
@@ -26836,8 +26344,7 @@
                   <a:srgbClr val="FFFFFF"/>
                 </a:solidFill>
                 <a:latin typeface="Calibri" pitchFamily="34" charset="0"/>
-                <a:ea typeface="Calibri" pitchFamily="34" charset="-122"/>
-                <a:cs typeface="Calibri" pitchFamily="34" charset="-120"/>
+                <a:cs typeface="Amiri" pitchFamily="2" charset="-78"/>
               </a:rPr>
               <a:t>P6-L08 · IGCSE Bridge</a:t>
             </a:r>
@@ -26902,8 +26409,7 @@
                   <a:srgbClr val="FFFFFF"/>
                 </a:solidFill>
                 <a:latin typeface="Calibri" pitchFamily="34" charset="0"/>
-                <a:ea typeface="Calibri" pitchFamily="34" charset="-122"/>
-                <a:cs typeface="Calibri" pitchFamily="34" charset="-120"/>
+                <a:cs typeface="Amiri" pitchFamily="2" charset="-78"/>
               </a:rPr>
               <a:t>WELCOME</a:t>
             </a:r>
@@ -26941,8 +26447,7 @@
                   <a:srgbClr val="5A6472"/>
                 </a:solidFill>
                 <a:latin typeface="Calibri" pitchFamily="34" charset="0"/>
-                <a:ea typeface="Calibri" pitchFamily="34" charset="-122"/>
-                <a:cs typeface="Calibri" pitchFamily="34" charset="-120"/>
+                <a:cs typeface="Amiri" pitchFamily="2" charset="-78"/>
               </a:rPr>
               <a:t>TODAY’S LESSON MAP</a:t>
             </a:r>
@@ -26980,8 +26485,7 @@
                   <a:srgbClr val="1B3B6F"/>
                 </a:solidFill>
                 <a:latin typeface="Cambria" pitchFamily="34" charset="0"/>
-                <a:ea typeface="Cambria" pitchFamily="34" charset="-122"/>
-                <a:cs typeface="Cambria" pitchFamily="34" charset="-120"/>
+                <a:cs typeface="Amiri" pitchFamily="2" charset="-78"/>
               </a:rPr>
               <a:t>Our lesson today, step by step</a:t>
             </a:r>
@@ -27018,9 +26522,8 @@
                 <a:solidFill>
                   <a:srgbClr val="8A6D1E"/>
                 </a:solidFill>
-                <a:latin typeface="Amiri" pitchFamily="34" charset="0"/>
-                <a:ea typeface="Amiri" pitchFamily="34" charset="-122"/>
-                <a:cs typeface="Amiri" pitchFamily="34" charset="-120"/>
+                <a:latin typeface="Amiri" pitchFamily="2" charset="-78"/>
+                <a:cs typeface="Amiri" pitchFamily="2" charset="-78"/>
               </a:rPr>
               <a:t>خَرِيطَةُ الدَّرْسِ</a:t>
             </a:r>
@@ -27058,8 +26561,7 @@
                   <a:srgbClr val="8A93A0"/>
                 </a:solidFill>
                 <a:latin typeface="Calibri" pitchFamily="34" charset="0"/>
-                <a:ea typeface="Calibri" pitchFamily="34" charset="-122"/>
-                <a:cs typeface="Calibri" pitchFamily="34" charset="-120"/>
+                <a:cs typeface="Amiri" pitchFamily="2" charset="-78"/>
               </a:rPr>
               <a:t>Miftah Arabic · Progression P6 · IGCSE Bridge · P6-L08</a:t>
             </a:r>
@@ -27158,8 +26660,7 @@
                   <a:srgbClr val="FFFFFF"/>
                 </a:solidFill>
                 <a:latin typeface="Calibri" pitchFamily="34" charset="0"/>
-                <a:ea typeface="Calibri" pitchFamily="34" charset="-122"/>
-                <a:cs typeface="Calibri" pitchFamily="34" charset="-120"/>
+                <a:cs typeface="Amiri" pitchFamily="2" charset="-78"/>
               </a:rPr>
               <a:t>DO NOW</a:t>
             </a:r>
@@ -27197,8 +26698,7 @@
                   <a:srgbClr val="E8EDF5"/>
                 </a:solidFill>
                 <a:latin typeface="Calibri" pitchFamily="34" charset="0"/>
-                <a:ea typeface="Calibri" pitchFamily="34" charset="-122"/>
-                <a:cs typeface="Calibri" pitchFamily="34" charset="-120"/>
+                <a:cs typeface="Amiri" pitchFamily="2" charset="-78"/>
               </a:rPr>
               <a:t>6 min</a:t>
             </a:r>
@@ -27261,8 +26761,7 @@
                   <a:srgbClr val="1B3B6F"/>
                 </a:solidFill>
                 <a:latin typeface="Calibri" pitchFamily="34" charset="0"/>
-                <a:ea typeface="Calibri" pitchFamily="34" charset="-122"/>
-                <a:cs typeface="Calibri" pitchFamily="34" charset="-120"/>
+                <a:cs typeface="Amiri" pitchFamily="2" charset="-78"/>
               </a:rPr>
               <a:t>1</a:t>
             </a:r>
@@ -27300,8 +26799,7 @@
                   <a:srgbClr val="1F2A37"/>
                 </a:solidFill>
                 <a:latin typeface="Calibri" pitchFamily="34" charset="0"/>
-                <a:ea typeface="Calibri" pitchFamily="34" charset="-122"/>
-                <a:cs typeface="Calibri" pitchFamily="34" charset="-120"/>
+                <a:cs typeface="Amiri" pitchFamily="2" charset="-78"/>
               </a:rPr>
               <a:t>Retrieval: the listening strategies.</a:t>
             </a:r>
@@ -27338,9 +26836,8 @@
                 <a:solidFill>
                   <a:srgbClr val="0E7C86"/>
                 </a:solidFill>
-                <a:latin typeface="Amiri" pitchFamily="34" charset="0"/>
-                <a:ea typeface="Amiri" pitchFamily="34" charset="-122"/>
-                <a:cs typeface="Amiri" pitchFamily="34" charset="-120"/>
+                <a:latin typeface="Amiri" pitchFamily="2" charset="-78"/>
+                <a:cs typeface="Amiri" pitchFamily="2" charset="-78"/>
               </a:rPr>
               <a:t>اِبْدَأِ الآنَ</a:t>
             </a:r>
@@ -27439,8 +26936,7 @@
                   <a:srgbClr val="FFFFFF"/>
                 </a:solidFill>
                 <a:latin typeface="Calibri" pitchFamily="34" charset="0"/>
-                <a:ea typeface="Calibri" pitchFamily="34" charset="-122"/>
-                <a:cs typeface="Calibri" pitchFamily="34" charset="-120"/>
+                <a:cs typeface="Amiri" pitchFamily="2" charset="-78"/>
               </a:rPr>
               <a:t>TEACHER INSTRUCTION</a:t>
             </a:r>
@@ -27478,8 +26974,7 @@
                   <a:srgbClr val="E8EDF5"/>
                 </a:solidFill>
                 <a:latin typeface="Calibri" pitchFamily="34" charset="0"/>
-                <a:ea typeface="Calibri" pitchFamily="34" charset="-122"/>
-                <a:cs typeface="Calibri" pitchFamily="34" charset="-120"/>
+                <a:cs typeface="Amiri" pitchFamily="2" charset="-78"/>
               </a:rPr>
               <a:t>3 min</a:t>
             </a:r>
@@ -27542,8 +27037,7 @@
                   <a:srgbClr val="1B3B6F"/>
                 </a:solidFill>
                 <a:latin typeface="Calibri" pitchFamily="34" charset="0"/>
-                <a:ea typeface="Calibri" pitchFamily="34" charset="-122"/>
-                <a:cs typeface="Calibri" pitchFamily="34" charset="-120"/>
+                <a:cs typeface="Amiri" pitchFamily="2" charset="-78"/>
               </a:rPr>
               <a:t>2</a:t>
             </a:r>
@@ -27581,8 +27075,7 @@
                   <a:srgbClr val="1F2A37"/>
                 </a:solidFill>
                 <a:latin typeface="Calibri" pitchFamily="34" charset="0"/>
-                <a:ea typeface="Calibri" pitchFamily="34" charset="-122"/>
-                <a:cs typeface="Calibri" pitchFamily="34" charset="-120"/>
+                <a:cs typeface="Amiri" pitchFamily="2" charset="-78"/>
               </a:rPr>
               <a:t>Exam conditions and the six strategies.</a:t>
             </a:r>
@@ -27619,9 +27112,8 @@
                 <a:solidFill>
                   <a:srgbClr val="1B3B6F"/>
                 </a:solidFill>
-                <a:latin typeface="Amiri" pitchFamily="34" charset="0"/>
-                <a:ea typeface="Amiri" pitchFamily="34" charset="-122"/>
-                <a:cs typeface="Amiri" pitchFamily="34" charset="-120"/>
+                <a:latin typeface="Amiri" pitchFamily="2" charset="-78"/>
+                <a:cs typeface="Amiri" pitchFamily="2" charset="-78"/>
               </a:rPr>
               <a:t>ظُرُوفُ الامْتِحَانِ</a:t>
             </a:r>
@@ -27720,8 +27212,7 @@
                   <a:srgbClr val="FFFFFF"/>
                 </a:solidFill>
                 <a:latin typeface="Calibri" pitchFamily="34" charset="0"/>
-                <a:ea typeface="Calibri" pitchFamily="34" charset="-122"/>
-                <a:cs typeface="Calibri" pitchFamily="34" charset="-120"/>
+                <a:cs typeface="Amiri" pitchFamily="2" charset="-78"/>
               </a:rPr>
               <a:t>YOU DO</a:t>
             </a:r>
@@ -27759,8 +27250,7 @@
                   <a:srgbClr val="E8EDF5"/>
                 </a:solidFill>
                 <a:latin typeface="Calibri" pitchFamily="34" charset="0"/>
-                <a:ea typeface="Calibri" pitchFamily="34" charset="-122"/>
-                <a:cs typeface="Calibri" pitchFamily="34" charset="-120"/>
+                <a:cs typeface="Amiri" pitchFamily="2" charset="-78"/>
               </a:rPr>
               <a:t>28 min</a:t>
             </a:r>
@@ -27823,8 +27313,7 @@
                   <a:srgbClr val="1B3B6F"/>
                 </a:solidFill>
                 <a:latin typeface="Calibri" pitchFamily="34" charset="0"/>
-                <a:ea typeface="Calibri" pitchFamily="34" charset="-122"/>
-                <a:cs typeface="Calibri" pitchFamily="34" charset="-120"/>
+                <a:cs typeface="Amiri" pitchFamily="2" charset="-78"/>
               </a:rPr>
               <a:t>3</a:t>
             </a:r>
@@ -27862,8 +27351,7 @@
                   <a:srgbClr val="1F2A37"/>
                 </a:solidFill>
                 <a:latin typeface="Calibri" pitchFamily="34" charset="0"/>
-                <a:ea typeface="Calibri" pitchFamily="34" charset="-122"/>
-                <a:cs typeface="Calibri" pitchFamily="34" charset="-120"/>
+                <a:cs typeface="Amiri" pitchFamily="2" charset="-78"/>
               </a:rPr>
               <a:t>The mock: three texts, each read twice.</a:t>
             </a:r>
@@ -27900,9 +27388,8 @@
                 <a:solidFill>
                   <a:srgbClr val="1E6B52"/>
                 </a:solidFill>
-                <a:latin typeface="Amiri" pitchFamily="34" charset="0"/>
-                <a:ea typeface="Amiri" pitchFamily="34" charset="-122"/>
-                <a:cs typeface="Amiri" pitchFamily="34" charset="-120"/>
+                <a:latin typeface="Amiri" pitchFamily="2" charset="-78"/>
+                <a:cs typeface="Amiri" pitchFamily="2" charset="-78"/>
               </a:rPr>
               <a:t>الامْتِحَانُ</a:t>
             </a:r>
@@ -28001,8 +27488,7 @@
                   <a:srgbClr val="FFFFFF"/>
                 </a:solidFill>
                 <a:latin typeface="Calibri" pitchFamily="34" charset="0"/>
-                <a:ea typeface="Calibri" pitchFamily="34" charset="-122"/>
-                <a:cs typeface="Calibri" pitchFamily="34" charset="-120"/>
+                <a:cs typeface="Amiri" pitchFamily="2" charset="-78"/>
               </a:rPr>
               <a:t>FEEDBACK</a:t>
             </a:r>
@@ -28040,8 +27526,7 @@
                   <a:srgbClr val="E8EDF5"/>
                 </a:solidFill>
                 <a:latin typeface="Calibri" pitchFamily="34" charset="0"/>
-                <a:ea typeface="Calibri" pitchFamily="34" charset="-122"/>
-                <a:cs typeface="Calibri" pitchFamily="34" charset="-120"/>
+                <a:cs typeface="Amiri" pitchFamily="2" charset="-78"/>
               </a:rPr>
               <a:t>13 min</a:t>
             </a:r>
@@ -28104,8 +27589,7 @@
                   <a:srgbClr val="1B3B6F"/>
                 </a:solidFill>
                 <a:latin typeface="Calibri" pitchFamily="34" charset="0"/>
-                <a:ea typeface="Calibri" pitchFamily="34" charset="-122"/>
-                <a:cs typeface="Calibri" pitchFamily="34" charset="-120"/>
+                <a:cs typeface="Amiri" pitchFamily="2" charset="-78"/>
               </a:rPr>
               <a:t>4</a:t>
             </a:r>
@@ -28143,8 +27627,7 @@
                   <a:srgbClr val="1F2A37"/>
                 </a:solidFill>
                 <a:latin typeface="Calibri" pitchFamily="34" charset="0"/>
-                <a:ea typeface="Calibri" pitchFamily="34" charset="-122"/>
-                <a:cs typeface="Calibri" pitchFamily="34" charset="-120"/>
+                <a:cs typeface="Amiri" pitchFamily="2" charset="-78"/>
               </a:rPr>
               <a:t>Mark together, score and convert.</a:t>
             </a:r>
@@ -28181,9 +27664,8 @@
                 <a:solidFill>
                   <a:srgbClr val="8A6D1E"/>
                 </a:solidFill>
-                <a:latin typeface="Amiri" pitchFamily="34" charset="0"/>
-                <a:ea typeface="Amiri" pitchFamily="34" charset="-122"/>
-                <a:cs typeface="Amiri" pitchFamily="34" charset="-120"/>
+                <a:latin typeface="Amiri" pitchFamily="2" charset="-78"/>
+                <a:cs typeface="Amiri" pitchFamily="2" charset="-78"/>
               </a:rPr>
               <a:t>صَحِّحْ</a:t>
             </a:r>
@@ -28282,8 +27764,7 @@
                   <a:srgbClr val="FFFFFF"/>
                 </a:solidFill>
                 <a:latin typeface="Calibri" pitchFamily="34" charset="0"/>
-                <a:ea typeface="Calibri" pitchFamily="34" charset="-122"/>
-                <a:cs typeface="Calibri" pitchFamily="34" charset="-120"/>
+                <a:cs typeface="Amiri" pitchFamily="2" charset="-78"/>
               </a:rPr>
               <a:t>FEEDBACK</a:t>
             </a:r>
@@ -28321,8 +27802,7 @@
                   <a:srgbClr val="E8EDF5"/>
                 </a:solidFill>
                 <a:latin typeface="Calibri" pitchFamily="34" charset="0"/>
-                <a:ea typeface="Calibri" pitchFamily="34" charset="-122"/>
-                <a:cs typeface="Calibri" pitchFamily="34" charset="-120"/>
+                <a:cs typeface="Amiri" pitchFamily="2" charset="-78"/>
               </a:rPr>
               <a:t>3 min</a:t>
             </a:r>
@@ -28385,8 +27865,7 @@
                   <a:srgbClr val="1B3B6F"/>
                 </a:solidFill>
                 <a:latin typeface="Calibri" pitchFamily="34" charset="0"/>
-                <a:ea typeface="Calibri" pitchFamily="34" charset="-122"/>
-                <a:cs typeface="Calibri" pitchFamily="34" charset="-120"/>
+                <a:cs typeface="Amiri" pitchFamily="2" charset="-78"/>
               </a:rPr>
               <a:t>5</a:t>
             </a:r>
@@ -28424,8 +27903,7 @@
                   <a:srgbClr val="1F2A37"/>
                 </a:solidFill>
                 <a:latin typeface="Calibri" pitchFamily="34" charset="0"/>
-                <a:ea typeface="Calibri" pitchFamily="34" charset="-122"/>
-                <a:cs typeface="Calibri" pitchFamily="34" charset="-120"/>
+                <a:cs typeface="Amiri" pitchFamily="2" charset="-78"/>
               </a:rPr>
               <a:t>Reflection and self-check.</a:t>
             </a:r>
@@ -28462,9 +27940,8 @@
                 <a:solidFill>
                   <a:srgbClr val="8A6D1E"/>
                 </a:solidFill>
-                <a:latin typeface="Amiri" pitchFamily="34" charset="0"/>
-                <a:ea typeface="Amiri" pitchFamily="34" charset="-122"/>
-                <a:cs typeface="Amiri" pitchFamily="34" charset="-120"/>
+                <a:latin typeface="Amiri" pitchFamily="2" charset="-78"/>
+                <a:cs typeface="Amiri" pitchFamily="2" charset="-78"/>
               </a:rPr>
               <a:t>قَيِّمْ</a:t>
             </a:r>
@@ -28563,8 +28040,7 @@
                   <a:srgbClr val="FFFFFF"/>
                 </a:solidFill>
                 <a:latin typeface="Calibri" pitchFamily="34" charset="0"/>
-                <a:ea typeface="Calibri" pitchFamily="34" charset="-122"/>
-                <a:cs typeface="Calibri" pitchFamily="34" charset="-120"/>
+                <a:cs typeface="Amiri" pitchFamily="2" charset="-78"/>
               </a:rPr>
               <a:t>PREPARATION</a:t>
             </a:r>
@@ -28602,8 +28078,7 @@
                   <a:srgbClr val="E8EDF5"/>
                 </a:solidFill>
                 <a:latin typeface="Calibri" pitchFamily="34" charset="0"/>
-                <a:ea typeface="Calibri" pitchFamily="34" charset="-122"/>
-                <a:cs typeface="Calibri" pitchFamily="34" charset="-120"/>
+                <a:cs typeface="Amiri" pitchFamily="2" charset="-78"/>
               </a:rPr>
               <a:t>2 min</a:t>
             </a:r>
@@ -28666,8 +28141,7 @@
                   <a:srgbClr val="1B3B6F"/>
                 </a:solidFill>
                 <a:latin typeface="Calibri" pitchFamily="34" charset="0"/>
-                <a:ea typeface="Calibri" pitchFamily="34" charset="-122"/>
-                <a:cs typeface="Calibri" pitchFamily="34" charset="-120"/>
+                <a:cs typeface="Amiri" pitchFamily="2" charset="-78"/>
               </a:rPr>
               <a:t>6</a:t>
             </a:r>
@@ -28705,8 +28179,7 @@
                   <a:srgbClr val="1F2A37"/>
                 </a:solidFill>
                 <a:latin typeface="Calibri" pitchFamily="34" charset="0"/>
-                <a:ea typeface="Calibri" pitchFamily="34" charset="-122"/>
-                <a:cs typeface="Calibri" pitchFamily="34" charset="-120"/>
+                <a:cs typeface="Amiri" pitchFamily="2" charset="-78"/>
               </a:rPr>
               <a:t>Get ready for the reading and writing mock.</a:t>
             </a:r>
@@ -28743,9 +28216,8 @@
                 <a:solidFill>
                   <a:srgbClr val="C45A3C"/>
                 </a:solidFill>
-                <a:latin typeface="Amiri" pitchFamily="34" charset="0"/>
-                <a:ea typeface="Amiri" pitchFamily="34" charset="-122"/>
-                <a:cs typeface="Amiri" pitchFamily="34" charset="-120"/>
+                <a:latin typeface="Amiri" pitchFamily="2" charset="-78"/>
+                <a:cs typeface="Amiri" pitchFamily="2" charset="-78"/>
               </a:rPr>
               <a:t>اِسْتَعِدَّ</a:t>
             </a:r>
@@ -28817,8 +28289,7 @@
                   <a:srgbClr val="1E6B52"/>
                 </a:solidFill>
                 <a:latin typeface="Calibri" pitchFamily="34" charset="0"/>
-                <a:ea typeface="Calibri" pitchFamily="34" charset="-122"/>
-                <a:cs typeface="Calibri" pitchFamily="34" charset="-120"/>
+                <a:cs typeface="Amiri" pitchFamily="2" charset="-78"/>
               </a:rPr>
               <a:t>IF ARABIC FEELS HARD TODAY</a:t>
             </a:r>
@@ -28856,8 +28327,7 @@
                   <a:srgbClr val="1F2A37"/>
                 </a:solidFill>
                 <a:latin typeface="Calibri" pitchFamily="34" charset="0"/>
-                <a:ea typeface="Calibri" pitchFamily="34" charset="-122"/>
-                <a:cs typeface="Calibri" pitchFamily="34" charset="-120"/>
+                <a:cs typeface="Amiri" pitchFamily="2" charset="-78"/>
               </a:rPr>
               <a:t>This is an exam-preparation lesson. Every task uses the real IGCSE format — Core students use the green boxes, frames and English support; nobody is expected to get everything right first time.</a:t>
             </a:r>
@@ -28895,8 +28365,7 @@
                   <a:srgbClr val="8A93A0"/>
                 </a:solidFill>
                 <a:latin typeface="Calibri" pitchFamily="34" charset="0"/>
-                <a:ea typeface="Calibri" pitchFamily="34" charset="-122"/>
-                <a:cs typeface="Calibri" pitchFamily="34" charset="-120"/>
+                <a:cs typeface="Amiri" pitchFamily="2" charset="-78"/>
               </a:rPr>
               <a:t>3 / 18</a:t>
             </a:r>
@@ -28990,9 +28459,8 @@
                 <a:solidFill>
                   <a:srgbClr val="D4AF37"/>
                 </a:solidFill>
-                <a:latin typeface="Amiri" pitchFamily="34" charset="0"/>
-                <a:ea typeface="Amiri" pitchFamily="34" charset="-122"/>
-                <a:cs typeface="Amiri" pitchFamily="34" charset="-120"/>
+                <a:latin typeface="Amiri" pitchFamily="2" charset="-78"/>
+                <a:cs typeface="Amiri" pitchFamily="2" charset="-78"/>
               </a:rPr>
               <a:t>م</a:t>
             </a:r>
@@ -29030,8 +28498,7 @@
                   <a:srgbClr val="1B3B6F"/>
                 </a:solidFill>
                 <a:latin typeface="Cambria" pitchFamily="34" charset="0"/>
-                <a:ea typeface="Cambria" pitchFamily="34" charset="-122"/>
-                <a:cs typeface="Cambria" pitchFamily="34" charset="-120"/>
+                <a:cs typeface="Amiri" pitchFamily="2" charset="-78"/>
               </a:rPr>
               <a:t>Al Madina Online School</a:t>
             </a:r>
@@ -29069,8 +28536,7 @@
                   <a:srgbClr val="8A6D1E"/>
                 </a:solidFill>
                 <a:latin typeface="Calibri" pitchFamily="34" charset="0"/>
-                <a:ea typeface="Calibri" pitchFamily="34" charset="-122"/>
-                <a:cs typeface="Calibri" pitchFamily="34" charset="-120"/>
+                <a:cs typeface="Amiri" pitchFamily="2" charset="-78"/>
               </a:rPr>
               <a:t>ARABIC DEPARTMENT · MIFTAH ARABIC · IGCSE 0544</a:t>
             </a:r>
@@ -29135,8 +28601,7 @@
                   <a:srgbClr val="FFFFFF"/>
                 </a:solidFill>
                 <a:latin typeface="Calibri" pitchFamily="34" charset="0"/>
-                <a:ea typeface="Calibri" pitchFamily="34" charset="-122"/>
-                <a:cs typeface="Calibri" pitchFamily="34" charset="-120"/>
+                <a:cs typeface="Amiri" pitchFamily="2" charset="-78"/>
               </a:rPr>
               <a:t>P6-L08 · IGCSE Bridge</a:t>
             </a:r>
@@ -29201,8 +28666,7 @@
                   <a:srgbClr val="FFFFFF"/>
                 </a:solidFill>
                 <a:latin typeface="Calibri" pitchFamily="34" charset="0"/>
-                <a:ea typeface="Calibri" pitchFamily="34" charset="-122"/>
-                <a:cs typeface="Calibri" pitchFamily="34" charset="-120"/>
+                <a:cs typeface="Amiri" pitchFamily="2" charset="-78"/>
               </a:rPr>
               <a:t>DO NOW · 5 MIN</a:t>
             </a:r>
@@ -29240,8 +28704,7 @@
                   <a:srgbClr val="0E7C86"/>
                 </a:solidFill>
                 <a:latin typeface="Calibri" pitchFamily="34" charset="0"/>
-                <a:ea typeface="Calibri" pitchFamily="34" charset="-122"/>
-                <a:cs typeface="Calibri" pitchFamily="34" charset="-120"/>
+                <a:cs typeface="Amiri" pitchFamily="2" charset="-78"/>
               </a:rPr>
               <a:t>DO NOW · ON YOUR OWN · 5 MINUTES</a:t>
             </a:r>
@@ -29279,8 +28742,7 @@
                   <a:srgbClr val="1B3B6F"/>
                 </a:solidFill>
                 <a:latin typeface="Cambria" pitchFamily="34" charset="0"/>
-                <a:ea typeface="Cambria" pitchFamily="34" charset="-122"/>
-                <a:cs typeface="Cambria" pitchFamily="34" charset="-120"/>
+                <a:cs typeface="Amiri" pitchFamily="2" charset="-78"/>
               </a:rPr>
               <a:t>Retrieval: what do you remember?</a:t>
             </a:r>
@@ -29317,9 +28779,8 @@
                 <a:solidFill>
                   <a:srgbClr val="8A6D1E"/>
                 </a:solidFill>
-                <a:latin typeface="Amiri" pitchFamily="34" charset="0"/>
-                <a:ea typeface="Amiri" pitchFamily="34" charset="-122"/>
-                <a:cs typeface="Amiri" pitchFamily="34" charset="-120"/>
+                <a:latin typeface="Amiri" pitchFamily="2" charset="-78"/>
+                <a:cs typeface="Amiri" pitchFamily="2" charset="-78"/>
               </a:rPr>
               <a:t>اِبْدَأِ الآنَ</a:t>
             </a:r>
@@ -29357,8 +28818,7 @@
                   <a:srgbClr val="8A93A0"/>
                 </a:solidFill>
                 <a:latin typeface="Calibri" pitchFamily="34" charset="0"/>
-                <a:ea typeface="Calibri" pitchFamily="34" charset="-122"/>
-                <a:cs typeface="Calibri" pitchFamily="34" charset="-120"/>
+                <a:cs typeface="Amiri" pitchFamily="2" charset="-78"/>
               </a:rPr>
               <a:t>Miftah Arabic · Progression P6 · IGCSE Bridge · P6-L08</a:t>
             </a:r>
@@ -29455,8 +28915,7 @@
                   <a:srgbClr val="FFFFFF"/>
                 </a:solidFill>
                 <a:latin typeface="Calibri" pitchFamily="34" charset="0"/>
-                <a:ea typeface="Calibri" pitchFamily="34" charset="-122"/>
-                <a:cs typeface="Calibri" pitchFamily="34" charset="-120"/>
+                <a:cs typeface="Amiri" pitchFamily="2" charset="-78"/>
               </a:rPr>
               <a:t>1</a:t>
             </a:r>
@@ -29494,8 +28953,7 @@
                   <a:srgbClr val="1B3B6F"/>
                 </a:solidFill>
                 <a:latin typeface="Calibri" pitchFamily="34" charset="0"/>
-                <a:ea typeface="Calibri" pitchFamily="34" charset="-122"/>
-                <a:cs typeface="Calibri" pitchFamily="34" charset="-120"/>
+                <a:cs typeface="Amiri" pitchFamily="2" charset="-78"/>
               </a:rPr>
               <a:t>What does </a:t>
             </a:r>
@@ -29507,9 +28965,8 @@
                 <a:solidFill>
                   <a:srgbClr val="1B3B6F"/>
                 </a:solidFill>
-                <a:latin typeface="Amiri" pitchFamily="34" charset="0"/>
-                <a:ea typeface="Amiri" pitchFamily="34" charset="-122"/>
-                <a:cs typeface="Amiri" pitchFamily="34" charset="-120"/>
+                <a:latin typeface="Amiri" pitchFamily="2" charset="-78"/>
+                <a:cs typeface="Amiri" pitchFamily="2" charset="-78"/>
               </a:rPr>
               <a:t>قِرَاءَةُ الأَسْئِلَةِ مُسْبَقًا</a:t>
             </a:r>
@@ -29522,8 +28979,7 @@
                   <a:srgbClr val="1B3B6F"/>
                 </a:solidFill>
                 <a:latin typeface="Calibri" pitchFamily="34" charset="0"/>
-                <a:ea typeface="Calibri" pitchFamily="34" charset="-122"/>
-                <a:cs typeface="Calibri" pitchFamily="34" charset="-120"/>
+                <a:cs typeface="Amiri" pitchFamily="2" charset="-78"/>
               </a:rPr>
               <a:t> mean?</a:t>
             </a:r>
@@ -29586,8 +29042,7 @@
                   <a:srgbClr val="1B3B6F"/>
                 </a:solidFill>
                 <a:latin typeface="Calibri" pitchFamily="34" charset="0"/>
-                <a:ea typeface="Calibri" pitchFamily="34" charset="-122"/>
-                <a:cs typeface="Calibri" pitchFamily="34" charset="-120"/>
+                <a:cs typeface="Amiri" pitchFamily="2" charset="-78"/>
               </a:rPr>
               <a:t>A</a:t>
             </a:r>
@@ -29625,8 +29080,7 @@
                   <a:srgbClr val="1F2A37"/>
                 </a:solidFill>
                 <a:latin typeface="Calibri" pitchFamily="34" charset="0"/>
-                <a:ea typeface="Calibri" pitchFamily="34" charset="-122"/>
-                <a:cs typeface="Calibri" pitchFamily="34" charset="-120"/>
+                <a:cs typeface="Amiri" pitchFamily="2" charset="-78"/>
               </a:rPr>
               <a:t>reading the answers aloud</a:t>
             </a:r>
@@ -29689,8 +29143,7 @@
                   <a:srgbClr val="1B3B6F"/>
                 </a:solidFill>
                 <a:latin typeface="Calibri" pitchFamily="34" charset="0"/>
-                <a:ea typeface="Calibri" pitchFamily="34" charset="-122"/>
-                <a:cs typeface="Calibri" pitchFamily="34" charset="-120"/>
+                <a:cs typeface="Amiri" pitchFamily="2" charset="-78"/>
               </a:rPr>
               <a:t>B</a:t>
             </a:r>
@@ -29728,8 +29181,7 @@
                   <a:srgbClr val="1F2A37"/>
                 </a:solidFill>
                 <a:latin typeface="Calibri" pitchFamily="34" charset="0"/>
-                <a:ea typeface="Calibri" pitchFamily="34" charset="-122"/>
-                <a:cs typeface="Calibri" pitchFamily="34" charset="-120"/>
+                <a:cs typeface="Amiri" pitchFamily="2" charset="-78"/>
               </a:rPr>
               <a:t>reading the questions in advance</a:t>
             </a:r>
@@ -29792,8 +29244,7 @@
                   <a:srgbClr val="1B3B6F"/>
                 </a:solidFill>
                 <a:latin typeface="Calibri" pitchFamily="34" charset="0"/>
-                <a:ea typeface="Calibri" pitchFamily="34" charset="-122"/>
-                <a:cs typeface="Calibri" pitchFamily="34" charset="-120"/>
+                <a:cs typeface="Amiri" pitchFamily="2" charset="-78"/>
               </a:rPr>
               <a:t>C</a:t>
             </a:r>
@@ -29831,8 +29282,7 @@
                   <a:srgbClr val="1F2A37"/>
                 </a:solidFill>
                 <a:latin typeface="Calibri" pitchFamily="34" charset="0"/>
-                <a:ea typeface="Calibri" pitchFamily="34" charset="-122"/>
-                <a:cs typeface="Calibri" pitchFamily="34" charset="-120"/>
+                <a:cs typeface="Amiri" pitchFamily="2" charset="-78"/>
               </a:rPr>
               <a:t>asking a question</a:t>
             </a:r>
@@ -29929,8 +29379,7 @@
                   <a:srgbClr val="FFFFFF"/>
                 </a:solidFill>
                 <a:latin typeface="Calibri" pitchFamily="34" charset="0"/>
-                <a:ea typeface="Calibri" pitchFamily="34" charset="-122"/>
-                <a:cs typeface="Calibri" pitchFamily="34" charset="-120"/>
+                <a:cs typeface="Amiri" pitchFamily="2" charset="-78"/>
               </a:rPr>
               <a:t>2</a:t>
             </a:r>
@@ -29968,8 +29417,7 @@
                   <a:srgbClr val="1B3B6F"/>
                 </a:solidFill>
                 <a:latin typeface="Calibri" pitchFamily="34" charset="0"/>
-                <a:ea typeface="Calibri" pitchFamily="34" charset="-122"/>
-                <a:cs typeface="Calibri" pitchFamily="34" charset="-120"/>
+                <a:cs typeface="Amiri" pitchFamily="2" charset="-78"/>
               </a:rPr>
               <a:t>What does </a:t>
             </a:r>
@@ -29981,9 +29429,8 @@
                 <a:solidFill>
                   <a:srgbClr val="1B3B6F"/>
                 </a:solidFill>
-                <a:latin typeface="Amiri" pitchFamily="34" charset="0"/>
-                <a:ea typeface="Amiri" pitchFamily="34" charset="-122"/>
-                <a:cs typeface="Amiri" pitchFamily="34" charset="-120"/>
+                <a:latin typeface="Amiri" pitchFamily="2" charset="-78"/>
+                <a:cs typeface="Amiri" pitchFamily="2" charset="-78"/>
               </a:rPr>
               <a:t>مُشَتِّتَاتُ الاسْتِمَاعِ</a:t>
             </a:r>
@@ -29996,8 +29443,7 @@
                   <a:srgbClr val="1B3B6F"/>
                 </a:solidFill>
                 <a:latin typeface="Calibri" pitchFamily="34" charset="0"/>
-                <a:ea typeface="Calibri" pitchFamily="34" charset="-122"/>
-                <a:cs typeface="Calibri" pitchFamily="34" charset="-120"/>
+                <a:cs typeface="Amiri" pitchFamily="2" charset="-78"/>
               </a:rPr>
               <a:t> mean?</a:t>
             </a:r>
@@ -30060,8 +29506,7 @@
                   <a:srgbClr val="1B3B6F"/>
                 </a:solidFill>
                 <a:latin typeface="Calibri" pitchFamily="34" charset="0"/>
-                <a:ea typeface="Calibri" pitchFamily="34" charset="-122"/>
-                <a:cs typeface="Calibri" pitchFamily="34" charset="-120"/>
+                <a:cs typeface="Amiri" pitchFamily="2" charset="-78"/>
               </a:rPr>
               <a:t>A</a:t>
             </a:r>
@@ -30099,8 +29544,7 @@
                   <a:srgbClr val="1F2A37"/>
                 </a:solidFill>
                 <a:latin typeface="Calibri" pitchFamily="34" charset="0"/>
-                <a:ea typeface="Calibri" pitchFamily="34" charset="-122"/>
-                <a:cs typeface="Calibri" pitchFamily="34" charset="-120"/>
+                <a:cs typeface="Amiri" pitchFamily="2" charset="-78"/>
               </a:rPr>
               <a:t>listening distractors</a:t>
             </a:r>
@@ -30163,8 +29607,7 @@
                   <a:srgbClr val="1B3B6F"/>
                 </a:solidFill>
                 <a:latin typeface="Calibri" pitchFamily="34" charset="0"/>
-                <a:ea typeface="Calibri" pitchFamily="34" charset="-122"/>
-                <a:cs typeface="Calibri" pitchFamily="34" charset="-120"/>
+                <a:cs typeface="Amiri" pitchFamily="2" charset="-78"/>
               </a:rPr>
               <a:t>B</a:t>
             </a:r>
@@ -30202,8 +29645,7 @@
                   <a:srgbClr val="1F2A37"/>
                 </a:solidFill>
                 <a:latin typeface="Calibri" pitchFamily="34" charset="0"/>
-                <a:ea typeface="Calibri" pitchFamily="34" charset="-122"/>
-                <a:cs typeface="Calibri" pitchFamily="34" charset="-120"/>
+                <a:cs typeface="Amiri" pitchFamily="2" charset="-78"/>
               </a:rPr>
               <a:t>listening strategies</a:t>
             </a:r>
@@ -30266,8 +29708,7 @@
                   <a:srgbClr val="1B3B6F"/>
                 </a:solidFill>
                 <a:latin typeface="Calibri" pitchFamily="34" charset="0"/>
-                <a:ea typeface="Calibri" pitchFamily="34" charset="-122"/>
-                <a:cs typeface="Calibri" pitchFamily="34" charset="-120"/>
+                <a:cs typeface="Amiri" pitchFamily="2" charset="-78"/>
               </a:rPr>
               <a:t>C</a:t>
             </a:r>
@@ -30305,8 +29746,7 @@
                   <a:srgbClr val="1F2A37"/>
                 </a:solidFill>
                 <a:latin typeface="Calibri" pitchFamily="34" charset="0"/>
-                <a:ea typeface="Calibri" pitchFamily="34" charset="-122"/>
-                <a:cs typeface="Calibri" pitchFamily="34" charset="-120"/>
+                <a:cs typeface="Amiri" pitchFamily="2" charset="-78"/>
               </a:rPr>
               <a:t>listening texts</a:t>
             </a:r>
@@ -30403,8 +29843,7 @@
                   <a:srgbClr val="FFFFFF"/>
                 </a:solidFill>
                 <a:latin typeface="Calibri" pitchFamily="34" charset="0"/>
-                <a:ea typeface="Calibri" pitchFamily="34" charset="-122"/>
-                <a:cs typeface="Calibri" pitchFamily="34" charset="-120"/>
+                <a:cs typeface="Amiri" pitchFamily="2" charset="-78"/>
               </a:rPr>
               <a:t>3</a:t>
             </a:r>
@@ -30442,8 +29881,7 @@
                   <a:srgbClr val="1B3B6F"/>
                 </a:solidFill>
                 <a:latin typeface="Calibri" pitchFamily="34" charset="0"/>
-                <a:ea typeface="Calibri" pitchFamily="34" charset="-122"/>
-                <a:cs typeface="Calibri" pitchFamily="34" charset="-120"/>
+                <a:cs typeface="Amiri" pitchFamily="2" charset="-78"/>
               </a:rPr>
               <a:t>What does </a:t>
             </a:r>
@@ -30455,9 +29893,8 @@
                 <a:solidFill>
                   <a:srgbClr val="1B3B6F"/>
                 </a:solidFill>
-                <a:latin typeface="Amiri" pitchFamily="34" charset="0"/>
-                <a:ea typeface="Amiri" pitchFamily="34" charset="-122"/>
-                <a:cs typeface="Amiri" pitchFamily="34" charset="-120"/>
+                <a:latin typeface="Amiri" pitchFamily="2" charset="-78"/>
+                <a:cs typeface="Amiri" pitchFamily="2" charset="-78"/>
               </a:rPr>
               <a:t>التَّحَقُّقُ فِي الاسْتِمَاعِ الثَّانِي</a:t>
             </a:r>
@@ -30470,8 +29907,7 @@
                   <a:srgbClr val="1B3B6F"/>
                 </a:solidFill>
                 <a:latin typeface="Calibri" pitchFamily="34" charset="0"/>
-                <a:ea typeface="Calibri" pitchFamily="34" charset="-122"/>
-                <a:cs typeface="Calibri" pitchFamily="34" charset="-120"/>
+                <a:cs typeface="Amiri" pitchFamily="2" charset="-78"/>
               </a:rPr>
               <a:t> mean?</a:t>
             </a:r>
@@ -30534,8 +29970,7 @@
                   <a:srgbClr val="1B3B6F"/>
                 </a:solidFill>
                 <a:latin typeface="Calibri" pitchFamily="34" charset="0"/>
-                <a:ea typeface="Calibri" pitchFamily="34" charset="-122"/>
-                <a:cs typeface="Calibri" pitchFamily="34" charset="-120"/>
+                <a:cs typeface="Amiri" pitchFamily="2" charset="-78"/>
               </a:rPr>
               <a:t>A</a:t>
             </a:r>
@@ -30573,8 +30008,7 @@
                   <a:srgbClr val="1F2A37"/>
                 </a:solidFill>
                 <a:latin typeface="Calibri" pitchFamily="34" charset="0"/>
-                <a:ea typeface="Calibri" pitchFamily="34" charset="-122"/>
-                <a:cs typeface="Calibri" pitchFamily="34" charset="-120"/>
+                <a:cs typeface="Amiri" pitchFamily="2" charset="-78"/>
               </a:rPr>
               <a:t>listening a second time for fun</a:t>
             </a:r>
@@ -30637,8 +30071,7 @@
                   <a:srgbClr val="1B3B6F"/>
                 </a:solidFill>
                 <a:latin typeface="Calibri" pitchFamily="34" charset="0"/>
-                <a:ea typeface="Calibri" pitchFamily="34" charset="-122"/>
-                <a:cs typeface="Calibri" pitchFamily="34" charset="-120"/>
+                <a:cs typeface="Amiri" pitchFamily="2" charset="-78"/>
               </a:rPr>
               <a:t>B</a:t>
             </a:r>
@@ -30676,8 +30109,7 @@
                   <a:srgbClr val="1F2A37"/>
                 </a:solidFill>
                 <a:latin typeface="Calibri" pitchFamily="34" charset="0"/>
-                <a:ea typeface="Calibri" pitchFamily="34" charset="-122"/>
-                <a:cs typeface="Calibri" pitchFamily="34" charset="-120"/>
+                <a:cs typeface="Amiri" pitchFamily="2" charset="-78"/>
               </a:rPr>
               <a:t>a second question</a:t>
             </a:r>
@@ -30740,8 +30172,7 @@
                   <a:srgbClr val="1B3B6F"/>
                 </a:solidFill>
                 <a:latin typeface="Calibri" pitchFamily="34" charset="0"/>
-                <a:ea typeface="Calibri" pitchFamily="34" charset="-122"/>
-                <a:cs typeface="Calibri" pitchFamily="34" charset="-120"/>
+                <a:cs typeface="Amiri" pitchFamily="2" charset="-78"/>
               </a:rPr>
               <a:t>C</a:t>
             </a:r>
@@ -30779,8 +30210,7 @@
                   <a:srgbClr val="1F2A37"/>
                 </a:solidFill>
                 <a:latin typeface="Calibri" pitchFamily="34" charset="0"/>
-                <a:ea typeface="Calibri" pitchFamily="34" charset="-122"/>
-                <a:cs typeface="Calibri" pitchFamily="34" charset="-120"/>
+                <a:cs typeface="Amiri" pitchFamily="2" charset="-78"/>
               </a:rPr>
               <a:t>verifying on the second listen</a:t>
             </a:r>
@@ -30877,8 +30307,7 @@
                   <a:srgbClr val="FFFFFF"/>
                 </a:solidFill>
                 <a:latin typeface="Calibri" pitchFamily="34" charset="0"/>
-                <a:ea typeface="Calibri" pitchFamily="34" charset="-122"/>
-                <a:cs typeface="Calibri" pitchFamily="34" charset="-120"/>
+                <a:cs typeface="Amiri" pitchFamily="2" charset="-78"/>
               </a:rPr>
               <a:t>4</a:t>
             </a:r>
@@ -30916,8 +30345,7 @@
                   <a:srgbClr val="1B3B6F"/>
                 </a:solidFill>
                 <a:latin typeface="Calibri" pitchFamily="34" charset="0"/>
-                <a:ea typeface="Calibri" pitchFamily="34" charset="-122"/>
-                <a:cs typeface="Calibri" pitchFamily="34" charset="-120"/>
+                <a:cs typeface="Amiri" pitchFamily="2" charset="-78"/>
               </a:rPr>
               <a:t>You hear </a:t>
             </a:r>
@@ -30929,9 +30357,8 @@
                 <a:solidFill>
                   <a:srgbClr val="1B3B6F"/>
                 </a:solidFill>
-                <a:latin typeface="Amiri" pitchFamily="34" charset="0"/>
-                <a:ea typeface="Amiri" pitchFamily="34" charset="-122"/>
-                <a:cs typeface="Amiri" pitchFamily="34" charset="-120"/>
+                <a:latin typeface="Amiri" pitchFamily="2" charset="-78"/>
+                <a:cs typeface="Amiri" pitchFamily="2" charset="-78"/>
               </a:rPr>
               <a:t>صَحِيحٌ أَنَّ … غَيْرَ أَنَّ</a:t>
             </a:r>
@@ -30944,8 +30371,7 @@
                   <a:srgbClr val="1B3B6F"/>
                 </a:solidFill>
                 <a:latin typeface="Calibri" pitchFamily="34" charset="0"/>
-                <a:ea typeface="Calibri" pitchFamily="34" charset="-122"/>
-                <a:cs typeface="Calibri" pitchFamily="34" charset="-120"/>
+                <a:cs typeface="Amiri" pitchFamily="2" charset="-78"/>
               </a:rPr>
               <a:t> … Where is the speaker’s real view?</a:t>
             </a:r>
@@ -31008,8 +30434,7 @@
                   <a:srgbClr val="1B3B6F"/>
                 </a:solidFill>
                 <a:latin typeface="Calibri" pitchFamily="34" charset="0"/>
-                <a:ea typeface="Calibri" pitchFamily="34" charset="-122"/>
-                <a:cs typeface="Calibri" pitchFamily="34" charset="-120"/>
+                <a:cs typeface="Amiri" pitchFamily="2" charset="-78"/>
               </a:rPr>
               <a:t>A</a:t>
             </a:r>
@@ -31047,8 +30472,7 @@
                   <a:srgbClr val="1F2A37"/>
                 </a:solidFill>
                 <a:latin typeface="Calibri" pitchFamily="34" charset="0"/>
-                <a:ea typeface="Calibri" pitchFamily="34" charset="-122"/>
-                <a:cs typeface="Calibri" pitchFamily="34" charset="-120"/>
+                <a:cs typeface="Amiri" pitchFamily="2" charset="-78"/>
               </a:rPr>
               <a:t>after </a:t>
             </a:r>
@@ -31060,9 +30484,8 @@
                 <a:solidFill>
                   <a:srgbClr val="1F2A37"/>
                 </a:solidFill>
-                <a:latin typeface="Amiri" pitchFamily="34" charset="0"/>
-                <a:ea typeface="Amiri" pitchFamily="34" charset="-122"/>
-                <a:cs typeface="Amiri" pitchFamily="34" charset="-120"/>
+                <a:latin typeface="Amiri" pitchFamily="2" charset="-78"/>
+                <a:cs typeface="Amiri" pitchFamily="2" charset="-78"/>
               </a:rPr>
               <a:t>صَحِيحٌ أَنَّ</a:t>
             </a:r>
@@ -31125,8 +30548,7 @@
                   <a:srgbClr val="1B3B6F"/>
                 </a:solidFill>
                 <a:latin typeface="Calibri" pitchFamily="34" charset="0"/>
-                <a:ea typeface="Calibri" pitchFamily="34" charset="-122"/>
-                <a:cs typeface="Calibri" pitchFamily="34" charset="-120"/>
+                <a:cs typeface="Amiri" pitchFamily="2" charset="-78"/>
               </a:rPr>
               <a:t>B</a:t>
             </a:r>
@@ -31164,8 +30586,7 @@
                   <a:srgbClr val="1F2A37"/>
                 </a:solidFill>
                 <a:latin typeface="Calibri" pitchFamily="34" charset="0"/>
-                <a:ea typeface="Calibri" pitchFamily="34" charset="-122"/>
-                <a:cs typeface="Calibri" pitchFamily="34" charset="-120"/>
+                <a:cs typeface="Amiri" pitchFamily="2" charset="-78"/>
               </a:rPr>
               <a:t>in neither part</a:t>
             </a:r>
@@ -31228,8 +30649,7 @@
                   <a:srgbClr val="1B3B6F"/>
                 </a:solidFill>
                 <a:latin typeface="Calibri" pitchFamily="34" charset="0"/>
-                <a:ea typeface="Calibri" pitchFamily="34" charset="-122"/>
-                <a:cs typeface="Calibri" pitchFamily="34" charset="-120"/>
+                <a:cs typeface="Amiri" pitchFamily="2" charset="-78"/>
               </a:rPr>
               <a:t>C</a:t>
             </a:r>
@@ -31267,8 +30687,7 @@
                   <a:srgbClr val="1F2A37"/>
                 </a:solidFill>
                 <a:latin typeface="Calibri" pitchFamily="34" charset="0"/>
-                <a:ea typeface="Calibri" pitchFamily="34" charset="-122"/>
-                <a:cs typeface="Calibri" pitchFamily="34" charset="-120"/>
+                <a:cs typeface="Amiri" pitchFamily="2" charset="-78"/>
               </a:rPr>
               <a:t>after </a:t>
             </a:r>
@@ -31280,9 +30699,8 @@
                 <a:solidFill>
                   <a:srgbClr val="1F2A37"/>
                 </a:solidFill>
-                <a:latin typeface="Amiri" pitchFamily="34" charset="0"/>
-                <a:ea typeface="Amiri" pitchFamily="34" charset="-122"/>
-                <a:cs typeface="Amiri" pitchFamily="34" charset="-120"/>
+                <a:latin typeface="Amiri" pitchFamily="2" charset="-78"/>
+                <a:cs typeface="Amiri" pitchFamily="2" charset="-78"/>
               </a:rPr>
               <a:t>غَيْرَ أَنَّ</a:t>
             </a:r>
@@ -31379,8 +30797,7 @@
                   <a:srgbClr val="FFFFFF"/>
                 </a:solidFill>
                 <a:latin typeface="Calibri" pitchFamily="34" charset="0"/>
-                <a:ea typeface="Calibri" pitchFamily="34" charset="-122"/>
-                <a:cs typeface="Calibri" pitchFamily="34" charset="-120"/>
+                <a:cs typeface="Amiri" pitchFamily="2" charset="-78"/>
               </a:rPr>
               <a:t>5</a:t>
             </a:r>
@@ -31418,8 +30835,7 @@
                   <a:srgbClr val="1B3B6F"/>
                 </a:solidFill>
                 <a:latin typeface="Calibri" pitchFamily="34" charset="0"/>
-                <a:ea typeface="Calibri" pitchFamily="34" charset="-122"/>
-                <a:cs typeface="Calibri" pitchFamily="34" charset="-120"/>
+                <a:cs typeface="Amiri" pitchFamily="2" charset="-78"/>
               </a:rPr>
               <a:t>You hear </a:t>
             </a:r>
@@ -31431,9 +30847,8 @@
                 <a:solidFill>
                   <a:srgbClr val="1B3B6F"/>
                 </a:solidFill>
-                <a:latin typeface="Amiri" pitchFamily="34" charset="0"/>
-                <a:ea typeface="Amiri" pitchFamily="34" charset="-122"/>
-                <a:cs typeface="Amiri" pitchFamily="34" charset="-120"/>
+                <a:latin typeface="Amiri" pitchFamily="2" charset="-78"/>
+                <a:cs typeface="Amiri" pitchFamily="2" charset="-78"/>
               </a:rPr>
               <a:t>لَوْ دَرَسْتُ … لَنَجَحْتُ</a:t>
             </a:r>
@@ -31446,8 +30861,7 @@
                   <a:srgbClr val="1B3B6F"/>
                 </a:solidFill>
                 <a:latin typeface="Calibri" pitchFamily="34" charset="0"/>
-                <a:ea typeface="Calibri" pitchFamily="34" charset="-122"/>
-                <a:cs typeface="Calibri" pitchFamily="34" charset="-120"/>
+                <a:cs typeface="Amiri" pitchFamily="2" charset="-78"/>
               </a:rPr>
               <a:t> — what kind of sentence is it?</a:t>
             </a:r>
@@ -31510,8 +30924,7 @@
                   <a:srgbClr val="1B3B6F"/>
                 </a:solidFill>
                 <a:latin typeface="Calibri" pitchFamily="34" charset="0"/>
-                <a:ea typeface="Calibri" pitchFamily="34" charset="-122"/>
-                <a:cs typeface="Calibri" pitchFamily="34" charset="-120"/>
+                <a:cs typeface="Amiri" pitchFamily="2" charset="-78"/>
               </a:rPr>
               <a:t>A</a:t>
             </a:r>
@@ -31549,8 +30962,7 @@
                   <a:srgbClr val="1F2A37"/>
                 </a:solidFill>
                 <a:latin typeface="Calibri" pitchFamily="34" charset="0"/>
-                <a:ea typeface="Calibri" pitchFamily="34" charset="-122"/>
-                <a:cs typeface="Calibri" pitchFamily="34" charset="-120"/>
+                <a:cs typeface="Amiri" pitchFamily="2" charset="-78"/>
               </a:rPr>
               <a:t>an unreal (Type 2) conditional</a:t>
             </a:r>
@@ -31613,8 +31025,7 @@
                   <a:srgbClr val="1B3B6F"/>
                 </a:solidFill>
                 <a:latin typeface="Calibri" pitchFamily="34" charset="0"/>
-                <a:ea typeface="Calibri" pitchFamily="34" charset="-122"/>
-                <a:cs typeface="Calibri" pitchFamily="34" charset="-120"/>
+                <a:cs typeface="Amiri" pitchFamily="2" charset="-78"/>
               </a:rPr>
               <a:t>B</a:t>
             </a:r>
@@ -31652,8 +31063,7 @@
                   <a:srgbClr val="1F2A37"/>
                 </a:solidFill>
                 <a:latin typeface="Calibri" pitchFamily="34" charset="0"/>
-                <a:ea typeface="Calibri" pitchFamily="34" charset="-122"/>
-                <a:cs typeface="Calibri" pitchFamily="34" charset="-120"/>
+                <a:cs typeface="Amiri" pitchFamily="2" charset="-78"/>
               </a:rPr>
               <a:t>a real (Type 1) conditional</a:t>
             </a:r>
@@ -31716,8 +31126,7 @@
                   <a:srgbClr val="1B3B6F"/>
                 </a:solidFill>
                 <a:latin typeface="Calibri" pitchFamily="34" charset="0"/>
-                <a:ea typeface="Calibri" pitchFamily="34" charset="-122"/>
-                <a:cs typeface="Calibri" pitchFamily="34" charset="-120"/>
+                <a:cs typeface="Amiri" pitchFamily="2" charset="-78"/>
               </a:rPr>
               <a:t>C</a:t>
             </a:r>
@@ -31755,8 +31164,7 @@
                   <a:srgbClr val="1F2A37"/>
                 </a:solidFill>
                 <a:latin typeface="Calibri" pitchFamily="34" charset="0"/>
-                <a:ea typeface="Calibri" pitchFamily="34" charset="-122"/>
-                <a:cs typeface="Calibri" pitchFamily="34" charset="-120"/>
+                <a:cs typeface="Amiri" pitchFamily="2" charset="-78"/>
               </a:rPr>
               <a:t>a question</a:t>
             </a:r>
@@ -31828,8 +31236,7 @@
                   <a:srgbClr val="0E7C86"/>
                 </a:solidFill>
                 <a:latin typeface="Calibri" pitchFamily="34" charset="0"/>
-                <a:ea typeface="Calibri" pitchFamily="34" charset="-122"/>
-                <a:cs typeface="Calibri" pitchFamily="34" charset="-120"/>
+                <a:cs typeface="Amiri" pitchFamily="2" charset="-78"/>
               </a:rPr>
               <a:t>HOW TO ANSWER</a:t>
             </a:r>
@@ -31867,8 +31274,7 @@
                   <a:srgbClr val="1F2A37"/>
                 </a:solidFill>
                 <a:latin typeface="Calibri" pitchFamily="34" charset="0"/>
-                <a:ea typeface="Calibri" pitchFamily="34" charset="-122"/>
-                <a:cs typeface="Calibri" pitchFamily="34" charset="-120"/>
+                <a:cs typeface="Amiri" pitchFamily="2" charset="-78"/>
               </a:rPr>
               <a:t>Work on your own in silence.</a:t>
             </a:r>
@@ -31884,8 +31290,7 @@
                   <a:srgbClr val="1F2A37"/>
                 </a:solidFill>
                 <a:latin typeface="Calibri" pitchFamily="34" charset="0"/>
-                <a:ea typeface="Calibri" pitchFamily="34" charset="-122"/>
-                <a:cs typeface="Calibri" pitchFamily="34" charset="-120"/>
+                <a:cs typeface="Amiri" pitchFamily="2" charset="-78"/>
               </a:rPr>
               <a:t>When the timer ends, type in the chat:</a:t>
             </a:r>
@@ -31923,8 +31328,7 @@
                   <a:srgbClr val="1B3B6F"/>
                 </a:solidFill>
                 <a:latin typeface="Consolas" pitchFamily="34" charset="0"/>
-                <a:ea typeface="Consolas" pitchFamily="34" charset="-122"/>
-                <a:cs typeface="Consolas" pitchFamily="34" charset="-120"/>
+                <a:cs typeface="Amiri" pitchFamily="2" charset="-78"/>
               </a:rPr>
               <a:t>1_  2_  3_  4_  5_</a:t>
             </a:r>
@@ -31962,8 +31366,7 @@
                   <a:srgbClr val="0E7C86"/>
                 </a:solidFill>
                 <a:latin typeface="Calibri" pitchFamily="34" charset="0"/>
-                <a:ea typeface="Calibri" pitchFamily="34" charset="-122"/>
-                <a:cs typeface="Calibri" pitchFamily="34" charset="-120"/>
+                <a:cs typeface="Amiri" pitchFamily="2" charset="-78"/>
               </a:rPr>
               <a:t>⏱  5 : 00</a:t>
             </a:r>
@@ -32001,8 +31404,7 @@
                   <a:srgbClr val="8A93A0"/>
                 </a:solidFill>
                 <a:latin typeface="Calibri" pitchFamily="34" charset="0"/>
-                <a:ea typeface="Calibri" pitchFamily="34" charset="-122"/>
-                <a:cs typeface="Calibri" pitchFamily="34" charset="-120"/>
+                <a:cs typeface="Amiri" pitchFamily="2" charset="-78"/>
               </a:rPr>
               <a:t>4 / 18</a:t>
             </a:r>
@@ -32096,9 +31498,8 @@
                 <a:solidFill>
                   <a:srgbClr val="D4AF37"/>
                 </a:solidFill>
-                <a:latin typeface="Amiri" pitchFamily="34" charset="0"/>
-                <a:ea typeface="Amiri" pitchFamily="34" charset="-122"/>
-                <a:cs typeface="Amiri" pitchFamily="34" charset="-120"/>
+                <a:latin typeface="Amiri" pitchFamily="2" charset="-78"/>
+                <a:cs typeface="Amiri" pitchFamily="2" charset="-78"/>
               </a:rPr>
               <a:t>م</a:t>
             </a:r>
@@ -32136,8 +31537,7 @@
                   <a:srgbClr val="1B3B6F"/>
                 </a:solidFill>
                 <a:latin typeface="Cambria" pitchFamily="34" charset="0"/>
-                <a:ea typeface="Cambria" pitchFamily="34" charset="-122"/>
-                <a:cs typeface="Cambria" pitchFamily="34" charset="-120"/>
+                <a:cs typeface="Amiri" pitchFamily="2" charset="-78"/>
               </a:rPr>
               <a:t>Al Madina Online School</a:t>
             </a:r>
@@ -32175,8 +31575,7 @@
                   <a:srgbClr val="8A6D1E"/>
                 </a:solidFill>
                 <a:latin typeface="Calibri" pitchFamily="34" charset="0"/>
-                <a:ea typeface="Calibri" pitchFamily="34" charset="-122"/>
-                <a:cs typeface="Calibri" pitchFamily="34" charset="-120"/>
+                <a:cs typeface="Amiri" pitchFamily="2" charset="-78"/>
               </a:rPr>
               <a:t>ARABIC DEPARTMENT · MIFTAH ARABIC · IGCSE 0544</a:t>
             </a:r>
@@ -32241,8 +31640,7 @@
                   <a:srgbClr val="FFFFFF"/>
                 </a:solidFill>
                 <a:latin typeface="Calibri" pitchFamily="34" charset="0"/>
-                <a:ea typeface="Calibri" pitchFamily="34" charset="-122"/>
-                <a:cs typeface="Calibri" pitchFamily="34" charset="-120"/>
+                <a:cs typeface="Amiri" pitchFamily="2" charset="-78"/>
               </a:rPr>
               <a:t>P6-L08 · IGCSE Bridge</a:t>
             </a:r>
@@ -32307,8 +31705,7 @@
                   <a:srgbClr val="FFFFFF"/>
                 </a:solidFill>
                 <a:latin typeface="Calibri" pitchFamily="34" charset="0"/>
-                <a:ea typeface="Calibri" pitchFamily="34" charset="-122"/>
-                <a:cs typeface="Calibri" pitchFamily="34" charset="-120"/>
+                <a:cs typeface="Amiri" pitchFamily="2" charset="-78"/>
               </a:rPr>
               <a:t>DO NOW · 2 MIN</a:t>
             </a:r>
@@ -32346,8 +31743,7 @@
                   <a:srgbClr val="0E7C86"/>
                 </a:solidFill>
                 <a:latin typeface="Calibri" pitchFamily="34" charset="0"/>
-                <a:ea typeface="Calibri" pitchFamily="34" charset="-122"/>
-                <a:cs typeface="Calibri" pitchFamily="34" charset="-120"/>
+                <a:cs typeface="Amiri" pitchFamily="2" charset="-78"/>
               </a:rPr>
               <a:t>DO NOW · ANSWERS AND REASONS</a:t>
             </a:r>
@@ -32385,8 +31781,7 @@
                   <a:srgbClr val="1B3B6F"/>
                 </a:solidFill>
                 <a:latin typeface="Cambria" pitchFamily="34" charset="0"/>
-                <a:ea typeface="Cambria" pitchFamily="34" charset="-122"/>
-                <a:cs typeface="Cambria" pitchFamily="34" charset="-120"/>
+                <a:cs typeface="Amiri" pitchFamily="2" charset="-78"/>
               </a:rPr>
               <a:t>Let’s check — and explain why</a:t>
             </a:r>
@@ -32423,9 +31818,8 @@
                 <a:solidFill>
                   <a:srgbClr val="8A6D1E"/>
                 </a:solidFill>
-                <a:latin typeface="Amiri" pitchFamily="34" charset="0"/>
-                <a:ea typeface="Amiri" pitchFamily="34" charset="-122"/>
-                <a:cs typeface="Amiri" pitchFamily="34" charset="-120"/>
+                <a:latin typeface="Amiri" pitchFamily="2" charset="-78"/>
+                <a:cs typeface="Amiri" pitchFamily="2" charset="-78"/>
               </a:rPr>
               <a:t>الإِجَابَاتُ وَالتَّعْلِيلُ</a:t>
             </a:r>
@@ -32463,8 +31857,7 @@
                   <a:srgbClr val="8A93A0"/>
                 </a:solidFill>
                 <a:latin typeface="Calibri" pitchFamily="34" charset="0"/>
-                <a:ea typeface="Calibri" pitchFamily="34" charset="-122"/>
-                <a:cs typeface="Calibri" pitchFamily="34" charset="-120"/>
+                <a:cs typeface="Amiri" pitchFamily="2" charset="-78"/>
               </a:rPr>
               <a:t>Miftah Arabic · Progression P6 · IGCSE Bridge · P6-L08</a:t>
             </a:r>
@@ -32561,8 +31954,7 @@
                   <a:srgbClr val="FFFFFF"/>
                 </a:solidFill>
                 <a:latin typeface="Calibri" pitchFamily="34" charset="0"/>
-                <a:ea typeface="Calibri" pitchFamily="34" charset="-122"/>
-                <a:cs typeface="Calibri" pitchFamily="34" charset="-120"/>
+                <a:cs typeface="Amiri" pitchFamily="2" charset="-78"/>
               </a:rPr>
               <a:t>1</a:t>
             </a:r>
@@ -32600,8 +31992,7 @@
                   <a:srgbClr val="1B3B6F"/>
                 </a:solidFill>
                 <a:latin typeface="Calibri" pitchFamily="34" charset="0"/>
-                <a:ea typeface="Calibri" pitchFamily="34" charset="-122"/>
-                <a:cs typeface="Calibri" pitchFamily="34" charset="-120"/>
+                <a:cs typeface="Amiri" pitchFamily="2" charset="-78"/>
               </a:rPr>
               <a:t>What does </a:t>
             </a:r>
@@ -32613,9 +32004,8 @@
                 <a:solidFill>
                   <a:srgbClr val="1B3B6F"/>
                 </a:solidFill>
-                <a:latin typeface="Amiri" pitchFamily="34" charset="0"/>
-                <a:ea typeface="Amiri" pitchFamily="34" charset="-122"/>
-                <a:cs typeface="Amiri" pitchFamily="34" charset="-120"/>
+                <a:latin typeface="Amiri" pitchFamily="2" charset="-78"/>
+                <a:cs typeface="Amiri" pitchFamily="2" charset="-78"/>
               </a:rPr>
               <a:t>قِرَاءَةُ الأَسْئِلَةِ مُسْبَقًا</a:t>
             </a:r>
@@ -32628,8 +32018,7 @@
                   <a:srgbClr val="1B3B6F"/>
                 </a:solidFill>
                 <a:latin typeface="Calibri" pitchFamily="34" charset="0"/>
-                <a:ea typeface="Calibri" pitchFamily="34" charset="-122"/>
-                <a:cs typeface="Calibri" pitchFamily="34" charset="-120"/>
+                <a:cs typeface="Amiri" pitchFamily="2" charset="-78"/>
               </a:rPr>
               <a:t> mean?</a:t>
             </a:r>
@@ -32692,8 +32081,7 @@
                   <a:srgbClr val="1B3B6F"/>
                 </a:solidFill>
                 <a:latin typeface="Calibri" pitchFamily="34" charset="0"/>
-                <a:ea typeface="Calibri" pitchFamily="34" charset="-122"/>
-                <a:cs typeface="Calibri" pitchFamily="34" charset="-120"/>
+                <a:cs typeface="Amiri" pitchFamily="2" charset="-78"/>
               </a:rPr>
               <a:t>A</a:t>
             </a:r>
@@ -32731,8 +32119,7 @@
                   <a:srgbClr val="9AA1AB"/>
                 </a:solidFill>
                 <a:latin typeface="Calibri" pitchFamily="34" charset="0"/>
-                <a:ea typeface="Calibri" pitchFamily="34" charset="-122"/>
-                <a:cs typeface="Calibri" pitchFamily="34" charset="-120"/>
+                <a:cs typeface="Amiri" pitchFamily="2" charset="-78"/>
               </a:rPr>
               <a:t>reading the answers aloud</a:t>
             </a:r>
@@ -32822,8 +32209,7 @@
                   <a:srgbClr val="FFFFFF"/>
                 </a:solidFill>
                 <a:latin typeface="Calibri" pitchFamily="34" charset="0"/>
-                <a:ea typeface="Calibri" pitchFamily="34" charset="-122"/>
-                <a:cs typeface="Calibri" pitchFamily="34" charset="-120"/>
+                <a:cs typeface="Amiri" pitchFamily="2" charset="-78"/>
               </a:rPr>
               <a:t>B</a:t>
             </a:r>
@@ -32861,8 +32247,7 @@
                   <a:srgbClr val="1F2A37"/>
                 </a:solidFill>
                 <a:latin typeface="Calibri" pitchFamily="34" charset="0"/>
-                <a:ea typeface="Calibri" pitchFamily="34" charset="-122"/>
-                <a:cs typeface="Calibri" pitchFamily="34" charset="-120"/>
+                <a:cs typeface="Amiri" pitchFamily="2" charset="-78"/>
               </a:rPr>
               <a:t>reading the questions in advance</a:t>
             </a:r>
@@ -32925,8 +32310,7 @@
                   <a:srgbClr val="1B3B6F"/>
                 </a:solidFill>
                 <a:latin typeface="Calibri" pitchFamily="34" charset="0"/>
-                <a:ea typeface="Calibri" pitchFamily="34" charset="-122"/>
-                <a:cs typeface="Calibri" pitchFamily="34" charset="-120"/>
+                <a:cs typeface="Amiri" pitchFamily="2" charset="-78"/>
               </a:rPr>
               <a:t>C</a:t>
             </a:r>
@@ -32964,8 +32348,7 @@
                   <a:srgbClr val="9AA1AB"/>
                 </a:solidFill>
                 <a:latin typeface="Calibri" pitchFamily="34" charset="0"/>
-                <a:ea typeface="Calibri" pitchFamily="34" charset="-122"/>
-                <a:cs typeface="Calibri" pitchFamily="34" charset="-120"/>
+                <a:cs typeface="Amiri" pitchFamily="2" charset="-78"/>
               </a:rPr>
               <a:t>asking a question</a:t>
             </a:r>
@@ -33003,8 +32386,7 @@
                   <a:srgbClr val="8A6D1E"/>
                 </a:solidFill>
                 <a:latin typeface="Calibri" pitchFamily="34" charset="0"/>
-                <a:ea typeface="Calibri" pitchFamily="34" charset="-122"/>
-                <a:cs typeface="Calibri" pitchFamily="34" charset="-120"/>
+                <a:cs typeface="Amiri" pitchFamily="2" charset="-78"/>
               </a:rPr>
               <a:t>Prepared at home (P6-L07, from P6-L02).</a:t>
             </a:r>
@@ -33101,8 +32483,7 @@
                   <a:srgbClr val="FFFFFF"/>
                 </a:solidFill>
                 <a:latin typeface="Calibri" pitchFamily="34" charset="0"/>
-                <a:ea typeface="Calibri" pitchFamily="34" charset="-122"/>
-                <a:cs typeface="Calibri" pitchFamily="34" charset="-120"/>
+                <a:cs typeface="Amiri" pitchFamily="2" charset="-78"/>
               </a:rPr>
               <a:t>2</a:t>
             </a:r>
@@ -33140,8 +32521,7 @@
                   <a:srgbClr val="1B3B6F"/>
                 </a:solidFill>
                 <a:latin typeface="Calibri" pitchFamily="34" charset="0"/>
-                <a:ea typeface="Calibri" pitchFamily="34" charset="-122"/>
-                <a:cs typeface="Calibri" pitchFamily="34" charset="-120"/>
+                <a:cs typeface="Amiri" pitchFamily="2" charset="-78"/>
               </a:rPr>
               <a:t>What does </a:t>
             </a:r>
@@ -33153,9 +32533,8 @@
                 <a:solidFill>
                   <a:srgbClr val="1B3B6F"/>
                 </a:solidFill>
-                <a:latin typeface="Amiri" pitchFamily="34" charset="0"/>
-                <a:ea typeface="Amiri" pitchFamily="34" charset="-122"/>
-                <a:cs typeface="Amiri" pitchFamily="34" charset="-120"/>
+                <a:latin typeface="Amiri" pitchFamily="2" charset="-78"/>
+                <a:cs typeface="Amiri" pitchFamily="2" charset="-78"/>
               </a:rPr>
               <a:t>مُشَتِّتَاتُ الاسْتِمَاعِ</a:t>
             </a:r>
@@ -33168,8 +32547,7 @@
                   <a:srgbClr val="1B3B6F"/>
                 </a:solidFill>
                 <a:latin typeface="Calibri" pitchFamily="34" charset="0"/>
-                <a:ea typeface="Calibri" pitchFamily="34" charset="-122"/>
-                <a:cs typeface="Calibri" pitchFamily="34" charset="-120"/>
+                <a:cs typeface="Amiri" pitchFamily="2" charset="-78"/>
               </a:rPr>
               <a:t> mean?</a:t>
             </a:r>
@@ -33259,8 +32637,7 @@
                   <a:srgbClr val="FFFFFF"/>
                 </a:solidFill>
                 <a:latin typeface="Calibri" pitchFamily="34" charset="0"/>
-                <a:ea typeface="Calibri" pitchFamily="34" charset="-122"/>
-                <a:cs typeface="Calibri" pitchFamily="34" charset="-120"/>
+                <a:cs typeface="Amiri" pitchFamily="2" charset="-78"/>
               </a:rPr>
               <a:t>A</a:t>
             </a:r>
@@ -33298,8 +32675,7 @@
                   <a:srgbClr val="1F2A37"/>
                 </a:solidFill>
                 <a:latin typeface="Calibri" pitchFamily="34" charset="0"/>
-                <a:ea typeface="Calibri" pitchFamily="34" charset="-122"/>
-                <a:cs typeface="Calibri" pitchFamily="34" charset="-120"/>
+                <a:cs typeface="Amiri" pitchFamily="2" charset="-78"/>
               </a:rPr>
               <a:t>listening distractors</a:t>
             </a:r>
@@ -33362,8 +32738,7 @@
                   <a:srgbClr val="1B3B6F"/>
                 </a:solidFill>
                 <a:latin typeface="Calibri" pitchFamily="34" charset="0"/>
-                <a:ea typeface="Calibri" pitchFamily="34" charset="-122"/>
-                <a:cs typeface="Calibri" pitchFamily="34" charset="-120"/>
+                <a:cs typeface="Amiri" pitchFamily="2" charset="-78"/>
               </a:rPr>
               <a:t>B</a:t>
             </a:r>
@@ -33401,8 +32776,7 @@
                   <a:srgbClr val="9AA1AB"/>
                 </a:solidFill>
                 <a:latin typeface="Calibri" pitchFamily="34" charset="0"/>
-                <a:ea typeface="Calibri" pitchFamily="34" charset="-122"/>
-                <a:cs typeface="Calibri" pitchFamily="34" charset="-120"/>
+                <a:cs typeface="Amiri" pitchFamily="2" charset="-78"/>
               </a:rPr>
               <a:t>listening strategies</a:t>
             </a:r>
@@ -33465,8 +32839,7 @@
                   <a:srgbClr val="1B3B6F"/>
                 </a:solidFill>
                 <a:latin typeface="Calibri" pitchFamily="34" charset="0"/>
-                <a:ea typeface="Calibri" pitchFamily="34" charset="-122"/>
-                <a:cs typeface="Calibri" pitchFamily="34" charset="-120"/>
+                <a:cs typeface="Amiri" pitchFamily="2" charset="-78"/>
               </a:rPr>
               <a:t>C</a:t>
             </a:r>
@@ -33504,8 +32877,7 @@
                   <a:srgbClr val="9AA1AB"/>
                 </a:solidFill>
                 <a:latin typeface="Calibri" pitchFamily="34" charset="0"/>
-                <a:ea typeface="Calibri" pitchFamily="34" charset="-122"/>
-                <a:cs typeface="Calibri" pitchFamily="34" charset="-120"/>
+                <a:cs typeface="Amiri" pitchFamily="2" charset="-78"/>
               </a:rPr>
               <a:t>listening texts</a:t>
             </a:r>
@@ -33543,8 +32915,7 @@
                   <a:srgbClr val="8A6D1E"/>
                 </a:solidFill>
                 <a:latin typeface="Calibri" pitchFamily="34" charset="0"/>
-                <a:ea typeface="Calibri" pitchFamily="34" charset="-122"/>
-                <a:cs typeface="Calibri" pitchFamily="34" charset="-120"/>
+                <a:cs typeface="Amiri" pitchFamily="2" charset="-78"/>
               </a:rPr>
               <a:t>Prepared at home (P6-L07, from P6-L02).</a:t>
             </a:r>
@@ -33641,8 +33012,7 @@
                   <a:srgbClr val="FFFFFF"/>
                 </a:solidFill>
                 <a:latin typeface="Calibri" pitchFamily="34" charset="0"/>
-                <a:ea typeface="Calibri" pitchFamily="34" charset="-122"/>
-                <a:cs typeface="Calibri" pitchFamily="34" charset="-120"/>
+                <a:cs typeface="Amiri" pitchFamily="2" charset="-78"/>
               </a:rPr>
               <a:t>3</a:t>
             </a:r>
@@ -33680,8 +33050,7 @@
                   <a:srgbClr val="1B3B6F"/>
                 </a:solidFill>
                 <a:latin typeface="Calibri" pitchFamily="34" charset="0"/>
-                <a:ea typeface="Calibri" pitchFamily="34" charset="-122"/>
-                <a:cs typeface="Calibri" pitchFamily="34" charset="-120"/>
+                <a:cs typeface="Amiri" pitchFamily="2" charset="-78"/>
               </a:rPr>
               <a:t>What does </a:t>
             </a:r>
@@ -33693,9 +33062,8 @@
                 <a:solidFill>
                   <a:srgbClr val="1B3B6F"/>
                 </a:solidFill>
-                <a:latin typeface="Amiri" pitchFamily="34" charset="0"/>
-                <a:ea typeface="Amiri" pitchFamily="34" charset="-122"/>
-                <a:cs typeface="Amiri" pitchFamily="34" charset="-120"/>
+                <a:latin typeface="Amiri" pitchFamily="2" charset="-78"/>
+                <a:cs typeface="Amiri" pitchFamily="2" charset="-78"/>
               </a:rPr>
               <a:t>التَّحَقُّقُ فِي الاسْتِمَاعِ الثَّانِي</a:t>
             </a:r>
@@ -33708,8 +33076,7 @@
                   <a:srgbClr val="1B3B6F"/>
                 </a:solidFill>
                 <a:latin typeface="Calibri" pitchFamily="34" charset="0"/>
-                <a:ea typeface="Calibri" pitchFamily="34" charset="-122"/>
-                <a:cs typeface="Calibri" pitchFamily="34" charset="-120"/>
+                <a:cs typeface="Amiri" pitchFamily="2" charset="-78"/>
               </a:rPr>
               <a:t> mean?</a:t>
             </a:r>
@@ -33772,8 +33139,7 @@
                   <a:srgbClr val="1B3B6F"/>
                 </a:solidFill>
                 <a:latin typeface="Calibri" pitchFamily="34" charset="0"/>
-                <a:ea typeface="Calibri" pitchFamily="34" charset="-122"/>
-                <a:cs typeface="Calibri" pitchFamily="34" charset="-120"/>
+                <a:cs typeface="Amiri" pitchFamily="2" charset="-78"/>
               </a:rPr>
               <a:t>A</a:t>
             </a:r>
@@ -33811,8 +33177,7 @@
                   <a:srgbClr val="9AA1AB"/>
                 </a:solidFill>
                 <a:latin typeface="Calibri" pitchFamily="34" charset="0"/>
-                <a:ea typeface="Calibri" pitchFamily="34" charset="-122"/>
-                <a:cs typeface="Calibri" pitchFamily="34" charset="-120"/>
+                <a:cs typeface="Amiri" pitchFamily="2" charset="-78"/>
               </a:rPr>
               <a:t>listening a second time for fun</a:t>
             </a:r>
@@ -33875,8 +33240,7 @@
                   <a:srgbClr val="1B3B6F"/>
                 </a:solidFill>
                 <a:latin typeface="Calibri" pitchFamily="34" charset="0"/>
-                <a:ea typeface="Calibri" pitchFamily="34" charset="-122"/>
-                <a:cs typeface="Calibri" pitchFamily="34" charset="-120"/>
+                <a:cs typeface="Amiri" pitchFamily="2" charset="-78"/>
               </a:rPr>
               <a:t>B</a:t>
             </a:r>
@@ -33914,8 +33278,7 @@
                   <a:srgbClr val="9AA1AB"/>
                 </a:solidFill>
                 <a:latin typeface="Calibri" pitchFamily="34" charset="0"/>
-                <a:ea typeface="Calibri" pitchFamily="34" charset="-122"/>
-                <a:cs typeface="Calibri" pitchFamily="34" charset="-120"/>
+                <a:cs typeface="Amiri" pitchFamily="2" charset="-78"/>
               </a:rPr>
               <a:t>a second question</a:t>
             </a:r>
@@ -34005,8 +33368,7 @@
                   <a:srgbClr val="FFFFFF"/>
                 </a:solidFill>
                 <a:latin typeface="Calibri" pitchFamily="34" charset="0"/>
-                <a:ea typeface="Calibri" pitchFamily="34" charset="-122"/>
-                <a:cs typeface="Calibri" pitchFamily="34" charset="-120"/>
+                <a:cs typeface="Amiri" pitchFamily="2" charset="-78"/>
               </a:rPr>
               <a:t>C</a:t>
             </a:r>
@@ -34044,8 +33406,7 @@
                   <a:srgbClr val="1F2A37"/>
                 </a:solidFill>
                 <a:latin typeface="Calibri" pitchFamily="34" charset="0"/>
-                <a:ea typeface="Calibri" pitchFamily="34" charset="-122"/>
-                <a:cs typeface="Calibri" pitchFamily="34" charset="-120"/>
+                <a:cs typeface="Amiri" pitchFamily="2" charset="-78"/>
               </a:rPr>
               <a:t>verifying on the second listen</a:t>
             </a:r>
@@ -34083,8 +33444,7 @@
                   <a:srgbClr val="8A6D1E"/>
                 </a:solidFill>
                 <a:latin typeface="Calibri" pitchFamily="34" charset="0"/>
-                <a:ea typeface="Calibri" pitchFamily="34" charset="-122"/>
-                <a:cs typeface="Calibri" pitchFamily="34" charset="-120"/>
+                <a:cs typeface="Amiri" pitchFamily="2" charset="-78"/>
               </a:rPr>
               <a:t>Prepared at home (P6-L07, from P6-L02).</a:t>
             </a:r>
@@ -34181,8 +33541,7 @@
                   <a:srgbClr val="FFFFFF"/>
                 </a:solidFill>
                 <a:latin typeface="Calibri" pitchFamily="34" charset="0"/>
-                <a:ea typeface="Calibri" pitchFamily="34" charset="-122"/>
-                <a:cs typeface="Calibri" pitchFamily="34" charset="-120"/>
+                <a:cs typeface="Amiri" pitchFamily="2" charset="-78"/>
               </a:rPr>
               <a:t>4</a:t>
             </a:r>
@@ -34220,8 +33579,7 @@
                   <a:srgbClr val="1B3B6F"/>
                 </a:solidFill>
                 <a:latin typeface="Calibri" pitchFamily="34" charset="0"/>
-                <a:ea typeface="Calibri" pitchFamily="34" charset="-122"/>
-                <a:cs typeface="Calibri" pitchFamily="34" charset="-120"/>
+                <a:cs typeface="Amiri" pitchFamily="2" charset="-78"/>
               </a:rPr>
               <a:t>You hear </a:t>
             </a:r>
@@ -34233,9 +33591,8 @@
                 <a:solidFill>
                   <a:srgbClr val="1B3B6F"/>
                 </a:solidFill>
-                <a:latin typeface="Amiri" pitchFamily="34" charset="0"/>
-                <a:ea typeface="Amiri" pitchFamily="34" charset="-122"/>
-                <a:cs typeface="Amiri" pitchFamily="34" charset="-120"/>
+                <a:latin typeface="Amiri" pitchFamily="2" charset="-78"/>
+                <a:cs typeface="Amiri" pitchFamily="2" charset="-78"/>
               </a:rPr>
               <a:t>صَحِيحٌ أَنَّ … غَيْرَ أَنَّ</a:t>
             </a:r>
@@ -34248,8 +33605,7 @@
                   <a:srgbClr val="1B3B6F"/>
                 </a:solidFill>
                 <a:latin typeface="Calibri" pitchFamily="34" charset="0"/>
-                <a:ea typeface="Calibri" pitchFamily="34" charset="-122"/>
-                <a:cs typeface="Calibri" pitchFamily="34" charset="-120"/>
+                <a:cs typeface="Amiri" pitchFamily="2" charset="-78"/>
               </a:rPr>
               <a:t> … Where is the speaker’s real view?</a:t>
             </a:r>
@@ -34312,8 +33668,7 @@
                   <a:srgbClr val="1B3B6F"/>
                 </a:solidFill>
                 <a:latin typeface="Calibri" pitchFamily="34" charset="0"/>
-                <a:ea typeface="Calibri" pitchFamily="34" charset="-122"/>
-                <a:cs typeface="Calibri" pitchFamily="34" charset="-120"/>
+                <a:cs typeface="Amiri" pitchFamily="2" charset="-78"/>
               </a:rPr>
               <a:t>A</a:t>
             </a:r>
@@ -34351,8 +33706,7 @@
                   <a:srgbClr val="9AA1AB"/>
                 </a:solidFill>
                 <a:latin typeface="Calibri" pitchFamily="34" charset="0"/>
-                <a:ea typeface="Calibri" pitchFamily="34" charset="-122"/>
-                <a:cs typeface="Calibri" pitchFamily="34" charset="-120"/>
+                <a:cs typeface="Amiri" pitchFamily="2" charset="-78"/>
               </a:rPr>
               <a:t>after </a:t>
             </a:r>
@@ -34364,9 +33718,8 @@
                 <a:solidFill>
                   <a:srgbClr val="9AA1AB"/>
                 </a:solidFill>
-                <a:latin typeface="Amiri" pitchFamily="34" charset="0"/>
-                <a:ea typeface="Amiri" pitchFamily="34" charset="-122"/>
-                <a:cs typeface="Amiri" pitchFamily="34" charset="-120"/>
+                <a:latin typeface="Amiri" pitchFamily="2" charset="-78"/>
+                <a:cs typeface="Amiri" pitchFamily="2" charset="-78"/>
               </a:rPr>
               <a:t>صَحِيحٌ أَنَّ</a:t>
             </a:r>
@@ -34429,8 +33782,7 @@
                   <a:srgbClr val="1B3B6F"/>
                 </a:solidFill>
                 <a:latin typeface="Calibri" pitchFamily="34" charset="0"/>
-                <a:ea typeface="Calibri" pitchFamily="34" charset="-122"/>
-                <a:cs typeface="Calibri" pitchFamily="34" charset="-120"/>
+                <a:cs typeface="Amiri" pitchFamily="2" charset="-78"/>
               </a:rPr>
               <a:t>B</a:t>
             </a:r>
@@ -34468,8 +33820,7 @@
                   <a:srgbClr val="9AA1AB"/>
                 </a:solidFill>
                 <a:latin typeface="Calibri" pitchFamily="34" charset="0"/>
-                <a:ea typeface="Calibri" pitchFamily="34" charset="-122"/>
-                <a:cs typeface="Calibri" pitchFamily="34" charset="-120"/>
+                <a:cs typeface="Amiri" pitchFamily="2" charset="-78"/>
               </a:rPr>
               <a:t>in neither part</a:t>
             </a:r>
@@ -34559,8 +33910,7 @@
                   <a:srgbClr val="FFFFFF"/>
                 </a:solidFill>
                 <a:latin typeface="Calibri" pitchFamily="34" charset="0"/>
-                <a:ea typeface="Calibri" pitchFamily="34" charset="-122"/>
-                <a:cs typeface="Calibri" pitchFamily="34" charset="-120"/>
+                <a:cs typeface="Amiri" pitchFamily="2" charset="-78"/>
               </a:rPr>
               <a:t>C</a:t>
             </a:r>
@@ -34598,8 +33948,7 @@
                   <a:srgbClr val="1F2A37"/>
                 </a:solidFill>
                 <a:latin typeface="Calibri" pitchFamily="34" charset="0"/>
-                <a:ea typeface="Calibri" pitchFamily="34" charset="-122"/>
-                <a:cs typeface="Calibri" pitchFamily="34" charset="-120"/>
+                <a:cs typeface="Amiri" pitchFamily="2" charset="-78"/>
               </a:rPr>
               <a:t>after </a:t>
             </a:r>
@@ -34611,9 +33960,8 @@
                 <a:solidFill>
                   <a:srgbClr val="1F2A37"/>
                 </a:solidFill>
-                <a:latin typeface="Amiri" pitchFamily="34" charset="0"/>
-                <a:ea typeface="Amiri" pitchFamily="34" charset="-122"/>
-                <a:cs typeface="Amiri" pitchFamily="34" charset="-120"/>
+                <a:latin typeface="Amiri" pitchFamily="2" charset="-78"/>
+                <a:cs typeface="Amiri" pitchFamily="2" charset="-78"/>
               </a:rPr>
               <a:t>غَيْرَ أَنَّ</a:t>
             </a:r>
@@ -34651,8 +33999,7 @@
                   <a:srgbClr val="8A6D1E"/>
                 </a:solidFill>
                 <a:latin typeface="Calibri" pitchFamily="34" charset="0"/>
-                <a:ea typeface="Calibri" pitchFamily="34" charset="-122"/>
-                <a:cs typeface="Calibri" pitchFamily="34" charset="-120"/>
+                <a:cs typeface="Amiri" pitchFamily="2" charset="-78"/>
               </a:rPr>
               <a:t>The concession comes first; the view follows ghayra anna.</a:t>
             </a:r>
@@ -34749,8 +34096,7 @@
                   <a:srgbClr val="FFFFFF"/>
                 </a:solidFill>
                 <a:latin typeface="Calibri" pitchFamily="34" charset="0"/>
-                <a:ea typeface="Calibri" pitchFamily="34" charset="-122"/>
-                <a:cs typeface="Calibri" pitchFamily="34" charset="-120"/>
+                <a:cs typeface="Amiri" pitchFamily="2" charset="-78"/>
               </a:rPr>
               <a:t>5</a:t>
             </a:r>
@@ -34788,8 +34134,7 @@
                   <a:srgbClr val="1B3B6F"/>
                 </a:solidFill>
                 <a:latin typeface="Calibri" pitchFamily="34" charset="0"/>
-                <a:ea typeface="Calibri" pitchFamily="34" charset="-122"/>
-                <a:cs typeface="Calibri" pitchFamily="34" charset="-120"/>
+                <a:cs typeface="Amiri" pitchFamily="2" charset="-78"/>
               </a:rPr>
               <a:t>You hear </a:t>
             </a:r>
@@ -34801,9 +34146,8 @@
                 <a:solidFill>
                   <a:srgbClr val="1B3B6F"/>
                 </a:solidFill>
-                <a:latin typeface="Amiri" pitchFamily="34" charset="0"/>
-                <a:ea typeface="Amiri" pitchFamily="34" charset="-122"/>
-                <a:cs typeface="Amiri" pitchFamily="34" charset="-120"/>
+                <a:latin typeface="Amiri" pitchFamily="2" charset="-78"/>
+                <a:cs typeface="Amiri" pitchFamily="2" charset="-78"/>
               </a:rPr>
               <a:t>لَوْ دَرَسْتُ … لَنَجَحْتُ</a:t>
             </a:r>
@@ -34816,8 +34160,7 @@
                   <a:srgbClr val="1B3B6F"/>
                 </a:solidFill>
                 <a:latin typeface="Calibri" pitchFamily="34" charset="0"/>
-                <a:ea typeface="Calibri" pitchFamily="34" charset="-122"/>
-                <a:cs typeface="Calibri" pitchFamily="34" charset="-120"/>
+                <a:cs typeface="Amiri" pitchFamily="2" charset="-78"/>
               </a:rPr>
               <a:t> — what kind of sentence is it?</a:t>
             </a:r>
@@ -34907,8 +34250,7 @@
                   <a:srgbClr val="FFFFFF"/>
                 </a:solidFill>
                 <a:latin typeface="Calibri" pitchFamily="34" charset="0"/>
-                <a:ea typeface="Calibri" pitchFamily="34" charset="-122"/>
-                <a:cs typeface="Calibri" pitchFamily="34" charset="-120"/>
+                <a:cs typeface="Amiri" pitchFamily="2" charset="-78"/>
               </a:rPr>
               <a:t>A</a:t>
             </a:r>
@@ -34946,8 +34288,7 @@
                   <a:srgbClr val="1F2A37"/>
                 </a:solidFill>
                 <a:latin typeface="Calibri" pitchFamily="34" charset="0"/>
-                <a:ea typeface="Calibri" pitchFamily="34" charset="-122"/>
-                <a:cs typeface="Calibri" pitchFamily="34" charset="-120"/>
+                <a:cs typeface="Amiri" pitchFamily="2" charset="-78"/>
               </a:rPr>
               <a:t>an unreal (Type 2) conditional</a:t>
             </a:r>
@@ -35010,8 +34351,7 @@
                   <a:srgbClr val="1B3B6F"/>
                 </a:solidFill>
                 <a:latin typeface="Calibri" pitchFamily="34" charset="0"/>
-                <a:ea typeface="Calibri" pitchFamily="34" charset="-122"/>
-                <a:cs typeface="Calibri" pitchFamily="34" charset="-120"/>
+                <a:cs typeface="Amiri" pitchFamily="2" charset="-78"/>
               </a:rPr>
               <a:t>B</a:t>
             </a:r>
@@ -35049,8 +34389,7 @@
                   <a:srgbClr val="9AA1AB"/>
                 </a:solidFill>
                 <a:latin typeface="Calibri" pitchFamily="34" charset="0"/>
-                <a:ea typeface="Calibri" pitchFamily="34" charset="-122"/>
-                <a:cs typeface="Calibri" pitchFamily="34" charset="-120"/>
+                <a:cs typeface="Amiri" pitchFamily="2" charset="-78"/>
               </a:rPr>
               <a:t>a real (Type 1) conditional</a:t>
             </a:r>
@@ -35113,8 +34452,7 @@
                   <a:srgbClr val="1B3B6F"/>
                 </a:solidFill>
                 <a:latin typeface="Calibri" pitchFamily="34" charset="0"/>
-                <a:ea typeface="Calibri" pitchFamily="34" charset="-122"/>
-                <a:cs typeface="Calibri" pitchFamily="34" charset="-120"/>
+                <a:cs typeface="Amiri" pitchFamily="2" charset="-78"/>
               </a:rPr>
               <a:t>C</a:t>
             </a:r>
@@ -35152,8 +34490,7 @@
                   <a:srgbClr val="9AA1AB"/>
                 </a:solidFill>
                 <a:latin typeface="Calibri" pitchFamily="34" charset="0"/>
-                <a:ea typeface="Calibri" pitchFamily="34" charset="-122"/>
-                <a:cs typeface="Calibri" pitchFamily="34" charset="-120"/>
+                <a:cs typeface="Amiri" pitchFamily="2" charset="-78"/>
               </a:rPr>
               <a:t>a question</a:t>
             </a:r>
@@ -35191,8 +34528,7 @@
                   <a:srgbClr val="8A6D1E"/>
                 </a:solidFill>
                 <a:latin typeface="Calibri" pitchFamily="34" charset="0"/>
-                <a:ea typeface="Calibri" pitchFamily="34" charset="-122"/>
-                <a:cs typeface="Calibri" pitchFamily="34" charset="-120"/>
+                <a:cs typeface="Amiri" pitchFamily="2" charset="-78"/>
               </a:rPr>
               <a:t>lau + past, la- + past = unreal.</a:t>
             </a:r>
@@ -35264,8 +34600,7 @@
                   <a:srgbClr val="8A6D1E"/>
                 </a:solidFill>
                 <a:latin typeface="Calibri" pitchFamily="34" charset="0"/>
-                <a:ea typeface="Calibri" pitchFamily="34" charset="-122"/>
-                <a:cs typeface="Calibri" pitchFamily="34" charset="-120"/>
+                <a:cs typeface="Amiri" pitchFamily="2" charset="-78"/>
               </a:rPr>
               <a:t>THE KEY IDEA FOR TODAY</a:t>
             </a:r>
@@ -35303,8 +34638,7 @@
                   <a:srgbClr val="1F2A37"/>
                 </a:solidFill>
                 <a:latin typeface="Calibri" pitchFamily="34" charset="0"/>
-                <a:ea typeface="Calibri" pitchFamily="34" charset="-122"/>
-                <a:cs typeface="Calibri" pitchFamily="34" charset="-120"/>
+                <a:cs typeface="Amiri" pitchFamily="2" charset="-78"/>
               </a:rPr>
               <a:t>Read, label, listen for gist, listen to verify — and never leave a blank.</a:t>
             </a:r>
@@ -35341,9 +34675,8 @@
                 <a:solidFill>
                   <a:srgbClr val="1B3B6F"/>
                 </a:solidFill>
-                <a:latin typeface="Amiri" pitchFamily="34" charset="0"/>
-                <a:ea typeface="Amiri" pitchFamily="34" charset="-122"/>
-                <a:cs typeface="Amiri" pitchFamily="34" charset="-120"/>
+                <a:latin typeface="Amiri" pitchFamily="2" charset="-78"/>
+                <a:cs typeface="Amiri" pitchFamily="2" charset="-78"/>
               </a:rPr>
               <a:t>اقْرَأْ ← تَنَبَّأْ ← اسْتَمِعْ ← تَحَقَّقْ</a:t>
             </a:r>
@@ -35381,8 +34714,7 @@
                   <a:srgbClr val="8A93A0"/>
                 </a:solidFill>
                 <a:latin typeface="Calibri" pitchFamily="34" charset="0"/>
-                <a:ea typeface="Calibri" pitchFamily="34" charset="-122"/>
-                <a:cs typeface="Calibri" pitchFamily="34" charset="-120"/>
+                <a:cs typeface="Amiri" pitchFamily="2" charset="-78"/>
               </a:rPr>
               <a:t>5 / 18</a:t>
             </a:r>
@@ -35476,9 +34808,8 @@
                 <a:solidFill>
                   <a:srgbClr val="D4AF37"/>
                 </a:solidFill>
-                <a:latin typeface="Amiri" pitchFamily="34" charset="0"/>
-                <a:ea typeface="Amiri" pitchFamily="34" charset="-122"/>
-                <a:cs typeface="Amiri" pitchFamily="34" charset="-120"/>
+                <a:latin typeface="Amiri" pitchFamily="2" charset="-78"/>
+                <a:cs typeface="Amiri" pitchFamily="2" charset="-78"/>
               </a:rPr>
               <a:t>م</a:t>
             </a:r>
@@ -35516,8 +34847,7 @@
                   <a:srgbClr val="1B3B6F"/>
                 </a:solidFill>
                 <a:latin typeface="Cambria" pitchFamily="34" charset="0"/>
-                <a:ea typeface="Cambria" pitchFamily="34" charset="-122"/>
-                <a:cs typeface="Cambria" pitchFamily="34" charset="-120"/>
+                <a:cs typeface="Amiri" pitchFamily="2" charset="-78"/>
               </a:rPr>
               <a:t>Al Madina Online School</a:t>
             </a:r>
@@ -35555,8 +34885,7 @@
                   <a:srgbClr val="8A6D1E"/>
                 </a:solidFill>
                 <a:latin typeface="Calibri" pitchFamily="34" charset="0"/>
-                <a:ea typeface="Calibri" pitchFamily="34" charset="-122"/>
-                <a:cs typeface="Calibri" pitchFamily="34" charset="-120"/>
+                <a:cs typeface="Amiri" pitchFamily="2" charset="-78"/>
               </a:rPr>
               <a:t>ARABIC DEPARTMENT · MIFTAH ARABIC · IGCSE 0544</a:t>
             </a:r>
@@ -35621,8 +34950,7 @@
                   <a:srgbClr val="FFFFFF"/>
                 </a:solidFill>
                 <a:latin typeface="Calibri" pitchFamily="34" charset="0"/>
-                <a:ea typeface="Calibri" pitchFamily="34" charset="-122"/>
-                <a:cs typeface="Calibri" pitchFamily="34" charset="-120"/>
+                <a:cs typeface="Amiri" pitchFamily="2" charset="-78"/>
               </a:rPr>
               <a:t>P6-L08 · IGCSE Bridge</a:t>
             </a:r>
@@ -35687,8 +35015,7 @@
                   <a:srgbClr val="FFFFFF"/>
                 </a:solidFill>
                 <a:latin typeface="Calibri" pitchFamily="34" charset="0"/>
-                <a:ea typeface="Calibri" pitchFamily="34" charset="-122"/>
-                <a:cs typeface="Calibri" pitchFamily="34" charset="-120"/>
+                <a:cs typeface="Amiri" pitchFamily="2" charset="-78"/>
               </a:rPr>
               <a:t>WELCOME · 1 MIN</a:t>
             </a:r>
@@ -35726,8 +35053,7 @@
                   <a:srgbClr val="5A6472"/>
                 </a:solidFill>
                 <a:latin typeface="Calibri" pitchFamily="34" charset="0"/>
-                <a:ea typeface="Calibri" pitchFamily="34" charset="-122"/>
-                <a:cs typeface="Calibri" pitchFamily="34" charset="-120"/>
+                <a:cs typeface="Amiri" pitchFamily="2" charset="-78"/>
               </a:rPr>
               <a:t>LESSON OBJECTIVES</a:t>
             </a:r>
@@ -35765,8 +35091,7 @@
                   <a:srgbClr val="1B3B6F"/>
                 </a:solidFill>
                 <a:latin typeface="Cambria" pitchFamily="34" charset="0"/>
-                <a:ea typeface="Cambria" pitchFamily="34" charset="-122"/>
-                <a:cs typeface="Cambria" pitchFamily="34" charset="-120"/>
+                <a:cs typeface="Amiri" pitchFamily="2" charset="-78"/>
               </a:rPr>
               <a:t>Objectives and success criteria</a:t>
             </a:r>
@@ -35803,9 +35128,8 @@
                 <a:solidFill>
                   <a:srgbClr val="8A6D1E"/>
                 </a:solidFill>
-                <a:latin typeface="Amiri" pitchFamily="34" charset="0"/>
-                <a:ea typeface="Amiri" pitchFamily="34" charset="-122"/>
-                <a:cs typeface="Amiri" pitchFamily="34" charset="-120"/>
+                <a:latin typeface="Amiri" pitchFamily="2" charset="-78"/>
+                <a:cs typeface="Amiri" pitchFamily="2" charset="-78"/>
               </a:rPr>
               <a:t>الأَهْدَافُ وَمَعَايِيرُ النَّجَاحِ</a:t>
             </a:r>
@@ -35843,8 +35167,7 @@
                   <a:srgbClr val="8A93A0"/>
                 </a:solidFill>
                 <a:latin typeface="Calibri" pitchFamily="34" charset="0"/>
-                <a:ea typeface="Calibri" pitchFamily="34" charset="-122"/>
-                <a:cs typeface="Calibri" pitchFamily="34" charset="-120"/>
+                <a:cs typeface="Amiri" pitchFamily="2" charset="-78"/>
               </a:rPr>
               <a:t>Miftah Arabic · Progression P6 · IGCSE Bridge · P6-L08</a:t>
             </a:r>
@@ -35916,8 +35239,7 @@
                   <a:srgbClr val="1B3B6F"/>
                 </a:solidFill>
                 <a:latin typeface="Calibri" pitchFamily="34" charset="0"/>
-                <a:ea typeface="Calibri" pitchFamily="34" charset="-122"/>
-                <a:cs typeface="Calibri" pitchFamily="34" charset="-120"/>
+                <a:cs typeface="Amiri" pitchFamily="2" charset="-78"/>
               </a:rPr>
               <a:t>TODAY YOU WILL</a:t>
             </a:r>
@@ -35954,9 +35276,8 @@
                 <a:solidFill>
                   <a:srgbClr val="8A6D1E"/>
                 </a:solidFill>
-                <a:latin typeface="Amiri" pitchFamily="34" charset="0"/>
-                <a:ea typeface="Amiri" pitchFamily="34" charset="-122"/>
-                <a:cs typeface="Amiri" pitchFamily="34" charset="-120"/>
+                <a:latin typeface="Amiri" pitchFamily="2" charset="-78"/>
+                <a:cs typeface="Amiri" pitchFamily="2" charset="-78"/>
               </a:rPr>
               <a:t>سَتَتَعَلَّمُ اليَوْمَ</a:t>
             </a:r>
@@ -36019,8 +35340,7 @@
                   <a:srgbClr val="D4AF37"/>
                 </a:solidFill>
                 <a:latin typeface="Calibri" pitchFamily="34" charset="0"/>
-                <a:ea typeface="Calibri" pitchFamily="34" charset="-122"/>
-                <a:cs typeface="Calibri" pitchFamily="34" charset="-120"/>
+                <a:cs typeface="Amiri" pitchFamily="2" charset="-78"/>
               </a:rPr>
               <a:t>1</a:t>
             </a:r>
@@ -36058,8 +35378,7 @@
                   <a:srgbClr val="1F2A37"/>
                 </a:solidFill>
                 <a:latin typeface="Calibri" pitchFamily="34" charset="0"/>
-                <a:ea typeface="Calibri" pitchFamily="34" charset="-122"/>
-                <a:cs typeface="Calibri" pitchFamily="34" charset="-120"/>
+                <a:cs typeface="Amiri" pitchFamily="2" charset="-78"/>
               </a:rPr>
               <a:t>Sit the mock Paper 1 Listening under exam conditions.</a:t>
             </a:r>
@@ -36122,8 +35441,7 @@
                   <a:srgbClr val="D4AF37"/>
                 </a:solidFill>
                 <a:latin typeface="Calibri" pitchFamily="34" charset="0"/>
-                <a:ea typeface="Calibri" pitchFamily="34" charset="-122"/>
-                <a:cs typeface="Calibri" pitchFamily="34" charset="-120"/>
+                <a:cs typeface="Amiri" pitchFamily="2" charset="-78"/>
               </a:rPr>
               <a:t>2</a:t>
             </a:r>
@@ -36161,8 +35479,7 @@
                   <a:srgbClr val="1F2A37"/>
                 </a:solidFill>
                 <a:latin typeface="Calibri" pitchFamily="34" charset="0"/>
-                <a:ea typeface="Calibri" pitchFamily="34" charset="-122"/>
-                <a:cs typeface="Calibri" pitchFamily="34" charset="-120"/>
+                <a:cs typeface="Amiri" pitchFamily="2" charset="-78"/>
               </a:rPr>
               <a:t>Apply all six listening strategies simultaneously.</a:t>
             </a:r>
@@ -36225,8 +35542,7 @@
                   <a:srgbClr val="D4AF37"/>
                 </a:solidFill>
                 <a:latin typeface="Calibri" pitchFamily="34" charset="0"/>
-                <a:ea typeface="Calibri" pitchFamily="34" charset="-122"/>
-                <a:cs typeface="Calibri" pitchFamily="34" charset="-120"/>
+                <a:cs typeface="Amiri" pitchFamily="2" charset="-78"/>
               </a:rPr>
               <a:t>3</a:t>
             </a:r>
@@ -36264,8 +35580,7 @@
                   <a:srgbClr val="1F2A37"/>
                 </a:solidFill>
                 <a:latin typeface="Calibri" pitchFamily="34" charset="0"/>
-                <a:ea typeface="Calibri" pitchFamily="34" charset="-122"/>
-                <a:cs typeface="Calibri" pitchFamily="34" charset="-120"/>
+                <a:cs typeface="Amiri" pitchFamily="2" charset="-78"/>
               </a:rPr>
               <a:t>Recognise F1–P6 grammar in fast speech across three formats.</a:t>
             </a:r>
@@ -36328,8 +35643,7 @@
                   <a:srgbClr val="D4AF37"/>
                 </a:solidFill>
                 <a:latin typeface="Calibri" pitchFamily="34" charset="0"/>
-                <a:ea typeface="Calibri" pitchFamily="34" charset="-122"/>
-                <a:cs typeface="Calibri" pitchFamily="34" charset="-120"/>
+                <a:cs typeface="Amiri" pitchFamily="2" charset="-78"/>
               </a:rPr>
               <a:t>4</a:t>
             </a:r>
@@ -36367,8 +35681,7 @@
                   <a:srgbClr val="1F2A37"/>
                 </a:solidFill>
                 <a:latin typeface="Calibri" pitchFamily="34" charset="0"/>
-                <a:ea typeface="Calibri" pitchFamily="34" charset="-122"/>
-                <a:cs typeface="Calibri" pitchFamily="34" charset="-120"/>
+                <a:cs typeface="Amiri" pitchFamily="2" charset="-78"/>
               </a:rPr>
               <a:t>Record your raw score and identify targets for the final exam.</a:t>
             </a:r>
@@ -36460,8 +35773,7 @@
                   <a:srgbClr val="FFFFFF"/>
                 </a:solidFill>
                 <a:latin typeface="Calibri" pitchFamily="34" charset="0"/>
-                <a:ea typeface="Calibri" pitchFamily="34" charset="-122"/>
-                <a:cs typeface="Calibri" pitchFamily="34" charset="-120"/>
+                <a:cs typeface="Amiri" pitchFamily="2" charset="-78"/>
               </a:rPr>
               <a:t>CORE</a:t>
             </a:r>
@@ -36499,8 +35811,7 @@
                   <a:srgbClr val="2E8B57"/>
                 </a:solidFill>
                 <a:latin typeface="Calibri" pitchFamily="34" charset="0"/>
-                <a:ea typeface="Calibri" pitchFamily="34" charset="-122"/>
-                <a:cs typeface="Calibri" pitchFamily="34" charset="-120"/>
+                <a:cs typeface="Amiri" pitchFamily="2" charset="-78"/>
               </a:rPr>
               <a:t>Everyone</a:t>
             </a:r>
@@ -36538,8 +35849,7 @@
                   <a:srgbClr val="2E8B57"/>
                 </a:solidFill>
                 <a:latin typeface="Calibri" pitchFamily="34" charset="0"/>
-                <a:ea typeface="Calibri" pitchFamily="34" charset="-122"/>
-                <a:cs typeface="Calibri" pitchFamily="34" charset="-120"/>
+                <a:cs typeface="Amiri" pitchFamily="2" charset="-78"/>
               </a:rPr>
               <a:t>☐  I can answer every question — no blanks.</a:t>
             </a:r>
@@ -36577,8 +35887,7 @@
                   <a:srgbClr val="2E8B57"/>
                 </a:solidFill>
                 <a:latin typeface="Calibri" pitchFamily="34" charset="0"/>
-                <a:ea typeface="Calibri" pitchFamily="34" charset="-122"/>
-                <a:cs typeface="Calibri" pitchFamily="34" charset="-120"/>
+                <a:cs typeface="Amiri" pitchFamily="2" charset="-78"/>
               </a:rPr>
               <a:t>☐  I can record my raw score.</a:t>
             </a:r>
@@ -36670,8 +35979,7 @@
                   <a:srgbClr val="FFFFFF"/>
                 </a:solidFill>
                 <a:latin typeface="Calibri" pitchFamily="34" charset="0"/>
-                <a:ea typeface="Calibri" pitchFamily="34" charset="-122"/>
-                <a:cs typeface="Calibri" pitchFamily="34" charset="-120"/>
+                <a:cs typeface="Amiri" pitchFamily="2" charset="-78"/>
               </a:rPr>
               <a:t>DEVELOP</a:t>
             </a:r>
@@ -36709,8 +36017,7 @@
                   <a:srgbClr val="C9780A"/>
                 </a:solidFill>
                 <a:latin typeface="Calibri" pitchFamily="34" charset="0"/>
-                <a:ea typeface="Calibri" pitchFamily="34" charset="-122"/>
-                <a:cs typeface="Calibri" pitchFamily="34" charset="-120"/>
+                <a:cs typeface="Amiri" pitchFamily="2" charset="-78"/>
               </a:rPr>
               <a:t>Most of us</a:t>
             </a:r>
@@ -36748,8 +36055,7 @@
                   <a:srgbClr val="C9780A"/>
                 </a:solidFill>
                 <a:latin typeface="Calibri" pitchFamily="34" charset="0"/>
-                <a:ea typeface="Calibri" pitchFamily="34" charset="-122"/>
-                <a:cs typeface="Calibri" pitchFamily="34" charset="-120"/>
+                <a:cs typeface="Amiri" pitchFamily="2" charset="-78"/>
               </a:rPr>
               <a:t>☐  I can annotate each question before the script.</a:t>
             </a:r>
@@ -36787,8 +36093,7 @@
                   <a:srgbClr val="C9780A"/>
                 </a:solidFill>
                 <a:latin typeface="Calibri" pitchFamily="34" charset="0"/>
-                <a:ea typeface="Calibri" pitchFamily="34" charset="-122"/>
-                <a:cs typeface="Calibri" pitchFamily="34" charset="-120"/>
+                <a:cs typeface="Amiri" pitchFamily="2" charset="-78"/>
               </a:rPr>
               <a:t>☐  I can convert my score to /45.</a:t>
             </a:r>
@@ -36880,8 +36185,7 @@
                   <a:srgbClr val="FFFFFF"/>
                 </a:solidFill>
                 <a:latin typeface="Calibri" pitchFamily="34" charset="0"/>
-                <a:ea typeface="Calibri" pitchFamily="34" charset="-122"/>
-                <a:cs typeface="Calibri" pitchFamily="34" charset="-120"/>
+                <a:cs typeface="Amiri" pitchFamily="2" charset="-78"/>
               </a:rPr>
               <a:t>STRETCH</a:t>
             </a:r>
@@ -36919,8 +36223,7 @@
                   <a:srgbClr val="B83227"/>
                 </a:solidFill>
                 <a:latin typeface="Calibri" pitchFamily="34" charset="0"/>
-                <a:ea typeface="Calibri" pitchFamily="34" charset="-122"/>
-                <a:cs typeface="Calibri" pitchFamily="34" charset="-120"/>
+                <a:cs typeface="Amiri" pitchFamily="2" charset="-78"/>
               </a:rPr>
               <a:t>Aim high</a:t>
             </a:r>
@@ -36958,8 +36261,7 @@
                   <a:srgbClr val="B83227"/>
                 </a:solidFill>
                 <a:latin typeface="Calibri" pitchFamily="34" charset="0"/>
-                <a:ea typeface="Calibri" pitchFamily="34" charset="-122"/>
-                <a:cs typeface="Calibri" pitchFamily="34" charset="-120"/>
+                <a:cs typeface="Amiri" pitchFamily="2" charset="-78"/>
               </a:rPr>
               <a:t>☐  I can use the second reading to verify, not to over-change.</a:t>
             </a:r>
@@ -36997,8 +36299,7 @@
                   <a:srgbClr val="B83227"/>
                 </a:solidFill>
                 <a:latin typeface="Calibri" pitchFamily="34" charset="0"/>
-                <a:ea typeface="Calibri" pitchFamily="34" charset="-122"/>
-                <a:cs typeface="Calibri" pitchFamily="34" charset="-120"/>
+                <a:cs typeface="Amiri" pitchFamily="2" charset="-78"/>
               </a:rPr>
               <a:t>☐  I can name my priority format and a strategy to fix it.</a:t>
             </a:r>
@@ -37036,8 +36337,7 @@
                   <a:srgbClr val="8A93A0"/>
                 </a:solidFill>
                 <a:latin typeface="Calibri" pitchFamily="34" charset="0"/>
-                <a:ea typeface="Calibri" pitchFamily="34" charset="-122"/>
-                <a:cs typeface="Calibri" pitchFamily="34" charset="-120"/>
+                <a:cs typeface="Amiri" pitchFamily="2" charset="-78"/>
               </a:rPr>
               <a:t>6 / 18</a:t>
             </a:r>
@@ -37131,9 +36431,8 @@
                 <a:solidFill>
                   <a:srgbClr val="D4AF37"/>
                 </a:solidFill>
-                <a:latin typeface="Amiri" pitchFamily="34" charset="0"/>
-                <a:ea typeface="Amiri" pitchFamily="34" charset="-122"/>
-                <a:cs typeface="Amiri" pitchFamily="34" charset="-120"/>
+                <a:latin typeface="Amiri" pitchFamily="2" charset="-78"/>
+                <a:cs typeface="Amiri" pitchFamily="2" charset="-78"/>
               </a:rPr>
               <a:t>م</a:t>
             </a:r>
@@ -37171,8 +36470,7 @@
                   <a:srgbClr val="1B3B6F"/>
                 </a:solidFill>
                 <a:latin typeface="Cambria" pitchFamily="34" charset="0"/>
-                <a:ea typeface="Cambria" pitchFamily="34" charset="-122"/>
-                <a:cs typeface="Cambria" pitchFamily="34" charset="-120"/>
+                <a:cs typeface="Amiri" pitchFamily="2" charset="-78"/>
               </a:rPr>
               <a:t>Al Madina Online School</a:t>
             </a:r>
@@ -37210,8 +36508,7 @@
                   <a:srgbClr val="8A6D1E"/>
                 </a:solidFill>
                 <a:latin typeface="Calibri" pitchFamily="34" charset="0"/>
-                <a:ea typeface="Calibri" pitchFamily="34" charset="-122"/>
-                <a:cs typeface="Calibri" pitchFamily="34" charset="-120"/>
+                <a:cs typeface="Amiri" pitchFamily="2" charset="-78"/>
               </a:rPr>
               <a:t>ARABIC DEPARTMENT · MIFTAH ARABIC · IGCSE 0544</a:t>
             </a:r>
@@ -37276,8 +36573,7 @@
                   <a:srgbClr val="FFFFFF"/>
                 </a:solidFill>
                 <a:latin typeface="Calibri" pitchFamily="34" charset="0"/>
-                <a:ea typeface="Calibri" pitchFamily="34" charset="-122"/>
-                <a:cs typeface="Calibri" pitchFamily="34" charset="-120"/>
+                <a:cs typeface="Amiri" pitchFamily="2" charset="-78"/>
               </a:rPr>
               <a:t>P6-L08 · IGCSE Bridge</a:t>
             </a:r>
@@ -37342,8 +36638,7 @@
                   <a:srgbClr val="FFFFFF"/>
                 </a:solidFill>
                 <a:latin typeface="Calibri" pitchFamily="34" charset="0"/>
-                <a:ea typeface="Calibri" pitchFamily="34" charset="-122"/>
-                <a:cs typeface="Calibri" pitchFamily="34" charset="-120"/>
+                <a:cs typeface="Amiri" pitchFamily="2" charset="-78"/>
               </a:rPr>
               <a:t>TEACHER INSTRUCTION · 3 MIN</a:t>
             </a:r>
@@ -37381,8 +36676,7 @@
                   <a:srgbClr val="1B3B6F"/>
                 </a:solidFill>
                 <a:latin typeface="Calibri" pitchFamily="34" charset="0"/>
-                <a:ea typeface="Calibri" pitchFamily="34" charset="-122"/>
-                <a:cs typeface="Calibri" pitchFamily="34" charset="-120"/>
+                <a:cs typeface="Amiri" pitchFamily="2" charset="-78"/>
               </a:rPr>
               <a:t>TEACH · EXAM CONDITIONS (WEBSITE) · THE SIX STRATEGIES</a:t>
             </a:r>
@@ -37420,8 +36714,7 @@
                   <a:srgbClr val="1B3B6F"/>
                 </a:solidFill>
                 <a:latin typeface="Cambria" pitchFamily="34" charset="0"/>
-                <a:ea typeface="Cambria" pitchFamily="34" charset="-122"/>
-                <a:cs typeface="Cambria" pitchFamily="34" charset="-120"/>
+                <a:cs typeface="Amiri" pitchFamily="2" charset="-78"/>
               </a:rPr>
               <a:t>Before you begin</a:t>
             </a:r>
@@ -37458,9 +36751,8 @@
                 <a:solidFill>
                   <a:srgbClr val="8A6D1E"/>
                 </a:solidFill>
-                <a:latin typeface="Amiri" pitchFamily="34" charset="0"/>
-                <a:ea typeface="Amiri" pitchFamily="34" charset="-122"/>
-                <a:cs typeface="Amiri" pitchFamily="34" charset="-120"/>
+                <a:latin typeface="Amiri" pitchFamily="2" charset="-78"/>
+                <a:cs typeface="Amiri" pitchFamily="2" charset="-78"/>
               </a:rPr>
               <a:t>ظُرُوفُ الامْتِحَانِ</a:t>
             </a:r>
@@ -37498,8 +36790,7 @@
                   <a:srgbClr val="8A93A0"/>
                 </a:solidFill>
                 <a:latin typeface="Calibri" pitchFamily="34" charset="0"/>
-                <a:ea typeface="Calibri" pitchFamily="34" charset="-122"/>
-                <a:cs typeface="Calibri" pitchFamily="34" charset="-120"/>
+                <a:cs typeface="Amiri" pitchFamily="2" charset="-78"/>
               </a:rPr>
               <a:t>Miftah Arabic · Progression P6 · IGCSE Bridge · P6-L08</a:t>
             </a:r>
@@ -37571,8 +36862,7 @@
                   <a:srgbClr val="1B3B6F"/>
                 </a:solidFill>
                 <a:latin typeface="Calibri" pitchFamily="34" charset="0"/>
-                <a:ea typeface="Calibri" pitchFamily="34" charset="-122"/>
-                <a:cs typeface="Calibri" pitchFamily="34" charset="-120"/>
+                <a:cs typeface="Amiri" pitchFamily="2" charset="-78"/>
               </a:rPr>
               <a:t>WHAT YOU NEED TO KNOW</a:t>
             </a:r>
@@ -37635,8 +36925,7 @@
                   <a:srgbClr val="D4AF37"/>
                 </a:solidFill>
                 <a:latin typeface="Calibri" pitchFamily="34" charset="0"/>
-                <a:ea typeface="Calibri" pitchFamily="34" charset="-122"/>
-                <a:cs typeface="Calibri" pitchFamily="34" charset="-120"/>
+                <a:cs typeface="Amiri" pitchFamily="2" charset="-78"/>
               </a:rPr>
               <a:t>1</a:t>
             </a:r>
@@ -37674,8 +36963,7 @@
                   <a:srgbClr val="1F2A37"/>
                 </a:solidFill>
                 <a:latin typeface="Calibri" pitchFamily="34" charset="0"/>
-                <a:ea typeface="Calibri" pitchFamily="34" charset="-122"/>
-                <a:cs typeface="Calibri" pitchFamily="34" charset="-120"/>
+                <a:cs typeface="Amiri" pitchFamily="2" charset="-78"/>
               </a:rPr>
               <a:t>This is a mock examination. Work silently, without notes, in one sitting. Read the questions in the two-minute gaps, then read each script twice.</a:t>
             </a:r>
@@ -37738,8 +37026,7 @@
                   <a:srgbClr val="D4AF37"/>
                 </a:solidFill>
                 <a:latin typeface="Calibri" pitchFamily="34" charset="0"/>
-                <a:ea typeface="Calibri" pitchFamily="34" charset="-122"/>
-                <a:cs typeface="Calibri" pitchFamily="34" charset="-120"/>
+                <a:cs typeface="Amiri" pitchFamily="2" charset="-78"/>
               </a:rPr>
               <a:t>2</a:t>
             </a:r>
@@ -37777,8 +37064,7 @@
                   <a:srgbClr val="1F2A37"/>
                 </a:solidFill>
                 <a:latin typeface="Calibri" pitchFamily="34" charset="0"/>
-                <a:ea typeface="Calibri" pitchFamily="34" charset="-122"/>
-                <a:cs typeface="Calibri" pitchFamily="34" charset="-120"/>
+                <a:cs typeface="Amiri" pitchFamily="2" charset="-78"/>
               </a:rPr>
               <a:t>The three texts carry 8 + 6 + 6 = 20 raw marks; the real Paper 1 scales this section to 45. Record your raw score at the end and convert it.</a:t>
             </a:r>
@@ -37841,8 +37127,7 @@
                   <a:srgbClr val="D4AF37"/>
                 </a:solidFill>
                 <a:latin typeface="Calibri" pitchFamily="34" charset="0"/>
-                <a:ea typeface="Calibri" pitchFamily="34" charset="-122"/>
-                <a:cs typeface="Calibri" pitchFamily="34" charset="-120"/>
+                <a:cs typeface="Amiri" pitchFamily="2" charset="-78"/>
               </a:rPr>
               <a:t>3</a:t>
             </a:r>
@@ -37880,8 +37165,7 @@
                   <a:srgbClr val="1F2A37"/>
                 </a:solidFill>
                 <a:latin typeface="Calibri" pitchFamily="34" charset="0"/>
-                <a:ea typeface="Calibri" pitchFamily="34" charset="-122"/>
-                <a:cs typeface="Calibri" pitchFamily="34" charset="-120"/>
+                <a:cs typeface="Amiri" pitchFamily="2" charset="-78"/>
               </a:rPr>
               <a:t>Never leave a blank: a guess may score; a blank never does.</a:t>
             </a:r>
@@ -37953,8 +37237,7 @@
                   <a:srgbClr val="8A6D1E"/>
                 </a:solidFill>
                 <a:latin typeface="Calibri" pitchFamily="34" charset="0"/>
-                <a:ea typeface="Calibri" pitchFamily="34" charset="-122"/>
-                <a:cs typeface="Calibri" pitchFamily="34" charset="-120"/>
+                <a:cs typeface="Amiri" pitchFamily="2" charset="-78"/>
               </a:rPr>
               <a:t>THE SIX STRATEGIES (P6-L02)</a:t>
             </a:r>
@@ -37991,9 +37274,8 @@
                 <a:solidFill>
                   <a:srgbClr val="1B3B6F"/>
                 </a:solidFill>
-                <a:latin typeface="Amiri" pitchFamily="34" charset="0"/>
-                <a:ea typeface="Amiri" pitchFamily="34" charset="-122"/>
-                <a:cs typeface="Amiri" pitchFamily="34" charset="-120"/>
+                <a:latin typeface="Amiri" pitchFamily="2" charset="-78"/>
+                <a:cs typeface="Amiri" pitchFamily="2" charset="-78"/>
               </a:rPr>
               <a:t>قِرَاءَةُ الأَسْئِلَةِ مُسْبَقًا · التَّنَبُّؤُ بِالمُحْتَوَى</a:t>
             </a:r>
@@ -38031,8 +37313,7 @@
                   <a:srgbClr val="5A6472"/>
                 </a:solidFill>
                 <a:latin typeface="Calibri" pitchFamily="34" charset="0"/>
-                <a:ea typeface="Calibri" pitchFamily="34" charset="-122"/>
-                <a:cs typeface="Calibri" pitchFamily="34" charset="-120"/>
+                <a:cs typeface="Amiri" pitchFamily="2" charset="-78"/>
               </a:rPr>
               <a:t>1–2: read the questions first · predict the content</a:t>
             </a:r>
@@ -38092,9 +37373,8 @@
                 <a:solidFill>
                   <a:srgbClr val="1B3B6F"/>
                 </a:solidFill>
-                <a:latin typeface="Amiri" pitchFamily="34" charset="0"/>
-                <a:ea typeface="Amiri" pitchFamily="34" charset="-122"/>
-                <a:cs typeface="Amiri" pitchFamily="34" charset="-120"/>
+                <a:latin typeface="Amiri" pitchFamily="2" charset="-78"/>
+                <a:cs typeface="Amiri" pitchFamily="2" charset="-78"/>
               </a:rPr>
               <a:t>الاسْتِمَاعُ الأَوَّلُ لِلْفَهْمِ العَامِّ · التَّرْكِيزُ عَلَى الإِشَارَاتِ</a:t>
             </a:r>
@@ -38132,8 +37412,7 @@
                   <a:srgbClr val="5A6472"/>
                 </a:solidFill>
                 <a:latin typeface="Calibri" pitchFamily="34" charset="0"/>
-                <a:ea typeface="Calibri" pitchFamily="34" charset="-122"/>
-                <a:cs typeface="Calibri" pitchFamily="34" charset="-120"/>
+                <a:cs typeface="Amiri" pitchFamily="2" charset="-78"/>
               </a:rPr>
               <a:t>3–4: first listen for gist · listen for the signals (</a:t>
             </a:r>
@@ -38145,9 +37424,8 @@
                 <a:solidFill>
                   <a:srgbClr val="5A6472"/>
                 </a:solidFill>
-                <a:latin typeface="Amiri" pitchFamily="34" charset="0"/>
-                <a:ea typeface="Amiri" pitchFamily="34" charset="-122"/>
-                <a:cs typeface="Amiri" pitchFamily="34" charset="-120"/>
+                <a:latin typeface="Amiri" pitchFamily="2" charset="-78"/>
+                <a:cs typeface="Amiri" pitchFamily="2" charset="-78"/>
               </a:rPr>
               <a:t>لَوْ</a:t>
             </a:r>
@@ -38160,8 +37438,7 @@
                   <a:srgbClr val="5A6472"/>
                 </a:solidFill>
                 <a:latin typeface="Calibri" pitchFamily="34" charset="0"/>
-                <a:ea typeface="Calibri" pitchFamily="34" charset="-122"/>
-                <a:cs typeface="Calibri" pitchFamily="34" charset="-120"/>
+                <a:cs typeface="Amiri" pitchFamily="2" charset="-78"/>
               </a:rPr>
               <a:t> · </a:t>
             </a:r>
@@ -38173,9 +37450,8 @@
                 <a:solidFill>
                   <a:srgbClr val="5A6472"/>
                 </a:solidFill>
-                <a:latin typeface="Amiri" pitchFamily="34" charset="0"/>
-                <a:ea typeface="Amiri" pitchFamily="34" charset="-122"/>
-                <a:cs typeface="Amiri" pitchFamily="34" charset="-120"/>
+                <a:latin typeface="Amiri" pitchFamily="2" charset="-78"/>
+                <a:cs typeface="Amiri" pitchFamily="2" charset="-78"/>
               </a:rPr>
               <a:t>غَيْرَ أَنَّ</a:t>
             </a:r>
@@ -38188,8 +37464,7 @@
                   <a:srgbClr val="5A6472"/>
                 </a:solidFill>
                 <a:latin typeface="Calibri" pitchFamily="34" charset="0"/>
-                <a:ea typeface="Calibri" pitchFamily="34" charset="-122"/>
-                <a:cs typeface="Calibri" pitchFamily="34" charset="-120"/>
+                <a:cs typeface="Amiri" pitchFamily="2" charset="-78"/>
               </a:rPr>
               <a:t>)</a:t>
             </a:r>
@@ -38249,9 +37524,8 @@
                 <a:solidFill>
                   <a:srgbClr val="1B3B6F"/>
                 </a:solidFill>
-                <a:latin typeface="Amiri" pitchFamily="34" charset="0"/>
-                <a:ea typeface="Amiri" pitchFamily="34" charset="-122"/>
-                <a:cs typeface="Amiri" pitchFamily="34" charset="-120"/>
+                <a:latin typeface="Amiri" pitchFamily="2" charset="-78"/>
+                <a:cs typeface="Amiri" pitchFamily="2" charset="-78"/>
               </a:rPr>
               <a:t>الحَذَرُ مِنَ المُشَتِّتَاتِ · التَّحَقُّقُ فِي الاسْتِمَاعِ الثَّانِي</a:t>
             </a:r>
@@ -38289,8 +37563,7 @@
                   <a:srgbClr val="5A6472"/>
                 </a:solidFill>
                 <a:latin typeface="Calibri" pitchFamily="34" charset="0"/>
-                <a:ea typeface="Calibri" pitchFamily="34" charset="-122"/>
-                <a:cs typeface="Calibri" pitchFamily="34" charset="-120"/>
+                <a:cs typeface="Amiri" pitchFamily="2" charset="-78"/>
               </a:rPr>
               <a:t>5–6: beware of distractors · verify on the second listen</a:t>
             </a:r>
@@ -38328,8 +37601,7 @@
                   <a:srgbClr val="8A93A0"/>
                 </a:solidFill>
                 <a:latin typeface="Calibri" pitchFamily="34" charset="0"/>
-                <a:ea typeface="Calibri" pitchFamily="34" charset="-122"/>
-                <a:cs typeface="Calibri" pitchFamily="34" charset="-120"/>
+                <a:cs typeface="Amiri" pitchFamily="2" charset="-78"/>
               </a:rPr>
               <a:t>7 / 18</a:t>
             </a:r>
@@ -38423,9 +37695,8 @@
                 <a:solidFill>
                   <a:srgbClr val="D4AF37"/>
                 </a:solidFill>
-                <a:latin typeface="Amiri" pitchFamily="34" charset="0"/>
-                <a:ea typeface="Amiri" pitchFamily="34" charset="-122"/>
-                <a:cs typeface="Amiri" pitchFamily="34" charset="-120"/>
+                <a:latin typeface="Amiri" pitchFamily="2" charset="-78"/>
+                <a:cs typeface="Amiri" pitchFamily="2" charset="-78"/>
               </a:rPr>
               <a:t>م</a:t>
             </a:r>
@@ -38463,8 +37734,7 @@
                   <a:srgbClr val="1B3B6F"/>
                 </a:solidFill>
                 <a:latin typeface="Cambria" pitchFamily="34" charset="0"/>
-                <a:ea typeface="Cambria" pitchFamily="34" charset="-122"/>
-                <a:cs typeface="Cambria" pitchFamily="34" charset="-120"/>
+                <a:cs typeface="Amiri" pitchFamily="2" charset="-78"/>
               </a:rPr>
               <a:t>Al Madina Online School</a:t>
             </a:r>
@@ -38502,8 +37772,7 @@
                   <a:srgbClr val="8A6D1E"/>
                 </a:solidFill>
                 <a:latin typeface="Calibri" pitchFamily="34" charset="0"/>
-                <a:ea typeface="Calibri" pitchFamily="34" charset="-122"/>
-                <a:cs typeface="Calibri" pitchFamily="34" charset="-120"/>
+                <a:cs typeface="Amiri" pitchFamily="2" charset="-78"/>
               </a:rPr>
               <a:t>ARABIC DEPARTMENT · MIFTAH ARABIC · IGCSE 0544</a:t>
             </a:r>
@@ -38568,8 +37837,7 @@
                   <a:srgbClr val="FFFFFF"/>
                 </a:solidFill>
                 <a:latin typeface="Calibri" pitchFamily="34" charset="0"/>
-                <a:ea typeface="Calibri" pitchFamily="34" charset="-122"/>
-                <a:cs typeface="Calibri" pitchFamily="34" charset="-120"/>
+                <a:cs typeface="Amiri" pitchFamily="2" charset="-78"/>
               </a:rPr>
               <a:t>P6-L08 · IGCSE Bridge</a:t>
             </a:r>
@@ -38634,8 +37902,7 @@
                   <a:srgbClr val="FFFFFF"/>
                 </a:solidFill>
                 <a:latin typeface="Calibri" pitchFamily="34" charset="0"/>
-                <a:ea typeface="Calibri" pitchFamily="34" charset="-122"/>
-                <a:cs typeface="Calibri" pitchFamily="34" charset="-120"/>
+                <a:cs typeface="Amiri" pitchFamily="2" charset="-78"/>
               </a:rPr>
               <a:t>YOU DO · 8 MIN</a:t>
             </a:r>
@@ -38673,8 +37940,7 @@
                   <a:srgbClr val="1E6B52"/>
                 </a:solidFill>
                 <a:latin typeface="Calibri" pitchFamily="34" charset="0"/>
-                <a:ea typeface="Calibri" pitchFamily="34" charset="-122"/>
-                <a:cs typeface="Calibri" pitchFamily="34" charset="-120"/>
+                <a:cs typeface="Amiri" pitchFamily="2" charset="-78"/>
               </a:rPr>
               <a:t>MOCK · PAPER 1 · TEXT 1 — MULTIPLE CHOICE (8 MARKS)</a:t>
             </a:r>
@@ -38712,8 +37978,7 @@
                   <a:srgbClr val="1B3B6F"/>
                 </a:solidFill>
                 <a:latin typeface="Cambria" pitchFamily="34" charset="0"/>
-                <a:ea typeface="Cambria" pitchFamily="34" charset="-122"/>
-                <a:cs typeface="Cambria" pitchFamily="34" charset="-120"/>
+                <a:cs typeface="Amiri" pitchFamily="2" charset="-78"/>
               </a:rPr>
               <a:t>Choose the correct option</a:t>
             </a:r>
@@ -38750,9 +38015,8 @@
                 <a:solidFill>
                   <a:srgbClr val="8A6D1E"/>
                 </a:solidFill>
-                <a:latin typeface="Amiri" pitchFamily="34" charset="0"/>
-                <a:ea typeface="Amiri" pitchFamily="34" charset="-122"/>
-                <a:cs typeface="Amiri" pitchFamily="34" charset="-120"/>
+                <a:latin typeface="Amiri" pitchFamily="2" charset="-78"/>
+                <a:cs typeface="Amiri" pitchFamily="2" charset="-78"/>
               </a:rPr>
               <a:t>الاسْتِمَاعُ</a:t>
             </a:r>
@@ -38790,8 +38054,7 @@
                   <a:srgbClr val="8A93A0"/>
                 </a:solidFill>
                 <a:latin typeface="Calibri" pitchFamily="34" charset="0"/>
-                <a:ea typeface="Calibri" pitchFamily="34" charset="-122"/>
-                <a:cs typeface="Calibri" pitchFamily="34" charset="-120"/>
+                <a:cs typeface="Amiri" pitchFamily="2" charset="-78"/>
               </a:rPr>
               <a:t>Miftah Arabic · Progression P6 · IGCSE Bridge · P6-L08</a:t>
             </a:r>
@@ -38888,8 +38151,7 @@
                   <a:srgbClr val="FFFFFF"/>
                 </a:solidFill>
                 <a:latin typeface="Calibri" pitchFamily="34" charset="0"/>
-                <a:ea typeface="Calibri" pitchFamily="34" charset="-122"/>
-                <a:cs typeface="Calibri" pitchFamily="34" charset="-120"/>
+                <a:cs typeface="Amiri" pitchFamily="2" charset="-78"/>
               </a:rPr>
               <a:t>1</a:t>
             </a:r>
@@ -38927,8 +38189,7 @@
                   <a:srgbClr val="1B3B6F"/>
                 </a:solidFill>
                 <a:latin typeface="Calibri" pitchFamily="34" charset="0"/>
-                <a:ea typeface="Calibri" pitchFamily="34" charset="-122"/>
-                <a:cs typeface="Calibri" pitchFamily="34" charset="-120"/>
+                <a:cs typeface="Amiri" pitchFamily="2" charset="-78"/>
               </a:rPr>
               <a:t>What does the doctor say prevention is?</a:t>
             </a:r>
@@ -38991,8 +38252,7 @@
                   <a:srgbClr val="1B3B6F"/>
                 </a:solidFill>
                 <a:latin typeface="Calibri" pitchFamily="34" charset="0"/>
-                <a:ea typeface="Calibri" pitchFamily="34" charset="-122"/>
-                <a:cs typeface="Calibri" pitchFamily="34" charset="-120"/>
+                <a:cs typeface="Amiri" pitchFamily="2" charset="-78"/>
               </a:rPr>
               <a:t>A</a:t>
             </a:r>
@@ -39030,8 +38290,7 @@
                   <a:srgbClr val="1F2A37"/>
                 </a:solidFill>
                 <a:latin typeface="Calibri" pitchFamily="34" charset="0"/>
-                <a:ea typeface="Calibri" pitchFamily="34" charset="-122"/>
-                <a:cs typeface="Calibri" pitchFamily="34" charset="-120"/>
+                <a:cs typeface="Amiri" pitchFamily="2" charset="-78"/>
               </a:rPr>
               <a:t>A waste of time</a:t>
             </a:r>
@@ -39094,8 +38353,7 @@
                   <a:srgbClr val="1B3B6F"/>
                 </a:solidFill>
                 <a:latin typeface="Calibri" pitchFamily="34" charset="0"/>
-                <a:ea typeface="Calibri" pitchFamily="34" charset="-122"/>
-                <a:cs typeface="Calibri" pitchFamily="34" charset="-120"/>
+                <a:cs typeface="Amiri" pitchFamily="2" charset="-78"/>
               </a:rPr>
               <a:t>B</a:t>
             </a:r>
@@ -39133,8 +38391,7 @@
                   <a:srgbClr val="1F2A37"/>
                 </a:solidFill>
                 <a:latin typeface="Calibri" pitchFamily="34" charset="0"/>
-                <a:ea typeface="Calibri" pitchFamily="34" charset="-122"/>
-                <a:cs typeface="Calibri" pitchFamily="34" charset="-120"/>
+                <a:cs typeface="Amiri" pitchFamily="2" charset="-78"/>
               </a:rPr>
               <a:t>Better than cure</a:t>
             </a:r>
@@ -39197,8 +38454,7 @@
                   <a:srgbClr val="1B3B6F"/>
                 </a:solidFill>
                 <a:latin typeface="Calibri" pitchFamily="34" charset="0"/>
-                <a:ea typeface="Calibri" pitchFamily="34" charset="-122"/>
-                <a:cs typeface="Calibri" pitchFamily="34" charset="-120"/>
+                <a:cs typeface="Amiri" pitchFamily="2" charset="-78"/>
               </a:rPr>
               <a:t>C</a:t>
             </a:r>
@@ -39236,8 +38492,7 @@
                   <a:srgbClr val="1F2A37"/>
                 </a:solidFill>
                 <a:latin typeface="Calibri" pitchFamily="34" charset="0"/>
-                <a:ea typeface="Calibri" pitchFamily="34" charset="-122"/>
-                <a:cs typeface="Calibri" pitchFamily="34" charset="-120"/>
+                <a:cs typeface="Amiri" pitchFamily="2" charset="-78"/>
               </a:rPr>
               <a:t>Only for the old</a:t>
             </a:r>
@@ -39334,8 +38589,7 @@
                   <a:srgbClr val="FFFFFF"/>
                 </a:solidFill>
                 <a:latin typeface="Calibri" pitchFamily="34" charset="0"/>
-                <a:ea typeface="Calibri" pitchFamily="34" charset="-122"/>
-                <a:cs typeface="Calibri" pitchFamily="34" charset="-120"/>
+                <a:cs typeface="Amiri" pitchFamily="2" charset="-78"/>
               </a:rPr>
               <a:t>2</a:t>
             </a:r>
@@ -39373,8 +38627,7 @@
                   <a:srgbClr val="1B3B6F"/>
                 </a:solidFill>
                 <a:latin typeface="Calibri" pitchFamily="34" charset="0"/>
-                <a:ea typeface="Calibri" pitchFamily="34" charset="-122"/>
-                <a:cs typeface="Calibri" pitchFamily="34" charset="-120"/>
+                <a:cs typeface="Amiri" pitchFamily="2" charset="-78"/>
               </a:rPr>
               <a:t>What does she concede (</a:t>
             </a:r>
@@ -39386,9 +38639,8 @@
                 <a:solidFill>
                   <a:srgbClr val="1B3B6F"/>
                 </a:solidFill>
-                <a:latin typeface="Amiri" pitchFamily="34" charset="0"/>
-                <a:ea typeface="Amiri" pitchFamily="34" charset="-122"/>
-                <a:cs typeface="Amiri" pitchFamily="34" charset="-120"/>
+                <a:latin typeface="Amiri" pitchFamily="2" charset="-78"/>
+                <a:cs typeface="Amiri" pitchFamily="2" charset="-78"/>
               </a:rPr>
               <a:t>صَحِيحٌ أَنَّ</a:t>
             </a:r>
@@ -39401,8 +38653,7 @@
                   <a:srgbClr val="1B3B6F"/>
                 </a:solidFill>
                 <a:latin typeface="Calibri" pitchFamily="34" charset="0"/>
-                <a:ea typeface="Calibri" pitchFamily="34" charset="-122"/>
-                <a:cs typeface="Calibri" pitchFamily="34" charset="-120"/>
+                <a:cs typeface="Amiri" pitchFamily="2" charset="-78"/>
               </a:rPr>
               <a:t>)?</a:t>
             </a:r>
@@ -39465,8 +38716,7 @@
                   <a:srgbClr val="1B3B6F"/>
                 </a:solidFill>
                 <a:latin typeface="Calibri" pitchFamily="34" charset="0"/>
-                <a:ea typeface="Calibri" pitchFamily="34" charset="-122"/>
-                <a:cs typeface="Calibri" pitchFamily="34" charset="-120"/>
+                <a:cs typeface="Amiri" pitchFamily="2" charset="-78"/>
               </a:rPr>
               <a:t>A</a:t>
             </a:r>
@@ -39504,8 +38754,7 @@
                   <a:srgbClr val="1F2A37"/>
                 </a:solidFill>
                 <a:latin typeface="Calibri" pitchFamily="34" charset="0"/>
-                <a:ea typeface="Calibri" pitchFamily="34" charset="-122"/>
-                <a:cs typeface="Calibri" pitchFamily="34" charset="-120"/>
+                <a:cs typeface="Amiri" pitchFamily="2" charset="-78"/>
               </a:rPr>
               <a:t>Medicines are useless</a:t>
             </a:r>
@@ -39568,8 +38817,7 @@
                   <a:srgbClr val="1B3B6F"/>
                 </a:solidFill>
                 <a:latin typeface="Calibri" pitchFamily="34" charset="0"/>
-                <a:ea typeface="Calibri" pitchFamily="34" charset="-122"/>
-                <a:cs typeface="Calibri" pitchFamily="34" charset="-120"/>
+                <a:cs typeface="Amiri" pitchFamily="2" charset="-78"/>
               </a:rPr>
               <a:t>B</a:t>
             </a:r>
@@ -39607,8 +38855,7 @@
                   <a:srgbClr val="1F2A37"/>
                 </a:solidFill>
                 <a:latin typeface="Calibri" pitchFamily="34" charset="0"/>
-                <a:ea typeface="Calibri" pitchFamily="34" charset="-122"/>
-                <a:cs typeface="Calibri" pitchFamily="34" charset="-120"/>
+                <a:cs typeface="Amiri" pitchFamily="2" charset="-78"/>
               </a:rPr>
               <a:t>Lifestyle does not matter</a:t>
             </a:r>
@@ -39671,8 +38918,7 @@
                   <a:srgbClr val="1B3B6F"/>
                 </a:solidFill>
                 <a:latin typeface="Calibri" pitchFamily="34" charset="0"/>
-                <a:ea typeface="Calibri" pitchFamily="34" charset="-122"/>
-                <a:cs typeface="Calibri" pitchFamily="34" charset="-120"/>
+                <a:cs typeface="Amiri" pitchFamily="2" charset="-78"/>
               </a:rPr>
               <a:t>C</a:t>
             </a:r>
@@ -39710,8 +38956,7 @@
                   <a:srgbClr val="1F2A37"/>
                 </a:solidFill>
                 <a:latin typeface="Calibri" pitchFamily="34" charset="0"/>
-                <a:ea typeface="Calibri" pitchFamily="34" charset="-122"/>
-                <a:cs typeface="Calibri" pitchFamily="34" charset="-120"/>
+                <a:cs typeface="Amiri" pitchFamily="2" charset="-78"/>
               </a:rPr>
               <a:t>Medicines are sometimes necessary</a:t>
             </a:r>
@@ -39808,8 +39053,7 @@
                   <a:srgbClr val="FFFFFF"/>
                 </a:solidFill>
                 <a:latin typeface="Calibri" pitchFamily="34" charset="0"/>
-                <a:ea typeface="Calibri" pitchFamily="34" charset="-122"/>
-                <a:cs typeface="Calibri" pitchFamily="34" charset="-120"/>
+                <a:cs typeface="Amiri" pitchFamily="2" charset="-78"/>
               </a:rPr>
               <a:t>3</a:t>
             </a:r>
@@ -39847,8 +39091,7 @@
                   <a:srgbClr val="1B3B6F"/>
                 </a:solidFill>
                 <a:latin typeface="Calibri" pitchFamily="34" charset="0"/>
-                <a:ea typeface="Calibri" pitchFamily="34" charset="-122"/>
-                <a:cs typeface="Calibri" pitchFamily="34" charset="-120"/>
+                <a:cs typeface="Amiri" pitchFamily="2" charset="-78"/>
               </a:rPr>
               <a:t>What does she emphasise (</a:t>
             </a:r>
@@ -39860,9 +39103,8 @@
                 <a:solidFill>
                   <a:srgbClr val="1B3B6F"/>
                 </a:solidFill>
-                <a:latin typeface="Amiri" pitchFamily="34" charset="0"/>
-                <a:ea typeface="Amiri" pitchFamily="34" charset="-122"/>
-                <a:cs typeface="Amiri" pitchFamily="34" charset="-120"/>
+                <a:latin typeface="Amiri" pitchFamily="2" charset="-78"/>
+                <a:cs typeface="Amiri" pitchFamily="2" charset="-78"/>
               </a:rPr>
               <a:t>غَيْرَ أَنَّ</a:t>
             </a:r>
@@ -39875,8 +39117,7 @@
                   <a:srgbClr val="1B3B6F"/>
                 </a:solidFill>
                 <a:latin typeface="Calibri" pitchFamily="34" charset="0"/>
-                <a:ea typeface="Calibri" pitchFamily="34" charset="-122"/>
-                <a:cs typeface="Calibri" pitchFamily="34" charset="-120"/>
+                <a:cs typeface="Amiri" pitchFamily="2" charset="-78"/>
               </a:rPr>
               <a:t>)?</a:t>
             </a:r>
@@ -39939,8 +39180,7 @@
                   <a:srgbClr val="1B3B6F"/>
                 </a:solidFill>
                 <a:latin typeface="Calibri" pitchFamily="34" charset="0"/>
-                <a:ea typeface="Calibri" pitchFamily="34" charset="-122"/>
-                <a:cs typeface="Calibri" pitchFamily="34" charset="-120"/>
+                <a:cs typeface="Amiri" pitchFamily="2" charset="-78"/>
               </a:rPr>
               <a:t>A</a:t>
             </a:r>
@@ -39978,8 +39218,7 @@
                   <a:srgbClr val="1F2A37"/>
                 </a:solidFill>
                 <a:latin typeface="Calibri" pitchFamily="34" charset="0"/>
-                <a:ea typeface="Calibri" pitchFamily="34" charset="-122"/>
-                <a:cs typeface="Calibri" pitchFamily="34" charset="-120"/>
+                <a:cs typeface="Amiri" pitchFamily="2" charset="-78"/>
               </a:rPr>
               <a:t>A healthy lifestyle prevents many diseases</a:t>
             </a:r>
@@ -40042,8 +39281,7 @@
                   <a:srgbClr val="1B3B6F"/>
                 </a:solidFill>
                 <a:latin typeface="Calibri" pitchFamily="34" charset="0"/>
-                <a:ea typeface="Calibri" pitchFamily="34" charset="-122"/>
-                <a:cs typeface="Calibri" pitchFamily="34" charset="-120"/>
+                <a:cs typeface="Amiri" pitchFamily="2" charset="-78"/>
               </a:rPr>
               <a:t>B</a:t>
             </a:r>
@@ -40081,8 +39319,7 @@
                   <a:srgbClr val="1F2A37"/>
                 </a:solidFill>
                 <a:latin typeface="Calibri" pitchFamily="34" charset="0"/>
-                <a:ea typeface="Calibri" pitchFamily="34" charset="-122"/>
-                <a:cs typeface="Calibri" pitchFamily="34" charset="-120"/>
+                <a:cs typeface="Amiri" pitchFamily="2" charset="-78"/>
               </a:rPr>
               <a:t>Only medicine works</a:t>
             </a:r>
@@ -40145,8 +39382,7 @@
                   <a:srgbClr val="1B3B6F"/>
                 </a:solidFill>
                 <a:latin typeface="Calibri" pitchFamily="34" charset="0"/>
-                <a:ea typeface="Calibri" pitchFamily="34" charset="-122"/>
-                <a:cs typeface="Calibri" pitchFamily="34" charset="-120"/>
+                <a:cs typeface="Amiri" pitchFamily="2" charset="-78"/>
               </a:rPr>
               <a:t>C</a:t>
             </a:r>
@@ -40184,8 +39420,7 @@
                   <a:srgbClr val="1F2A37"/>
                 </a:solidFill>
                 <a:latin typeface="Calibri" pitchFamily="34" charset="0"/>
-                <a:ea typeface="Calibri" pitchFamily="34" charset="-122"/>
-                <a:cs typeface="Calibri" pitchFamily="34" charset="-120"/>
+                <a:cs typeface="Amiri" pitchFamily="2" charset="-78"/>
               </a:rPr>
               <a:t>Exercise is pointless</a:t>
             </a:r>
@@ -40282,8 +39517,7 @@
                   <a:srgbClr val="FFFFFF"/>
                 </a:solidFill>
                 <a:latin typeface="Calibri" pitchFamily="34" charset="0"/>
-                <a:ea typeface="Calibri" pitchFamily="34" charset="-122"/>
-                <a:cs typeface="Calibri" pitchFamily="34" charset="-120"/>
+                <a:cs typeface="Amiri" pitchFamily="2" charset="-78"/>
               </a:rPr>
               <a:t>4</a:t>
             </a:r>
@@ -40321,8 +39555,7 @@
                   <a:srgbClr val="1B3B6F"/>
                 </a:solidFill>
                 <a:latin typeface="Calibri" pitchFamily="34" charset="0"/>
-                <a:ea typeface="Calibri" pitchFamily="34" charset="-122"/>
-                <a:cs typeface="Calibri" pitchFamily="34" charset="-120"/>
+                <a:cs typeface="Amiri" pitchFamily="2" charset="-78"/>
               </a:rPr>
               <a:t>What had many patients done (past perfect)?</a:t>
             </a:r>
@@ -40385,8 +39618,7 @@
                   <a:srgbClr val="1B3B6F"/>
                 </a:solidFill>
                 <a:latin typeface="Calibri" pitchFamily="34" charset="0"/>
-                <a:ea typeface="Calibri" pitchFamily="34" charset="-122"/>
-                <a:cs typeface="Calibri" pitchFamily="34" charset="-120"/>
+                <a:cs typeface="Amiri" pitchFamily="2" charset="-78"/>
               </a:rPr>
               <a:t>A</a:t>
             </a:r>
@@ -40424,8 +39656,7 @@
                   <a:srgbClr val="1F2A37"/>
                 </a:solidFill>
                 <a:latin typeface="Calibri" pitchFamily="34" charset="0"/>
-                <a:ea typeface="Calibri" pitchFamily="34" charset="-122"/>
-                <a:cs typeface="Calibri" pitchFamily="34" charset="-120"/>
+                <a:cs typeface="Amiri" pitchFamily="2" charset="-78"/>
               </a:rPr>
               <a:t>Exercised daily</a:t>
             </a:r>
@@ -40488,8 +39719,7 @@
                   <a:srgbClr val="1B3B6F"/>
                 </a:solidFill>
                 <a:latin typeface="Calibri" pitchFamily="34" charset="0"/>
-                <a:ea typeface="Calibri" pitchFamily="34" charset="-122"/>
-                <a:cs typeface="Calibri" pitchFamily="34" charset="-120"/>
+                <a:cs typeface="Amiri" pitchFamily="2" charset="-78"/>
               </a:rPr>
               <a:t>B</a:t>
             </a:r>
@@ -40527,8 +39757,7 @@
                   <a:srgbClr val="1F2A37"/>
                 </a:solidFill>
                 <a:latin typeface="Calibri" pitchFamily="34" charset="0"/>
-                <a:ea typeface="Calibri" pitchFamily="34" charset="-122"/>
-                <a:cs typeface="Calibri" pitchFamily="34" charset="-120"/>
+                <a:cs typeface="Amiri" pitchFamily="2" charset="-78"/>
               </a:rPr>
               <a:t>Neglected exercise for years</a:t>
             </a:r>
@@ -40591,8 +39820,7 @@
                   <a:srgbClr val="1B3B6F"/>
                 </a:solidFill>
                 <a:latin typeface="Calibri" pitchFamily="34" charset="0"/>
-                <a:ea typeface="Calibri" pitchFamily="34" charset="-122"/>
-                <a:cs typeface="Calibri" pitchFamily="34" charset="-120"/>
+                <a:cs typeface="Amiri" pitchFamily="2" charset="-78"/>
               </a:rPr>
               <a:t>C</a:t>
             </a:r>
@@ -40630,8 +39858,7 @@
                   <a:srgbClr val="1F2A37"/>
                 </a:solidFill>
                 <a:latin typeface="Calibri" pitchFamily="34" charset="0"/>
-                <a:ea typeface="Calibri" pitchFamily="34" charset="-122"/>
-                <a:cs typeface="Calibri" pitchFamily="34" charset="-120"/>
+                <a:cs typeface="Amiri" pitchFamily="2" charset="-78"/>
               </a:rPr>
               <a:t>Followed the advice</a:t>
             </a:r>
@@ -40728,8 +39955,7 @@
                   <a:srgbClr val="FFFFFF"/>
                 </a:solidFill>
                 <a:latin typeface="Calibri" pitchFamily="34" charset="0"/>
-                <a:ea typeface="Calibri" pitchFamily="34" charset="-122"/>
-                <a:cs typeface="Calibri" pitchFamily="34" charset="-120"/>
+                <a:cs typeface="Amiri" pitchFamily="2" charset="-78"/>
               </a:rPr>
               <a:t>5</a:t>
             </a:r>
@@ -40767,8 +39993,7 @@
                   <a:srgbClr val="1B3B6F"/>
                 </a:solidFill>
                 <a:latin typeface="Calibri" pitchFamily="34" charset="0"/>
-                <a:ea typeface="Calibri" pitchFamily="34" charset="-122"/>
-                <a:cs typeface="Calibri" pitchFamily="34" charset="-120"/>
+                <a:cs typeface="Amiri" pitchFamily="2" charset="-78"/>
               </a:rPr>
               <a:t>What is the Type 1 conditional claim?</a:t>
             </a:r>
@@ -40831,8 +40056,7 @@
                   <a:srgbClr val="1B3B6F"/>
                 </a:solidFill>
                 <a:latin typeface="Calibri" pitchFamily="34" charset="0"/>
-                <a:ea typeface="Calibri" pitchFamily="34" charset="-122"/>
-                <a:cs typeface="Calibri" pitchFamily="34" charset="-120"/>
+                <a:cs typeface="Amiri" pitchFamily="2" charset="-78"/>
               </a:rPr>
               <a:t>A</a:t>
             </a:r>
@@ -40870,8 +40094,7 @@
                   <a:srgbClr val="1F2A37"/>
                 </a:solidFill>
                 <a:latin typeface="Calibri" pitchFamily="34" charset="0"/>
-                <a:ea typeface="Calibri" pitchFamily="34" charset="-122"/>
-                <a:cs typeface="Calibri" pitchFamily="34" charset="-120"/>
+                <a:cs typeface="Amiri" pitchFamily="2" charset="-78"/>
               </a:rPr>
               <a:t>If a person walks half an hour daily, their heart will improve</a:t>
             </a:r>
@@ -40934,8 +40157,7 @@
                   <a:srgbClr val="1B3B6F"/>
                 </a:solidFill>
                 <a:latin typeface="Calibri" pitchFamily="34" charset="0"/>
-                <a:ea typeface="Calibri" pitchFamily="34" charset="-122"/>
-                <a:cs typeface="Calibri" pitchFamily="34" charset="-120"/>
+                <a:cs typeface="Amiri" pitchFamily="2" charset="-78"/>
               </a:rPr>
               <a:t>B</a:t>
             </a:r>
@@ -40973,8 +40195,7 @@
                   <a:srgbClr val="1F2A37"/>
                 </a:solidFill>
                 <a:latin typeface="Calibri" pitchFamily="34" charset="0"/>
-                <a:ea typeface="Calibri" pitchFamily="34" charset="-122"/>
-                <a:cs typeface="Calibri" pitchFamily="34" charset="-120"/>
+                <a:cs typeface="Amiri" pitchFamily="2" charset="-78"/>
               </a:rPr>
               <a:t>Walking harms the heart</a:t>
             </a:r>
@@ -41037,8 +40258,7 @@
                   <a:srgbClr val="1B3B6F"/>
                 </a:solidFill>
                 <a:latin typeface="Calibri" pitchFamily="34" charset="0"/>
-                <a:ea typeface="Calibri" pitchFamily="34" charset="-122"/>
-                <a:cs typeface="Calibri" pitchFamily="34" charset="-120"/>
+                <a:cs typeface="Amiri" pitchFamily="2" charset="-78"/>
               </a:rPr>
               <a:t>C</a:t>
             </a:r>
@@ -41076,8 +40296,7 @@
                   <a:srgbClr val="1F2A37"/>
                 </a:solidFill>
                 <a:latin typeface="Calibri" pitchFamily="34" charset="0"/>
-                <a:ea typeface="Calibri" pitchFamily="34" charset="-122"/>
-                <a:cs typeface="Calibri" pitchFamily="34" charset="-120"/>
+                <a:cs typeface="Amiri" pitchFamily="2" charset="-78"/>
               </a:rPr>
               <a:t>The heart cannot improve</a:t>
             </a:r>
@@ -41174,8 +40393,7 @@
                   <a:srgbClr val="FFFFFF"/>
                 </a:solidFill>
                 <a:latin typeface="Calibri" pitchFamily="34" charset="0"/>
-                <a:ea typeface="Calibri" pitchFamily="34" charset="-122"/>
-                <a:cs typeface="Calibri" pitchFamily="34" charset="-120"/>
+                <a:cs typeface="Amiri" pitchFamily="2" charset="-78"/>
               </a:rPr>
               <a:t>6</a:t>
             </a:r>
@@ -41213,8 +40431,7 @@
                   <a:srgbClr val="1B3B6F"/>
                 </a:solidFill>
                 <a:latin typeface="Calibri" pitchFamily="34" charset="0"/>
-                <a:ea typeface="Calibri" pitchFamily="34" charset="-122"/>
-                <a:cs typeface="Calibri" pitchFamily="34" charset="-120"/>
+                <a:cs typeface="Amiri" pitchFamily="2" charset="-78"/>
               </a:rPr>
               <a:t>What is the Type 2 conditional claim?</a:t>
             </a:r>
@@ -41277,8 +40494,7 @@
                   <a:srgbClr val="1B3B6F"/>
                 </a:solidFill>
                 <a:latin typeface="Calibri" pitchFamily="34" charset="0"/>
-                <a:ea typeface="Calibri" pitchFamily="34" charset="-122"/>
-                <a:cs typeface="Calibri" pitchFamily="34" charset="-120"/>
+                <a:cs typeface="Amiri" pitchFamily="2" charset="-78"/>
               </a:rPr>
               <a:t>A</a:t>
             </a:r>
@@ -41316,8 +40532,7 @@
                   <a:srgbClr val="1F2A37"/>
                 </a:solidFill>
                 <a:latin typeface="Calibri" pitchFamily="34" charset="0"/>
-                <a:ea typeface="Calibri" pitchFamily="34" charset="-122"/>
-                <a:cs typeface="Calibri" pitchFamily="34" charset="-120"/>
+                <a:cs typeface="Amiri" pitchFamily="2" charset="-78"/>
               </a:rPr>
               <a:t>Sugar has no effect</a:t>
             </a:r>
@@ -41380,8 +40595,7 @@
                   <a:srgbClr val="1B3B6F"/>
                 </a:solidFill>
                 <a:latin typeface="Calibri" pitchFamily="34" charset="0"/>
-                <a:ea typeface="Calibri" pitchFamily="34" charset="-122"/>
-                <a:cs typeface="Calibri" pitchFamily="34" charset="-120"/>
+                <a:cs typeface="Amiri" pitchFamily="2" charset="-78"/>
               </a:rPr>
               <a:t>B</a:t>
             </a:r>
@@ -41419,8 +40633,7 @@
                   <a:srgbClr val="1F2A37"/>
                 </a:solidFill>
                 <a:latin typeface="Calibri" pitchFamily="34" charset="0"/>
-                <a:ea typeface="Calibri" pitchFamily="34" charset="-122"/>
-                <a:cs typeface="Calibri" pitchFamily="34" charset="-120"/>
+                <a:cs typeface="Amiri" pitchFamily="2" charset="-78"/>
               </a:rPr>
               <a:t>Diseases cannot fall</a:t>
             </a:r>
@@ -41483,8 +40696,7 @@
                   <a:srgbClr val="1B3B6F"/>
                 </a:solidFill>
                 <a:latin typeface="Calibri" pitchFamily="34" charset="0"/>
-                <a:ea typeface="Calibri" pitchFamily="34" charset="-122"/>
-                <a:cs typeface="Calibri" pitchFamily="34" charset="-120"/>
+                <a:cs typeface="Amiri" pitchFamily="2" charset="-78"/>
               </a:rPr>
               <a:t>C</a:t>
             </a:r>
@@ -41522,8 +40734,7 @@
                   <a:srgbClr val="1F2A37"/>
                 </a:solidFill>
                 <a:latin typeface="Calibri" pitchFamily="34" charset="0"/>
-                <a:ea typeface="Calibri" pitchFamily="34" charset="-122"/>
-                <a:cs typeface="Calibri" pitchFamily="34" charset="-120"/>
+                <a:cs typeface="Amiri" pitchFamily="2" charset="-78"/>
               </a:rPr>
               <a:t>Had we cut sugar, modern diseases would have fallen</a:t>
             </a:r>
@@ -41620,8 +40831,7 @@
                   <a:srgbClr val="FFFFFF"/>
                 </a:solidFill>
                 <a:latin typeface="Calibri" pitchFamily="34" charset="0"/>
-                <a:ea typeface="Calibri" pitchFamily="34" charset="-122"/>
-                <a:cs typeface="Calibri" pitchFamily="34" charset="-120"/>
+                <a:cs typeface="Amiri" pitchFamily="2" charset="-78"/>
               </a:rPr>
               <a:t>7</a:t>
             </a:r>
@@ -41659,8 +40869,7 @@
                   <a:srgbClr val="1B3B6F"/>
                 </a:solidFill>
                 <a:latin typeface="Calibri" pitchFamily="34" charset="0"/>
-                <a:ea typeface="Calibri" pitchFamily="34" charset="-122"/>
-                <a:cs typeface="Calibri" pitchFamily="34" charset="-120"/>
+                <a:cs typeface="Amiri" pitchFamily="2" charset="-78"/>
               </a:rPr>
               <a:t>What does she say one ought to do (</a:t>
             </a:r>
@@ -41672,9 +40881,8 @@
                 <a:solidFill>
                   <a:srgbClr val="1B3B6F"/>
                 </a:solidFill>
-                <a:latin typeface="Amiri" pitchFamily="34" charset="0"/>
-                <a:ea typeface="Amiri" pitchFamily="34" charset="-122"/>
-                <a:cs typeface="Amiri" pitchFamily="34" charset="-120"/>
+                <a:latin typeface="Amiri" pitchFamily="2" charset="-78"/>
+                <a:cs typeface="Amiri" pitchFamily="2" charset="-78"/>
               </a:rPr>
               <a:t>يَنْبَغِي أَنْ</a:t>
             </a:r>
@@ -41687,8 +40895,7 @@
                   <a:srgbClr val="1B3B6F"/>
                 </a:solidFill>
                 <a:latin typeface="Calibri" pitchFamily="34" charset="0"/>
-                <a:ea typeface="Calibri" pitchFamily="34" charset="-122"/>
-                <a:cs typeface="Calibri" pitchFamily="34" charset="-120"/>
+                <a:cs typeface="Amiri" pitchFamily="2" charset="-78"/>
               </a:rPr>
               <a:t>)?</a:t>
             </a:r>
@@ -41751,8 +40958,7 @@
                   <a:srgbClr val="1B3B6F"/>
                 </a:solidFill>
                 <a:latin typeface="Calibri" pitchFamily="34" charset="0"/>
-                <a:ea typeface="Calibri" pitchFamily="34" charset="-122"/>
-                <a:cs typeface="Calibri" pitchFamily="34" charset="-120"/>
+                <a:cs typeface="Amiri" pitchFamily="2" charset="-78"/>
               </a:rPr>
               <a:t>A</a:t>
             </a:r>
@@ -41790,8 +40996,7 @@
                   <a:srgbClr val="1F2A37"/>
                 </a:solidFill>
                 <a:latin typeface="Calibri" pitchFamily="34" charset="0"/>
-                <a:ea typeface="Calibri" pitchFamily="34" charset="-122"/>
-                <a:cs typeface="Calibri" pitchFamily="34" charset="-120"/>
+                <a:cs typeface="Amiri" pitchFamily="2" charset="-78"/>
               </a:rPr>
               <a:t>Skip meals</a:t>
             </a:r>
@@ -41854,8 +41059,7 @@
                   <a:srgbClr val="1B3B6F"/>
                 </a:solidFill>
                 <a:latin typeface="Calibri" pitchFamily="34" charset="0"/>
-                <a:ea typeface="Calibri" pitchFamily="34" charset="-122"/>
-                <a:cs typeface="Calibri" pitchFamily="34" charset="-120"/>
+                <a:cs typeface="Amiri" pitchFamily="2" charset="-78"/>
               </a:rPr>
               <a:t>B</a:t>
             </a:r>
@@ -41893,8 +41097,7 @@
                   <a:srgbClr val="1F2A37"/>
                 </a:solidFill>
                 <a:latin typeface="Calibri" pitchFamily="34" charset="0"/>
-                <a:ea typeface="Calibri" pitchFamily="34" charset="-122"/>
-                <a:cs typeface="Calibri" pitchFamily="34" charset="-120"/>
+                <a:cs typeface="Amiri" pitchFamily="2" charset="-78"/>
               </a:rPr>
               <a:t>Avoid all fat</a:t>
             </a:r>
@@ -41957,8 +41160,7 @@
                   <a:srgbClr val="1B3B6F"/>
                 </a:solidFill>
                 <a:latin typeface="Calibri" pitchFamily="34" charset="0"/>
-                <a:ea typeface="Calibri" pitchFamily="34" charset="-122"/>
-                <a:cs typeface="Calibri" pitchFamily="34" charset="-120"/>
+                <a:cs typeface="Amiri" pitchFamily="2" charset="-78"/>
               </a:rPr>
               <a:t>C</a:t>
             </a:r>
@@ -41996,8 +41198,7 @@
                   <a:srgbClr val="1F2A37"/>
                 </a:solidFill>
                 <a:latin typeface="Calibri" pitchFamily="34" charset="0"/>
-                <a:ea typeface="Calibri" pitchFamily="34" charset="-122"/>
-                <a:cs typeface="Calibri" pitchFamily="34" charset="-120"/>
+                <a:cs typeface="Amiri" pitchFamily="2" charset="-78"/>
               </a:rPr>
               <a:t>Drink plenty of water</a:t>
             </a:r>
@@ -42094,8 +41295,7 @@
                   <a:srgbClr val="FFFFFF"/>
                 </a:solidFill>
                 <a:latin typeface="Calibri" pitchFamily="34" charset="0"/>
-                <a:ea typeface="Calibri" pitchFamily="34" charset="-122"/>
-                <a:cs typeface="Calibri" pitchFamily="34" charset="-120"/>
+                <a:cs typeface="Amiri" pitchFamily="2" charset="-78"/>
               </a:rPr>
               <a:t>8</a:t>
             </a:r>
@@ -42133,8 +41333,7 @@
                   <a:srgbClr val="1B3B6F"/>
                 </a:solidFill>
                 <a:latin typeface="Calibri" pitchFamily="34" charset="0"/>
-                <a:ea typeface="Calibri" pitchFamily="34" charset="-122"/>
-                <a:cs typeface="Calibri" pitchFamily="34" charset="-120"/>
+                <a:cs typeface="Amiri" pitchFamily="2" charset="-78"/>
               </a:rPr>
               <a:t>What does she hope for (</a:t>
             </a:r>
@@ -42146,9 +41345,8 @@
                 <a:solidFill>
                   <a:srgbClr val="1B3B6F"/>
                 </a:solidFill>
-                <a:latin typeface="Amiri" pitchFamily="34" charset="0"/>
-                <a:ea typeface="Amiri" pitchFamily="34" charset="-122"/>
-                <a:cs typeface="Amiri" pitchFamily="34" charset="-120"/>
+                <a:latin typeface="Amiri" pitchFamily="2" charset="-78"/>
+                <a:cs typeface="Amiri" pitchFamily="2" charset="-78"/>
               </a:rPr>
               <a:t>أَرْجُو أَنْ</a:t>
             </a:r>
@@ -42161,8 +41359,7 @@
                   <a:srgbClr val="1B3B6F"/>
                 </a:solidFill>
                 <a:latin typeface="Calibri" pitchFamily="34" charset="0"/>
-                <a:ea typeface="Calibri" pitchFamily="34" charset="-122"/>
-                <a:cs typeface="Calibri" pitchFamily="34" charset="-120"/>
+                <a:cs typeface="Amiri" pitchFamily="2" charset="-78"/>
               </a:rPr>
               <a:t>)?</a:t>
             </a:r>
@@ -42225,8 +41422,7 @@
                   <a:srgbClr val="1B3B6F"/>
                 </a:solidFill>
                 <a:latin typeface="Calibri" pitchFamily="34" charset="0"/>
-                <a:ea typeface="Calibri" pitchFamily="34" charset="-122"/>
-                <a:cs typeface="Calibri" pitchFamily="34" charset="-120"/>
+                <a:cs typeface="Amiri" pitchFamily="2" charset="-78"/>
               </a:rPr>
               <a:t>A</a:t>
             </a:r>
@@ -42264,8 +41460,7 @@
                   <a:srgbClr val="1F2A37"/>
                 </a:solidFill>
                 <a:latin typeface="Calibri" pitchFamily="34" charset="0"/>
-                <a:ea typeface="Calibri" pitchFamily="34" charset="-122"/>
-                <a:cs typeface="Calibri" pitchFamily="34" charset="-120"/>
+                <a:cs typeface="Amiri" pitchFamily="2" charset="-78"/>
               </a:rPr>
               <a:t>That young people care for their health early</a:t>
             </a:r>
@@ -42328,8 +41523,7 @@
                   <a:srgbClr val="1B3B6F"/>
                 </a:solidFill>
                 <a:latin typeface="Calibri" pitchFamily="34" charset="0"/>
-                <a:ea typeface="Calibri" pitchFamily="34" charset="-122"/>
-                <a:cs typeface="Calibri" pitchFamily="34" charset="-120"/>
+                <a:cs typeface="Amiri" pitchFamily="2" charset="-78"/>
               </a:rPr>
               <a:t>B</a:t>
             </a:r>
@@ -42367,8 +41561,7 @@
                   <a:srgbClr val="1F2A37"/>
                 </a:solidFill>
                 <a:latin typeface="Calibri" pitchFamily="34" charset="0"/>
-                <a:ea typeface="Calibri" pitchFamily="34" charset="-122"/>
-                <a:cs typeface="Calibri" pitchFamily="34" charset="-120"/>
+                <a:cs typeface="Amiri" pitchFamily="2" charset="-78"/>
               </a:rPr>
               <a:t>That people ignore health</a:t>
             </a:r>
@@ -42431,8 +41624,7 @@
                   <a:srgbClr val="1B3B6F"/>
                 </a:solidFill>
                 <a:latin typeface="Calibri" pitchFamily="34" charset="0"/>
-                <a:ea typeface="Calibri" pitchFamily="34" charset="-122"/>
-                <a:cs typeface="Calibri" pitchFamily="34" charset="-120"/>
+                <a:cs typeface="Amiri" pitchFamily="2" charset="-78"/>
               </a:rPr>
               <a:t>C</a:t>
             </a:r>
@@ -42470,8 +41662,7 @@
                   <a:srgbClr val="1F2A37"/>
                 </a:solidFill>
                 <a:latin typeface="Calibri" pitchFamily="34" charset="0"/>
-                <a:ea typeface="Calibri" pitchFamily="34" charset="-122"/>
-                <a:cs typeface="Calibri" pitchFamily="34" charset="-120"/>
+                <a:cs typeface="Amiri" pitchFamily="2" charset="-78"/>
               </a:rPr>
               <a:t>That medicine replaces lifestyle</a:t>
             </a:r>
@@ -42509,8 +41700,7 @@
                   <a:srgbClr val="8A93A0"/>
                 </a:solidFill>
                 <a:latin typeface="Calibri" pitchFamily="34" charset="0"/>
-                <a:ea typeface="Calibri" pitchFamily="34" charset="-122"/>
-                <a:cs typeface="Calibri" pitchFamily="34" charset="-120"/>
+                <a:cs typeface="Amiri" pitchFamily="2" charset="-78"/>
               </a:rPr>
               <a:t>8 / 18</a:t>
             </a:r>
@@ -42604,9 +41794,8 @@
                 <a:solidFill>
                   <a:srgbClr val="D4AF37"/>
                 </a:solidFill>
-                <a:latin typeface="Amiri" pitchFamily="34" charset="0"/>
-                <a:ea typeface="Amiri" pitchFamily="34" charset="-122"/>
-                <a:cs typeface="Amiri" pitchFamily="34" charset="-120"/>
+                <a:latin typeface="Amiri" pitchFamily="2" charset="-78"/>
+                <a:cs typeface="Amiri" pitchFamily="2" charset="-78"/>
               </a:rPr>
               <a:t>م</a:t>
             </a:r>
@@ -42644,8 +41833,7 @@
                   <a:srgbClr val="1B3B6F"/>
                 </a:solidFill>
                 <a:latin typeface="Cambria" pitchFamily="34" charset="0"/>
-                <a:ea typeface="Cambria" pitchFamily="34" charset="-122"/>
-                <a:cs typeface="Cambria" pitchFamily="34" charset="-120"/>
+                <a:cs typeface="Amiri" pitchFamily="2" charset="-78"/>
               </a:rPr>
               <a:t>Al Madina Online School</a:t>
             </a:r>
@@ -42683,8 +41871,7 @@
                   <a:srgbClr val="8A6D1E"/>
                 </a:solidFill>
                 <a:latin typeface="Calibri" pitchFamily="34" charset="0"/>
-                <a:ea typeface="Calibri" pitchFamily="34" charset="-122"/>
-                <a:cs typeface="Calibri" pitchFamily="34" charset="-120"/>
+                <a:cs typeface="Amiri" pitchFamily="2" charset="-78"/>
               </a:rPr>
               <a:t>ARABIC DEPARTMENT · MIFTAH ARABIC · IGCSE 0544</a:t>
             </a:r>
@@ -42749,8 +41936,7 @@
                   <a:srgbClr val="FFFFFF"/>
                 </a:solidFill>
                 <a:latin typeface="Calibri" pitchFamily="34" charset="0"/>
-                <a:ea typeface="Calibri" pitchFamily="34" charset="-122"/>
-                <a:cs typeface="Calibri" pitchFamily="34" charset="-120"/>
+                <a:cs typeface="Amiri" pitchFamily="2" charset="-78"/>
               </a:rPr>
               <a:t>P6-L08 · IGCSE Bridge</a:t>
             </a:r>
@@ -42815,8 +42001,7 @@
                   <a:srgbClr val="FFFFFF"/>
                 </a:solidFill>
                 <a:latin typeface="Calibri" pitchFamily="34" charset="0"/>
-                <a:ea typeface="Calibri" pitchFamily="34" charset="-122"/>
-                <a:cs typeface="Calibri" pitchFamily="34" charset="-120"/>
+                <a:cs typeface="Amiri" pitchFamily="2" charset="-78"/>
               </a:rPr>
               <a:t>YOU DO · 6 MIN</a:t>
             </a:r>
@@ -42854,8 +42039,7 @@
                   <a:srgbClr val="1E6B52"/>
                 </a:solidFill>
                 <a:latin typeface="Calibri" pitchFamily="34" charset="0"/>
-                <a:ea typeface="Calibri" pitchFamily="34" charset="-122"/>
-                <a:cs typeface="Calibri" pitchFamily="34" charset="-120"/>
+                <a:cs typeface="Amiri" pitchFamily="2" charset="-78"/>
               </a:rPr>
               <a:t>MOCK · PAPER 1 · TEXT 2 — MATCHING: WHO SAYS IT? (6 MARKS)</a:t>
             </a:r>
@@ -42893,8 +42077,7 @@
                   <a:srgbClr val="1B3B6F"/>
                 </a:solidFill>
                 <a:latin typeface="Cambria" pitchFamily="34" charset="0"/>
-                <a:ea typeface="Cambria" pitchFamily="34" charset="-122"/>
-                <a:cs typeface="Cambria" pitchFamily="34" charset="-120"/>
+                <a:cs typeface="Amiri" pitchFamily="2" charset="-78"/>
               </a:rPr>
               <a:t>Match each statement to the speaker</a:t>
             </a:r>
@@ -42931,9 +42114,8 @@
                 <a:solidFill>
                   <a:srgbClr val="8A6D1E"/>
                 </a:solidFill>
-                <a:latin typeface="Amiri" pitchFamily="34" charset="0"/>
-                <a:ea typeface="Amiri" pitchFamily="34" charset="-122"/>
-                <a:cs typeface="Amiri" pitchFamily="34" charset="-120"/>
+                <a:latin typeface="Amiri" pitchFamily="2" charset="-78"/>
+                <a:cs typeface="Amiri" pitchFamily="2" charset="-78"/>
               </a:rPr>
               <a:t>الاسْتِمَاعُ</a:t>
             </a:r>
@@ -42971,8 +42153,7 @@
                   <a:srgbClr val="8A93A0"/>
                 </a:solidFill>
                 <a:latin typeface="Calibri" pitchFamily="34" charset="0"/>
-                <a:ea typeface="Calibri" pitchFamily="34" charset="-122"/>
-                <a:cs typeface="Calibri" pitchFamily="34" charset="-120"/>
+                <a:cs typeface="Amiri" pitchFamily="2" charset="-78"/>
               </a:rPr>
               <a:t>Miftah Arabic · Progression P6 · IGCSE Bridge · P6-L08</a:t>
             </a:r>
@@ -43069,8 +42250,7 @@
                   <a:srgbClr val="FFFFFF"/>
                 </a:solidFill>
                 <a:latin typeface="Calibri" pitchFamily="34" charset="0"/>
-                <a:ea typeface="Calibri" pitchFamily="34" charset="-122"/>
-                <a:cs typeface="Calibri" pitchFamily="34" charset="-120"/>
+                <a:cs typeface="Amiri" pitchFamily="2" charset="-78"/>
               </a:rPr>
               <a:t>1</a:t>
             </a:r>
@@ -43108,8 +42288,7 @@
                   <a:srgbClr val="1B3B6F"/>
                 </a:solidFill>
                 <a:latin typeface="Calibri" pitchFamily="34" charset="0"/>
-                <a:ea typeface="Calibri" pitchFamily="34" charset="-122"/>
-                <a:cs typeface="Calibri" pitchFamily="34" charset="-120"/>
+                <a:cs typeface="Amiri" pitchFamily="2" charset="-78"/>
               </a:rPr>
               <a:t>Who says practical training is no less important than the certificate?</a:t>
             </a:r>
@@ -43172,8 +42351,7 @@
                   <a:srgbClr val="1B3B6F"/>
                 </a:solidFill>
                 <a:latin typeface="Calibri" pitchFamily="34" charset="0"/>
-                <a:ea typeface="Calibri" pitchFamily="34" charset="-122"/>
-                <a:cs typeface="Calibri" pitchFamily="34" charset="-120"/>
+                <a:cs typeface="Amiri" pitchFamily="2" charset="-78"/>
               </a:rPr>
               <a:t>A</a:t>
             </a:r>
@@ -43211,8 +42389,7 @@
                   <a:srgbClr val="1F2A37"/>
                 </a:solidFill>
                 <a:latin typeface="Calibri" pitchFamily="34" charset="0"/>
-                <a:ea typeface="Calibri" pitchFamily="34" charset="-122"/>
-                <a:cs typeface="Calibri" pitchFamily="34" charset="-120"/>
+                <a:cs typeface="Amiri" pitchFamily="2" charset="-78"/>
               </a:rPr>
               <a:t>Nour</a:t>
             </a:r>
@@ -43275,8 +42452,7 @@
                   <a:srgbClr val="1B3B6F"/>
                 </a:solidFill>
                 <a:latin typeface="Calibri" pitchFamily="34" charset="0"/>
-                <a:ea typeface="Calibri" pitchFamily="34" charset="-122"/>
-                <a:cs typeface="Calibri" pitchFamily="34" charset="-120"/>
+                <a:cs typeface="Amiri" pitchFamily="2" charset="-78"/>
               </a:rPr>
               <a:t>B</a:t>
             </a:r>
@@ -43314,8 +42490,7 @@
                   <a:srgbClr val="1F2A37"/>
                 </a:solidFill>
                 <a:latin typeface="Calibri" pitchFamily="34" charset="0"/>
-                <a:ea typeface="Calibri" pitchFamily="34" charset="-122"/>
-                <a:cs typeface="Calibri" pitchFamily="34" charset="-120"/>
+                <a:cs typeface="Amiri" pitchFamily="2" charset="-78"/>
               </a:rPr>
               <a:t>Zayd</a:t>
             </a:r>
@@ -43378,8 +42553,7 @@
                   <a:srgbClr val="1B3B6F"/>
                 </a:solidFill>
                 <a:latin typeface="Calibri" pitchFamily="34" charset="0"/>
-                <a:ea typeface="Calibri" pitchFamily="34" charset="-122"/>
-                <a:cs typeface="Calibri" pitchFamily="34" charset="-120"/>
+                <a:cs typeface="Amiri" pitchFamily="2" charset="-78"/>
               </a:rPr>
               <a:t>C</a:t>
             </a:r>
@@ -43417,8 +42591,7 @@
                   <a:srgbClr val="1F2A37"/>
                 </a:solidFill>
                 <a:latin typeface="Calibri" pitchFamily="34" charset="0"/>
-                <a:ea typeface="Calibri" pitchFamily="34" charset="-122"/>
-                <a:cs typeface="Calibri" pitchFamily="34" charset="-120"/>
+                <a:cs typeface="Amiri" pitchFamily="2" charset="-78"/>
               </a:rPr>
               <a:t>Both</a:t>
             </a:r>
@@ -43515,8 +42688,7 @@
                   <a:srgbClr val="FFFFFF"/>
                 </a:solidFill>
                 <a:latin typeface="Calibri" pitchFamily="34" charset="0"/>
-                <a:ea typeface="Calibri" pitchFamily="34" charset="-122"/>
-                <a:cs typeface="Calibri" pitchFamily="34" charset="-120"/>
+                <a:cs typeface="Amiri" pitchFamily="2" charset="-78"/>
               </a:rPr>
               <a:t>2</a:t>
             </a:r>
@@ -43554,8 +42726,7 @@
                   <a:srgbClr val="1B3B6F"/>
                 </a:solidFill>
                 <a:latin typeface="Calibri" pitchFamily="34" charset="0"/>
-                <a:ea typeface="Calibri" pitchFamily="34" charset="-122"/>
-                <a:cs typeface="Calibri" pitchFamily="34" charset="-120"/>
+                <a:cs typeface="Amiri" pitchFamily="2" charset="-78"/>
               </a:rPr>
               <a:t>Who concedes the certificate matters but skills make the difference?</a:t>
             </a:r>
@@ -43618,8 +42789,7 @@
                   <a:srgbClr val="1B3B6F"/>
                 </a:solidFill>
                 <a:latin typeface="Calibri" pitchFamily="34" charset="0"/>
-                <a:ea typeface="Calibri" pitchFamily="34" charset="-122"/>
-                <a:cs typeface="Calibri" pitchFamily="34" charset="-120"/>
+                <a:cs typeface="Amiri" pitchFamily="2" charset="-78"/>
               </a:rPr>
               <a:t>A</a:t>
             </a:r>
@@ -43657,8 +42827,7 @@
                   <a:srgbClr val="1F2A37"/>
                 </a:solidFill>
                 <a:latin typeface="Calibri" pitchFamily="34" charset="0"/>
-                <a:ea typeface="Calibri" pitchFamily="34" charset="-122"/>
-                <a:cs typeface="Calibri" pitchFamily="34" charset="-120"/>
+                <a:cs typeface="Amiri" pitchFamily="2" charset="-78"/>
               </a:rPr>
               <a:t>Nour</a:t>
             </a:r>
@@ -43721,8 +42890,7 @@
                   <a:srgbClr val="1B3B6F"/>
                 </a:solidFill>
                 <a:latin typeface="Calibri" pitchFamily="34" charset="0"/>
-                <a:ea typeface="Calibri" pitchFamily="34" charset="-122"/>
-                <a:cs typeface="Calibri" pitchFamily="34" charset="-120"/>
+                <a:cs typeface="Amiri" pitchFamily="2" charset="-78"/>
               </a:rPr>
               <a:t>B</a:t>
             </a:r>
@@ -43760,8 +42928,7 @@
                   <a:srgbClr val="1F2A37"/>
                 </a:solidFill>
                 <a:latin typeface="Calibri" pitchFamily="34" charset="0"/>
-                <a:ea typeface="Calibri" pitchFamily="34" charset="-122"/>
-                <a:cs typeface="Calibri" pitchFamily="34" charset="-120"/>
+                <a:cs typeface="Amiri" pitchFamily="2" charset="-78"/>
               </a:rPr>
               <a:t>Zayd</a:t>
             </a:r>
@@ -43824,8 +42991,7 @@
                   <a:srgbClr val="1B3B6F"/>
                 </a:solidFill>
                 <a:latin typeface="Calibri" pitchFamily="34" charset="0"/>
-                <a:ea typeface="Calibri" pitchFamily="34" charset="-122"/>
-                <a:cs typeface="Calibri" pitchFamily="34" charset="-120"/>
+                <a:cs typeface="Amiri" pitchFamily="2" charset="-78"/>
               </a:rPr>
               <a:t>C</a:t>
             </a:r>
@@ -43863,8 +43029,7 @@
                   <a:srgbClr val="1F2A37"/>
                 </a:solidFill>
                 <a:latin typeface="Calibri" pitchFamily="34" charset="0"/>
-                <a:ea typeface="Calibri" pitchFamily="34" charset="-122"/>
-                <a:cs typeface="Calibri" pitchFamily="34" charset="-120"/>
+                <a:cs typeface="Amiri" pitchFamily="2" charset="-78"/>
               </a:rPr>
               <a:t>Both</a:t>
             </a:r>
@@ -43961,8 +43126,7 @@
                   <a:srgbClr val="FFFFFF"/>
                 </a:solidFill>
                 <a:latin typeface="Calibri" pitchFamily="34" charset="0"/>
-                <a:ea typeface="Calibri" pitchFamily="34" charset="-122"/>
-                <a:cs typeface="Calibri" pitchFamily="34" charset="-120"/>
+                <a:cs typeface="Amiri" pitchFamily="2" charset="-78"/>
               </a:rPr>
               <a:t>3</a:t>
             </a:r>
@@ -44000,8 +43164,7 @@
                   <a:srgbClr val="1B3B6F"/>
                 </a:solidFill>
                 <a:latin typeface="Calibri" pitchFamily="34" charset="0"/>
-                <a:ea typeface="Calibri" pitchFamily="34" charset="-122"/>
-                <a:cs typeface="Calibri" pitchFamily="34" charset="-120"/>
+                <a:cs typeface="Amiri" pitchFamily="2" charset="-78"/>
               </a:rPr>
               <a:t>Who makes the Type 2 conditional about starting training early?</a:t>
             </a:r>
@@ -44064,8 +43227,7 @@
                   <a:srgbClr val="1B3B6F"/>
                 </a:solidFill>
                 <a:latin typeface="Calibri" pitchFamily="34" charset="0"/>
-                <a:ea typeface="Calibri" pitchFamily="34" charset="-122"/>
-                <a:cs typeface="Calibri" pitchFamily="34" charset="-120"/>
+                <a:cs typeface="Amiri" pitchFamily="2" charset="-78"/>
               </a:rPr>
               <a:t>A</a:t>
             </a:r>
@@ -44103,8 +43265,7 @@
                   <a:srgbClr val="1F2A37"/>
                 </a:solidFill>
                 <a:latin typeface="Calibri" pitchFamily="34" charset="0"/>
-                <a:ea typeface="Calibri" pitchFamily="34" charset="-122"/>
-                <a:cs typeface="Calibri" pitchFamily="34" charset="-120"/>
+                <a:cs typeface="Amiri" pitchFamily="2" charset="-78"/>
               </a:rPr>
               <a:t>Nour</a:t>
             </a:r>
@@ -44167,8 +43328,7 @@
                   <a:srgbClr val="1B3B6F"/>
                 </a:solidFill>
                 <a:latin typeface="Calibri" pitchFamily="34" charset="0"/>
-                <a:ea typeface="Calibri" pitchFamily="34" charset="-122"/>
-                <a:cs typeface="Calibri" pitchFamily="34" charset="-120"/>
+                <a:cs typeface="Amiri" pitchFamily="2" charset="-78"/>
               </a:rPr>
               <a:t>B</a:t>
             </a:r>
@@ -44206,8 +43366,7 @@
                   <a:srgbClr val="1F2A37"/>
                 </a:solidFill>
                 <a:latin typeface="Calibri" pitchFamily="34" charset="0"/>
-                <a:ea typeface="Calibri" pitchFamily="34" charset="-122"/>
-                <a:cs typeface="Calibri" pitchFamily="34" charset="-120"/>
+                <a:cs typeface="Amiri" pitchFamily="2" charset="-78"/>
               </a:rPr>
               <a:t>Zayd</a:t>
             </a:r>
@@ -44270,8 +43429,7 @@
                   <a:srgbClr val="1B3B6F"/>
                 </a:solidFill>
                 <a:latin typeface="Calibri" pitchFamily="34" charset="0"/>
-                <a:ea typeface="Calibri" pitchFamily="34" charset="-122"/>
-                <a:cs typeface="Calibri" pitchFamily="34" charset="-120"/>
+                <a:cs typeface="Amiri" pitchFamily="2" charset="-78"/>
               </a:rPr>
               <a:t>C</a:t>
             </a:r>
@@ -44309,8 +43467,7 @@
                   <a:srgbClr val="1F2A37"/>
                 </a:solidFill>
                 <a:latin typeface="Calibri" pitchFamily="34" charset="0"/>
-                <a:ea typeface="Calibri" pitchFamily="34" charset="-122"/>
-                <a:cs typeface="Calibri" pitchFamily="34" charset="-120"/>
+                <a:cs typeface="Amiri" pitchFamily="2" charset="-78"/>
               </a:rPr>
               <a:t>Both</a:t>
             </a:r>
@@ -44407,8 +43564,7 @@
                   <a:srgbClr val="FFFFFF"/>
                 </a:solidFill>
                 <a:latin typeface="Calibri" pitchFamily="34" charset="0"/>
-                <a:ea typeface="Calibri" pitchFamily="34" charset="-122"/>
-                <a:cs typeface="Calibri" pitchFamily="34" charset="-120"/>
+                <a:cs typeface="Amiri" pitchFamily="2" charset="-78"/>
               </a:rPr>
               <a:t>4</a:t>
             </a:r>
@@ -44446,8 +43602,7 @@
                   <a:srgbClr val="1B3B6F"/>
                 </a:solidFill>
                 <a:latin typeface="Calibri" pitchFamily="34" charset="0"/>
-                <a:ea typeface="Calibri" pitchFamily="34" charset="-122"/>
-                <a:cs typeface="Calibri" pitchFamily="34" charset="-120"/>
+                <a:cs typeface="Amiri" pitchFamily="2" charset="-78"/>
               </a:rPr>
               <a:t>Who says one ought to choose a field they love?</a:t>
             </a:r>
@@ -44510,8 +43665,7 @@
                   <a:srgbClr val="1B3B6F"/>
                 </a:solidFill>
                 <a:latin typeface="Calibri" pitchFamily="34" charset="0"/>
-                <a:ea typeface="Calibri" pitchFamily="34" charset="-122"/>
-                <a:cs typeface="Calibri" pitchFamily="34" charset="-120"/>
+                <a:cs typeface="Amiri" pitchFamily="2" charset="-78"/>
               </a:rPr>
               <a:t>A</a:t>
             </a:r>
@@ -44549,8 +43703,7 @@
                   <a:srgbClr val="1F2A37"/>
                 </a:solidFill>
                 <a:latin typeface="Calibri" pitchFamily="34" charset="0"/>
-                <a:ea typeface="Calibri" pitchFamily="34" charset="-122"/>
-                <a:cs typeface="Calibri" pitchFamily="34" charset="-120"/>
+                <a:cs typeface="Amiri" pitchFamily="2" charset="-78"/>
               </a:rPr>
               <a:t>Nour</a:t>
             </a:r>
@@ -44613,8 +43766,7 @@
                   <a:srgbClr val="1B3B6F"/>
                 </a:solidFill>
                 <a:latin typeface="Calibri" pitchFamily="34" charset="0"/>
-                <a:ea typeface="Calibri" pitchFamily="34" charset="-122"/>
-                <a:cs typeface="Calibri" pitchFamily="34" charset="-120"/>
+                <a:cs typeface="Amiri" pitchFamily="2" charset="-78"/>
               </a:rPr>
               <a:t>B</a:t>
             </a:r>
@@ -44652,8 +43804,7 @@
                   <a:srgbClr val="1F2A37"/>
                 </a:solidFill>
                 <a:latin typeface="Calibri" pitchFamily="34" charset="0"/>
-                <a:ea typeface="Calibri" pitchFamily="34" charset="-122"/>
-                <a:cs typeface="Calibri" pitchFamily="34" charset="-120"/>
+                <a:cs typeface="Amiri" pitchFamily="2" charset="-78"/>
               </a:rPr>
               <a:t>Both</a:t>
             </a:r>
@@ -44716,8 +43867,7 @@
                   <a:srgbClr val="1B3B6F"/>
                 </a:solidFill>
                 <a:latin typeface="Calibri" pitchFamily="34" charset="0"/>
-                <a:ea typeface="Calibri" pitchFamily="34" charset="-122"/>
-                <a:cs typeface="Calibri" pitchFamily="34" charset="-120"/>
+                <a:cs typeface="Amiri" pitchFamily="2" charset="-78"/>
               </a:rPr>
               <a:t>C</a:t>
             </a:r>
@@ -44755,8 +43905,7 @@
                   <a:srgbClr val="1F2A37"/>
                 </a:solidFill>
                 <a:latin typeface="Calibri" pitchFamily="34" charset="0"/>
-                <a:ea typeface="Calibri" pitchFamily="34" charset="-122"/>
-                <a:cs typeface="Calibri" pitchFamily="34" charset="-120"/>
+                <a:cs typeface="Amiri" pitchFamily="2" charset="-78"/>
               </a:rPr>
               <a:t>Zayd</a:t>
             </a:r>
@@ -44853,8 +44002,7 @@
                   <a:srgbClr val="FFFFFF"/>
                 </a:solidFill>
                 <a:latin typeface="Calibri" pitchFamily="34" charset="0"/>
-                <a:ea typeface="Calibri" pitchFamily="34" charset="-122"/>
-                <a:cs typeface="Calibri" pitchFamily="34" charset="-120"/>
+                <a:cs typeface="Amiri" pitchFamily="2" charset="-78"/>
               </a:rPr>
               <a:t>5</a:t>
             </a:r>
@@ -44892,8 +44040,7 @@
                   <a:srgbClr val="1B3B6F"/>
                 </a:solidFill>
                 <a:latin typeface="Calibri" pitchFamily="34" charset="0"/>
-                <a:ea typeface="Calibri" pitchFamily="34" charset="-122"/>
-                <a:cs typeface="Calibri" pitchFamily="34" charset="-120"/>
+                <a:cs typeface="Amiri" pitchFamily="2" charset="-78"/>
               </a:rPr>
               <a:t>Who reports the teacher's view that passion leads to success?</a:t>
             </a:r>
@@ -44956,8 +44103,7 @@
                   <a:srgbClr val="1B3B6F"/>
                 </a:solidFill>
                 <a:latin typeface="Calibri" pitchFamily="34" charset="0"/>
-                <a:ea typeface="Calibri" pitchFamily="34" charset="-122"/>
-                <a:cs typeface="Calibri" pitchFamily="34" charset="-120"/>
+                <a:cs typeface="Amiri" pitchFamily="2" charset="-78"/>
               </a:rPr>
               <a:t>A</a:t>
             </a:r>
@@ -44995,8 +44141,7 @@
                   <a:srgbClr val="1F2A37"/>
                 </a:solidFill>
                 <a:latin typeface="Calibri" pitchFamily="34" charset="0"/>
-                <a:ea typeface="Calibri" pitchFamily="34" charset="-122"/>
-                <a:cs typeface="Calibri" pitchFamily="34" charset="-120"/>
+                <a:cs typeface="Amiri" pitchFamily="2" charset="-78"/>
               </a:rPr>
               <a:t>Zayd</a:t>
             </a:r>
@@ -45059,8 +44204,7 @@
                   <a:srgbClr val="1B3B6F"/>
                 </a:solidFill>
                 <a:latin typeface="Calibri" pitchFamily="34" charset="0"/>
-                <a:ea typeface="Calibri" pitchFamily="34" charset="-122"/>
-                <a:cs typeface="Calibri" pitchFamily="34" charset="-120"/>
+                <a:cs typeface="Amiri" pitchFamily="2" charset="-78"/>
               </a:rPr>
               <a:t>B</a:t>
             </a:r>
@@ -45098,8 +44242,7 @@
                   <a:srgbClr val="1F2A37"/>
                 </a:solidFill>
                 <a:latin typeface="Calibri" pitchFamily="34" charset="0"/>
-                <a:ea typeface="Calibri" pitchFamily="34" charset="-122"/>
-                <a:cs typeface="Calibri" pitchFamily="34" charset="-120"/>
+                <a:cs typeface="Amiri" pitchFamily="2" charset="-78"/>
               </a:rPr>
               <a:t>Both</a:t>
             </a:r>
@@ -45162,8 +44305,7 @@
                   <a:srgbClr val="1B3B6F"/>
                 </a:solidFill>
                 <a:latin typeface="Calibri" pitchFamily="34" charset="0"/>
-                <a:ea typeface="Calibri" pitchFamily="34" charset="-122"/>
-                <a:cs typeface="Calibri" pitchFamily="34" charset="-120"/>
+                <a:cs typeface="Amiri" pitchFamily="2" charset="-78"/>
               </a:rPr>
               <a:t>C</a:t>
             </a:r>
@@ -45201,8 +44343,7 @@
                   <a:srgbClr val="1F2A37"/>
                 </a:solidFill>
                 <a:latin typeface="Calibri" pitchFamily="34" charset="0"/>
-                <a:ea typeface="Calibri" pitchFamily="34" charset="-122"/>
-                <a:cs typeface="Calibri" pitchFamily="34" charset="-120"/>
+                <a:cs typeface="Amiri" pitchFamily="2" charset="-78"/>
               </a:rPr>
               <a:t>Nour</a:t>
             </a:r>
@@ -45299,8 +44440,7 @@
                   <a:srgbClr val="FFFFFF"/>
                 </a:solidFill>
                 <a:latin typeface="Calibri" pitchFamily="34" charset="0"/>
-                <a:ea typeface="Calibri" pitchFamily="34" charset="-122"/>
-                <a:cs typeface="Calibri" pitchFamily="34" charset="-120"/>
+                <a:cs typeface="Amiri" pitchFamily="2" charset="-78"/>
               </a:rPr>
               <a:t>6</a:t>
             </a:r>
@@ -45338,8 +44478,7 @@
                   <a:srgbClr val="1B3B6F"/>
                 </a:solidFill>
                 <a:latin typeface="Calibri" pitchFamily="34" charset="0"/>
-                <a:ea typeface="Calibri" pitchFamily="34" charset="-122"/>
-                <a:cs typeface="Calibri" pitchFamily="34" charset="-120"/>
+                <a:cs typeface="Amiri" pitchFamily="2" charset="-78"/>
               </a:rPr>
               <a:t>Who makes the Type 1 conditional about defining a goal?</a:t>
             </a:r>
@@ -45402,8 +44541,7 @@
                   <a:srgbClr val="1B3B6F"/>
                 </a:solidFill>
                 <a:latin typeface="Calibri" pitchFamily="34" charset="0"/>
-                <a:ea typeface="Calibri" pitchFamily="34" charset="-122"/>
-                <a:cs typeface="Calibri" pitchFamily="34" charset="-120"/>
+                <a:cs typeface="Amiri" pitchFamily="2" charset="-78"/>
               </a:rPr>
               <a:t>A</a:t>
             </a:r>
@@ -45441,8 +44579,7 @@
                   <a:srgbClr val="1F2A37"/>
                 </a:solidFill>
                 <a:latin typeface="Calibri" pitchFamily="34" charset="0"/>
-                <a:ea typeface="Calibri" pitchFamily="34" charset="-122"/>
-                <a:cs typeface="Calibri" pitchFamily="34" charset="-120"/>
+                <a:cs typeface="Amiri" pitchFamily="2" charset="-78"/>
               </a:rPr>
               <a:t>Zayd</a:t>
             </a:r>
@@ -45505,8 +44642,7 @@
                   <a:srgbClr val="1B3B6F"/>
                 </a:solidFill>
                 <a:latin typeface="Calibri" pitchFamily="34" charset="0"/>
-                <a:ea typeface="Calibri" pitchFamily="34" charset="-122"/>
-                <a:cs typeface="Calibri" pitchFamily="34" charset="-120"/>
+                <a:cs typeface="Amiri" pitchFamily="2" charset="-78"/>
               </a:rPr>
               <a:t>B</a:t>
             </a:r>
@@ -45544,8 +44680,7 @@
                   <a:srgbClr val="1F2A37"/>
                 </a:solidFill>
                 <a:latin typeface="Calibri" pitchFamily="34" charset="0"/>
-                <a:ea typeface="Calibri" pitchFamily="34" charset="-122"/>
-                <a:cs typeface="Calibri" pitchFamily="34" charset="-120"/>
+                <a:cs typeface="Amiri" pitchFamily="2" charset="-78"/>
               </a:rPr>
               <a:t>Nour</a:t>
             </a:r>
@@ -45608,8 +44743,7 @@
                   <a:srgbClr val="1B3B6F"/>
                 </a:solidFill>
                 <a:latin typeface="Calibri" pitchFamily="34" charset="0"/>
-                <a:ea typeface="Calibri" pitchFamily="34" charset="-122"/>
-                <a:cs typeface="Calibri" pitchFamily="34" charset="-120"/>
+                <a:cs typeface="Amiri" pitchFamily="2" charset="-78"/>
               </a:rPr>
               <a:t>C</a:t>
             </a:r>
@@ -45647,8 +44781,7 @@
                   <a:srgbClr val="1F2A37"/>
                 </a:solidFill>
                 <a:latin typeface="Calibri" pitchFamily="34" charset="0"/>
-                <a:ea typeface="Calibri" pitchFamily="34" charset="-122"/>
-                <a:cs typeface="Calibri" pitchFamily="34" charset="-120"/>
+                <a:cs typeface="Amiri" pitchFamily="2" charset="-78"/>
               </a:rPr>
               <a:t>Both</a:t>
             </a:r>
@@ -45686,8 +44819,7 @@
                   <a:srgbClr val="8A93A0"/>
                 </a:solidFill>
                 <a:latin typeface="Calibri" pitchFamily="34" charset="0"/>
-                <a:ea typeface="Calibri" pitchFamily="34" charset="-122"/>
-                <a:cs typeface="Calibri" pitchFamily="34" charset="-120"/>
+                <a:cs typeface="Amiri" pitchFamily="2" charset="-78"/>
               </a:rPr>
               <a:t>9 / 18</a:t>
             </a:r>

--- a/Progression_P6/P6-L08_Mock_Paper_1_Listening.pptx
+++ b/Progression_P6/P6-L08_Mock_Paper_1_Listening.pptx
@@ -616,7 +616,11 @@
           <a:lstStyle/>
           <a:p>
             <a:r>
-              <a:rPr lang="en-US" dirty="0"/>
+              <a:rPr lang="ar-SA" dirty="0">
+                <a:latin typeface="Amiri" pitchFamily="2" charset="-78"/>
+                <a:ea typeface="Amiri" pitchFamily="2" charset="-78"/>
+                <a:cs typeface="Amiri" pitchFamily="2" charset="-78"/>
+              </a:rPr>
               <a:t>MOCK — EXAM CONDITIONS: cameras on, mics muted, chat closed, no notes. Students write answers on paper (1A, 2C …) and photograph the sheet into the assignment at the end. Read the script twice at a steady pace with a short pause between readings; no further repetition.
 TEXT 3 (website) — select the statement the text supports, 6 marks. Distractors use words from the text but change the meaning.
 TEACHER READS THE SCRIPT ALOUD TWICE (exam conditions: no pausing, no repetition beyond the second reading). Students read the questions first (30 s).
@@ -1417,7 +1421,11 @@
           <a:lstStyle/>
           <a:p>
             <a:r>
-              <a:rPr lang="en-US" dirty="0"/>
+              <a:rPr lang="ar-SA" dirty="0">
+                <a:latin typeface="Amiri" pitchFamily="2" charset="-78"/>
+                <a:ea typeface="Amiri" pitchFamily="2" charset="-78"/>
+                <a:cs typeface="Amiri" pitchFamily="2" charset="-78"/>
+              </a:rPr>
               <a:t>WELCOME (1 min) — while students join.
 • Greet each student by name as they arrive: السَّلَامُ عَلَيْكُمْ. Take the register (Pastoral Tracker: attendance 0/1).
 • 2-MINUTE CHECK-IN (SEND training): a private chat to any student who seemed unsettled last lesson — “Are you okay today? 👍 / 👎”.
@@ -1961,7 +1969,11 @@
           <a:lstStyle/>
           <a:p>
             <a:r>
-              <a:rPr lang="en-US" dirty="0"/>
+              <a:rPr lang="ar-SA" dirty="0">
+                <a:latin typeface="Amiri" pitchFamily="2" charset="-78"/>
+                <a:ea typeface="Amiri" pitchFamily="2" charset="-78"/>
+                <a:cs typeface="Amiri" pitchFamily="2" charset="-78"/>
+              </a:rPr>
               <a:t>MOCK — EXAM CONDITIONS: cameras on, mics muted, chat closed, no notes. Students write answers on paper (1A, 2C …) and photograph the sheet into the assignment at the end. Read the script twice at a steady pace with a short pause between readings; no further repetition.
 TEXT 1 (website) — multiple choice, 8 marks. Two minutes to read the questions first.
 TEACHER READS THE SCRIPT ALOUD TWICE (exam conditions: no pausing, no repetition beyond the second reading). Students read the questions first (30 s).
@@ -2052,7 +2064,11 @@
           <a:lstStyle/>
           <a:p>
             <a:r>
-              <a:rPr lang="en-US" dirty="0"/>
+              <a:rPr lang="ar-SA" dirty="0">
+                <a:latin typeface="Amiri" pitchFamily="2" charset="-78"/>
+                <a:ea typeface="Amiri" pitchFamily="2" charset="-78"/>
+                <a:cs typeface="Amiri" pitchFamily="2" charset="-78"/>
+              </a:rPr>
               <a:t>MOCK — EXAM CONDITIONS: cameras on, mics muted, chat closed, no notes. Students write answers on paper (1A, 2C …) and photograph the sheet into the assignment at the end. Read the script twice at a steady pace with a short pause between readings; no further repetition.
 TEXT 2 (website) — matching: who says it? 6 marks. Use a different voice for نُورٌ and زَيْدٌ, and say each name clearly.
 TEACHER READS THE SCRIPT ALOUD TWICE (exam conditions: no pausing, no repetition beyond the second reading). Students read the questions first (30 s).
@@ -2539,6 +2555,7 @@
                   <a:srgbClr val="D4AF37"/>
                 </a:solidFill>
                 <a:latin typeface="Amiri" pitchFamily="2" charset="-78"/>
+                <a:ea typeface="Amiri" pitchFamily="2" charset="-78"/>
                 <a:cs typeface="Amiri" pitchFamily="2" charset="-78"/>
               </a:rPr>
               <a:t>م</a:t>
@@ -2745,6 +2762,7 @@
                   <a:srgbClr val="D4AF37"/>
                 </a:solidFill>
                 <a:latin typeface="Amiri" pitchFamily="2" charset="-78"/>
+                <a:ea typeface="Amiri" pitchFamily="2" charset="-78"/>
                 <a:cs typeface="Amiri" pitchFamily="2" charset="-78"/>
               </a:rPr>
               <a:t>امْتِحَانُ المُحَاكَاةِ — الوَرَقَةُ الأُولَى: الاسْتِمَاعُ</a:t>
@@ -3202,6 +3220,7 @@
                   <a:srgbClr val="D4AF37"/>
                 </a:solidFill>
                 <a:latin typeface="Amiri" pitchFamily="2" charset="-78"/>
+                <a:ea typeface="Amiri" pitchFamily="2" charset="-78"/>
                 <a:cs typeface="Amiri" pitchFamily="2" charset="-78"/>
               </a:rPr>
               <a:t>م</a:t>
@@ -3522,6 +3541,7 @@
                   <a:srgbClr val="8A6D1E"/>
                 </a:solidFill>
                 <a:latin typeface="Amiri" pitchFamily="2" charset="-78"/>
+                <a:ea typeface="Amiri" pitchFamily="2" charset="-78"/>
                 <a:cs typeface="Amiri" pitchFamily="2" charset="-78"/>
               </a:rPr>
               <a:t>الاسْتِمَاعُ</a:t>
@@ -4584,6 +4604,7 @@
                   <a:srgbClr val="1B3B6F"/>
                 </a:solidFill>
                 <a:latin typeface="Amiri" pitchFamily="2" charset="-78"/>
+                <a:ea typeface="Amiri" pitchFamily="2" charset="-78"/>
                 <a:cs typeface="Amiri" pitchFamily="2" charset="-78"/>
               </a:rPr>
               <a:t>لِكَيْ</a:t>
@@ -5924,6 +5945,7 @@
                   <a:srgbClr val="1B3B6F"/>
                 </a:solidFill>
                 <a:latin typeface="Amiri" pitchFamily="2" charset="-78"/>
+                <a:ea typeface="Amiri" pitchFamily="2" charset="-78"/>
                 <a:cs typeface="Amiri" pitchFamily="2" charset="-78"/>
               </a:rPr>
               <a:t>يَرْجُو</a:t>
@@ -6373,6 +6395,7 @@
                   <a:srgbClr val="D4AF37"/>
                 </a:solidFill>
                 <a:latin typeface="Amiri" pitchFamily="2" charset="-78"/>
+                <a:ea typeface="Amiri" pitchFamily="2" charset="-78"/>
                 <a:cs typeface="Amiri" pitchFamily="2" charset="-78"/>
               </a:rPr>
               <a:t>م</a:t>
@@ -6693,6 +6716,7 @@
                   <a:srgbClr val="8A6D1E"/>
                 </a:solidFill>
                 <a:latin typeface="Amiri" pitchFamily="2" charset="-78"/>
+                <a:ea typeface="Amiri" pitchFamily="2" charset="-78"/>
                 <a:cs typeface="Amiri" pitchFamily="2" charset="-78"/>
               </a:rPr>
               <a:t>الإِجَابَاتُ</a:t>
@@ -7234,6 +7258,7 @@
                   <a:srgbClr val="8A6D1E"/>
                 </a:solidFill>
                 <a:latin typeface="Amiri" pitchFamily="2" charset="-78"/>
+                <a:ea typeface="Amiri" pitchFamily="2" charset="-78"/>
                 <a:cs typeface="Amiri" pitchFamily="2" charset="-78"/>
               </a:rPr>
               <a:t>أُشِيرُ إِلَى أَنَّ الوِقَايَةَ خَيْرٌ مِنَ العِلَاجِ.</a:t>
@@ -7382,6 +7407,7 @@
                   <a:srgbClr val="1B3B6F"/>
                 </a:solidFill>
                 <a:latin typeface="Amiri" pitchFamily="2" charset="-78"/>
+                <a:ea typeface="Amiri" pitchFamily="2" charset="-78"/>
                 <a:cs typeface="Amiri" pitchFamily="2" charset="-78"/>
               </a:rPr>
               <a:t>صَحِيحٌ أَنَّ</a:t>
@@ -7763,6 +7789,7 @@
                   <a:srgbClr val="8A6D1E"/>
                 </a:solidFill>
                 <a:latin typeface="Amiri" pitchFamily="2" charset="-78"/>
+                <a:ea typeface="Amiri" pitchFamily="2" charset="-78"/>
                 <a:cs typeface="Amiri" pitchFamily="2" charset="-78"/>
               </a:rPr>
               <a:t>صَحِيحٌ أَنَّ الأَدْوِيَةَ ضَرُورِيَّةٌ أَحْيَانًا.</a:t>
@@ -7911,6 +7938,7 @@
                   <a:srgbClr val="1B3B6F"/>
                 </a:solidFill>
                 <a:latin typeface="Amiri" pitchFamily="2" charset="-78"/>
+                <a:ea typeface="Amiri" pitchFamily="2" charset="-78"/>
                 <a:cs typeface="Amiri" pitchFamily="2" charset="-78"/>
               </a:rPr>
               <a:t>غَيْرَ أَنَّ</a:t>
@@ -8292,6 +8320,7 @@
                   <a:srgbClr val="8A6D1E"/>
                 </a:solidFill>
                 <a:latin typeface="Amiri" pitchFamily="2" charset="-78"/>
+                <a:ea typeface="Amiri" pitchFamily="2" charset="-78"/>
                 <a:cs typeface="Amiri" pitchFamily="2" charset="-78"/>
               </a:rPr>
               <a:t>غَيْرَ أَنَّ نَمَطَ الحَيَاةِ الصِّحِّيَّ يَقِي مِنْ كَثِيرٍ مِنَ الأَمْرَاضِ.</a:t>
@@ -8795,6 +8824,7 @@
                   <a:srgbClr val="8A6D1E"/>
                 </a:solidFill>
                 <a:latin typeface="Amiri" pitchFamily="2" charset="-78"/>
+                <a:ea typeface="Amiri" pitchFamily="2" charset="-78"/>
                 <a:cs typeface="Amiri" pitchFamily="2" charset="-78"/>
               </a:rPr>
               <a:t>كَانَ كَثِيرٌ مِنَ المَرْضَى قَدْ أَهْمَلُوا الرِّيَاضَةَ لِسَنَوَاتٍ.</a:t>
@@ -9298,6 +9328,7 @@
                   <a:srgbClr val="8A6D1E"/>
                 </a:solidFill>
                 <a:latin typeface="Amiri" pitchFamily="2" charset="-78"/>
+                <a:ea typeface="Amiri" pitchFamily="2" charset="-78"/>
                 <a:cs typeface="Amiri" pitchFamily="2" charset="-78"/>
               </a:rPr>
               <a:t>إِذَا مَشَى الإِنْسَانُ نِصْفَ سَاعَةٍ يَوْمِيًّا، سَيَتَحَسَّنُ قَلْبُهُ.</a:t>
@@ -9801,6 +9832,7 @@
                   <a:srgbClr val="8A6D1E"/>
                 </a:solidFill>
                 <a:latin typeface="Amiri" pitchFamily="2" charset="-78"/>
+                <a:ea typeface="Amiri" pitchFamily="2" charset="-78"/>
                 <a:cs typeface="Amiri" pitchFamily="2" charset="-78"/>
               </a:rPr>
               <a:t>لَوْ قَلَّلْنَا مِنَ السُّكَّرِ، لَانْخَفَضَتْ أَمْرَاضُ العَصْرِ.</a:t>
@@ -9949,6 +9981,7 @@
                   <a:srgbClr val="1B3B6F"/>
                 </a:solidFill>
                 <a:latin typeface="Amiri" pitchFamily="2" charset="-78"/>
+                <a:ea typeface="Amiri" pitchFamily="2" charset="-78"/>
                 <a:cs typeface="Amiri" pitchFamily="2" charset="-78"/>
               </a:rPr>
               <a:t>يَنْبَغِي أَنْ</a:t>
@@ -10330,6 +10363,7 @@
                   <a:srgbClr val="8A6D1E"/>
                 </a:solidFill>
                 <a:latin typeface="Amiri" pitchFamily="2" charset="-78"/>
+                <a:ea typeface="Amiri" pitchFamily="2" charset="-78"/>
                 <a:cs typeface="Amiri" pitchFamily="2" charset="-78"/>
               </a:rPr>
               <a:t>يَنْبَغِي أَنْ نَشْرَبَ المَاءَ بِوَفْرَةٍ.</a:t>
@@ -10478,6 +10512,7 @@
                   <a:srgbClr val="1B3B6F"/>
                 </a:solidFill>
                 <a:latin typeface="Amiri" pitchFamily="2" charset="-78"/>
+                <a:ea typeface="Amiri" pitchFamily="2" charset="-78"/>
                 <a:cs typeface="Amiri" pitchFamily="2" charset="-78"/>
               </a:rPr>
               <a:t>أَرْجُو أَنْ</a:t>
@@ -10859,6 +10894,7 @@
                   <a:srgbClr val="8A6D1E"/>
                 </a:solidFill>
                 <a:latin typeface="Amiri" pitchFamily="2" charset="-78"/>
+                <a:ea typeface="Amiri" pitchFamily="2" charset="-78"/>
                 <a:cs typeface="Amiri" pitchFamily="2" charset="-78"/>
               </a:rPr>
               <a:t>أَرْجُو أَنْ يَهْتَمَّ الشَّبَابُ بِصِحَّتِهِمْ مُبَكِّرًا.</a:t>
@@ -10992,6 +11028,7 @@
                   <a:srgbClr val="D4AF37"/>
                 </a:solidFill>
                 <a:latin typeface="Amiri" pitchFamily="2" charset="-78"/>
+                <a:ea typeface="Amiri" pitchFamily="2" charset="-78"/>
                 <a:cs typeface="Amiri" pitchFamily="2" charset="-78"/>
               </a:rPr>
               <a:t>م</a:t>
@@ -11312,6 +11349,7 @@
                   <a:srgbClr val="8A6D1E"/>
                 </a:solidFill>
                 <a:latin typeface="Amiri" pitchFamily="2" charset="-78"/>
+                <a:ea typeface="Amiri" pitchFamily="2" charset="-78"/>
                 <a:cs typeface="Amiri" pitchFamily="2" charset="-78"/>
               </a:rPr>
               <a:t>الإِجَابَاتُ</a:t>
@@ -11853,6 +11891,7 @@
                   <a:srgbClr val="8A6D1E"/>
                 </a:solidFill>
                 <a:latin typeface="Amiri" pitchFamily="2" charset="-78"/>
+                <a:ea typeface="Amiri" pitchFamily="2" charset="-78"/>
                 <a:cs typeface="Amiri" pitchFamily="2" charset="-78"/>
               </a:rPr>
               <a:t>نُورٌ: أَرَى أَنَّ التَّدْرِيبَ العَمَلِيَّ لَا يَقِلُّ أَهَمِّيَّةً عَنِ الشَّهَادَةِ.</a:t>
@@ -12356,6 +12395,7 @@
                   <a:srgbClr val="8A6D1E"/>
                 </a:solidFill>
                 <a:latin typeface="Amiri" pitchFamily="2" charset="-78"/>
+                <a:ea typeface="Amiri" pitchFamily="2" charset="-78"/>
                 <a:cs typeface="Amiri" pitchFamily="2" charset="-78"/>
               </a:rPr>
               <a:t>زَيْدٌ: صَحِيحٌ أَنَّ الشَّهَادَةَ مُهِمَّةٌ، غَيْرَ أَنَّ المَهَارَاتِ تَصْنَعُ الفَرْقَ.</a:t>
@@ -12859,6 +12899,7 @@
                   <a:srgbClr val="8A6D1E"/>
                 </a:solidFill>
                 <a:latin typeface="Amiri" pitchFamily="2" charset="-78"/>
+                <a:ea typeface="Amiri" pitchFamily="2" charset="-78"/>
                 <a:cs typeface="Amiri" pitchFamily="2" charset="-78"/>
               </a:rPr>
               <a:t>نُورٌ: لَوْ بَدَأْتُ التَّدَرُّبَ مُبَكِّرًا، لَاكْتَسَبْتُ خِبْرَةً.</a:t>
@@ -13362,6 +13403,7 @@
                   <a:srgbClr val="8A6D1E"/>
                 </a:solidFill>
                 <a:latin typeface="Amiri" pitchFamily="2" charset="-78"/>
+                <a:ea typeface="Amiri" pitchFamily="2" charset="-78"/>
                 <a:cs typeface="Amiri" pitchFamily="2" charset="-78"/>
               </a:rPr>
               <a:t>زَيْدٌ: يَنْبَغِي أَنْ نَخْتَارَ مَجَالًا نُحِبُّهُ.</a:t>
@@ -13865,6 +13907,7 @@
                   <a:srgbClr val="8A6D1E"/>
                 </a:solidFill>
                 <a:latin typeface="Amiri" pitchFamily="2" charset="-78"/>
+                <a:ea typeface="Amiri" pitchFamily="2" charset="-78"/>
                 <a:cs typeface="Amiri" pitchFamily="2" charset="-78"/>
               </a:rPr>
               <a:t>نُورٌ: أَكَّدَ مُعَلِّمِي أَنَّ الشَّغَفَ يَقُودُ إِلَى النَّجَاحِ.</a:t>
@@ -14368,6 +14411,7 @@
                   <a:srgbClr val="8A6D1E"/>
                 </a:solidFill>
                 <a:latin typeface="Amiri" pitchFamily="2" charset="-78"/>
+                <a:ea typeface="Amiri" pitchFamily="2" charset="-78"/>
                 <a:cs typeface="Amiri" pitchFamily="2" charset="-78"/>
               </a:rPr>
               <a:t>زَيْدٌ: إِذَا حَدَّدْتُ هَدَفِي، سَأُخَطِّطُ لَهُ بِوُضُوحٍ.</a:t>
@@ -14501,6 +14545,7 @@
                   <a:srgbClr val="D4AF37"/>
                 </a:solidFill>
                 <a:latin typeface="Amiri" pitchFamily="2" charset="-78"/>
+                <a:ea typeface="Amiri" pitchFamily="2" charset="-78"/>
                 <a:cs typeface="Amiri" pitchFamily="2" charset="-78"/>
               </a:rPr>
               <a:t>م</a:t>
@@ -14821,6 +14866,7 @@
                   <a:srgbClr val="8A6D1E"/>
                 </a:solidFill>
                 <a:latin typeface="Amiri" pitchFamily="2" charset="-78"/>
+                <a:ea typeface="Amiri" pitchFamily="2" charset="-78"/>
                 <a:cs typeface="Amiri" pitchFamily="2" charset="-78"/>
               </a:rPr>
               <a:t>الإِجَابَاتُ</a:t>
@@ -15362,6 +15408,7 @@
                   <a:srgbClr val="8A6D1E"/>
                 </a:solidFill>
                 <a:latin typeface="Amiri" pitchFamily="2" charset="-78"/>
+                <a:ea typeface="Amiri" pitchFamily="2" charset="-78"/>
                 <a:cs typeface="Amiri" pitchFamily="2" charset="-78"/>
               </a:rPr>
               <a:t>كَانَتِ المِنْطَقَةُ قَدْ عَانَتْ مِنَ البَطَالَةِ بَيْنَ الشَّبَابِ.</a:t>
@@ -15865,6 +15912,7 @@
                   <a:srgbClr val="8A6D1E"/>
                 </a:solidFill>
                 <a:latin typeface="Amiri" pitchFamily="2" charset="-78"/>
+                <a:ea typeface="Amiri" pitchFamily="2" charset="-78"/>
                 <a:cs typeface="Amiri" pitchFamily="2" charset="-78"/>
               </a:rPr>
               <a:t>يَتَطَلَّبُ الأَمْرُ أَنْ نُوَفِّرَ فُرَصَ تَدْرِيبٍ حَقِيقِيَّةً.</a:t>
@@ -16013,6 +16061,7 @@
                   <a:srgbClr val="1B3B6F"/>
                 </a:solidFill>
                 <a:latin typeface="Amiri" pitchFamily="2" charset="-78"/>
+                <a:ea typeface="Amiri" pitchFamily="2" charset="-78"/>
                 <a:cs typeface="Amiri" pitchFamily="2" charset="-78"/>
               </a:rPr>
               <a:t>لِكَيْ</a:t>
@@ -16394,6 +16443,7 @@
                   <a:srgbClr val="8A6D1E"/>
                 </a:solidFill>
                 <a:latin typeface="Amiri" pitchFamily="2" charset="-78"/>
+                <a:ea typeface="Amiri" pitchFamily="2" charset="-78"/>
                 <a:cs typeface="Amiri" pitchFamily="2" charset="-78"/>
               </a:rPr>
               <a:t>أُطْلِقَ بَرْنَامَجٌ لِكَيْ يُمَكِّنَ الشَّبَابَ مِنْ سُوقِ العَمَلِ.</a:t>
@@ -16897,6 +16947,7 @@
                   <a:srgbClr val="8A6D1E"/>
                 </a:solidFill>
                 <a:latin typeface="Amiri" pitchFamily="2" charset="-78"/>
+                <a:ea typeface="Amiri" pitchFamily="2" charset="-78"/>
                 <a:cs typeface="Amiri" pitchFamily="2" charset="-78"/>
               </a:rPr>
               <a:t>صَحِيحٌ أَنَّ التَّمْوِيلَ مَحْدُودٌ، غَيْرَ أَنَّ الإِرَادَةَ مَوْجُودَةٌ.</a:t>
@@ -17400,6 +17451,7 @@
                   <a:srgbClr val="8A6D1E"/>
                 </a:solidFill>
                 <a:latin typeface="Amiri" pitchFamily="2" charset="-78"/>
+                <a:ea typeface="Amiri" pitchFamily="2" charset="-78"/>
                 <a:cs typeface="Amiri" pitchFamily="2" charset="-78"/>
               </a:rPr>
               <a:t>إِذَا تَعَاوَنَ القِطَاعَانِ العَامُّ وَالخَاصُّ، سَتَزْدَادُ الفُرَصُ.</a:t>
@@ -17548,6 +17600,7 @@
                   <a:srgbClr val="1B3B6F"/>
                 </a:solidFill>
                 <a:latin typeface="Amiri" pitchFamily="2" charset="-78"/>
+                <a:ea typeface="Amiri" pitchFamily="2" charset="-78"/>
                 <a:cs typeface="Amiri" pitchFamily="2" charset="-78"/>
               </a:rPr>
               <a:t>يَرْجُو</a:t>
@@ -17929,6 +17982,7 @@
                   <a:srgbClr val="8A6D1E"/>
                 </a:solidFill>
                 <a:latin typeface="Amiri" pitchFamily="2" charset="-78"/>
+                <a:ea typeface="Amiri" pitchFamily="2" charset="-78"/>
                 <a:cs typeface="Amiri" pitchFamily="2" charset="-78"/>
               </a:rPr>
               <a:t>يَرْجُو المَسْؤُولُ أَنْ يُصْبِحَ البَرْنَامَجُ نَمُوذَجًا وَطَنِيًّا.</a:t>
@@ -18062,6 +18116,7 @@
                   <a:srgbClr val="D4AF37"/>
                 </a:solidFill>
                 <a:latin typeface="Amiri" pitchFamily="2" charset="-78"/>
+                <a:ea typeface="Amiri" pitchFamily="2" charset="-78"/>
                 <a:cs typeface="Amiri" pitchFamily="2" charset="-78"/>
               </a:rPr>
               <a:t>م</a:t>
@@ -18382,6 +18437,7 @@
                   <a:srgbClr val="8A6D1E"/>
                 </a:solidFill>
                 <a:latin typeface="Amiri" pitchFamily="2" charset="-78"/>
+                <a:ea typeface="Amiri" pitchFamily="2" charset="-78"/>
                 <a:cs typeface="Amiri" pitchFamily="2" charset="-78"/>
               </a:rPr>
               <a:t>سَجِّلْ نَتِيجَتَكَ</a:t>
@@ -19695,6 +19751,7 @@
                   <a:srgbClr val="D4AF37"/>
                 </a:solidFill>
                 <a:latin typeface="Amiri" pitchFamily="2" charset="-78"/>
+                <a:ea typeface="Amiri" pitchFamily="2" charset="-78"/>
                 <a:cs typeface="Amiri" pitchFamily="2" charset="-78"/>
               </a:rPr>
               <a:t>م</a:t>
@@ -20015,6 +20072,7 @@
                   <a:srgbClr val="8A6D1E"/>
                 </a:solidFill>
                 <a:latin typeface="Amiri" pitchFamily="2" charset="-78"/>
+                <a:ea typeface="Amiri" pitchFamily="2" charset="-78"/>
                 <a:cs typeface="Amiri" pitchFamily="2" charset="-78"/>
               </a:rPr>
               <a:t>التَّأَمُّلُ</a:t>
@@ -20539,6 +20597,7 @@
                   <a:srgbClr val="1B3B6F"/>
                 </a:solidFill>
                 <a:latin typeface="Amiri" pitchFamily="2" charset="-78"/>
+                <a:ea typeface="Amiri" pitchFamily="2" charset="-78"/>
                 <a:cs typeface="Amiri" pitchFamily="2" charset="-78"/>
               </a:rPr>
               <a:t>قِرَاءَةُ الأَسْئِلَةِ مُسْبَقًا</a:t>
@@ -20615,6 +20674,7 @@
                   <a:srgbClr val="1B3B6F"/>
                 </a:solidFill>
                 <a:latin typeface="Amiri" pitchFamily="2" charset="-78"/>
+                <a:ea typeface="Amiri" pitchFamily="2" charset="-78"/>
                 <a:cs typeface="Amiri" pitchFamily="2" charset="-78"/>
               </a:rPr>
               <a:t>الاسْتِرَاتِيجِيَّةُ الَّتِي سَاعَدَتْنِي أَكْثَرَ هِيَ ______ .</a:t>
@@ -20786,6 +20846,7 @@
                   <a:srgbClr val="D4AF37"/>
                 </a:solidFill>
                 <a:latin typeface="Amiri" pitchFamily="2" charset="-78"/>
+                <a:ea typeface="Amiri" pitchFamily="2" charset="-78"/>
                 <a:cs typeface="Amiri" pitchFamily="2" charset="-78"/>
               </a:rPr>
               <a:t>م</a:t>
@@ -21106,6 +21167,7 @@
                   <a:srgbClr val="8A6D1E"/>
                 </a:solidFill>
                 <a:latin typeface="Amiri" pitchFamily="2" charset="-78"/>
+                <a:ea typeface="Amiri" pitchFamily="2" charset="-78"/>
                 <a:cs typeface="Amiri" pitchFamily="2" charset="-78"/>
               </a:rPr>
               <a:t>قَيِّمْ عَمَلَكَ</a:t>
@@ -22263,6 +22325,7 @@
                   <a:srgbClr val="D4AF37"/>
                 </a:solidFill>
                 <a:latin typeface="Amiri" pitchFamily="2" charset="-78"/>
+                <a:ea typeface="Amiri" pitchFamily="2" charset="-78"/>
                 <a:cs typeface="Amiri" pitchFamily="2" charset="-78"/>
               </a:rPr>
               <a:t>م</a:t>
@@ -22583,6 +22646,7 @@
                   <a:srgbClr val="8A6D1E"/>
                 </a:solidFill>
                 <a:latin typeface="Amiri" pitchFamily="2" charset="-78"/>
+                <a:ea typeface="Amiri" pitchFamily="2" charset="-78"/>
                 <a:cs typeface="Amiri" pitchFamily="2" charset="-78"/>
               </a:rPr>
               <a:t>التَّحْضِيرُ لِلدَّرْسِ القَادِمِ</a:t>
@@ -22796,6 +22860,7 @@
                   <a:srgbClr val="1B3B6F"/>
                 </a:solidFill>
                 <a:latin typeface="Amiri" pitchFamily="2" charset="-78"/>
+                <a:ea typeface="Amiri" pitchFamily="2" charset="-78"/>
                 <a:cs typeface="Amiri" pitchFamily="2" charset="-78"/>
               </a:rPr>
               <a:t>المَعْنَى العَامُّ</a:t>
@@ -22885,6 +22950,7 @@
                   <a:srgbClr val="1B3B6F"/>
                 </a:solidFill>
                 <a:latin typeface="Amiri" pitchFamily="2" charset="-78"/>
+                <a:ea typeface="Amiri" pitchFamily="2" charset="-78"/>
                 <a:cs typeface="Amiri" pitchFamily="2" charset="-78"/>
               </a:rPr>
               <a:t>التَّفَاصِيلُ الوَاقِعِيَّةُ</a:t>
@@ -22931,11 +22997,12 @@
               <a:buNone/>
             </a:pPr>
             <a:r>
-              <a:rPr lang="en-US" sz="1000" i="1" dirty="0">
+              <a:rPr lang="ar-SA" sz="1000" i="1" dirty="0">
                 <a:solidFill>
                   <a:srgbClr val="5A6472"/>
                 </a:solidFill>
                 <a:latin typeface="Calibri" pitchFamily="34" charset="0"/>
+                <a:ea typeface="Amiri" pitchFamily="2" charset="-78"/>
                 <a:cs typeface="Amiri" pitchFamily="2" charset="-78"/>
               </a:rPr>
               <a:t>  sg. تَفْصِيلٌ</a:t>
@@ -22974,6 +23041,7 @@
                   <a:srgbClr val="1B3B6F"/>
                 </a:solidFill>
                 <a:latin typeface="Amiri" pitchFamily="2" charset="-78"/>
+                <a:ea typeface="Amiri" pitchFamily="2" charset="-78"/>
                 <a:cs typeface="Amiri" pitchFamily="2" charset="-78"/>
               </a:rPr>
               <a:t>الأَدِلَّةُ النَّصِّيَّةُ</a:t>
@@ -23020,11 +23088,12 @@
               <a:buNone/>
             </a:pPr>
             <a:r>
-              <a:rPr lang="en-US" sz="1000" i="1" dirty="0">
+              <a:rPr lang="ar-SA" sz="1000" i="1" dirty="0">
                 <a:solidFill>
                   <a:srgbClr val="5A6472"/>
                 </a:solidFill>
                 <a:latin typeface="Calibri" pitchFamily="34" charset="0"/>
+                <a:ea typeface="Amiri" pitchFamily="2" charset="-78"/>
                 <a:cs typeface="Amiri" pitchFamily="2" charset="-78"/>
               </a:rPr>
               <a:t>  sg. دَلِيلٌ</a:t>
@@ -23063,6 +23132,7 @@
                   <a:srgbClr val="1B3B6F"/>
                 </a:solidFill>
                 <a:latin typeface="Amiri" pitchFamily="2" charset="-78"/>
+                <a:ea typeface="Amiri" pitchFamily="2" charset="-78"/>
                 <a:cs typeface="Amiri" pitchFamily="2" charset="-78"/>
               </a:rPr>
               <a:t>اسْتِنْتَاجُ الكَلِمَاتِ المَجْهُولَةِ</a:t>
@@ -23152,6 +23222,7 @@
                   <a:srgbClr val="1B3B6F"/>
                 </a:solidFill>
                 <a:latin typeface="Amiri" pitchFamily="2" charset="-78"/>
+                <a:ea typeface="Amiri" pitchFamily="2" charset="-78"/>
                 <a:cs typeface="Amiri" pitchFamily="2" charset="-78"/>
               </a:rPr>
               <a:t>الدِّقَّةُ فِي الاخْتِيَارِ</a:t>
@@ -23320,6 +23391,7 @@
                   <a:srgbClr val="1B3B6F"/>
                 </a:solidFill>
                 <a:latin typeface="Amiri" pitchFamily="2" charset="-78"/>
+                <a:ea typeface="Amiri" pitchFamily="2" charset="-78"/>
                 <a:cs typeface="Amiri" pitchFamily="2" charset="-78"/>
               </a:rPr>
               <a:t>سَأَقْرَأُ ______ أَوَّلًا، ثُمَّ سَأَبْحَثُ عَنْ ______ .</a:t>
@@ -23645,6 +23717,7 @@
                   <a:srgbClr val="1F2A37"/>
                 </a:solidFill>
                 <a:latin typeface="Amiri" pitchFamily="2" charset="-78"/>
+                <a:ea typeface="Amiri" pitchFamily="2" charset="-78"/>
                 <a:cs typeface="Amiri" pitchFamily="2" charset="-78"/>
               </a:rPr>
               <a:t>لَوْ</a:t>
@@ -23671,6 +23744,7 @@
                   <a:srgbClr val="1F2A37"/>
                 </a:solidFill>
                 <a:latin typeface="Amiri" pitchFamily="2" charset="-78"/>
+                <a:ea typeface="Amiri" pitchFamily="2" charset="-78"/>
                 <a:cs typeface="Amiri" pitchFamily="2" charset="-78"/>
               </a:rPr>
               <a:t>غَيْرَ أَنَّ</a:t>
@@ -23697,6 +23771,7 @@
                   <a:srgbClr val="1F2A37"/>
                 </a:solidFill>
                 <a:latin typeface="Amiri" pitchFamily="2" charset="-78"/>
+                <a:ea typeface="Amiri" pitchFamily="2" charset="-78"/>
                 <a:cs typeface="Amiri" pitchFamily="2" charset="-78"/>
               </a:rPr>
               <a:t>يَتَطَلَّبُ</a:t>
@@ -24067,6 +24142,7 @@
                   <a:srgbClr val="FFFFFF"/>
                 </a:solidFill>
                 <a:latin typeface="Amiri" pitchFamily="2" charset="-78"/>
+                <a:ea typeface="Amiri" pitchFamily="2" charset="-78"/>
                 <a:cs typeface="Amiri" pitchFamily="2" charset="-78"/>
               </a:rPr>
               <a:t>أَحْسَنْتُمْ! إِلَى اللِّقَاءِ</a:t>
@@ -24219,6 +24295,7 @@
                   <a:srgbClr val="D4AF37"/>
                 </a:solidFill>
                 <a:latin typeface="Amiri" pitchFamily="2" charset="-78"/>
+                <a:ea typeface="Amiri" pitchFamily="2" charset="-78"/>
                 <a:cs typeface="Amiri" pitchFamily="2" charset="-78"/>
               </a:rPr>
               <a:t>امْتِحَانُ المُحَاكَاةِ — الوَرَقَتَانِ الثَّانِيَةُ وَالرَّابِعَةُ</a:t>
@@ -24352,6 +24429,7 @@
                   <a:srgbClr val="D4AF37"/>
                 </a:solidFill>
                 <a:latin typeface="Amiri" pitchFamily="2" charset="-78"/>
+                <a:ea typeface="Amiri" pitchFamily="2" charset="-78"/>
                 <a:cs typeface="Amiri" pitchFamily="2" charset="-78"/>
               </a:rPr>
               <a:t>م</a:t>
@@ -24672,6 +24750,7 @@
                   <a:srgbClr val="8A6D1E"/>
                 </a:solidFill>
                 <a:latin typeface="Amiri" pitchFamily="2" charset="-78"/>
+                <a:ea typeface="Amiri" pitchFamily="2" charset="-78"/>
                 <a:cs typeface="Amiri" pitchFamily="2" charset="-78"/>
               </a:rPr>
               <a:t>آدَابُ الصَّفِّ</a:t>
@@ -26203,6 +26282,7 @@
                   <a:srgbClr val="D4AF37"/>
                 </a:solidFill>
                 <a:latin typeface="Amiri" pitchFamily="2" charset="-78"/>
+                <a:ea typeface="Amiri" pitchFamily="2" charset="-78"/>
                 <a:cs typeface="Amiri" pitchFamily="2" charset="-78"/>
               </a:rPr>
               <a:t>م</a:t>
@@ -26523,6 +26603,7 @@
                   <a:srgbClr val="8A6D1E"/>
                 </a:solidFill>
                 <a:latin typeface="Amiri" pitchFamily="2" charset="-78"/>
+                <a:ea typeface="Amiri" pitchFamily="2" charset="-78"/>
                 <a:cs typeface="Amiri" pitchFamily="2" charset="-78"/>
               </a:rPr>
               <a:t>خَرِيطَةُ الدَّرْسِ</a:t>
@@ -26837,6 +26918,7 @@
                   <a:srgbClr val="0E7C86"/>
                 </a:solidFill>
                 <a:latin typeface="Amiri" pitchFamily="2" charset="-78"/>
+                <a:ea typeface="Amiri" pitchFamily="2" charset="-78"/>
                 <a:cs typeface="Amiri" pitchFamily="2" charset="-78"/>
               </a:rPr>
               <a:t>اِبْدَأِ الآنَ</a:t>
@@ -27113,6 +27195,7 @@
                   <a:srgbClr val="1B3B6F"/>
                 </a:solidFill>
                 <a:latin typeface="Amiri" pitchFamily="2" charset="-78"/>
+                <a:ea typeface="Amiri" pitchFamily="2" charset="-78"/>
                 <a:cs typeface="Amiri" pitchFamily="2" charset="-78"/>
               </a:rPr>
               <a:t>ظُرُوفُ الامْتِحَانِ</a:t>
@@ -27389,6 +27472,7 @@
                   <a:srgbClr val="1E6B52"/>
                 </a:solidFill>
                 <a:latin typeface="Amiri" pitchFamily="2" charset="-78"/>
+                <a:ea typeface="Amiri" pitchFamily="2" charset="-78"/>
                 <a:cs typeface="Amiri" pitchFamily="2" charset="-78"/>
               </a:rPr>
               <a:t>الامْتِحَانُ</a:t>
@@ -27665,6 +27749,7 @@
                   <a:srgbClr val="8A6D1E"/>
                 </a:solidFill>
                 <a:latin typeface="Amiri" pitchFamily="2" charset="-78"/>
+                <a:ea typeface="Amiri" pitchFamily="2" charset="-78"/>
                 <a:cs typeface="Amiri" pitchFamily="2" charset="-78"/>
               </a:rPr>
               <a:t>صَحِّحْ</a:t>
@@ -27941,6 +28026,7 @@
                   <a:srgbClr val="8A6D1E"/>
                 </a:solidFill>
                 <a:latin typeface="Amiri" pitchFamily="2" charset="-78"/>
+                <a:ea typeface="Amiri" pitchFamily="2" charset="-78"/>
                 <a:cs typeface="Amiri" pitchFamily="2" charset="-78"/>
               </a:rPr>
               <a:t>قَيِّمْ</a:t>
@@ -28217,6 +28303,7 @@
                   <a:srgbClr val="C45A3C"/>
                 </a:solidFill>
                 <a:latin typeface="Amiri" pitchFamily="2" charset="-78"/>
+                <a:ea typeface="Amiri" pitchFamily="2" charset="-78"/>
                 <a:cs typeface="Amiri" pitchFamily="2" charset="-78"/>
               </a:rPr>
               <a:t>اِسْتَعِدَّ</a:t>
@@ -28460,6 +28547,7 @@
                   <a:srgbClr val="D4AF37"/>
                 </a:solidFill>
                 <a:latin typeface="Amiri" pitchFamily="2" charset="-78"/>
+                <a:ea typeface="Amiri" pitchFamily="2" charset="-78"/>
                 <a:cs typeface="Amiri" pitchFamily="2" charset="-78"/>
               </a:rPr>
               <a:t>م</a:t>
@@ -28780,6 +28868,7 @@
                   <a:srgbClr val="8A6D1E"/>
                 </a:solidFill>
                 <a:latin typeface="Amiri" pitchFamily="2" charset="-78"/>
+                <a:ea typeface="Amiri" pitchFamily="2" charset="-78"/>
                 <a:cs typeface="Amiri" pitchFamily="2" charset="-78"/>
               </a:rPr>
               <a:t>اِبْدَأِ الآنَ</a:t>
@@ -28966,6 +29055,7 @@
                   <a:srgbClr val="1B3B6F"/>
                 </a:solidFill>
                 <a:latin typeface="Amiri" pitchFamily="2" charset="-78"/>
+                <a:ea typeface="Amiri" pitchFamily="2" charset="-78"/>
                 <a:cs typeface="Amiri" pitchFamily="2" charset="-78"/>
               </a:rPr>
               <a:t>قِرَاءَةُ الأَسْئِلَةِ مُسْبَقًا</a:t>
@@ -29430,6 +29520,7 @@
                   <a:srgbClr val="1B3B6F"/>
                 </a:solidFill>
                 <a:latin typeface="Amiri" pitchFamily="2" charset="-78"/>
+                <a:ea typeface="Amiri" pitchFamily="2" charset="-78"/>
                 <a:cs typeface="Amiri" pitchFamily="2" charset="-78"/>
               </a:rPr>
               <a:t>مُشَتِّتَاتُ الاسْتِمَاعِ</a:t>
@@ -29894,6 +29985,7 @@
                   <a:srgbClr val="1B3B6F"/>
                 </a:solidFill>
                 <a:latin typeface="Amiri" pitchFamily="2" charset="-78"/>
+                <a:ea typeface="Amiri" pitchFamily="2" charset="-78"/>
                 <a:cs typeface="Amiri" pitchFamily="2" charset="-78"/>
               </a:rPr>
               <a:t>التَّحَقُّقُ فِي الاسْتِمَاعِ الثَّانِي</a:t>
@@ -30358,6 +30450,7 @@
                   <a:srgbClr val="1B3B6F"/>
                 </a:solidFill>
                 <a:latin typeface="Amiri" pitchFamily="2" charset="-78"/>
+                <a:ea typeface="Amiri" pitchFamily="2" charset="-78"/>
                 <a:cs typeface="Amiri" pitchFamily="2" charset="-78"/>
               </a:rPr>
               <a:t>صَحِيحٌ أَنَّ … غَيْرَ أَنَّ</a:t>
@@ -30485,6 +30578,7 @@
                   <a:srgbClr val="1F2A37"/>
                 </a:solidFill>
                 <a:latin typeface="Amiri" pitchFamily="2" charset="-78"/>
+                <a:ea typeface="Amiri" pitchFamily="2" charset="-78"/>
                 <a:cs typeface="Amiri" pitchFamily="2" charset="-78"/>
               </a:rPr>
               <a:t>صَحِيحٌ أَنَّ</a:t>
@@ -30700,6 +30794,7 @@
                   <a:srgbClr val="1F2A37"/>
                 </a:solidFill>
                 <a:latin typeface="Amiri" pitchFamily="2" charset="-78"/>
+                <a:ea typeface="Amiri" pitchFamily="2" charset="-78"/>
                 <a:cs typeface="Amiri" pitchFamily="2" charset="-78"/>
               </a:rPr>
               <a:t>غَيْرَ أَنَّ</a:t>
@@ -30848,6 +30943,7 @@
                   <a:srgbClr val="1B3B6F"/>
                 </a:solidFill>
                 <a:latin typeface="Amiri" pitchFamily="2" charset="-78"/>
+                <a:ea typeface="Amiri" pitchFamily="2" charset="-78"/>
                 <a:cs typeface="Amiri" pitchFamily="2" charset="-78"/>
               </a:rPr>
               <a:t>لَوْ دَرَسْتُ … لَنَجَحْتُ</a:t>
@@ -31499,6 +31595,7 @@
                   <a:srgbClr val="D4AF37"/>
                 </a:solidFill>
                 <a:latin typeface="Amiri" pitchFamily="2" charset="-78"/>
+                <a:ea typeface="Amiri" pitchFamily="2" charset="-78"/>
                 <a:cs typeface="Amiri" pitchFamily="2" charset="-78"/>
               </a:rPr>
               <a:t>م</a:t>
@@ -31819,6 +31916,7 @@
                   <a:srgbClr val="8A6D1E"/>
                 </a:solidFill>
                 <a:latin typeface="Amiri" pitchFamily="2" charset="-78"/>
+                <a:ea typeface="Amiri" pitchFamily="2" charset="-78"/>
                 <a:cs typeface="Amiri" pitchFamily="2" charset="-78"/>
               </a:rPr>
               <a:t>الإِجَابَاتُ وَالتَّعْلِيلُ</a:t>
@@ -32005,6 +32103,7 @@
                   <a:srgbClr val="1B3B6F"/>
                 </a:solidFill>
                 <a:latin typeface="Amiri" pitchFamily="2" charset="-78"/>
+                <a:ea typeface="Amiri" pitchFamily="2" charset="-78"/>
                 <a:cs typeface="Amiri" pitchFamily="2" charset="-78"/>
               </a:rPr>
               <a:t>قِرَاءَةُ الأَسْئِلَةِ مُسْبَقًا</a:t>
@@ -32534,6 +32633,7 @@
                   <a:srgbClr val="1B3B6F"/>
                 </a:solidFill>
                 <a:latin typeface="Amiri" pitchFamily="2" charset="-78"/>
+                <a:ea typeface="Amiri" pitchFamily="2" charset="-78"/>
                 <a:cs typeface="Amiri" pitchFamily="2" charset="-78"/>
               </a:rPr>
               <a:t>مُشَتِّتَاتُ الاسْتِمَاعِ</a:t>
@@ -33063,6 +33163,7 @@
                   <a:srgbClr val="1B3B6F"/>
                 </a:solidFill>
                 <a:latin typeface="Amiri" pitchFamily="2" charset="-78"/>
+                <a:ea typeface="Amiri" pitchFamily="2" charset="-78"/>
                 <a:cs typeface="Amiri" pitchFamily="2" charset="-78"/>
               </a:rPr>
               <a:t>التَّحَقُّقُ فِي الاسْتِمَاعِ الثَّانِي</a:t>
@@ -33592,6 +33693,7 @@
                   <a:srgbClr val="1B3B6F"/>
                 </a:solidFill>
                 <a:latin typeface="Amiri" pitchFamily="2" charset="-78"/>
+                <a:ea typeface="Amiri" pitchFamily="2" charset="-78"/>
                 <a:cs typeface="Amiri" pitchFamily="2" charset="-78"/>
               </a:rPr>
               <a:t>صَحِيحٌ أَنَّ … غَيْرَ أَنَّ</a:t>
@@ -33719,6 +33821,7 @@
                   <a:srgbClr val="9AA1AB"/>
                 </a:solidFill>
                 <a:latin typeface="Amiri" pitchFamily="2" charset="-78"/>
+                <a:ea typeface="Amiri" pitchFamily="2" charset="-78"/>
                 <a:cs typeface="Amiri" pitchFamily="2" charset="-78"/>
               </a:rPr>
               <a:t>صَحِيحٌ أَنَّ</a:t>
@@ -33961,6 +34064,7 @@
                   <a:srgbClr val="1F2A37"/>
                 </a:solidFill>
                 <a:latin typeface="Amiri" pitchFamily="2" charset="-78"/>
+                <a:ea typeface="Amiri" pitchFamily="2" charset="-78"/>
                 <a:cs typeface="Amiri" pitchFamily="2" charset="-78"/>
               </a:rPr>
               <a:t>غَيْرَ أَنَّ</a:t>
@@ -34147,6 +34251,7 @@
                   <a:srgbClr val="1B3B6F"/>
                 </a:solidFill>
                 <a:latin typeface="Amiri" pitchFamily="2" charset="-78"/>
+                <a:ea typeface="Amiri" pitchFamily="2" charset="-78"/>
                 <a:cs typeface="Amiri" pitchFamily="2" charset="-78"/>
               </a:rPr>
               <a:t>لَوْ دَرَسْتُ … لَنَجَحْتُ</a:t>
@@ -34676,6 +34781,7 @@
                   <a:srgbClr val="1B3B6F"/>
                 </a:solidFill>
                 <a:latin typeface="Amiri" pitchFamily="2" charset="-78"/>
+                <a:ea typeface="Amiri" pitchFamily="2" charset="-78"/>
                 <a:cs typeface="Amiri" pitchFamily="2" charset="-78"/>
               </a:rPr>
               <a:t>اقْرَأْ ← تَنَبَّأْ ← اسْتَمِعْ ← تَحَقَّقْ</a:t>
@@ -34809,6 +34915,7 @@
                   <a:srgbClr val="D4AF37"/>
                 </a:solidFill>
                 <a:latin typeface="Amiri" pitchFamily="2" charset="-78"/>
+                <a:ea typeface="Amiri" pitchFamily="2" charset="-78"/>
                 <a:cs typeface="Amiri" pitchFamily="2" charset="-78"/>
               </a:rPr>
               <a:t>م</a:t>
@@ -35129,6 +35236,7 @@
                   <a:srgbClr val="8A6D1E"/>
                 </a:solidFill>
                 <a:latin typeface="Amiri" pitchFamily="2" charset="-78"/>
+                <a:ea typeface="Amiri" pitchFamily="2" charset="-78"/>
                 <a:cs typeface="Amiri" pitchFamily="2" charset="-78"/>
               </a:rPr>
               <a:t>الأَهْدَافُ وَمَعَايِيرُ النَّجَاحِ</a:t>
@@ -35277,6 +35385,7 @@
                   <a:srgbClr val="8A6D1E"/>
                 </a:solidFill>
                 <a:latin typeface="Amiri" pitchFamily="2" charset="-78"/>
+                <a:ea typeface="Amiri" pitchFamily="2" charset="-78"/>
                 <a:cs typeface="Amiri" pitchFamily="2" charset="-78"/>
               </a:rPr>
               <a:t>سَتَتَعَلَّمُ اليَوْمَ</a:t>
@@ -36432,6 +36541,7 @@
                   <a:srgbClr val="D4AF37"/>
                 </a:solidFill>
                 <a:latin typeface="Amiri" pitchFamily="2" charset="-78"/>
+                <a:ea typeface="Amiri" pitchFamily="2" charset="-78"/>
                 <a:cs typeface="Amiri" pitchFamily="2" charset="-78"/>
               </a:rPr>
               <a:t>م</a:t>
@@ -36752,6 +36862,7 @@
                   <a:srgbClr val="8A6D1E"/>
                 </a:solidFill>
                 <a:latin typeface="Amiri" pitchFamily="2" charset="-78"/>
+                <a:ea typeface="Amiri" pitchFamily="2" charset="-78"/>
                 <a:cs typeface="Amiri" pitchFamily="2" charset="-78"/>
               </a:rPr>
               <a:t>ظُرُوفُ الامْتِحَانِ</a:t>
@@ -37275,6 +37386,7 @@
                   <a:srgbClr val="1B3B6F"/>
                 </a:solidFill>
                 <a:latin typeface="Amiri" pitchFamily="2" charset="-78"/>
+                <a:ea typeface="Amiri" pitchFamily="2" charset="-78"/>
                 <a:cs typeface="Amiri" pitchFamily="2" charset="-78"/>
               </a:rPr>
               <a:t>قِرَاءَةُ الأَسْئِلَةِ مُسْبَقًا · التَّنَبُّؤُ بِالمُحْتَوَى</a:t>
@@ -37374,6 +37486,7 @@
                   <a:srgbClr val="1B3B6F"/>
                 </a:solidFill>
                 <a:latin typeface="Amiri" pitchFamily="2" charset="-78"/>
+                <a:ea typeface="Amiri" pitchFamily="2" charset="-78"/>
                 <a:cs typeface="Amiri" pitchFamily="2" charset="-78"/>
               </a:rPr>
               <a:t>الاسْتِمَاعُ الأَوَّلُ لِلْفَهْمِ العَامِّ · التَّرْكِيزُ عَلَى الإِشَارَاتِ</a:t>
@@ -37425,6 +37538,7 @@
                   <a:srgbClr val="5A6472"/>
                 </a:solidFill>
                 <a:latin typeface="Amiri" pitchFamily="2" charset="-78"/>
+                <a:ea typeface="Amiri" pitchFamily="2" charset="-78"/>
                 <a:cs typeface="Amiri" pitchFamily="2" charset="-78"/>
               </a:rPr>
               <a:t>لَوْ</a:t>
@@ -37451,6 +37565,7 @@
                   <a:srgbClr val="5A6472"/>
                 </a:solidFill>
                 <a:latin typeface="Amiri" pitchFamily="2" charset="-78"/>
+                <a:ea typeface="Amiri" pitchFamily="2" charset="-78"/>
                 <a:cs typeface="Amiri" pitchFamily="2" charset="-78"/>
               </a:rPr>
               <a:t>غَيْرَ أَنَّ</a:t>
@@ -37525,6 +37640,7 @@
                   <a:srgbClr val="1B3B6F"/>
                 </a:solidFill>
                 <a:latin typeface="Amiri" pitchFamily="2" charset="-78"/>
+                <a:ea typeface="Amiri" pitchFamily="2" charset="-78"/>
                 <a:cs typeface="Amiri" pitchFamily="2" charset="-78"/>
               </a:rPr>
               <a:t>الحَذَرُ مِنَ المُشَتِّتَاتِ · التَّحَقُّقُ فِي الاسْتِمَاعِ الثَّانِي</a:t>
@@ -37696,6 +37812,7 @@
                   <a:srgbClr val="D4AF37"/>
                 </a:solidFill>
                 <a:latin typeface="Amiri" pitchFamily="2" charset="-78"/>
+                <a:ea typeface="Amiri" pitchFamily="2" charset="-78"/>
                 <a:cs typeface="Amiri" pitchFamily="2" charset="-78"/>
               </a:rPr>
               <a:t>م</a:t>
@@ -38016,6 +38133,7 @@
                   <a:srgbClr val="8A6D1E"/>
                 </a:solidFill>
                 <a:latin typeface="Amiri" pitchFamily="2" charset="-78"/>
+                <a:ea typeface="Amiri" pitchFamily="2" charset="-78"/>
                 <a:cs typeface="Amiri" pitchFamily="2" charset="-78"/>
               </a:rPr>
               <a:t>الاسْتِمَاعُ</a:t>
@@ -38640,6 +38758,7 @@
                   <a:srgbClr val="1B3B6F"/>
                 </a:solidFill>
                 <a:latin typeface="Amiri" pitchFamily="2" charset="-78"/>
+                <a:ea typeface="Amiri" pitchFamily="2" charset="-78"/>
                 <a:cs typeface="Amiri" pitchFamily="2" charset="-78"/>
               </a:rPr>
               <a:t>صَحِيحٌ أَنَّ</a:t>
@@ -39104,6 +39223,7 @@
                   <a:srgbClr val="1B3B6F"/>
                 </a:solidFill>
                 <a:latin typeface="Amiri" pitchFamily="2" charset="-78"/>
+                <a:ea typeface="Amiri" pitchFamily="2" charset="-78"/>
                 <a:cs typeface="Amiri" pitchFamily="2" charset="-78"/>
               </a:rPr>
               <a:t>غَيْرَ أَنَّ</a:t>
@@ -40882,6 +41002,7 @@
                   <a:srgbClr val="1B3B6F"/>
                 </a:solidFill>
                 <a:latin typeface="Amiri" pitchFamily="2" charset="-78"/>
+                <a:ea typeface="Amiri" pitchFamily="2" charset="-78"/>
                 <a:cs typeface="Amiri" pitchFamily="2" charset="-78"/>
               </a:rPr>
               <a:t>يَنْبَغِي أَنْ</a:t>
@@ -41346,6 +41467,7 @@
                   <a:srgbClr val="1B3B6F"/>
                 </a:solidFill>
                 <a:latin typeface="Amiri" pitchFamily="2" charset="-78"/>
+                <a:ea typeface="Amiri" pitchFamily="2" charset="-78"/>
                 <a:cs typeface="Amiri" pitchFamily="2" charset="-78"/>
               </a:rPr>
               <a:t>أَرْجُو أَنْ</a:t>
@@ -41795,6 +41917,7 @@
                   <a:srgbClr val="D4AF37"/>
                 </a:solidFill>
                 <a:latin typeface="Amiri" pitchFamily="2" charset="-78"/>
+                <a:ea typeface="Amiri" pitchFamily="2" charset="-78"/>
                 <a:cs typeface="Amiri" pitchFamily="2" charset="-78"/>
               </a:rPr>
               <a:t>م</a:t>
@@ -42115,6 +42238,7 @@
                   <a:srgbClr val="8A6D1E"/>
                 </a:solidFill>
                 <a:latin typeface="Amiri" pitchFamily="2" charset="-78"/>
+                <a:ea typeface="Amiri" pitchFamily="2" charset="-78"/>
                 <a:cs typeface="Amiri" pitchFamily="2" charset="-78"/>
               </a:rPr>
               <a:t>الاسْتِمَاعُ</a:t>
@@ -44879,13 +45003,9 @@
     <a:fontScheme name="Office">
       <a:majorFont>
         <a:latin typeface="Calibri Light" panose="020F0302020204030204"/>
-        <a:ea typeface=""/>
-        <a:cs typeface=""/>
-        <a:font script="Jpan" typeface="游ゴシック Light"/>
-        <a:font script="Hang" typeface="맑은 고딕"/>
-        <a:font script="Hans" typeface="等线 Light"/>
-        <a:font script="Hant" typeface="新細明體"/>
-        <a:font script="Arab" typeface="Times New Roman"/>
+        <a:ea typeface="Amiri" pitchFamily="2" charset="-78"/>
+        <a:cs typeface="Amiri" pitchFamily="2" charset="-78"/>
+        <a:font script="Arab" typeface="Amiri"/>
         <a:font script="Hebr" typeface="Times New Roman"/>
         <a:font script="Thai" typeface="Angsana New"/>
         <a:font script="Ethi" typeface="Nyala"/>
@@ -44931,13 +45051,9 @@
       </a:majorFont>
       <a:minorFont>
         <a:latin typeface="Calibri" panose="020F0502020204030204"/>
-        <a:ea typeface=""/>
-        <a:cs typeface=""/>
-        <a:font script="Jpan" typeface="游ゴシック"/>
-        <a:font script="Hang" typeface="맑은 고딕"/>
-        <a:font script="Hans" typeface="等线"/>
-        <a:font script="Hant" typeface="新細明體"/>
-        <a:font script="Arab" typeface="Arial"/>
+        <a:ea typeface="Amiri" pitchFamily="2" charset="-78"/>
+        <a:cs typeface="Amiri" pitchFamily="2" charset="-78"/>
+        <a:font script="Arab" typeface="Amiri"/>
         <a:font script="Hebr" typeface="Arial"/>
         <a:font script="Thai" typeface="Cordia New"/>
         <a:font script="Ethi" typeface="Nyala"/>
